--- a/國科會推薦委員操作手冊(V6).pptx
+++ b/國科會推薦委員操作手冊(V6).pptx
@@ -286,7 +286,7 @@
       </p15:sldGuideLst>
     </p:ext>
     <p:ext uri="GoogleSlidesCustomDataVersion2">
-      <go:slidesCustomData xmlns:go="http://customooxmlschemas.google.com/" r:id="rId37" roundtripDataSignature="AMtx7mhDUjqJR2M2HuHEtrGWr8dIm7KGlA=="/>
+      <go:slidesCustomData xmlns:go="http://customooxmlschemas.google.com/" r:id="rId37" roundtripDataSignature="AMtx7mjGL1/LXvqTDtCeWvKAmnJJWqYimA=="/>
     </p:ext>
   </p:extLst>
 </p:presentation>
@@ -14459,7 +14459,7 @@
             <a:r>
               <a:rPr b="0" i="0" lang="zh-TW" sz="2300" u="none" cap="none" strike="noStrike">
                 <a:solidFill>
-                  <a:schemeClr val="dk2"/>
+                  <a:srgbClr val="FF0000"/>
                 </a:solidFill>
                 <a:latin typeface="Arial"/>
                 <a:ea typeface="Arial"/>
@@ -14470,7 +14470,7 @@
             </a:r>
             <a:endParaRPr b="0" i="0" sz="2300" u="none" cap="none" strike="noStrike">
               <a:solidFill>
-                <a:schemeClr val="dk2"/>
+                <a:srgbClr val="FF0000"/>
               </a:solidFill>
               <a:latin typeface="Arial"/>
               <a:ea typeface="Arial"/>
@@ -14698,7 +14698,7 @@
             <a:r>
               <a:rPr b="0" i="0" lang="zh-TW" sz="2300" u="none" cap="none" strike="noStrike">
                 <a:solidFill>
-                  <a:schemeClr val="dk2"/>
+                  <a:srgbClr val="FF0000"/>
                 </a:solidFill>
                 <a:latin typeface="Arial"/>
                 <a:ea typeface="Arial"/>
@@ -14709,7 +14709,7 @@
             </a:r>
             <a:endParaRPr b="0" i="0" sz="2300" u="none" cap="none" strike="noStrike">
               <a:solidFill>
-                <a:schemeClr val="dk2"/>
+                <a:srgbClr val="FF0000"/>
               </a:solidFill>
               <a:latin typeface="Arial"/>
               <a:ea typeface="Arial"/>
@@ -14905,6 +14905,66 @@
             </a:r>
             <a:endParaRPr/>
           </a:p>
+          <a:p>
+            <a:pPr indent="-342900" lvl="0" marL="457200" rtl="0" algn="l">
+              <a:lnSpc>
+                <a:spcPct val="115000"/>
+              </a:lnSpc>
+              <a:spcBef>
+                <a:spcPts val="0"/>
+              </a:spcBef>
+              <a:spcAft>
+                <a:spcPts val="0"/>
+              </a:spcAft>
+              <a:buSzPts val="1800"/>
+              <a:buChar char="●"/>
+            </a:pPr>
+            <a:r>
+              <a:rPr lang="zh-TW"/>
+              <a:t>計劃摘要</a:t>
+            </a:r>
+            <a:endParaRPr/>
+          </a:p>
+          <a:p>
+            <a:pPr indent="-342900" lvl="0" marL="457200" rtl="0" algn="l">
+              <a:lnSpc>
+                <a:spcPct val="115000"/>
+              </a:lnSpc>
+              <a:spcBef>
+                <a:spcPts val="0"/>
+              </a:spcBef>
+              <a:spcAft>
+                <a:spcPts val="0"/>
+              </a:spcAft>
+              <a:buSzPts val="1800"/>
+              <a:buChar char="●"/>
+            </a:pPr>
+            <a:r>
+              <a:rPr lang="zh-TW"/>
+              <a:t>主持人</a:t>
+            </a:r>
+            <a:endParaRPr/>
+          </a:p>
+          <a:p>
+            <a:pPr indent="-342900" lvl="0" marL="457200" rtl="0" algn="l">
+              <a:lnSpc>
+                <a:spcPct val="115000"/>
+              </a:lnSpc>
+              <a:spcBef>
+                <a:spcPts val="0"/>
+              </a:spcBef>
+              <a:spcAft>
+                <a:spcPts val="0"/>
+              </a:spcAft>
+              <a:buSzPts val="1800"/>
+              <a:buChar char="●"/>
+            </a:pPr>
+            <a:r>
+              <a:rPr lang="zh-TW"/>
+              <a:t>申請機構</a:t>
+            </a:r>
+            <a:endParaRPr/>
+          </a:p>
         </p:txBody>
       </p:sp>
       <p:pic>
@@ -14985,7 +15045,7 @@
             <a:r>
               <a:rPr b="0" i="0" lang="zh-TW" sz="2300" u="none" cap="none" strike="noStrike">
                 <a:solidFill>
-                  <a:schemeClr val="dk2"/>
+                  <a:srgbClr val="FF0000"/>
                 </a:solidFill>
                 <a:latin typeface="Arial"/>
                 <a:ea typeface="Arial"/>
@@ -14996,7 +15056,7 @@
             </a:r>
             <a:endParaRPr b="0" i="0" sz="2300" u="none" cap="none" strike="noStrike">
               <a:solidFill>
-                <a:schemeClr val="dk2"/>
+                <a:srgbClr val="FF0000"/>
               </a:solidFill>
               <a:latin typeface="Arial"/>
               <a:ea typeface="Arial"/>
@@ -16218,7 +16278,7 @@
             <a:r>
               <a:rPr b="0" i="0" lang="zh-TW" sz="2300" u="none" cap="none" strike="noStrike">
                 <a:solidFill>
-                  <a:schemeClr val="dk2"/>
+                  <a:srgbClr val="FF0000"/>
                 </a:solidFill>
                 <a:latin typeface="Arial"/>
                 <a:ea typeface="Arial"/>
@@ -16229,7 +16289,7 @@
             </a:r>
             <a:endParaRPr b="0" i="0" sz="2300" u="none" cap="none" strike="noStrike">
               <a:solidFill>
-                <a:schemeClr val="dk2"/>
+                <a:srgbClr val="FF0000"/>
               </a:solidFill>
               <a:latin typeface="Arial"/>
               <a:ea typeface="Arial"/>
@@ -17970,9 +18030,37 @@
           </a:p>
         </p:txBody>
       </p:sp>
+      <p:pic>
+        <p:nvPicPr>
+          <p:cNvPr id="298" name="Google Shape;298;g3f4f89e88cb_0_46"/>
+          <p:cNvPicPr preferRelativeResize="0"/>
+          <p:nvPr/>
+        </p:nvPicPr>
+        <p:blipFill>
+          <a:blip r:embed="rId3">
+            <a:alphaModFix/>
+          </a:blip>
+          <a:stretch>
+            <a:fillRect/>
+          </a:stretch>
+        </p:blipFill>
+        <p:spPr>
+          <a:xfrm>
+            <a:off x="311700" y="2842950"/>
+            <a:ext cx="4468501" cy="2260551"/>
+          </a:xfrm>
+          <a:prstGeom prst="rect">
+            <a:avLst/>
+          </a:prstGeom>
+          <a:noFill/>
+          <a:ln>
+            <a:noFill/>
+          </a:ln>
+        </p:spPr>
+      </p:pic>
       <p:sp>
         <p:nvSpPr>
-          <p:cNvPr id="298" name="Google Shape;298;g3f4f89e88cb_0_46"/>
+          <p:cNvPr id="299" name="Google Shape;299;g3f4f89e88cb_0_46"/>
           <p:cNvSpPr txBox="1"/>
           <p:nvPr>
             <p:ph idx="1" type="body"/>
@@ -17993,7 +18081,7 @@
         </p:spPr>
         <p:txBody>
           <a:bodyPr anchorCtr="0" anchor="t" bIns="91425" lIns="91425" spcFirstLastPara="1" rIns="91425" wrap="square" tIns="91425">
-            <a:normAutofit lnSpcReduction="10000"/>
+            <a:normAutofit/>
           </a:bodyPr>
           <a:lstStyle/>
           <a:p>
@@ -18012,46 +18100,7 @@
             </a:pPr>
             <a:r>
               <a:rPr lang="zh-TW"/>
-              <a:t>Step1: 於 NSTC（國家科學及技術委員會研究人才查詢）以「教授名稱＋當前任職單位」取得教授畢業院校</a:t>
-            </a:r>
-            <a:endParaRPr/>
-          </a:p>
-          <a:p>
-            <a:pPr indent="0" lvl="0" marL="0" rtl="0" algn="l">
-              <a:lnSpc>
-                <a:spcPct val="115000"/>
-              </a:lnSpc>
-              <a:spcBef>
-                <a:spcPts val="1000"/>
-              </a:spcBef>
-              <a:spcAft>
-                <a:spcPts val="0"/>
-              </a:spcAft>
-              <a:buSzPts val="1800"/>
-              <a:buNone/>
-            </a:pPr>
-            <a:r>
-              <a:rPr lang="zh-TW"/>
-              <a:t>（註：部分教授未公開，故查不到）</a:t>
-            </a:r>
-            <a:endParaRPr/>
-          </a:p>
-          <a:p>
-            <a:pPr indent="0" lvl="0" marL="0" rtl="0" algn="l">
-              <a:lnSpc>
-                <a:spcPct val="115000"/>
-              </a:lnSpc>
-              <a:spcBef>
-                <a:spcPts val="1000"/>
-              </a:spcBef>
-              <a:spcAft>
-                <a:spcPts val="0"/>
-              </a:spcAft>
-              <a:buSzPts val="1800"/>
-              <a:buNone/>
-            </a:pPr>
-            <a:r>
-              <a:t/>
+              <a:t>Step1: 於 NSTC（國家科學及技術委員會研究人才查詢）以「教授名稱＋當前任職單位」取得教授畢業院校（註：部分教授未公開，故查不到）</a:t>
             </a:r>
             <a:endParaRPr/>
           </a:p>
@@ -18137,7 +18186,7 @@
       </p:sp>
       <p:sp>
         <p:nvSpPr>
-          <p:cNvPr id="299" name="Google Shape;299;g3f4f89e88cb_0_46"/>
+          <p:cNvPr id="300" name="Google Shape;300;g3f4f89e88cb_0_46"/>
           <p:cNvSpPr txBox="1"/>
           <p:nvPr/>
         </p:nvSpPr>
@@ -18221,34 +18270,6 @@
           </a:p>
         </p:txBody>
       </p:sp>
-      <p:pic>
-        <p:nvPicPr>
-          <p:cNvPr id="300" name="Google Shape;300;g3f4f89e88cb_0_46"/>
-          <p:cNvPicPr preferRelativeResize="0"/>
-          <p:nvPr/>
-        </p:nvPicPr>
-        <p:blipFill>
-          <a:blip r:embed="rId3">
-            <a:alphaModFix/>
-          </a:blip>
-          <a:stretch>
-            <a:fillRect/>
-          </a:stretch>
-        </p:blipFill>
-        <p:spPr>
-          <a:xfrm>
-            <a:off x="311700" y="3506575"/>
-            <a:ext cx="3173024" cy="1536049"/>
-          </a:xfrm>
-          <a:prstGeom prst="rect">
-            <a:avLst/>
-          </a:prstGeom>
-          <a:noFill/>
-          <a:ln>
-            <a:noFill/>
-          </a:ln>
-        </p:spPr>
-      </p:pic>
       <p:sp>
         <p:nvSpPr>
           <p:cNvPr id="301" name="Google Shape;301;g3f4f89e88cb_0_46"/>
@@ -18257,8 +18278,8 @@
         </p:nvSpPr>
         <p:spPr>
           <a:xfrm>
-            <a:off x="331875" y="4561650"/>
-            <a:ext cx="3052800" cy="271500"/>
+            <a:off x="311700" y="4057375"/>
+            <a:ext cx="1837200" cy="263700"/>
           </a:xfrm>
           <a:prstGeom prst="rect">
             <a:avLst/>
@@ -18312,7 +18333,7 @@
         </p:blipFill>
         <p:spPr>
           <a:xfrm>
-            <a:off x="3747075" y="3477725"/>
+            <a:off x="5003850" y="3461150"/>
             <a:ext cx="3952998" cy="1593750"/>
           </a:xfrm>
           <a:prstGeom prst="rect">
@@ -18332,7 +18353,7 @@
         </p:nvSpPr>
         <p:spPr>
           <a:xfrm>
-            <a:off x="3731550" y="3941025"/>
+            <a:off x="5003850" y="3894475"/>
             <a:ext cx="1668000" cy="504300"/>
           </a:xfrm>
           <a:prstGeom prst="rect">
@@ -18379,7 +18400,7 @@
         </p:nvSpPr>
         <p:spPr>
           <a:xfrm>
-            <a:off x="5399550" y="3894475"/>
+            <a:off x="5003850" y="3198275"/>
             <a:ext cx="4468500" cy="400200"/>
           </a:xfrm>
           <a:prstGeom prst="rect">
@@ -23402,6 +23423,285 @@
 </file>
 
 <file path=ppt/theme/theme1.xml><?xml version="1.0" encoding="utf-8"?>
+<a:theme xmlns:a="http://schemas.openxmlformats.org/drawingml/2006/main" xmlns:r="http://schemas.openxmlformats.org/officeDocument/2006/relationships">
+  <a:themeElements>
+    <a:clrScheme name="Default">
+      <a:dk1>
+        <a:srgbClr val="000000"/>
+      </a:dk1>
+      <a:lt1>
+        <a:srgbClr val="FFFFFF"/>
+      </a:lt1>
+      <a:dk2>
+        <a:srgbClr val="158158"/>
+      </a:dk2>
+      <a:lt2>
+        <a:srgbClr val="F3F3F3"/>
+      </a:lt2>
+      <a:accent1>
+        <a:srgbClr val="058DC7"/>
+      </a:accent1>
+      <a:accent2>
+        <a:srgbClr val="50B432"/>
+      </a:accent2>
+      <a:accent3>
+        <a:srgbClr val="ED561B"/>
+      </a:accent3>
+      <a:accent4>
+        <a:srgbClr val="EDEF00"/>
+      </a:accent4>
+      <a:accent5>
+        <a:srgbClr val="24CBE5"/>
+      </a:accent5>
+      <a:accent6>
+        <a:srgbClr val="64E572"/>
+      </a:accent6>
+      <a:hlink>
+        <a:srgbClr val="2200CC"/>
+      </a:hlink>
+      <a:folHlink>
+        <a:srgbClr val="551A8B"/>
+      </a:folHlink>
+    </a:clrScheme>
+    <a:fontScheme name="Office">
+      <a:majorFont>
+        <a:latin typeface="Arial"/>
+        <a:ea typeface=""/>
+        <a:cs typeface=""/>
+        <a:font script="Jpan" typeface="ＭＳ Ｐゴシック"/>
+        <a:font script="Hang" typeface="맑은 고딕"/>
+        <a:font script="Hans" typeface="宋体"/>
+        <a:font script="Hant" typeface="新細明體"/>
+        <a:font script="Arab" typeface="Times New Roman"/>
+        <a:font script="Hebr" typeface="Times New Roman"/>
+        <a:font script="Thai" typeface="Angsana New"/>
+        <a:font script="Ethi" typeface="Nyala"/>
+        <a:font script="Beng" typeface="Vrinda"/>
+        <a:font script="Gujr" typeface="Shruti"/>
+        <a:font script="Khmr" typeface="MoolBoran"/>
+        <a:font script="Knda" typeface="Tunga"/>
+        <a:font script="Guru" typeface="Raavi"/>
+        <a:font script="Cans" typeface="Euphemia"/>
+        <a:font script="Cher" typeface="Plantagenet Cherokee"/>
+        <a:font script="Yiii" typeface="Microsoft Yi Baiti"/>
+        <a:font script="Tibt" typeface="Microsoft Himalaya"/>
+        <a:font script="Thaa" typeface="MV Boli"/>
+        <a:font script="Deva" typeface="Mangal"/>
+        <a:font script="Telu" typeface="Gautami"/>
+        <a:font script="Taml" typeface="Latha"/>
+        <a:font script="Syrc" typeface="Estrangelo Edessa"/>
+        <a:font script="Orya" typeface="Kalinga"/>
+        <a:font script="Mlym" typeface="Kartika"/>
+        <a:font script="Laoo" typeface="DokChampa"/>
+        <a:font script="Sinh" typeface="Iskoola Pota"/>
+        <a:font script="Mong" typeface="Mongolian Baiti"/>
+        <a:font script="Viet" typeface="Times New Roman"/>
+        <a:font script="Uigh" typeface="Microsoft Uighur"/>
+        <a:font script="Geor" typeface="Sylfaen"/>
+      </a:majorFont>
+      <a:minorFont>
+        <a:latin typeface="Arial"/>
+        <a:ea typeface=""/>
+        <a:cs typeface=""/>
+        <a:font script="Jpan" typeface="ＭＳ Ｐゴシック"/>
+        <a:font script="Hang" typeface="맑은 고딕"/>
+        <a:font script="Hans" typeface="宋体"/>
+        <a:font script="Hant" typeface="新細明體"/>
+        <a:font script="Arab" typeface="Arial"/>
+        <a:font script="Hebr" typeface="Arial"/>
+        <a:font script="Thai" typeface="Cordia New"/>
+        <a:font script="Ethi" typeface="Nyala"/>
+        <a:font script="Beng" typeface="Vrinda"/>
+        <a:font script="Gujr" typeface="Shruti"/>
+        <a:font script="Khmr" typeface="DaunPenh"/>
+        <a:font script="Knda" typeface="Tunga"/>
+        <a:font script="Guru" typeface="Raavi"/>
+        <a:font script="Cans" typeface="Euphemia"/>
+        <a:font script="Cher" typeface="Plantagenet Cherokee"/>
+        <a:font script="Yiii" typeface="Microsoft Yi Baiti"/>
+        <a:font script="Tibt" typeface="Microsoft Himalaya"/>
+        <a:font script="Thaa" typeface="MV Boli"/>
+        <a:font script="Deva" typeface="Mangal"/>
+        <a:font script="Telu" typeface="Gautami"/>
+        <a:font script="Taml" typeface="Latha"/>
+        <a:font script="Syrc" typeface="Estrangelo Edessa"/>
+        <a:font script="Orya" typeface="Kalinga"/>
+        <a:font script="Mlym" typeface="Kartika"/>
+        <a:font script="Laoo" typeface="DokChampa"/>
+        <a:font script="Sinh" typeface="Iskoola Pota"/>
+        <a:font script="Mong" typeface="Mongolian Baiti"/>
+        <a:font script="Viet" typeface="Arial"/>
+        <a:font script="Uigh" typeface="Microsoft Uighur"/>
+        <a:font script="Geor" typeface="Sylfaen"/>
+      </a:minorFont>
+    </a:fontScheme>
+    <a:fmtScheme name="Office">
+      <a:fillStyleLst>
+        <a:solidFill>
+          <a:schemeClr val="phClr"/>
+        </a:solidFill>
+        <a:gradFill rotWithShape="1">
+          <a:gsLst>
+            <a:gs pos="0">
+              <a:schemeClr val="phClr">
+                <a:tint val="50000"/>
+                <a:satMod val="300000"/>
+              </a:schemeClr>
+            </a:gs>
+            <a:gs pos="35000">
+              <a:schemeClr val="phClr">
+                <a:tint val="37000"/>
+                <a:satMod val="300000"/>
+              </a:schemeClr>
+            </a:gs>
+            <a:gs pos="100000">
+              <a:schemeClr val="phClr">
+                <a:tint val="15000"/>
+                <a:satMod val="350000"/>
+              </a:schemeClr>
+            </a:gs>
+          </a:gsLst>
+          <a:lin ang="16200000" scaled="1"/>
+        </a:gradFill>
+        <a:gradFill rotWithShape="1">
+          <a:gsLst>
+            <a:gs pos="0">
+              <a:schemeClr val="phClr">
+                <a:tint val="100000"/>
+                <a:shade val="100000"/>
+                <a:satMod val="130000"/>
+              </a:schemeClr>
+            </a:gs>
+            <a:gs pos="100000">
+              <a:schemeClr val="phClr">
+                <a:tint val="50000"/>
+                <a:shade val="100000"/>
+                <a:satMod val="350000"/>
+              </a:schemeClr>
+            </a:gs>
+          </a:gsLst>
+          <a:lin ang="16200000" scaled="0"/>
+        </a:gradFill>
+      </a:fillStyleLst>
+      <a:lnStyleLst>
+        <a:ln w="9525" cap="flat" cmpd="sng" algn="ctr">
+          <a:solidFill>
+            <a:schemeClr val="phClr">
+              <a:shade val="95000"/>
+              <a:satMod val="105000"/>
+            </a:schemeClr>
+          </a:solidFill>
+          <a:prstDash val="solid"/>
+        </a:ln>
+        <a:ln w="25400" cap="flat" cmpd="sng" algn="ctr">
+          <a:solidFill>
+            <a:schemeClr val="phClr"/>
+          </a:solidFill>
+          <a:prstDash val="solid"/>
+        </a:ln>
+        <a:ln w="38100" cap="flat" cmpd="sng" algn="ctr">
+          <a:solidFill>
+            <a:schemeClr val="phClr"/>
+          </a:solidFill>
+          <a:prstDash val="solid"/>
+        </a:ln>
+      </a:lnStyleLst>
+      <a:effectStyleLst>
+        <a:effectStyle>
+          <a:effectLst>
+            <a:outerShdw blurRad="40000" dist="20000" dir="5400000" rotWithShape="0">
+              <a:srgbClr val="000000">
+                <a:alpha val="38000"/>
+              </a:srgbClr>
+            </a:outerShdw>
+          </a:effectLst>
+        </a:effectStyle>
+        <a:effectStyle>
+          <a:effectLst>
+            <a:outerShdw blurRad="40000" dist="23000" dir="5400000" rotWithShape="0">
+              <a:srgbClr val="000000">
+                <a:alpha val="35000"/>
+              </a:srgbClr>
+            </a:outerShdw>
+          </a:effectLst>
+        </a:effectStyle>
+        <a:effectStyle>
+          <a:effectLst>
+            <a:outerShdw blurRad="40000" dist="23000" dir="5400000" rotWithShape="0">
+              <a:srgbClr val="000000">
+                <a:alpha val="35000"/>
+              </a:srgbClr>
+            </a:outerShdw>
+          </a:effectLst>
+          <a:scene3d>
+            <a:camera prst="orthographicFront">
+              <a:rot lat="0" lon="0" rev="0"/>
+            </a:camera>
+            <a:lightRig rig="threePt" dir="t">
+              <a:rot lat="0" lon="0" rev="1200000"/>
+            </a:lightRig>
+          </a:scene3d>
+          <a:sp3d>
+            <a:bevelT w="63500" h="25400"/>
+          </a:sp3d>
+        </a:effectStyle>
+      </a:effectStyleLst>
+      <a:bgFillStyleLst>
+        <a:solidFill>
+          <a:schemeClr val="phClr"/>
+        </a:solidFill>
+        <a:gradFill rotWithShape="1">
+          <a:gsLst>
+            <a:gs pos="0">
+              <a:schemeClr val="phClr">
+                <a:tint val="40000"/>
+                <a:satMod val="350000"/>
+              </a:schemeClr>
+            </a:gs>
+            <a:gs pos="40000">
+              <a:schemeClr val="phClr">
+                <a:tint val="45000"/>
+                <a:shade val="99000"/>
+                <a:satMod val="350000"/>
+              </a:schemeClr>
+            </a:gs>
+            <a:gs pos="100000">
+              <a:schemeClr val="phClr">
+                <a:shade val="20000"/>
+                <a:satMod val="255000"/>
+              </a:schemeClr>
+            </a:gs>
+          </a:gsLst>
+          <a:path path="circle">
+            <a:fillToRect l="50000" t="-80000" r="50000" b="180000"/>
+          </a:path>
+        </a:gradFill>
+        <a:gradFill rotWithShape="1">
+          <a:gsLst>
+            <a:gs pos="0">
+              <a:schemeClr val="phClr">
+                <a:tint val="80000"/>
+                <a:satMod val="300000"/>
+              </a:schemeClr>
+            </a:gs>
+            <a:gs pos="100000">
+              <a:schemeClr val="phClr">
+                <a:shade val="30000"/>
+                <a:satMod val="200000"/>
+              </a:schemeClr>
+            </a:gs>
+          </a:gsLst>
+          <a:path path="circle">
+            <a:fillToRect l="50000" t="50000" r="50000" b="50000"/>
+          </a:path>
+        </a:gradFill>
+      </a:bgFillStyleLst>
+    </a:fmtScheme>
+  </a:themeElements>
+</a:theme>
+</file>
+
+<file path=ppt/theme/theme2.xml><?xml version="1.0" encoding="utf-8"?>
 <a:theme xmlns:a="http://schemas.openxmlformats.org/drawingml/2006/main" xmlns:r="http://schemas.openxmlformats.org/officeDocument/2006/relationships" name="Simple Light">
   <a:themeElements>
     <a:clrScheme name="Simple Light">
@@ -23678,283 +23978,4 @@
     </a:fmtScheme>
   </a:themeElements>
 </a:theme>
-</file>
-
-<file path=ppt/theme/theme2.xml><?xml version="1.0" encoding="utf-8"?>
-<a:theme xmlns:a="http://schemas.openxmlformats.org/drawingml/2006/main" xmlns:r="http://schemas.openxmlformats.org/officeDocument/2006/relationships">
-  <a:themeElements>
-    <a:clrScheme name="Default">
-      <a:dk1>
-        <a:srgbClr val="000000"/>
-      </a:dk1>
-      <a:lt1>
-        <a:srgbClr val="FFFFFF"/>
-      </a:lt1>
-      <a:dk2>
-        <a:srgbClr val="158158"/>
-      </a:dk2>
-      <a:lt2>
-        <a:srgbClr val="F3F3F3"/>
-      </a:lt2>
-      <a:accent1>
-        <a:srgbClr val="058DC7"/>
-      </a:accent1>
-      <a:accent2>
-        <a:srgbClr val="50B432"/>
-      </a:accent2>
-      <a:accent3>
-        <a:srgbClr val="ED561B"/>
-      </a:accent3>
-      <a:accent4>
-        <a:srgbClr val="EDEF00"/>
-      </a:accent4>
-      <a:accent5>
-        <a:srgbClr val="24CBE5"/>
-      </a:accent5>
-      <a:accent6>
-        <a:srgbClr val="64E572"/>
-      </a:accent6>
-      <a:hlink>
-        <a:srgbClr val="2200CC"/>
-      </a:hlink>
-      <a:folHlink>
-        <a:srgbClr val="551A8B"/>
-      </a:folHlink>
-    </a:clrScheme>
-    <a:fontScheme name="Office">
-      <a:majorFont>
-        <a:latin typeface="Arial"/>
-        <a:ea typeface=""/>
-        <a:cs typeface=""/>
-        <a:font script="Jpan" typeface="ＭＳ Ｐゴシック"/>
-        <a:font script="Hang" typeface="맑은 고딕"/>
-        <a:font script="Hans" typeface="宋体"/>
-        <a:font script="Hant" typeface="新細明體"/>
-        <a:font script="Arab" typeface="Times New Roman"/>
-        <a:font script="Hebr" typeface="Times New Roman"/>
-        <a:font script="Thai" typeface="Angsana New"/>
-        <a:font script="Ethi" typeface="Nyala"/>
-        <a:font script="Beng" typeface="Vrinda"/>
-        <a:font script="Gujr" typeface="Shruti"/>
-        <a:font script="Khmr" typeface="MoolBoran"/>
-        <a:font script="Knda" typeface="Tunga"/>
-        <a:font script="Guru" typeface="Raavi"/>
-        <a:font script="Cans" typeface="Euphemia"/>
-        <a:font script="Cher" typeface="Plantagenet Cherokee"/>
-        <a:font script="Yiii" typeface="Microsoft Yi Baiti"/>
-        <a:font script="Tibt" typeface="Microsoft Himalaya"/>
-        <a:font script="Thaa" typeface="MV Boli"/>
-        <a:font script="Deva" typeface="Mangal"/>
-        <a:font script="Telu" typeface="Gautami"/>
-        <a:font script="Taml" typeface="Latha"/>
-        <a:font script="Syrc" typeface="Estrangelo Edessa"/>
-        <a:font script="Orya" typeface="Kalinga"/>
-        <a:font script="Mlym" typeface="Kartika"/>
-        <a:font script="Laoo" typeface="DokChampa"/>
-        <a:font script="Sinh" typeface="Iskoola Pota"/>
-        <a:font script="Mong" typeface="Mongolian Baiti"/>
-        <a:font script="Viet" typeface="Times New Roman"/>
-        <a:font script="Uigh" typeface="Microsoft Uighur"/>
-        <a:font script="Geor" typeface="Sylfaen"/>
-      </a:majorFont>
-      <a:minorFont>
-        <a:latin typeface="Arial"/>
-        <a:ea typeface=""/>
-        <a:cs typeface=""/>
-        <a:font script="Jpan" typeface="ＭＳ Ｐゴシック"/>
-        <a:font script="Hang" typeface="맑은 고딕"/>
-        <a:font script="Hans" typeface="宋体"/>
-        <a:font script="Hant" typeface="新細明體"/>
-        <a:font script="Arab" typeface="Arial"/>
-        <a:font script="Hebr" typeface="Arial"/>
-        <a:font script="Thai" typeface="Cordia New"/>
-        <a:font script="Ethi" typeface="Nyala"/>
-        <a:font script="Beng" typeface="Vrinda"/>
-        <a:font script="Gujr" typeface="Shruti"/>
-        <a:font script="Khmr" typeface="DaunPenh"/>
-        <a:font script="Knda" typeface="Tunga"/>
-        <a:font script="Guru" typeface="Raavi"/>
-        <a:font script="Cans" typeface="Euphemia"/>
-        <a:font script="Cher" typeface="Plantagenet Cherokee"/>
-        <a:font script="Yiii" typeface="Microsoft Yi Baiti"/>
-        <a:font script="Tibt" typeface="Microsoft Himalaya"/>
-        <a:font script="Thaa" typeface="MV Boli"/>
-        <a:font script="Deva" typeface="Mangal"/>
-        <a:font script="Telu" typeface="Gautami"/>
-        <a:font script="Taml" typeface="Latha"/>
-        <a:font script="Syrc" typeface="Estrangelo Edessa"/>
-        <a:font script="Orya" typeface="Kalinga"/>
-        <a:font script="Mlym" typeface="Kartika"/>
-        <a:font script="Laoo" typeface="DokChampa"/>
-        <a:font script="Sinh" typeface="Iskoola Pota"/>
-        <a:font script="Mong" typeface="Mongolian Baiti"/>
-        <a:font script="Viet" typeface="Arial"/>
-        <a:font script="Uigh" typeface="Microsoft Uighur"/>
-        <a:font script="Geor" typeface="Sylfaen"/>
-      </a:minorFont>
-    </a:fontScheme>
-    <a:fmtScheme name="Office">
-      <a:fillStyleLst>
-        <a:solidFill>
-          <a:schemeClr val="phClr"/>
-        </a:solidFill>
-        <a:gradFill rotWithShape="1">
-          <a:gsLst>
-            <a:gs pos="0">
-              <a:schemeClr val="phClr">
-                <a:tint val="50000"/>
-                <a:satMod val="300000"/>
-              </a:schemeClr>
-            </a:gs>
-            <a:gs pos="35000">
-              <a:schemeClr val="phClr">
-                <a:tint val="37000"/>
-                <a:satMod val="300000"/>
-              </a:schemeClr>
-            </a:gs>
-            <a:gs pos="100000">
-              <a:schemeClr val="phClr">
-                <a:tint val="15000"/>
-                <a:satMod val="350000"/>
-              </a:schemeClr>
-            </a:gs>
-          </a:gsLst>
-          <a:lin ang="16200000" scaled="1"/>
-        </a:gradFill>
-        <a:gradFill rotWithShape="1">
-          <a:gsLst>
-            <a:gs pos="0">
-              <a:schemeClr val="phClr">
-                <a:tint val="100000"/>
-                <a:shade val="100000"/>
-                <a:satMod val="130000"/>
-              </a:schemeClr>
-            </a:gs>
-            <a:gs pos="100000">
-              <a:schemeClr val="phClr">
-                <a:tint val="50000"/>
-                <a:shade val="100000"/>
-                <a:satMod val="350000"/>
-              </a:schemeClr>
-            </a:gs>
-          </a:gsLst>
-          <a:lin ang="16200000" scaled="0"/>
-        </a:gradFill>
-      </a:fillStyleLst>
-      <a:lnStyleLst>
-        <a:ln w="9525" cap="flat" cmpd="sng" algn="ctr">
-          <a:solidFill>
-            <a:schemeClr val="phClr">
-              <a:shade val="95000"/>
-              <a:satMod val="105000"/>
-            </a:schemeClr>
-          </a:solidFill>
-          <a:prstDash val="solid"/>
-        </a:ln>
-        <a:ln w="25400" cap="flat" cmpd="sng" algn="ctr">
-          <a:solidFill>
-            <a:schemeClr val="phClr"/>
-          </a:solidFill>
-          <a:prstDash val="solid"/>
-        </a:ln>
-        <a:ln w="38100" cap="flat" cmpd="sng" algn="ctr">
-          <a:solidFill>
-            <a:schemeClr val="phClr"/>
-          </a:solidFill>
-          <a:prstDash val="solid"/>
-        </a:ln>
-      </a:lnStyleLst>
-      <a:effectStyleLst>
-        <a:effectStyle>
-          <a:effectLst>
-            <a:outerShdw blurRad="40000" dist="20000" dir="5400000" rotWithShape="0">
-              <a:srgbClr val="000000">
-                <a:alpha val="38000"/>
-              </a:srgbClr>
-            </a:outerShdw>
-          </a:effectLst>
-        </a:effectStyle>
-        <a:effectStyle>
-          <a:effectLst>
-            <a:outerShdw blurRad="40000" dist="23000" dir="5400000" rotWithShape="0">
-              <a:srgbClr val="000000">
-                <a:alpha val="35000"/>
-              </a:srgbClr>
-            </a:outerShdw>
-          </a:effectLst>
-        </a:effectStyle>
-        <a:effectStyle>
-          <a:effectLst>
-            <a:outerShdw blurRad="40000" dist="23000" dir="5400000" rotWithShape="0">
-              <a:srgbClr val="000000">
-                <a:alpha val="35000"/>
-              </a:srgbClr>
-            </a:outerShdw>
-          </a:effectLst>
-          <a:scene3d>
-            <a:camera prst="orthographicFront">
-              <a:rot lat="0" lon="0" rev="0"/>
-            </a:camera>
-            <a:lightRig rig="threePt" dir="t">
-              <a:rot lat="0" lon="0" rev="1200000"/>
-            </a:lightRig>
-          </a:scene3d>
-          <a:sp3d>
-            <a:bevelT w="63500" h="25400"/>
-          </a:sp3d>
-        </a:effectStyle>
-      </a:effectStyleLst>
-      <a:bgFillStyleLst>
-        <a:solidFill>
-          <a:schemeClr val="phClr"/>
-        </a:solidFill>
-        <a:gradFill rotWithShape="1">
-          <a:gsLst>
-            <a:gs pos="0">
-              <a:schemeClr val="phClr">
-                <a:tint val="40000"/>
-                <a:satMod val="350000"/>
-              </a:schemeClr>
-            </a:gs>
-            <a:gs pos="40000">
-              <a:schemeClr val="phClr">
-                <a:tint val="45000"/>
-                <a:shade val="99000"/>
-                <a:satMod val="350000"/>
-              </a:schemeClr>
-            </a:gs>
-            <a:gs pos="100000">
-              <a:schemeClr val="phClr">
-                <a:shade val="20000"/>
-                <a:satMod val="255000"/>
-              </a:schemeClr>
-            </a:gs>
-          </a:gsLst>
-          <a:path path="circle">
-            <a:fillToRect l="50000" t="-80000" r="50000" b="180000"/>
-          </a:path>
-        </a:gradFill>
-        <a:gradFill rotWithShape="1">
-          <a:gsLst>
-            <a:gs pos="0">
-              <a:schemeClr val="phClr">
-                <a:tint val="80000"/>
-                <a:satMod val="300000"/>
-              </a:schemeClr>
-            </a:gs>
-            <a:gs pos="100000">
-              <a:schemeClr val="phClr">
-                <a:shade val="30000"/>
-                <a:satMod val="200000"/>
-              </a:schemeClr>
-            </a:gs>
-          </a:gsLst>
-          <a:path path="circle">
-            <a:fillToRect l="50000" t="50000" r="50000" b="50000"/>
-          </a:path>
-        </a:gradFill>
-      </a:bgFillStyleLst>
-    </a:fmtScheme>
-  </a:themeElements>
-</a:theme>
 </file>
--- a/國科會推薦委員操作手冊(V6).pptx
+++ b/國科會推薦委員操作手冊(V6).pptx
@@ -22905,17 +22905,13 @@
               <a:buNone/>
             </a:pPr>
             <a:r>
-              <a:rPr b="0" i="0" lang="zh-TW" sz="1800" u="sng" cap="none" strike="noStrike">
+              <a:rPr lang="zh-TW" sz="1800" u="sng">
                 <a:solidFill>
                   <a:schemeClr val="hlink"/>
                 </a:solidFill>
-                <a:latin typeface="Arial"/>
-                <a:ea typeface="Arial"/>
-                <a:cs typeface="Arial"/>
-                <a:sym typeface="Arial"/>
                 <a:hlinkClick r:id="rId5"/>
               </a:rPr>
-              <a:t>https://drive.google.com/drive/folders/1vmnuAJUWGayN9tZjgvZjtRdlW6-VX_Xg?usp=sharing</a:t>
+              <a:t>https://drive.google.com/drive/folders/1yrLFD6SsjqOV3T37nAB6LskgI7o_EG7c?usp=sharing</a:t>
             </a:r>
             <a:endParaRPr b="0" i="0" sz="1800" u="none" cap="none" strike="noStrike">
               <a:solidFill>

--- a/國科會推薦委員操作手冊(V6).pptx
+++ b/國科會推薦委員操作手冊(V6).pptx
@@ -39,6 +39,7 @@
     <p:sldId id="284" r:id="rId35"/>
     <p:sldId id="285" r:id="rId36"/>
     <p:sldId id="286" r:id="rId37"/>
+    <p:sldId id="287" r:id="rId38"/>
   </p:sldIdLst>
   <p:sldSz cy="5143500" cx="9144000"/>
   <p:notesSz cx="6858000" cy="9144000"/>
@@ -287,7 +288,7 @@
       </p15:sldGuideLst>
     </p:ext>
     <p:ext uri="GoogleSlidesCustomDataVersion2">
-      <go:slidesCustomData xmlns:go="http://customooxmlschemas.google.com/" r:id="rId38" roundtripDataSignature="AMtx7mhC4Y2eM0fVj+SLnT+JjXMZcVuFlQ=="/>
+      <go:slidesCustomData xmlns:go="http://customooxmlschemas.google.com/" r:id="rId39" roundtripDataSignature="AMtx7mi8nMbB76oq5xbiCM8hIr1NiWrjUg=="/>
     </p:ext>
   </p:extLst>
 </p:presentation>
@@ -1675,7 +1676,7 @@
       </p:grpSpPr>
       <p:sp>
         <p:nvSpPr>
-          <p:cNvPr id="199" name="Google Shape;199;p13:notes"/>
+          <p:cNvPr id="199" name="Google Shape;199;g3f81f8ff915_0_2:notes"/>
           <p:cNvSpPr/>
           <p:nvPr>
             <p:ph idx="2" type="sldImg"/>
@@ -1720,7 +1721,7 @@
       </p:sp>
       <p:sp>
         <p:nvSpPr>
-          <p:cNvPr id="200" name="Google Shape;200;p13:notes"/>
+          <p:cNvPr id="200" name="Google Shape;200;g3f81f8ff915_0_2:notes"/>
           <p:cNvSpPr txBox="1"/>
           <p:nvPr>
             <p:ph idx="1" type="body"/>
@@ -1778,7 +1779,7 @@
   <p:cSld>
     <p:spTree>
       <p:nvGrpSpPr>
-        <p:cNvPr id="206" name="Shape 206"/>
+        <p:cNvPr id="215" name="Shape 215"/>
         <p:cNvGrpSpPr/>
         <p:nvPr/>
       </p:nvGrpSpPr>
@@ -1792,7 +1793,7 @@
       </p:grpSpPr>
       <p:sp>
         <p:nvSpPr>
-          <p:cNvPr id="207" name="Google Shape;207;p14:notes"/>
+          <p:cNvPr id="216" name="Google Shape;216;p13:notes"/>
           <p:cNvSpPr/>
           <p:nvPr>
             <p:ph idx="2" type="sldImg"/>
@@ -1837,7 +1838,7 @@
       </p:sp>
       <p:sp>
         <p:nvSpPr>
-          <p:cNvPr id="208" name="Google Shape;208;p14:notes"/>
+          <p:cNvPr id="217" name="Google Shape;217;p13:notes"/>
           <p:cNvSpPr txBox="1"/>
           <p:nvPr>
             <p:ph idx="1" type="body"/>
@@ -1895,7 +1896,7 @@
   <p:cSld>
     <p:spTree>
       <p:nvGrpSpPr>
-        <p:cNvPr id="216" name="Shape 216"/>
+        <p:cNvPr id="223" name="Shape 223"/>
         <p:cNvGrpSpPr/>
         <p:nvPr/>
       </p:nvGrpSpPr>
@@ -1909,7 +1910,7 @@
       </p:grpSpPr>
       <p:sp>
         <p:nvSpPr>
-          <p:cNvPr id="217" name="Google Shape;217;p15:notes"/>
+          <p:cNvPr id="224" name="Google Shape;224;p14:notes"/>
           <p:cNvSpPr/>
           <p:nvPr>
             <p:ph idx="2" type="sldImg"/>
@@ -1954,7 +1955,7 @@
       </p:sp>
       <p:sp>
         <p:nvSpPr>
-          <p:cNvPr id="218" name="Google Shape;218;p15:notes"/>
+          <p:cNvPr id="225" name="Google Shape;225;p14:notes"/>
           <p:cNvSpPr txBox="1"/>
           <p:nvPr>
             <p:ph idx="1" type="body"/>
@@ -2012,7 +2013,7 @@
   <p:cSld>
     <p:spTree>
       <p:nvGrpSpPr>
-        <p:cNvPr id="226" name="Shape 226"/>
+        <p:cNvPr id="233" name="Shape 233"/>
         <p:cNvGrpSpPr/>
         <p:nvPr/>
       </p:nvGrpSpPr>
@@ -2026,7 +2027,7 @@
       </p:grpSpPr>
       <p:sp>
         <p:nvSpPr>
-          <p:cNvPr id="227" name="Google Shape;227;p16:notes"/>
+          <p:cNvPr id="234" name="Google Shape;234;p15:notes"/>
           <p:cNvSpPr/>
           <p:nvPr>
             <p:ph idx="2" type="sldImg"/>
@@ -2071,7 +2072,7 @@
       </p:sp>
       <p:sp>
         <p:nvSpPr>
-          <p:cNvPr id="228" name="Google Shape;228;p16:notes"/>
+          <p:cNvPr id="235" name="Google Shape;235;p15:notes"/>
           <p:cNvSpPr txBox="1"/>
           <p:nvPr>
             <p:ph idx="1" type="body"/>
@@ -2129,7 +2130,7 @@
   <p:cSld>
     <p:spTree>
       <p:nvGrpSpPr>
-        <p:cNvPr id="235" name="Shape 235"/>
+        <p:cNvPr id="243" name="Shape 243"/>
         <p:cNvGrpSpPr/>
         <p:nvPr/>
       </p:nvGrpSpPr>
@@ -2143,7 +2144,7 @@
       </p:grpSpPr>
       <p:sp>
         <p:nvSpPr>
-          <p:cNvPr id="236" name="Google Shape;236;p17:notes"/>
+          <p:cNvPr id="244" name="Google Shape;244;p16:notes"/>
           <p:cNvSpPr/>
           <p:nvPr>
             <p:ph idx="2" type="sldImg"/>
@@ -2188,7 +2189,7 @@
       </p:sp>
       <p:sp>
         <p:nvSpPr>
-          <p:cNvPr id="237" name="Google Shape;237;p17:notes"/>
+          <p:cNvPr id="245" name="Google Shape;245;p16:notes"/>
           <p:cNvSpPr txBox="1"/>
           <p:nvPr>
             <p:ph idx="1" type="body"/>
@@ -2363,7 +2364,7 @@
   <p:cSld>
     <p:spTree>
       <p:nvGrpSpPr>
-        <p:cNvPr id="243" name="Shape 243"/>
+        <p:cNvPr id="252" name="Shape 252"/>
         <p:cNvGrpSpPr/>
         <p:nvPr/>
       </p:nvGrpSpPr>
@@ -2377,7 +2378,7 @@
       </p:grpSpPr>
       <p:sp>
         <p:nvSpPr>
-          <p:cNvPr id="244" name="Google Shape;244;p18:notes"/>
+          <p:cNvPr id="253" name="Google Shape;253;p17:notes"/>
           <p:cNvSpPr/>
           <p:nvPr>
             <p:ph idx="2" type="sldImg"/>
@@ -2422,7 +2423,7 @@
       </p:sp>
       <p:sp>
         <p:nvSpPr>
-          <p:cNvPr id="245" name="Google Shape;245;p18:notes"/>
+          <p:cNvPr id="254" name="Google Shape;254;p17:notes"/>
           <p:cNvSpPr txBox="1"/>
           <p:nvPr>
             <p:ph idx="1" type="body"/>
@@ -2480,7 +2481,7 @@
   <p:cSld>
     <p:spTree>
       <p:nvGrpSpPr>
-        <p:cNvPr id="257" name="Shape 257"/>
+        <p:cNvPr id="260" name="Shape 260"/>
         <p:cNvGrpSpPr/>
         <p:nvPr/>
       </p:nvGrpSpPr>
@@ -2494,7 +2495,7 @@
       </p:grpSpPr>
       <p:sp>
         <p:nvSpPr>
-          <p:cNvPr id="258" name="Google Shape;258;p19:notes"/>
+          <p:cNvPr id="261" name="Google Shape;261;p18:notes"/>
           <p:cNvSpPr/>
           <p:nvPr>
             <p:ph idx="2" type="sldImg"/>
@@ -2502,7 +2503,7 @@
         </p:nvSpPr>
         <p:spPr>
           <a:xfrm>
-            <a:off x="381000" y="685800"/>
+            <a:off x="381300" y="685800"/>
             <a:ext cx="6096000" cy="3429000"/>
           </a:xfrm>
           <a:custGeom>
@@ -2539,7 +2540,7 @@
       </p:sp>
       <p:sp>
         <p:nvSpPr>
-          <p:cNvPr id="259" name="Google Shape;259;p19:notes"/>
+          <p:cNvPr id="262" name="Google Shape;262;p18:notes"/>
           <p:cNvSpPr txBox="1"/>
           <p:nvPr>
             <p:ph idx="1" type="body"/>
@@ -2597,7 +2598,7 @@
   <p:cSld>
     <p:spTree>
       <p:nvGrpSpPr>
-        <p:cNvPr id="266" name="Shape 266"/>
+        <p:cNvPr id="274" name="Shape 274"/>
         <p:cNvGrpSpPr/>
         <p:nvPr/>
       </p:nvGrpSpPr>
@@ -2611,7 +2612,7 @@
       </p:grpSpPr>
       <p:sp>
         <p:nvSpPr>
-          <p:cNvPr id="267" name="Google Shape;267;p20:notes"/>
+          <p:cNvPr id="275" name="Google Shape;275;p19:notes"/>
           <p:cNvSpPr/>
           <p:nvPr>
             <p:ph idx="2" type="sldImg"/>
@@ -2656,7 +2657,7 @@
       </p:sp>
       <p:sp>
         <p:nvSpPr>
-          <p:cNvPr id="268" name="Google Shape;268;p20:notes"/>
+          <p:cNvPr id="276" name="Google Shape;276;p19:notes"/>
           <p:cNvSpPr txBox="1"/>
           <p:nvPr>
             <p:ph idx="1" type="body"/>
@@ -2714,7 +2715,7 @@
   <p:cSld>
     <p:spTree>
       <p:nvGrpSpPr>
-        <p:cNvPr id="277" name="Shape 277"/>
+        <p:cNvPr id="283" name="Shape 283"/>
         <p:cNvGrpSpPr/>
         <p:nvPr/>
       </p:nvGrpSpPr>
@@ -2728,7 +2729,7 @@
       </p:grpSpPr>
       <p:sp>
         <p:nvSpPr>
-          <p:cNvPr id="278" name="Google Shape;278;p21:notes"/>
+          <p:cNvPr id="284" name="Google Shape;284;p20:notes"/>
           <p:cNvSpPr/>
           <p:nvPr>
             <p:ph idx="2" type="sldImg"/>
@@ -2736,7 +2737,7 @@
         </p:nvSpPr>
         <p:spPr>
           <a:xfrm>
-            <a:off x="381300" y="685800"/>
+            <a:off x="381000" y="685800"/>
             <a:ext cx="6096000" cy="3429000"/>
           </a:xfrm>
           <a:custGeom>
@@ -2773,7 +2774,7 @@
       </p:sp>
       <p:sp>
         <p:nvSpPr>
-          <p:cNvPr id="279" name="Google Shape;279;p21:notes"/>
+          <p:cNvPr id="285" name="Google Shape;285;p20:notes"/>
           <p:cNvSpPr txBox="1"/>
           <p:nvPr>
             <p:ph idx="1" type="body"/>
@@ -2831,7 +2832,7 @@
   <p:cSld>
     <p:spTree>
       <p:nvGrpSpPr>
-        <p:cNvPr id="285" name="Shape 285"/>
+        <p:cNvPr id="294" name="Shape 294"/>
         <p:cNvGrpSpPr/>
         <p:nvPr/>
       </p:nvGrpSpPr>
@@ -2845,7 +2846,7 @@
       </p:grpSpPr>
       <p:sp>
         <p:nvSpPr>
-          <p:cNvPr id="286" name="Google Shape;286;g3f4f89e88cb_0_8:notes"/>
+          <p:cNvPr id="295" name="Google Shape;295;p21:notes"/>
           <p:cNvSpPr/>
           <p:nvPr>
             <p:ph idx="2" type="sldImg"/>
@@ -2890,7 +2891,7 @@
       </p:sp>
       <p:sp>
         <p:nvSpPr>
-          <p:cNvPr id="287" name="Google Shape;287;g3f4f89e88cb_0_8:notes"/>
+          <p:cNvPr id="296" name="Google Shape;296;p21:notes"/>
           <p:cNvSpPr txBox="1"/>
           <p:nvPr>
             <p:ph idx="1" type="body"/>
@@ -2948,7 +2949,7 @@
   <p:cSld>
     <p:spTree>
       <p:nvGrpSpPr>
-        <p:cNvPr id="291" name="Shape 291"/>
+        <p:cNvPr id="302" name="Shape 302"/>
         <p:cNvGrpSpPr/>
         <p:nvPr/>
       </p:nvGrpSpPr>
@@ -2962,7 +2963,7 @@
       </p:grpSpPr>
       <p:sp>
         <p:nvSpPr>
-          <p:cNvPr id="292" name="Google Shape;292;g3f4f89e88cb_0_19:notes"/>
+          <p:cNvPr id="303" name="Google Shape;303;g3f4f89e88cb_0_8:notes"/>
           <p:cNvSpPr/>
           <p:nvPr>
             <p:ph idx="2" type="sldImg"/>
@@ -3007,7 +3008,7 @@
       </p:sp>
       <p:sp>
         <p:nvSpPr>
-          <p:cNvPr id="293" name="Google Shape;293;g3f4f89e88cb_0_19:notes"/>
+          <p:cNvPr id="304" name="Google Shape;304;g3f4f89e88cb_0_8:notes"/>
           <p:cNvSpPr txBox="1"/>
           <p:nvPr>
             <p:ph idx="1" type="body"/>
@@ -3065,7 +3066,7 @@
   <p:cSld>
     <p:spTree>
       <p:nvGrpSpPr>
-        <p:cNvPr id="297" name="Shape 297"/>
+        <p:cNvPr id="309" name="Shape 309"/>
         <p:cNvGrpSpPr/>
         <p:nvPr/>
       </p:nvGrpSpPr>
@@ -3079,7 +3080,7 @@
       </p:grpSpPr>
       <p:sp>
         <p:nvSpPr>
-          <p:cNvPr id="298" name="Google Shape;298;g3f4f89e88cb_0_25:notes"/>
+          <p:cNvPr id="310" name="Google Shape;310;g3f4f89e88cb_0_19:notes"/>
           <p:cNvSpPr/>
           <p:nvPr>
             <p:ph idx="2" type="sldImg"/>
@@ -3087,7 +3088,7 @@
         </p:nvSpPr>
         <p:spPr>
           <a:xfrm>
-            <a:off x="381000" y="685800"/>
+            <a:off x="381300" y="685800"/>
             <a:ext cx="6096000" cy="3429000"/>
           </a:xfrm>
           <a:custGeom>
@@ -3124,7 +3125,7 @@
       </p:sp>
       <p:sp>
         <p:nvSpPr>
-          <p:cNvPr id="299" name="Google Shape;299;g3f4f89e88cb_0_25:notes"/>
+          <p:cNvPr id="311" name="Google Shape;311;g3f4f89e88cb_0_19:notes"/>
           <p:cNvSpPr txBox="1"/>
           <p:nvPr>
             <p:ph idx="1" type="body"/>
@@ -3182,7 +3183,7 @@
   <p:cSld>
     <p:spTree>
       <p:nvGrpSpPr>
-        <p:cNvPr id="309" name="Shape 309"/>
+        <p:cNvPr id="315" name="Shape 315"/>
         <p:cNvGrpSpPr/>
         <p:nvPr/>
       </p:nvGrpSpPr>
@@ -3196,7 +3197,7 @@
       </p:grpSpPr>
       <p:sp>
         <p:nvSpPr>
-          <p:cNvPr id="310" name="Google Shape;310;g3f4f89e88cb_0_46:notes"/>
+          <p:cNvPr id="316" name="Google Shape;316;g3f4f89e88cb_0_25:notes"/>
           <p:cNvSpPr/>
           <p:nvPr>
             <p:ph idx="2" type="sldImg"/>
@@ -3241,7 +3242,7 @@
       </p:sp>
       <p:sp>
         <p:nvSpPr>
-          <p:cNvPr id="311" name="Google Shape;311;g3f4f89e88cb_0_46:notes"/>
+          <p:cNvPr id="317" name="Google Shape;317;g3f4f89e88cb_0_25:notes"/>
           <p:cNvSpPr txBox="1"/>
           <p:nvPr>
             <p:ph idx="1" type="body"/>
@@ -3299,7 +3300,7 @@
   <p:cSld>
     <p:spTree>
       <p:nvGrpSpPr>
-        <p:cNvPr id="322" name="Shape 322"/>
+        <p:cNvPr id="327" name="Shape 327"/>
         <p:cNvGrpSpPr/>
         <p:nvPr/>
       </p:nvGrpSpPr>
@@ -3313,7 +3314,7 @@
       </p:grpSpPr>
       <p:sp>
         <p:nvSpPr>
-          <p:cNvPr id="323" name="Google Shape;323;g3f4f89e88cb_0_64:notes"/>
+          <p:cNvPr id="328" name="Google Shape;328;g3f4f89e88cb_0_46:notes"/>
           <p:cNvSpPr/>
           <p:nvPr>
             <p:ph idx="2" type="sldImg"/>
@@ -3358,7 +3359,7 @@
       </p:sp>
       <p:sp>
         <p:nvSpPr>
-          <p:cNvPr id="324" name="Google Shape;324;g3f4f89e88cb_0_64:notes"/>
+          <p:cNvPr id="329" name="Google Shape;329;g3f4f89e88cb_0_46:notes"/>
           <p:cNvSpPr txBox="1"/>
           <p:nvPr>
             <p:ph idx="1" type="body"/>
@@ -3416,7 +3417,7 @@
   <p:cSld>
     <p:spTree>
       <p:nvGrpSpPr>
-        <p:cNvPr id="337" name="Shape 337"/>
+        <p:cNvPr id="340" name="Shape 340"/>
         <p:cNvGrpSpPr/>
         <p:nvPr/>
       </p:nvGrpSpPr>
@@ -3430,7 +3431,7 @@
       </p:grpSpPr>
       <p:sp>
         <p:nvSpPr>
-          <p:cNvPr id="338" name="Google Shape;338;g3f4f89e88cb_0_83:notes"/>
+          <p:cNvPr id="341" name="Google Shape;341;g3f4f89e88cb_0_64:notes"/>
           <p:cNvSpPr/>
           <p:nvPr>
             <p:ph idx="2" type="sldImg"/>
@@ -3475,7 +3476,7 @@
       </p:sp>
       <p:sp>
         <p:nvSpPr>
-          <p:cNvPr id="339" name="Google Shape;339;g3f4f89e88cb_0_83:notes"/>
+          <p:cNvPr id="342" name="Google Shape;342;g3f4f89e88cb_0_64:notes"/>
           <p:cNvSpPr txBox="1"/>
           <p:nvPr>
             <p:ph idx="1" type="body"/>
@@ -3650,7 +3651,7 @@
   <p:cSld>
     <p:spTree>
       <p:nvGrpSpPr>
-        <p:cNvPr id="344" name="Shape 344"/>
+        <p:cNvPr id="355" name="Shape 355"/>
         <p:cNvGrpSpPr/>
         <p:nvPr/>
       </p:nvGrpSpPr>
@@ -3664,7 +3665,7 @@
       </p:grpSpPr>
       <p:sp>
         <p:nvSpPr>
-          <p:cNvPr id="345" name="Google Shape;345;p23:notes"/>
+          <p:cNvPr id="356" name="Google Shape;356;g3f4f89e88cb_0_83:notes"/>
           <p:cNvSpPr/>
           <p:nvPr>
             <p:ph idx="2" type="sldImg"/>
@@ -3672,7 +3673,7 @@
         </p:nvSpPr>
         <p:spPr>
           <a:xfrm>
-            <a:off x="381300" y="685800"/>
+            <a:off x="381000" y="685800"/>
             <a:ext cx="6096000" cy="3429000"/>
           </a:xfrm>
           <a:custGeom>
@@ -3709,7 +3710,7 @@
       </p:sp>
       <p:sp>
         <p:nvSpPr>
-          <p:cNvPr id="346" name="Google Shape;346;p23:notes"/>
+          <p:cNvPr id="357" name="Google Shape;357;g3f4f89e88cb_0_83:notes"/>
           <p:cNvSpPr txBox="1"/>
           <p:nvPr>
             <p:ph idx="1" type="body"/>
@@ -3767,7 +3768,7 @@
   <p:cSld>
     <p:spTree>
       <p:nvGrpSpPr>
-        <p:cNvPr id="350" name="Shape 350"/>
+        <p:cNvPr id="362" name="Shape 362"/>
         <p:cNvGrpSpPr/>
         <p:nvPr/>
       </p:nvGrpSpPr>
@@ -3781,7 +3782,7 @@
       </p:grpSpPr>
       <p:sp>
         <p:nvSpPr>
-          <p:cNvPr id="351" name="Google Shape;351;p24:notes"/>
+          <p:cNvPr id="363" name="Google Shape;363;p23:notes"/>
           <p:cNvSpPr/>
           <p:nvPr>
             <p:ph idx="2" type="sldImg"/>
@@ -3826,7 +3827,124 @@
       </p:sp>
       <p:sp>
         <p:nvSpPr>
-          <p:cNvPr id="352" name="Google Shape;352;p24:notes"/>
+          <p:cNvPr id="364" name="Google Shape;364;p23:notes"/>
+          <p:cNvSpPr txBox="1"/>
+          <p:nvPr>
+            <p:ph idx="1" type="body"/>
+          </p:nvPr>
+        </p:nvSpPr>
+        <p:spPr>
+          <a:xfrm>
+            <a:off x="685800" y="4343400"/>
+            <a:ext cx="5486400" cy="4114800"/>
+          </a:xfrm>
+          <a:prstGeom prst="rect">
+            <a:avLst/>
+          </a:prstGeom>
+          <a:noFill/>
+          <a:ln>
+            <a:noFill/>
+          </a:ln>
+        </p:spPr>
+        <p:txBody>
+          <a:bodyPr anchorCtr="0" anchor="t" bIns="91425" lIns="91425" spcFirstLastPara="1" rIns="91425" wrap="square" tIns="91425">
+            <a:noAutofit/>
+          </a:bodyPr>
+          <a:lstStyle/>
+          <a:p>
+            <a:pPr indent="0" lvl="0" marL="0" rtl="0" algn="l">
+              <a:lnSpc>
+                <a:spcPct val="100000"/>
+              </a:lnSpc>
+              <a:spcBef>
+                <a:spcPts val="0"/>
+              </a:spcBef>
+              <a:spcAft>
+                <a:spcPts val="0"/>
+              </a:spcAft>
+              <a:buSzPts val="1100"/>
+              <a:buNone/>
+            </a:pPr>
+            <a:r>
+              <a:t/>
+            </a:r>
+            <a:endParaRPr/>
+          </a:p>
+        </p:txBody>
+      </p:sp>
+    </p:spTree>
+  </p:cSld>
+  <p:clrMapOvr>
+    <a:masterClrMapping/>
+  </p:clrMapOvr>
+</p:notes>
+</file>
+
+<file path=ppt/notesSlides/notesSlide32.xml><?xml version="1.0" encoding="utf-8"?>
+<p:notes xmlns:a="http://schemas.openxmlformats.org/drawingml/2006/main" xmlns:r="http://schemas.openxmlformats.org/officeDocument/2006/relationships" xmlns:mc="http://schemas.openxmlformats.org/markup-compatibility/2006" xmlns:mv="urn:schemas-microsoft-com:mac:vml" xmlns:p="http://schemas.openxmlformats.org/presentationml/2006/main" xmlns:c="http://schemas.openxmlformats.org/drawingml/2006/chart" xmlns:dgm="http://schemas.openxmlformats.org/drawingml/2006/diagram" xmlns:o="urn:schemas-microsoft-com:office:office" xmlns:v="urn:schemas-microsoft-com:vml" xmlns:pvml="urn:schemas-microsoft-com:office:powerpoint" xmlns:com="http://schemas.openxmlformats.org/drawingml/2006/compatibility" xmlns:p14="http://schemas.microsoft.com/office/powerpoint/2010/main" xmlns:p15="http://schemas.microsoft.com/office/powerpoint/2012/main" xmlns:ahyp="http://schemas.microsoft.com/office/drawing/2018/hyperlinkcolor" showMasterPhAnim="0" showMasterSp="0">
+  <p:cSld>
+    <p:spTree>
+      <p:nvGrpSpPr>
+        <p:cNvPr id="368" name="Shape 368"/>
+        <p:cNvGrpSpPr/>
+        <p:nvPr/>
+      </p:nvGrpSpPr>
+      <p:grpSpPr>
+        <a:xfrm>
+          <a:off x="0" y="0"/>
+          <a:ext cx="0" cy="0"/>
+          <a:chOff x="0" y="0"/>
+          <a:chExt cx="0" cy="0"/>
+        </a:xfrm>
+      </p:grpSpPr>
+      <p:sp>
+        <p:nvSpPr>
+          <p:cNvPr id="369" name="Google Shape;369;p24:notes"/>
+          <p:cNvSpPr/>
+          <p:nvPr>
+            <p:ph idx="2" type="sldImg"/>
+          </p:nvPr>
+        </p:nvSpPr>
+        <p:spPr>
+          <a:xfrm>
+            <a:off x="381300" y="685800"/>
+            <a:ext cx="6096000" cy="3429000"/>
+          </a:xfrm>
+          <a:custGeom>
+            <a:rect b="b" l="l" r="r" t="t"/>
+            <a:pathLst>
+              <a:path extrusionOk="0" h="120000" w="120000">
+                <a:moveTo>
+                  <a:pt x="0" y="0"/>
+                </a:moveTo>
+                <a:lnTo>
+                  <a:pt x="120000" y="0"/>
+                </a:lnTo>
+                <a:lnTo>
+                  <a:pt x="120000" y="120000"/>
+                </a:lnTo>
+                <a:lnTo>
+                  <a:pt x="0" y="120000"/>
+                </a:lnTo>
+                <a:close/>
+              </a:path>
+            </a:pathLst>
+          </a:custGeom>
+          <a:noFill/>
+          <a:ln cap="flat" cmpd="sng" w="9525">
+            <a:solidFill>
+              <a:srgbClr val="000000"/>
+            </a:solidFill>
+            <a:prstDash val="solid"/>
+            <a:round/>
+            <a:headEnd len="sm" w="sm" type="none"/>
+            <a:tailEnd len="sm" w="sm" type="none"/>
+          </a:ln>
+        </p:spPr>
+      </p:sp>
+      <p:sp>
+        <p:nvSpPr>
+          <p:cNvPr id="370" name="Google Shape;370;p24:notes"/>
           <p:cNvSpPr txBox="1"/>
           <p:nvPr>
             <p:ph idx="1" type="body"/>
@@ -14203,7 +14321,7 @@
       </p:grpSpPr>
       <p:sp>
         <p:nvSpPr>
-          <p:cNvPr id="202" name="Google Shape;202;p13"/>
+          <p:cNvPr id="202" name="Google Shape;202;g3f81f8ff915_0_2"/>
           <p:cNvSpPr txBox="1"/>
           <p:nvPr>
             <p:ph type="title"/>
@@ -14229,242 +14347,6 @@
           <a:lstStyle/>
           <a:p>
             <a:pPr indent="0" lvl="0" marL="0" rtl="0" algn="l">
-              <a:lnSpc>
-                <a:spcPct val="100000"/>
-              </a:lnSpc>
-              <a:spcBef>
-                <a:spcPts val="0"/>
-              </a:spcBef>
-              <a:spcAft>
-                <a:spcPts val="0"/>
-              </a:spcAft>
-              <a:buSzPct val="111111"/>
-              <a:buNone/>
-            </a:pPr>
-            <a:r>
-              <a:rPr lang="zh-TW"/>
-              <a:t>Step3: 設定要執行的計劃 </a:t>
-            </a:r>
-            <a:endParaRPr/>
-          </a:p>
-        </p:txBody>
-      </p:sp>
-      <p:pic>
-        <p:nvPicPr>
-          <p:cNvPr id="203" name="Google Shape;203;p13"/>
-          <p:cNvPicPr preferRelativeResize="0"/>
-          <p:nvPr/>
-        </p:nvPicPr>
-        <p:blipFill rotWithShape="1">
-          <a:blip r:embed="rId3">
-            <a:alphaModFix/>
-          </a:blip>
-          <a:srcRect b="0" l="0" r="0" t="0"/>
-          <a:stretch/>
-        </p:blipFill>
-        <p:spPr>
-          <a:xfrm>
-            <a:off x="311700" y="1123450"/>
-            <a:ext cx="8465201" cy="435500"/>
-          </a:xfrm>
-          <a:prstGeom prst="rect">
-            <a:avLst/>
-          </a:prstGeom>
-          <a:noFill/>
-          <a:ln>
-            <a:noFill/>
-          </a:ln>
-        </p:spPr>
-      </p:pic>
-      <p:pic>
-        <p:nvPicPr>
-          <p:cNvPr id="204" name="Google Shape;204;p13"/>
-          <p:cNvPicPr preferRelativeResize="0"/>
-          <p:nvPr/>
-        </p:nvPicPr>
-        <p:blipFill rotWithShape="1">
-          <a:blip r:embed="rId4">
-            <a:alphaModFix/>
-          </a:blip>
-          <a:srcRect b="0" l="0" r="0" t="0"/>
-          <a:stretch/>
-        </p:blipFill>
-        <p:spPr>
-          <a:xfrm>
-            <a:off x="311700" y="1864875"/>
-            <a:ext cx="6257124" cy="2213375"/>
-          </a:xfrm>
-          <a:prstGeom prst="rect">
-            <a:avLst/>
-          </a:prstGeom>
-          <a:noFill/>
-          <a:ln>
-            <a:noFill/>
-          </a:ln>
-        </p:spPr>
-      </p:pic>
-      <p:sp>
-        <p:nvSpPr>
-          <p:cNvPr id="205" name="Google Shape;205;p13"/>
-          <p:cNvSpPr txBox="1"/>
-          <p:nvPr/>
-        </p:nvSpPr>
-        <p:spPr>
-          <a:xfrm>
-            <a:off x="6754000" y="2656450"/>
-            <a:ext cx="1567500" cy="738900"/>
-          </a:xfrm>
-          <a:prstGeom prst="rect">
-            <a:avLst/>
-          </a:prstGeom>
-          <a:noFill/>
-          <a:ln>
-            <a:noFill/>
-          </a:ln>
-        </p:spPr>
-        <p:txBody>
-          <a:bodyPr anchorCtr="0" anchor="t" bIns="91425" lIns="91425" spcFirstLastPara="1" rIns="91425" wrap="square" tIns="91425">
-            <a:spAutoFit/>
-          </a:bodyPr>
-          <a:lstStyle/>
-          <a:p>
-            <a:pPr indent="-342900" lvl="0" marL="457200" marR="0" rtl="0" algn="l">
-              <a:lnSpc>
-                <a:spcPct val="100000"/>
-              </a:lnSpc>
-              <a:spcBef>
-                <a:spcPts val="0"/>
-              </a:spcBef>
-              <a:spcAft>
-                <a:spcPts val="0"/>
-              </a:spcAft>
-              <a:buClr>
-                <a:schemeClr val="dk2"/>
-              </a:buClr>
-              <a:buSzPts val="1800"/>
-              <a:buFont typeface="Arial"/>
-              <a:buAutoNum type="arabicPeriod"/>
-            </a:pPr>
-            <a:r>
-              <a:rPr b="0" i="0" lang="zh-TW" sz="1800" u="none" cap="none" strike="noStrike">
-                <a:solidFill>
-                  <a:schemeClr val="dk2"/>
-                </a:solidFill>
-                <a:latin typeface="Arial"/>
-                <a:ea typeface="Arial"/>
-                <a:cs typeface="Arial"/>
-                <a:sym typeface="Arial"/>
-              </a:rPr>
-              <a:t>產學合作</a:t>
-            </a:r>
-            <a:endParaRPr b="0" i="0" sz="1800" u="none" cap="none" strike="noStrike">
-              <a:solidFill>
-                <a:schemeClr val="dk2"/>
-              </a:solidFill>
-              <a:latin typeface="Arial"/>
-              <a:ea typeface="Arial"/>
-              <a:cs typeface="Arial"/>
-              <a:sym typeface="Arial"/>
-            </a:endParaRPr>
-          </a:p>
-          <a:p>
-            <a:pPr indent="-342900" lvl="0" marL="457200" marR="0" rtl="0" algn="l">
-              <a:lnSpc>
-                <a:spcPct val="100000"/>
-              </a:lnSpc>
-              <a:spcBef>
-                <a:spcPts val="0"/>
-              </a:spcBef>
-              <a:spcAft>
-                <a:spcPts val="0"/>
-              </a:spcAft>
-              <a:buClr>
-                <a:schemeClr val="dk2"/>
-              </a:buClr>
-              <a:buSzPts val="1800"/>
-              <a:buFont typeface="Arial"/>
-              <a:buAutoNum type="arabicPeriod"/>
-            </a:pPr>
-            <a:r>
-              <a:rPr b="0" i="0" lang="zh-TW" sz="1800" u="none" cap="none" strike="noStrike">
-                <a:solidFill>
-                  <a:schemeClr val="dk2"/>
-                </a:solidFill>
-                <a:latin typeface="Arial"/>
-                <a:ea typeface="Arial"/>
-                <a:cs typeface="Arial"/>
-                <a:sym typeface="Arial"/>
-              </a:rPr>
-              <a:t>研究計劃</a:t>
-            </a:r>
-            <a:endParaRPr b="0" i="0" sz="1800" u="none" cap="none" strike="noStrike">
-              <a:solidFill>
-                <a:schemeClr val="dk2"/>
-              </a:solidFill>
-              <a:latin typeface="Arial"/>
-              <a:ea typeface="Arial"/>
-              <a:cs typeface="Arial"/>
-              <a:sym typeface="Arial"/>
-            </a:endParaRPr>
-          </a:p>
-        </p:txBody>
-      </p:sp>
-    </p:spTree>
-  </p:cSld>
-  <p:clrMapOvr>
-    <a:masterClrMapping/>
-  </p:clrMapOvr>
-</p:sld>
-</file>
-
-<file path=ppt/slides/slide16.xml><?xml version="1.0" encoding="utf-8"?>
-<p:sld xmlns:a="http://schemas.openxmlformats.org/drawingml/2006/main" xmlns:r="http://schemas.openxmlformats.org/officeDocument/2006/relationships" xmlns:mc="http://schemas.openxmlformats.org/markup-compatibility/2006" xmlns:mv="urn:schemas-microsoft-com:mac:vml" xmlns:p="http://schemas.openxmlformats.org/presentationml/2006/main" xmlns:c="http://schemas.openxmlformats.org/drawingml/2006/chart" xmlns:dgm="http://schemas.openxmlformats.org/drawingml/2006/diagram" xmlns:o="urn:schemas-microsoft-com:office:office" xmlns:v="urn:schemas-microsoft-com:vml" xmlns:pvml="urn:schemas-microsoft-com:office:powerpoint" xmlns:com="http://schemas.openxmlformats.org/drawingml/2006/compatibility" xmlns:p14="http://schemas.microsoft.com/office/powerpoint/2010/main" xmlns:p15="http://schemas.microsoft.com/office/powerpoint/2012/main" xmlns:ahyp="http://schemas.microsoft.com/office/drawing/2018/hyperlinkcolor">
-  <p:cSld>
-    <p:spTree>
-      <p:nvGrpSpPr>
-        <p:cNvPr id="209" name="Shape 209"/>
-        <p:cNvGrpSpPr/>
-        <p:nvPr/>
-      </p:nvGrpSpPr>
-      <p:grpSpPr>
-        <a:xfrm>
-          <a:off x="0" y="0"/>
-          <a:ext cx="0" cy="0"/>
-          <a:chOff x="0" y="0"/>
-          <a:chExt cx="0" cy="0"/>
-        </a:xfrm>
-      </p:grpSpPr>
-      <p:sp>
-        <p:nvSpPr>
-          <p:cNvPr id="210" name="Google Shape;210;p14"/>
-          <p:cNvSpPr txBox="1"/>
-          <p:nvPr>
-            <p:ph type="title"/>
-          </p:nvPr>
-        </p:nvSpPr>
-        <p:spPr>
-          <a:xfrm>
-            <a:off x="311700" y="445025"/>
-            <a:ext cx="8520600" cy="572700"/>
-          </a:xfrm>
-          <a:prstGeom prst="rect">
-            <a:avLst/>
-          </a:prstGeom>
-          <a:noFill/>
-          <a:ln>
-            <a:noFill/>
-          </a:ln>
-        </p:spPr>
-        <p:txBody>
-          <a:bodyPr anchorCtr="0" anchor="t" bIns="91425" lIns="91425" spcFirstLastPara="1" rIns="91425" wrap="square" tIns="91425">
-            <a:normAutofit fontScale="90000"/>
-          </a:bodyPr>
-          <a:lstStyle/>
-          <a:p>
-            <a:pPr indent="0" lvl="0" marL="0" rtl="0" algn="l">
-              <a:lnSpc>
-                <a:spcPct val="100000"/>
-              </a:lnSpc>
               <a:spcBef>
                 <a:spcPts val="0"/>
               </a:spcBef>
@@ -14474,55 +14356,13 @@
               <a:buClr>
                 <a:schemeClr val="dk1"/>
               </a:buClr>
-              <a:buSzPct val="39285"/>
+              <a:buSzPct val="111111"/>
               <a:buFont typeface="Arial"/>
               <a:buNone/>
             </a:pPr>
             <a:r>
               <a:rPr lang="zh-TW"/>
-              <a:t>Step3: 設定要執行的計劃 </a:t>
-            </a:r>
-            <a:endParaRPr/>
-          </a:p>
-          <a:p>
-            <a:pPr indent="0" lvl="0" marL="0" rtl="0" algn="l">
-              <a:lnSpc>
-                <a:spcPct val="100000"/>
-              </a:lnSpc>
-              <a:spcBef>
-                <a:spcPts val="0"/>
-              </a:spcBef>
-              <a:spcAft>
-                <a:spcPts val="0"/>
-              </a:spcAft>
-              <a:buClr>
-                <a:schemeClr val="dk1"/>
-              </a:buClr>
-              <a:buSzPct val="39285"/>
-              <a:buFont typeface="Arial"/>
-              <a:buNone/>
-            </a:pPr>
-            <a:r>
-              <a:t/>
-            </a:r>
-            <a:endParaRPr/>
-          </a:p>
-          <a:p>
-            <a:pPr indent="0" lvl="0" marL="0" rtl="0" algn="l">
-              <a:lnSpc>
-                <a:spcPct val="100000"/>
-              </a:lnSpc>
-              <a:spcBef>
-                <a:spcPts val="0"/>
-              </a:spcBef>
-              <a:spcAft>
-                <a:spcPts val="0"/>
-              </a:spcAft>
-              <a:buSzPct val="111111"/>
-              <a:buNone/>
-            </a:pPr>
-            <a:r>
-              <a:t/>
+              <a:t>Step 2: 安裝環境</a:t>
             </a:r>
             <a:endParaRPr/>
           </a:p>
@@ -14530,7 +14370,7 @@
       </p:sp>
       <p:sp>
         <p:nvSpPr>
-          <p:cNvPr id="211" name="Google Shape;211;p14"/>
+          <p:cNvPr id="203" name="Google Shape;203;g3f81f8ff915_0_2"/>
           <p:cNvSpPr txBox="1"/>
           <p:nvPr>
             <p:ph idx="1" type="body"/>
@@ -14563,21 +14403,32 @@
                 <a:spcPts val="0"/>
               </a:spcBef>
               <a:spcAft>
-                <a:spcPts val="1200"/>
-              </a:spcAft>
-              <a:buSzPts val="1800"/>
+                <a:spcPts val="0"/>
+              </a:spcAft>
               <a:buNone/>
             </a:pPr>
             <a:r>
               <a:rPr lang="zh-TW"/>
-              <a:t>雙擊 windows_setting.bat ，</a:t>
-            </a:r>
-            <a:br>
+              <a:t>若發現點擊後沒有反應或是在終端機執行發現圖中錯誤</a:t>
+            </a:r>
+            <a:endParaRPr/>
+          </a:p>
+          <a:p>
+            <a:pPr indent="0" lvl="0" marL="0" rtl="0" algn="l">
+              <a:lnSpc>
+                <a:spcPct val="115000"/>
+              </a:lnSpc>
+              <a:spcBef>
+                <a:spcPts val="0"/>
+              </a:spcBef>
+              <a:spcAft>
+                <a:spcPts val="0"/>
+              </a:spcAft>
+              <a:buNone/>
+            </a:pPr>
+            <a:r>
               <a:rPr lang="zh-TW"/>
-            </a:br>
-            <a:r>
-              <a:rPr lang="zh-TW"/>
-              <a:t>分為「產學合作」、「研究計畫」後，確認項目後按下確認</a:t>
+              <a:t>請到控控制台 → 地區 → 系統管理 → 變更系統地區設定 → 看有沒有勾選「Beta: 使用 Unicode UTF-8 提供全球語言支援」</a:t>
             </a:r>
             <a:endParaRPr/>
           </a:p>
@@ -14585,29 +14436,134 @@
       </p:sp>
       <p:pic>
         <p:nvPicPr>
-          <p:cNvPr id="212" name="Google Shape;212;p14"/>
+          <p:cNvPr id="204" name="Google Shape;204;g3f81f8ff915_0_2"/>
           <p:cNvPicPr preferRelativeResize="0"/>
           <p:nvPr/>
         </p:nvPicPr>
-        <p:blipFill rotWithShape="1">
+        <p:blipFill>
           <a:blip r:embed="rId3">
             <a:alphaModFix/>
           </a:blip>
-          <a:srcRect b="0" l="0" r="0" t="0"/>
-          <a:stretch/>
+          <a:stretch>
+            <a:fillRect/>
+          </a:stretch>
         </p:blipFill>
         <p:spPr>
           <a:xfrm>
-            <a:off x="451975" y="1971752"/>
-            <a:ext cx="4901100" cy="2910050"/>
+            <a:off x="4825973" y="410700"/>
+            <a:ext cx="4006325" cy="641350"/>
           </a:xfrm>
           <a:prstGeom prst="rect">
             <a:avLst/>
           </a:prstGeom>
           <a:noFill/>
-          <a:ln cap="flat" cmpd="sng" w="9525">
+          <a:ln>
+            <a:noFill/>
+          </a:ln>
+        </p:spPr>
+      </p:pic>
+      <p:pic>
+        <p:nvPicPr>
+          <p:cNvPr id="205" name="Google Shape;205;g3f81f8ff915_0_2" title="截圖 2026-07-15 14.45.47.png"/>
+          <p:cNvPicPr preferRelativeResize="0"/>
+          <p:nvPr/>
+        </p:nvPicPr>
+        <p:blipFill>
+          <a:blip r:embed="rId4">
+            <a:alphaModFix/>
+          </a:blip>
+          <a:stretch>
+            <a:fillRect/>
+          </a:stretch>
+        </p:blipFill>
+        <p:spPr>
+          <a:xfrm>
+            <a:off x="85474" y="2384149"/>
+            <a:ext cx="3048426" cy="1500950"/>
+          </a:xfrm>
+          <a:prstGeom prst="rect">
+            <a:avLst/>
+          </a:prstGeom>
+          <a:noFill/>
+          <a:ln>
+            <a:noFill/>
+          </a:ln>
+        </p:spPr>
+      </p:pic>
+      <p:pic>
+        <p:nvPicPr>
+          <p:cNvPr id="206" name="Google Shape;206;g3f81f8ff915_0_2" title="截圖 2026-07-15 14.46.27.png"/>
+          <p:cNvPicPr preferRelativeResize="0"/>
+          <p:nvPr/>
+        </p:nvPicPr>
+        <p:blipFill>
+          <a:blip r:embed="rId5">
+            <a:alphaModFix/>
+          </a:blip>
+          <a:stretch>
+            <a:fillRect/>
+          </a:stretch>
+        </p:blipFill>
+        <p:spPr>
+          <a:xfrm>
+            <a:off x="3316413" y="2372875"/>
+            <a:ext cx="3727700" cy="2104225"/>
+          </a:xfrm>
+          <a:prstGeom prst="rect">
+            <a:avLst/>
+          </a:prstGeom>
+          <a:noFill/>
+          <a:ln>
+            <a:noFill/>
+          </a:ln>
+        </p:spPr>
+      </p:pic>
+      <p:pic>
+        <p:nvPicPr>
+          <p:cNvPr id="207" name="Google Shape;207;g3f81f8ff915_0_2" title="截圖 2026-07-15 14.46.41.png"/>
+          <p:cNvPicPr preferRelativeResize="0"/>
+          <p:nvPr/>
+        </p:nvPicPr>
+        <p:blipFill>
+          <a:blip r:embed="rId6">
+            <a:alphaModFix/>
+          </a:blip>
+          <a:stretch>
+            <a:fillRect/>
+          </a:stretch>
+        </p:blipFill>
+        <p:spPr>
+          <a:xfrm>
+            <a:off x="7132600" y="2472425"/>
+            <a:ext cx="1880975" cy="985500"/>
+          </a:xfrm>
+          <a:prstGeom prst="rect">
+            <a:avLst/>
+          </a:prstGeom>
+          <a:noFill/>
+          <a:ln>
+            <a:noFill/>
+          </a:ln>
+        </p:spPr>
+      </p:pic>
+      <p:sp>
+        <p:nvSpPr>
+          <p:cNvPr id="208" name="Google Shape;208;g3f81f8ff915_0_2"/>
+          <p:cNvSpPr/>
+          <p:nvPr/>
+        </p:nvSpPr>
+        <p:spPr>
+          <a:xfrm>
+            <a:off x="2199200" y="3309175"/>
+            <a:ext cx="846300" cy="231600"/>
+          </a:xfrm>
+          <a:prstGeom prst="rect">
+            <a:avLst/>
+          </a:prstGeom>
+          <a:noFill/>
+          <a:ln cap="flat" cmpd="sng" w="28575">
             <a:solidFill>
-              <a:schemeClr val="dk2"/>
+              <a:schemeClr val="accent4"/>
             </a:solidFill>
             <a:prstDash val="solid"/>
             <a:round/>
@@ -14615,32 +14571,46 @@
             <a:tailEnd len="sm" w="sm" type="none"/>
           </a:ln>
         </p:spPr>
-      </p:pic>
-      <p:pic>
-        <p:nvPicPr>
-          <p:cNvPr id="213" name="Google Shape;213;p14"/>
-          <p:cNvPicPr preferRelativeResize="0"/>
+        <p:txBody>
+          <a:bodyPr anchorCtr="0" anchor="ctr" bIns="91425" lIns="91425" spcFirstLastPara="1" rIns="91425" wrap="square" tIns="91425">
+            <a:noAutofit/>
+          </a:bodyPr>
+          <a:lstStyle/>
+          <a:p>
+            <a:pPr indent="0" lvl="0" marL="0" rtl="0" algn="ctr">
+              <a:spcBef>
+                <a:spcPts val="0"/>
+              </a:spcBef>
+              <a:spcAft>
+                <a:spcPts val="0"/>
+              </a:spcAft>
+              <a:buNone/>
+            </a:pPr>
+            <a:r>
+              <a:t/>
+            </a:r>
+            <a:endParaRPr/>
+          </a:p>
+        </p:txBody>
+      </p:sp>
+      <p:sp>
+        <p:nvSpPr>
+          <p:cNvPr id="209" name="Google Shape;209;g3f81f8ff915_0_2"/>
+          <p:cNvSpPr/>
           <p:nvPr/>
-        </p:nvPicPr>
-        <p:blipFill rotWithShape="1">
-          <a:blip r:embed="rId4">
-            <a:alphaModFix/>
-          </a:blip>
-          <a:srcRect b="0" l="0" r="0" t="0"/>
-          <a:stretch/>
-        </p:blipFill>
-        <p:spPr>
-          <a:xfrm>
-            <a:off x="5081675" y="3562425"/>
-            <a:ext cx="2781300" cy="1466850"/>
+        </p:nvSpPr>
+        <p:spPr>
+          <a:xfrm>
+            <a:off x="4024213" y="2778713"/>
+            <a:ext cx="372600" cy="111000"/>
           </a:xfrm>
           <a:prstGeom prst="rect">
             <a:avLst/>
           </a:prstGeom>
           <a:noFill/>
-          <a:ln cap="flat" cmpd="sng" w="9525">
+          <a:ln cap="flat" cmpd="sng" w="28575">
             <a:solidFill>
-              <a:schemeClr val="dk2"/>
+              <a:schemeClr val="accent4"/>
             </a:solidFill>
             <a:prstDash val="solid"/>
             <a:round/>
@@ -14648,168 +14618,23 @@
             <a:tailEnd len="sm" w="sm" type="none"/>
           </a:ln>
         </p:spPr>
-      </p:pic>
-      <p:sp>
-        <p:nvSpPr>
-          <p:cNvPr id="214" name="Google Shape;214;p14"/>
-          <p:cNvSpPr txBox="1"/>
-          <p:nvPr/>
-        </p:nvSpPr>
-        <p:spPr>
-          <a:xfrm>
-            <a:off x="4459275" y="44875"/>
-            <a:ext cx="4684800" cy="631200"/>
-          </a:xfrm>
-          <a:prstGeom prst="rect">
-            <a:avLst/>
-          </a:prstGeom>
-          <a:noFill/>
-          <a:ln>
-            <a:noFill/>
-          </a:ln>
-        </p:spPr>
         <p:txBody>
-          <a:bodyPr anchorCtr="0" anchor="t" bIns="91425" lIns="91425" spcFirstLastPara="1" rIns="91425" wrap="square" tIns="91425">
-            <a:spAutoFit/>
+          <a:bodyPr anchorCtr="0" anchor="ctr" bIns="91425" lIns="91425" spcFirstLastPara="1" rIns="91425" wrap="square" tIns="91425">
+            <a:noAutofit/>
           </a:bodyPr>
           <a:lstStyle/>
           <a:p>
-            <a:pPr indent="0" lvl="0" marL="0" marR="0" rtl="0" algn="r">
-              <a:lnSpc>
-                <a:spcPct val="100000"/>
-              </a:lnSpc>
-              <a:spcBef>
-                <a:spcPts val="0"/>
-              </a:spcBef>
-              <a:spcAft>
-                <a:spcPts val="0"/>
-              </a:spcAft>
-              <a:buClr>
-                <a:srgbClr val="000000"/>
-              </a:buClr>
-              <a:buSzPts val="2900"/>
-              <a:buFont typeface="Arial"/>
-              <a:buNone/>
-            </a:pPr>
-            <a:r>
-              <a:rPr b="0" i="0" lang="zh-TW" sz="2900" u="none" cap="none" strike="noStrike">
-                <a:solidFill>
-                  <a:srgbClr val="FF0000"/>
-                </a:solidFill>
-                <a:latin typeface="Arial"/>
-                <a:ea typeface="Arial"/>
-                <a:cs typeface="Arial"/>
-                <a:sym typeface="Arial"/>
-              </a:rPr>
-              <a:t>windows_setting.bat </a:t>
-            </a:r>
-            <a:endParaRPr b="0" i="0" sz="2900" u="none" cap="none" strike="noStrike">
-              <a:solidFill>
-                <a:srgbClr val="FF0000"/>
-              </a:solidFill>
-              <a:latin typeface="Arial"/>
-              <a:ea typeface="Arial"/>
-              <a:cs typeface="Arial"/>
-              <a:sym typeface="Arial"/>
-            </a:endParaRPr>
-          </a:p>
-        </p:txBody>
-      </p:sp>
-      <p:pic>
-        <p:nvPicPr>
-          <p:cNvPr id="215" name="Google Shape;215;p14"/>
-          <p:cNvPicPr preferRelativeResize="0"/>
-          <p:nvPr/>
-        </p:nvPicPr>
-        <p:blipFill rotWithShape="1">
-          <a:blip r:embed="rId5">
-            <a:alphaModFix/>
-          </a:blip>
-          <a:srcRect b="0" l="1574" r="72059" t="0"/>
-          <a:stretch/>
-        </p:blipFill>
-        <p:spPr>
-          <a:xfrm>
-            <a:off x="878725" y="1090500"/>
-            <a:ext cx="2231975" cy="435500"/>
-          </a:xfrm>
-          <a:prstGeom prst="rect">
-            <a:avLst/>
-          </a:prstGeom>
-          <a:noFill/>
-          <a:ln>
-            <a:noFill/>
-          </a:ln>
-        </p:spPr>
-      </p:pic>
-    </p:spTree>
-  </p:cSld>
-  <p:clrMapOvr>
-    <a:masterClrMapping/>
-  </p:clrMapOvr>
-</p:sld>
-</file>
-
-<file path=ppt/slides/slide17.xml><?xml version="1.0" encoding="utf-8"?>
-<p:sld xmlns:a="http://schemas.openxmlformats.org/drawingml/2006/main" xmlns:r="http://schemas.openxmlformats.org/officeDocument/2006/relationships" xmlns:mc="http://schemas.openxmlformats.org/markup-compatibility/2006" xmlns:mv="urn:schemas-microsoft-com:mac:vml" xmlns:p="http://schemas.openxmlformats.org/presentationml/2006/main" xmlns:c="http://schemas.openxmlformats.org/drawingml/2006/chart" xmlns:dgm="http://schemas.openxmlformats.org/drawingml/2006/diagram" xmlns:o="urn:schemas-microsoft-com:office:office" xmlns:v="urn:schemas-microsoft-com:vml" xmlns:pvml="urn:schemas-microsoft-com:office:powerpoint" xmlns:com="http://schemas.openxmlformats.org/drawingml/2006/compatibility" xmlns:p14="http://schemas.microsoft.com/office/powerpoint/2010/main" xmlns:p15="http://schemas.microsoft.com/office/powerpoint/2012/main" xmlns:ahyp="http://schemas.microsoft.com/office/drawing/2018/hyperlinkcolor">
-  <p:cSld>
-    <p:spTree>
-      <p:nvGrpSpPr>
-        <p:cNvPr id="219" name="Shape 219"/>
-        <p:cNvGrpSpPr/>
-        <p:nvPr/>
-      </p:nvGrpSpPr>
-      <p:grpSpPr>
-        <a:xfrm>
-          <a:off x="0" y="0"/>
-          <a:ext cx="0" cy="0"/>
-          <a:chOff x="0" y="0"/>
-          <a:chExt cx="0" cy="0"/>
-        </a:xfrm>
-      </p:grpSpPr>
-      <p:sp>
-        <p:nvSpPr>
-          <p:cNvPr id="220" name="Google Shape;220;p15"/>
-          <p:cNvSpPr txBox="1"/>
-          <p:nvPr>
-            <p:ph type="title"/>
-          </p:nvPr>
-        </p:nvSpPr>
-        <p:spPr>
-          <a:xfrm>
-            <a:off x="311700" y="445025"/>
-            <a:ext cx="8520600" cy="572700"/>
-          </a:xfrm>
-          <a:prstGeom prst="rect">
-            <a:avLst/>
-          </a:prstGeom>
-          <a:noFill/>
-          <a:ln>
-            <a:noFill/>
-          </a:ln>
-        </p:spPr>
-        <p:txBody>
-          <a:bodyPr anchorCtr="0" anchor="t" bIns="91425" lIns="91425" spcFirstLastPara="1" rIns="91425" wrap="square" tIns="91425">
-            <a:normAutofit fontScale="90000"/>
-          </a:bodyPr>
-          <a:lstStyle/>
-          <a:p>
-            <a:pPr indent="0" lvl="0" marL="0" rtl="0" algn="l">
-              <a:lnSpc>
-                <a:spcPct val="100000"/>
-              </a:lnSpc>
-              <a:spcBef>
-                <a:spcPts val="0"/>
-              </a:spcBef>
-              <a:spcAft>
-                <a:spcPts val="0"/>
-              </a:spcAft>
-              <a:buSzPct val="111111"/>
-              <a:buNone/>
-            </a:pPr>
-            <a:r>
-              <a:rPr lang="zh-TW"/>
-              <a:t>選擇要處理的檔案</a:t>
+            <a:pPr indent="0" lvl="0" marL="0" rtl="0" algn="ctr">
+              <a:spcBef>
+                <a:spcPts val="0"/>
+              </a:spcBef>
+              <a:spcAft>
+                <a:spcPts val="0"/>
+              </a:spcAft>
+              <a:buNone/>
+            </a:pPr>
+            <a:r>
+              <a:t/>
             </a:r>
             <a:endParaRPr/>
           </a:p>
@@ -14817,97 +14642,22 @@
       </p:sp>
       <p:sp>
         <p:nvSpPr>
-          <p:cNvPr id="221" name="Google Shape;221;p15"/>
-          <p:cNvSpPr txBox="1"/>
-          <p:nvPr>
-            <p:ph idx="1" type="body"/>
-          </p:nvPr>
+          <p:cNvPr id="210" name="Google Shape;210;g3f81f8ff915_0_2"/>
+          <p:cNvSpPr/>
+          <p:nvPr/>
         </p:nvSpPr>
         <p:spPr>
           <a:xfrm>
-            <a:off x="311700" y="1152475"/>
-            <a:ext cx="8520600" cy="3416400"/>
+            <a:off x="6194938" y="3589438"/>
+            <a:ext cx="610800" cy="111000"/>
           </a:xfrm>
           <a:prstGeom prst="rect">
             <a:avLst/>
           </a:prstGeom>
           <a:noFill/>
-          <a:ln>
-            <a:noFill/>
-          </a:ln>
-        </p:spPr>
-        <p:txBody>
-          <a:bodyPr anchorCtr="0" anchor="t" bIns="91425" lIns="91425" spcFirstLastPara="1" rIns="91425" wrap="square" tIns="91425">
-            <a:normAutofit/>
-          </a:bodyPr>
-          <a:lstStyle/>
-          <a:p>
-            <a:pPr indent="0" lvl="0" marL="0" rtl="0" algn="l">
-              <a:lnSpc>
-                <a:spcPct val="115000"/>
-              </a:lnSpc>
-              <a:spcBef>
-                <a:spcPts val="0"/>
-              </a:spcBef>
-              <a:spcAft>
-                <a:spcPts val="0"/>
-              </a:spcAft>
-              <a:buSzPts val="1800"/>
-              <a:buNone/>
-            </a:pPr>
-            <a:r>
-              <a:rPr lang="zh-TW"/>
-              <a:t>記得要根據「準備的資料」放在相應的位置</a:t>
-            </a:r>
-            <a:endParaRPr/>
-          </a:p>
-          <a:p>
-            <a:pPr indent="0" lvl="0" marL="0" rtl="0" algn="l">
-              <a:lnSpc>
-                <a:spcPct val="115000"/>
-              </a:lnSpc>
-              <a:spcBef>
-                <a:spcPts val="1200"/>
-              </a:spcBef>
-              <a:spcAft>
-                <a:spcPts val="1200"/>
-              </a:spcAft>
-              <a:buSzPts val="1800"/>
-              <a:buNone/>
-            </a:pPr>
-            <a:r>
-              <a:rPr lang="zh-TW"/>
-              <a:t>選擇要處理的檔案</a:t>
-            </a:r>
-            <a:endParaRPr/>
-          </a:p>
-        </p:txBody>
-      </p:sp>
-      <p:pic>
-        <p:nvPicPr>
-          <p:cNvPr id="222" name="Google Shape;222;p15"/>
-          <p:cNvPicPr preferRelativeResize="0"/>
-          <p:nvPr/>
-        </p:nvPicPr>
-        <p:blipFill rotWithShape="1">
-          <a:blip r:embed="rId3">
-            <a:alphaModFix/>
-          </a:blip>
-          <a:srcRect b="0" l="0" r="0" t="0"/>
-          <a:stretch/>
-        </p:blipFill>
-        <p:spPr>
-          <a:xfrm>
-            <a:off x="365550" y="2269600"/>
-            <a:ext cx="3695700" cy="2076450"/>
-          </a:xfrm>
-          <a:prstGeom prst="rect">
-            <a:avLst/>
-          </a:prstGeom>
-          <a:noFill/>
-          <a:ln cap="flat" cmpd="sng" w="9525">
+          <a:ln cap="flat" cmpd="sng" w="28575">
             <a:solidFill>
-              <a:schemeClr val="dk2"/>
+              <a:schemeClr val="accent4"/>
             </a:solidFill>
             <a:prstDash val="solid"/>
             <a:round/>
@@ -14915,17 +14665,85 @@
             <a:tailEnd len="sm" w="sm" type="none"/>
           </a:ln>
         </p:spPr>
-      </p:pic>
+        <p:txBody>
+          <a:bodyPr anchorCtr="0" anchor="ctr" bIns="91425" lIns="91425" spcFirstLastPara="1" rIns="91425" wrap="square" tIns="91425">
+            <a:noAutofit/>
+          </a:bodyPr>
+          <a:lstStyle/>
+          <a:p>
+            <a:pPr indent="0" lvl="0" marL="0" rtl="0" algn="ctr">
+              <a:spcBef>
+                <a:spcPts val="0"/>
+              </a:spcBef>
+              <a:spcAft>
+                <a:spcPts val="0"/>
+              </a:spcAft>
+              <a:buNone/>
+            </a:pPr>
+            <a:r>
+              <a:t/>
+            </a:r>
+            <a:endParaRPr/>
+          </a:p>
+        </p:txBody>
+      </p:sp>
       <p:sp>
         <p:nvSpPr>
-          <p:cNvPr id="223" name="Google Shape;223;p15"/>
+          <p:cNvPr id="211" name="Google Shape;211;g3f81f8ff915_0_2"/>
           <p:cNvSpPr/>
           <p:nvPr/>
         </p:nvSpPr>
         <p:spPr>
           <a:xfrm>
-            <a:off x="4514675" y="2975675"/>
-            <a:ext cx="556500" cy="466800"/>
+            <a:off x="7132600" y="3159925"/>
+            <a:ext cx="1317000" cy="111000"/>
+          </a:xfrm>
+          <a:prstGeom prst="rect">
+            <a:avLst/>
+          </a:prstGeom>
+          <a:noFill/>
+          <a:ln cap="flat" cmpd="sng" w="28575">
+            <a:solidFill>
+              <a:schemeClr val="accent4"/>
+            </a:solidFill>
+            <a:prstDash val="solid"/>
+            <a:round/>
+            <a:headEnd len="sm" w="sm" type="none"/>
+            <a:tailEnd len="sm" w="sm" type="none"/>
+          </a:ln>
+        </p:spPr>
+        <p:txBody>
+          <a:bodyPr anchorCtr="0" anchor="ctr" bIns="91425" lIns="91425" spcFirstLastPara="1" rIns="91425" wrap="square" tIns="91425">
+            <a:noAutofit/>
+          </a:bodyPr>
+          <a:lstStyle/>
+          <a:p>
+            <a:pPr indent="0" lvl="0" marL="0" rtl="0" algn="ctr">
+              <a:spcBef>
+                <a:spcPts val="0"/>
+              </a:spcBef>
+              <a:spcAft>
+                <a:spcPts val="0"/>
+              </a:spcAft>
+              <a:buNone/>
+            </a:pPr>
+            <a:r>
+              <a:t/>
+            </a:r>
+            <a:endParaRPr/>
+          </a:p>
+        </p:txBody>
+      </p:sp>
+      <p:sp>
+        <p:nvSpPr>
+          <p:cNvPr id="212" name="Google Shape;212;g3f81f8ff915_0_2"/>
+          <p:cNvSpPr/>
+          <p:nvPr/>
+        </p:nvSpPr>
+        <p:spPr>
+          <a:xfrm>
+            <a:off x="2997925" y="3540775"/>
+            <a:ext cx="510600" cy="376800"/>
           </a:xfrm>
           <a:prstGeom prst="rightArrow">
             <a:avLst>
@@ -14984,28 +14802,26 @@
           </a:p>
         </p:txBody>
       </p:sp>
-      <p:pic>
-        <p:nvPicPr>
-          <p:cNvPr id="224" name="Google Shape;224;p15"/>
-          <p:cNvPicPr preferRelativeResize="0"/>
+      <p:sp>
+        <p:nvSpPr>
+          <p:cNvPr id="213" name="Google Shape;213;g3f81f8ff915_0_2"/>
+          <p:cNvSpPr/>
           <p:nvPr/>
-        </p:nvPicPr>
-        <p:blipFill rotWithShape="1">
-          <a:blip r:embed="rId4">
-            <a:alphaModFix/>
-          </a:blip>
-          <a:srcRect b="0" l="0" r="50985" t="0"/>
-          <a:stretch/>
-        </p:blipFill>
-        <p:spPr>
-          <a:xfrm>
-            <a:off x="5648350" y="1332025"/>
-            <a:ext cx="2754551" cy="3162300"/>
-          </a:xfrm>
-          <a:prstGeom prst="rect">
-            <a:avLst/>
+        </p:nvSpPr>
+        <p:spPr>
+          <a:xfrm rot="-1726116">
+            <a:off x="6857958" y="3397907"/>
+            <a:ext cx="624593" cy="376620"/>
+          </a:xfrm>
+          <a:prstGeom prst="rightArrow">
+            <a:avLst>
+              <a:gd fmla="val 50000" name="adj1"/>
+              <a:gd fmla="val 50000" name="adj2"/>
+            </a:avLst>
           </a:prstGeom>
-          <a:noFill/>
+          <a:solidFill>
+            <a:schemeClr val="lt2"/>
+          </a:solidFill>
           <a:ln cap="flat" cmpd="sng" w="9525">
             <a:solidFill>
               <a:schemeClr val="dk2"/>
@@ -15016,17 +14832,54 @@
             <a:tailEnd len="sm" w="sm" type="none"/>
           </a:ln>
         </p:spPr>
-      </p:pic>
+        <p:txBody>
+          <a:bodyPr anchorCtr="0" anchor="ctr" bIns="91425" lIns="91425" spcFirstLastPara="1" rIns="91425" wrap="square" tIns="91425">
+            <a:noAutofit/>
+          </a:bodyPr>
+          <a:lstStyle/>
+          <a:p>
+            <a:pPr indent="0" lvl="0" marL="0" marR="0" rtl="0" algn="ctr">
+              <a:lnSpc>
+                <a:spcPct val="100000"/>
+              </a:lnSpc>
+              <a:spcBef>
+                <a:spcPts val="0"/>
+              </a:spcBef>
+              <a:spcAft>
+                <a:spcPts val="0"/>
+              </a:spcAft>
+              <a:buClr>
+                <a:srgbClr val="000000"/>
+              </a:buClr>
+              <a:buSzPts val="1400"/>
+              <a:buFont typeface="Arial"/>
+              <a:buNone/>
+            </a:pPr>
+            <a:r>
+              <a:t/>
+            </a:r>
+            <a:endParaRPr b="0" i="0" sz="1400" u="none" cap="none" strike="noStrike">
+              <a:solidFill>
+                <a:srgbClr val="000000"/>
+              </a:solidFill>
+              <a:latin typeface="Arial"/>
+              <a:ea typeface="Arial"/>
+              <a:cs typeface="Arial"/>
+              <a:sym typeface="Arial"/>
+            </a:endParaRPr>
+          </a:p>
+        </p:txBody>
+      </p:sp>
       <p:sp>
         <p:nvSpPr>
-          <p:cNvPr id="225" name="Google Shape;225;p15"/>
+          <p:cNvPr id="214" name="Google Shape;214;g3f81f8ff915_0_2"/>
           <p:cNvSpPr txBox="1"/>
           <p:nvPr/>
         </p:nvSpPr>
         <p:spPr>
           <a:xfrm>
-            <a:off x="6144000" y="44875"/>
-            <a:ext cx="3000000" cy="538800"/>
+            <a:off x="7458075" y="3309175"/>
+            <a:ext cx="1555500" cy="415500"/>
           </a:xfrm>
           <a:prstGeom prst="rect">
             <a:avLst/>
@@ -15042,6 +14895,529 @@
           </a:bodyPr>
           <a:lstStyle/>
           <a:p>
+            <a:pPr indent="0" lvl="0" marL="0" rtl="0" algn="l">
+              <a:spcBef>
+                <a:spcPts val="0"/>
+              </a:spcBef>
+              <a:spcAft>
+                <a:spcPts val="0"/>
+              </a:spcAft>
+              <a:buNone/>
+            </a:pPr>
+            <a:r>
+              <a:rPr b="1" lang="zh-TW" sz="1500">
+                <a:solidFill>
+                  <a:srgbClr val="FF0000"/>
+                </a:solidFill>
+              </a:rPr>
+              <a:t>打勾後儲存</a:t>
+            </a:r>
+            <a:endParaRPr b="1" sz="1500">
+              <a:solidFill>
+                <a:srgbClr val="FF0000"/>
+              </a:solidFill>
+            </a:endParaRPr>
+          </a:p>
+        </p:txBody>
+      </p:sp>
+    </p:spTree>
+  </p:cSld>
+  <p:clrMapOvr>
+    <a:masterClrMapping/>
+  </p:clrMapOvr>
+</p:sld>
+</file>
+
+<file path=ppt/slides/slide16.xml><?xml version="1.0" encoding="utf-8"?>
+<p:sld xmlns:a="http://schemas.openxmlformats.org/drawingml/2006/main" xmlns:r="http://schemas.openxmlformats.org/officeDocument/2006/relationships" xmlns:mc="http://schemas.openxmlformats.org/markup-compatibility/2006" xmlns:mv="urn:schemas-microsoft-com:mac:vml" xmlns:p="http://schemas.openxmlformats.org/presentationml/2006/main" xmlns:c="http://schemas.openxmlformats.org/drawingml/2006/chart" xmlns:dgm="http://schemas.openxmlformats.org/drawingml/2006/diagram" xmlns:o="urn:schemas-microsoft-com:office:office" xmlns:v="urn:schemas-microsoft-com:vml" xmlns:pvml="urn:schemas-microsoft-com:office:powerpoint" xmlns:com="http://schemas.openxmlformats.org/drawingml/2006/compatibility" xmlns:p14="http://schemas.microsoft.com/office/powerpoint/2010/main" xmlns:p15="http://schemas.microsoft.com/office/powerpoint/2012/main" xmlns:ahyp="http://schemas.microsoft.com/office/drawing/2018/hyperlinkcolor">
+  <p:cSld>
+    <p:spTree>
+      <p:nvGrpSpPr>
+        <p:cNvPr id="218" name="Shape 218"/>
+        <p:cNvGrpSpPr/>
+        <p:nvPr/>
+      </p:nvGrpSpPr>
+      <p:grpSpPr>
+        <a:xfrm>
+          <a:off x="0" y="0"/>
+          <a:ext cx="0" cy="0"/>
+          <a:chOff x="0" y="0"/>
+          <a:chExt cx="0" cy="0"/>
+        </a:xfrm>
+      </p:grpSpPr>
+      <p:sp>
+        <p:nvSpPr>
+          <p:cNvPr id="219" name="Google Shape;219;p13"/>
+          <p:cNvSpPr txBox="1"/>
+          <p:nvPr>
+            <p:ph type="title"/>
+          </p:nvPr>
+        </p:nvSpPr>
+        <p:spPr>
+          <a:xfrm>
+            <a:off x="311700" y="445025"/>
+            <a:ext cx="8520600" cy="572700"/>
+          </a:xfrm>
+          <a:prstGeom prst="rect">
+            <a:avLst/>
+          </a:prstGeom>
+          <a:noFill/>
+          <a:ln>
+            <a:noFill/>
+          </a:ln>
+        </p:spPr>
+        <p:txBody>
+          <a:bodyPr anchorCtr="0" anchor="t" bIns="91425" lIns="91425" spcFirstLastPara="1" rIns="91425" wrap="square" tIns="91425">
+            <a:normAutofit fontScale="90000"/>
+          </a:bodyPr>
+          <a:lstStyle/>
+          <a:p>
+            <a:pPr indent="0" lvl="0" marL="0" rtl="0" algn="l">
+              <a:lnSpc>
+                <a:spcPct val="100000"/>
+              </a:lnSpc>
+              <a:spcBef>
+                <a:spcPts val="0"/>
+              </a:spcBef>
+              <a:spcAft>
+                <a:spcPts val="0"/>
+              </a:spcAft>
+              <a:buSzPct val="111111"/>
+              <a:buNone/>
+            </a:pPr>
+            <a:r>
+              <a:rPr lang="zh-TW"/>
+              <a:t>Step3: 設定要執行的計劃 </a:t>
+            </a:r>
+            <a:endParaRPr/>
+          </a:p>
+        </p:txBody>
+      </p:sp>
+      <p:pic>
+        <p:nvPicPr>
+          <p:cNvPr id="220" name="Google Shape;220;p13"/>
+          <p:cNvPicPr preferRelativeResize="0"/>
+          <p:nvPr/>
+        </p:nvPicPr>
+        <p:blipFill rotWithShape="1">
+          <a:blip r:embed="rId3">
+            <a:alphaModFix/>
+          </a:blip>
+          <a:srcRect b="0" l="0" r="0" t="0"/>
+          <a:stretch/>
+        </p:blipFill>
+        <p:spPr>
+          <a:xfrm>
+            <a:off x="311700" y="1123450"/>
+            <a:ext cx="8465201" cy="435500"/>
+          </a:xfrm>
+          <a:prstGeom prst="rect">
+            <a:avLst/>
+          </a:prstGeom>
+          <a:noFill/>
+          <a:ln>
+            <a:noFill/>
+          </a:ln>
+        </p:spPr>
+      </p:pic>
+      <p:pic>
+        <p:nvPicPr>
+          <p:cNvPr id="221" name="Google Shape;221;p13"/>
+          <p:cNvPicPr preferRelativeResize="0"/>
+          <p:nvPr/>
+        </p:nvPicPr>
+        <p:blipFill rotWithShape="1">
+          <a:blip r:embed="rId4">
+            <a:alphaModFix/>
+          </a:blip>
+          <a:srcRect b="0" l="0" r="0" t="0"/>
+          <a:stretch/>
+        </p:blipFill>
+        <p:spPr>
+          <a:xfrm>
+            <a:off x="311700" y="1864875"/>
+            <a:ext cx="6257124" cy="2213375"/>
+          </a:xfrm>
+          <a:prstGeom prst="rect">
+            <a:avLst/>
+          </a:prstGeom>
+          <a:noFill/>
+          <a:ln>
+            <a:noFill/>
+          </a:ln>
+        </p:spPr>
+      </p:pic>
+      <p:sp>
+        <p:nvSpPr>
+          <p:cNvPr id="222" name="Google Shape;222;p13"/>
+          <p:cNvSpPr txBox="1"/>
+          <p:nvPr/>
+        </p:nvSpPr>
+        <p:spPr>
+          <a:xfrm>
+            <a:off x="6754000" y="2656450"/>
+            <a:ext cx="1567500" cy="738900"/>
+          </a:xfrm>
+          <a:prstGeom prst="rect">
+            <a:avLst/>
+          </a:prstGeom>
+          <a:noFill/>
+          <a:ln>
+            <a:noFill/>
+          </a:ln>
+        </p:spPr>
+        <p:txBody>
+          <a:bodyPr anchorCtr="0" anchor="t" bIns="91425" lIns="91425" spcFirstLastPara="1" rIns="91425" wrap="square" tIns="91425">
+            <a:spAutoFit/>
+          </a:bodyPr>
+          <a:lstStyle/>
+          <a:p>
+            <a:pPr indent="-342900" lvl="0" marL="457200" marR="0" rtl="0" algn="l">
+              <a:lnSpc>
+                <a:spcPct val="100000"/>
+              </a:lnSpc>
+              <a:spcBef>
+                <a:spcPts val="0"/>
+              </a:spcBef>
+              <a:spcAft>
+                <a:spcPts val="0"/>
+              </a:spcAft>
+              <a:buClr>
+                <a:schemeClr val="dk2"/>
+              </a:buClr>
+              <a:buSzPts val="1800"/>
+              <a:buFont typeface="Arial"/>
+              <a:buAutoNum type="arabicPeriod"/>
+            </a:pPr>
+            <a:r>
+              <a:rPr b="0" i="0" lang="zh-TW" sz="1800" u="none" cap="none" strike="noStrike">
+                <a:solidFill>
+                  <a:schemeClr val="dk2"/>
+                </a:solidFill>
+                <a:latin typeface="Arial"/>
+                <a:ea typeface="Arial"/>
+                <a:cs typeface="Arial"/>
+                <a:sym typeface="Arial"/>
+              </a:rPr>
+              <a:t>產學合作</a:t>
+            </a:r>
+            <a:endParaRPr b="0" i="0" sz="1800" u="none" cap="none" strike="noStrike">
+              <a:solidFill>
+                <a:schemeClr val="dk2"/>
+              </a:solidFill>
+              <a:latin typeface="Arial"/>
+              <a:ea typeface="Arial"/>
+              <a:cs typeface="Arial"/>
+              <a:sym typeface="Arial"/>
+            </a:endParaRPr>
+          </a:p>
+          <a:p>
+            <a:pPr indent="-342900" lvl="0" marL="457200" marR="0" rtl="0" algn="l">
+              <a:lnSpc>
+                <a:spcPct val="100000"/>
+              </a:lnSpc>
+              <a:spcBef>
+                <a:spcPts val="0"/>
+              </a:spcBef>
+              <a:spcAft>
+                <a:spcPts val="0"/>
+              </a:spcAft>
+              <a:buClr>
+                <a:schemeClr val="dk2"/>
+              </a:buClr>
+              <a:buSzPts val="1800"/>
+              <a:buFont typeface="Arial"/>
+              <a:buAutoNum type="arabicPeriod"/>
+            </a:pPr>
+            <a:r>
+              <a:rPr b="0" i="0" lang="zh-TW" sz="1800" u="none" cap="none" strike="noStrike">
+                <a:solidFill>
+                  <a:schemeClr val="dk2"/>
+                </a:solidFill>
+                <a:latin typeface="Arial"/>
+                <a:ea typeface="Arial"/>
+                <a:cs typeface="Arial"/>
+                <a:sym typeface="Arial"/>
+              </a:rPr>
+              <a:t>研究計劃</a:t>
+            </a:r>
+            <a:endParaRPr b="0" i="0" sz="1800" u="none" cap="none" strike="noStrike">
+              <a:solidFill>
+                <a:schemeClr val="dk2"/>
+              </a:solidFill>
+              <a:latin typeface="Arial"/>
+              <a:ea typeface="Arial"/>
+              <a:cs typeface="Arial"/>
+              <a:sym typeface="Arial"/>
+            </a:endParaRPr>
+          </a:p>
+        </p:txBody>
+      </p:sp>
+    </p:spTree>
+  </p:cSld>
+  <p:clrMapOvr>
+    <a:masterClrMapping/>
+  </p:clrMapOvr>
+</p:sld>
+</file>
+
+<file path=ppt/slides/slide17.xml><?xml version="1.0" encoding="utf-8"?>
+<p:sld xmlns:a="http://schemas.openxmlformats.org/drawingml/2006/main" xmlns:r="http://schemas.openxmlformats.org/officeDocument/2006/relationships" xmlns:mc="http://schemas.openxmlformats.org/markup-compatibility/2006" xmlns:mv="urn:schemas-microsoft-com:mac:vml" xmlns:p="http://schemas.openxmlformats.org/presentationml/2006/main" xmlns:c="http://schemas.openxmlformats.org/drawingml/2006/chart" xmlns:dgm="http://schemas.openxmlformats.org/drawingml/2006/diagram" xmlns:o="urn:schemas-microsoft-com:office:office" xmlns:v="urn:schemas-microsoft-com:vml" xmlns:pvml="urn:schemas-microsoft-com:office:powerpoint" xmlns:com="http://schemas.openxmlformats.org/drawingml/2006/compatibility" xmlns:p14="http://schemas.microsoft.com/office/powerpoint/2010/main" xmlns:p15="http://schemas.microsoft.com/office/powerpoint/2012/main" xmlns:ahyp="http://schemas.microsoft.com/office/drawing/2018/hyperlinkcolor">
+  <p:cSld>
+    <p:spTree>
+      <p:nvGrpSpPr>
+        <p:cNvPr id="226" name="Shape 226"/>
+        <p:cNvGrpSpPr/>
+        <p:nvPr/>
+      </p:nvGrpSpPr>
+      <p:grpSpPr>
+        <a:xfrm>
+          <a:off x="0" y="0"/>
+          <a:ext cx="0" cy="0"/>
+          <a:chOff x="0" y="0"/>
+          <a:chExt cx="0" cy="0"/>
+        </a:xfrm>
+      </p:grpSpPr>
+      <p:sp>
+        <p:nvSpPr>
+          <p:cNvPr id="227" name="Google Shape;227;p14"/>
+          <p:cNvSpPr txBox="1"/>
+          <p:nvPr>
+            <p:ph type="title"/>
+          </p:nvPr>
+        </p:nvSpPr>
+        <p:spPr>
+          <a:xfrm>
+            <a:off x="311700" y="445025"/>
+            <a:ext cx="8520600" cy="572700"/>
+          </a:xfrm>
+          <a:prstGeom prst="rect">
+            <a:avLst/>
+          </a:prstGeom>
+          <a:noFill/>
+          <a:ln>
+            <a:noFill/>
+          </a:ln>
+        </p:spPr>
+        <p:txBody>
+          <a:bodyPr anchorCtr="0" anchor="t" bIns="91425" lIns="91425" spcFirstLastPara="1" rIns="91425" wrap="square" tIns="91425">
+            <a:normAutofit fontScale="90000"/>
+          </a:bodyPr>
+          <a:lstStyle/>
+          <a:p>
+            <a:pPr indent="0" lvl="0" marL="0" rtl="0" algn="l">
+              <a:lnSpc>
+                <a:spcPct val="100000"/>
+              </a:lnSpc>
+              <a:spcBef>
+                <a:spcPts val="0"/>
+              </a:spcBef>
+              <a:spcAft>
+                <a:spcPts val="0"/>
+              </a:spcAft>
+              <a:buClr>
+                <a:schemeClr val="dk1"/>
+              </a:buClr>
+              <a:buSzPct val="39285"/>
+              <a:buFont typeface="Arial"/>
+              <a:buNone/>
+            </a:pPr>
+            <a:r>
+              <a:rPr lang="zh-TW"/>
+              <a:t>Step3: 設定要執行的計劃 </a:t>
+            </a:r>
+            <a:endParaRPr/>
+          </a:p>
+          <a:p>
+            <a:pPr indent="0" lvl="0" marL="0" rtl="0" algn="l">
+              <a:lnSpc>
+                <a:spcPct val="100000"/>
+              </a:lnSpc>
+              <a:spcBef>
+                <a:spcPts val="0"/>
+              </a:spcBef>
+              <a:spcAft>
+                <a:spcPts val="0"/>
+              </a:spcAft>
+              <a:buClr>
+                <a:schemeClr val="dk1"/>
+              </a:buClr>
+              <a:buSzPct val="39285"/>
+              <a:buFont typeface="Arial"/>
+              <a:buNone/>
+            </a:pPr>
+            <a:r>
+              <a:t/>
+            </a:r>
+            <a:endParaRPr/>
+          </a:p>
+          <a:p>
+            <a:pPr indent="0" lvl="0" marL="0" rtl="0" algn="l">
+              <a:lnSpc>
+                <a:spcPct val="100000"/>
+              </a:lnSpc>
+              <a:spcBef>
+                <a:spcPts val="0"/>
+              </a:spcBef>
+              <a:spcAft>
+                <a:spcPts val="0"/>
+              </a:spcAft>
+              <a:buSzPct val="111111"/>
+              <a:buNone/>
+            </a:pPr>
+            <a:r>
+              <a:t/>
+            </a:r>
+            <a:endParaRPr/>
+          </a:p>
+        </p:txBody>
+      </p:sp>
+      <p:sp>
+        <p:nvSpPr>
+          <p:cNvPr id="228" name="Google Shape;228;p14"/>
+          <p:cNvSpPr txBox="1"/>
+          <p:nvPr>
+            <p:ph idx="1" type="body"/>
+          </p:nvPr>
+        </p:nvSpPr>
+        <p:spPr>
+          <a:xfrm>
+            <a:off x="311700" y="1152475"/>
+            <a:ext cx="8520600" cy="3416400"/>
+          </a:xfrm>
+          <a:prstGeom prst="rect">
+            <a:avLst/>
+          </a:prstGeom>
+          <a:noFill/>
+          <a:ln>
+            <a:noFill/>
+          </a:ln>
+        </p:spPr>
+        <p:txBody>
+          <a:bodyPr anchorCtr="0" anchor="t" bIns="91425" lIns="91425" spcFirstLastPara="1" rIns="91425" wrap="square" tIns="91425">
+            <a:normAutofit/>
+          </a:bodyPr>
+          <a:lstStyle/>
+          <a:p>
+            <a:pPr indent="0" lvl="0" marL="0" rtl="0" algn="l">
+              <a:lnSpc>
+                <a:spcPct val="115000"/>
+              </a:lnSpc>
+              <a:spcBef>
+                <a:spcPts val="0"/>
+              </a:spcBef>
+              <a:spcAft>
+                <a:spcPts val="1200"/>
+              </a:spcAft>
+              <a:buSzPts val="1800"/>
+              <a:buNone/>
+            </a:pPr>
+            <a:r>
+              <a:rPr lang="zh-TW"/>
+              <a:t>雙擊 windows_setting.bat ，</a:t>
+            </a:r>
+            <a:br>
+              <a:rPr lang="zh-TW"/>
+            </a:br>
+            <a:r>
+              <a:rPr lang="zh-TW"/>
+              <a:t>分為「產學合作」、「研究計畫」後，確認項目後按下確認</a:t>
+            </a:r>
+            <a:endParaRPr/>
+          </a:p>
+        </p:txBody>
+      </p:sp>
+      <p:pic>
+        <p:nvPicPr>
+          <p:cNvPr id="229" name="Google Shape;229;p14"/>
+          <p:cNvPicPr preferRelativeResize="0"/>
+          <p:nvPr/>
+        </p:nvPicPr>
+        <p:blipFill rotWithShape="1">
+          <a:blip r:embed="rId3">
+            <a:alphaModFix/>
+          </a:blip>
+          <a:srcRect b="0" l="0" r="0" t="0"/>
+          <a:stretch/>
+        </p:blipFill>
+        <p:spPr>
+          <a:xfrm>
+            <a:off x="451975" y="1971752"/>
+            <a:ext cx="4901100" cy="2910050"/>
+          </a:xfrm>
+          <a:prstGeom prst="rect">
+            <a:avLst/>
+          </a:prstGeom>
+          <a:noFill/>
+          <a:ln cap="flat" cmpd="sng" w="9525">
+            <a:solidFill>
+              <a:schemeClr val="dk2"/>
+            </a:solidFill>
+            <a:prstDash val="solid"/>
+            <a:round/>
+            <a:headEnd len="sm" w="sm" type="none"/>
+            <a:tailEnd len="sm" w="sm" type="none"/>
+          </a:ln>
+        </p:spPr>
+      </p:pic>
+      <p:pic>
+        <p:nvPicPr>
+          <p:cNvPr id="230" name="Google Shape;230;p14"/>
+          <p:cNvPicPr preferRelativeResize="0"/>
+          <p:nvPr/>
+        </p:nvPicPr>
+        <p:blipFill rotWithShape="1">
+          <a:blip r:embed="rId4">
+            <a:alphaModFix/>
+          </a:blip>
+          <a:srcRect b="0" l="0" r="0" t="0"/>
+          <a:stretch/>
+        </p:blipFill>
+        <p:spPr>
+          <a:xfrm>
+            <a:off x="5081675" y="3562425"/>
+            <a:ext cx="2781300" cy="1466850"/>
+          </a:xfrm>
+          <a:prstGeom prst="rect">
+            <a:avLst/>
+          </a:prstGeom>
+          <a:noFill/>
+          <a:ln cap="flat" cmpd="sng" w="9525">
+            <a:solidFill>
+              <a:schemeClr val="dk2"/>
+            </a:solidFill>
+            <a:prstDash val="solid"/>
+            <a:round/>
+            <a:headEnd len="sm" w="sm" type="none"/>
+            <a:tailEnd len="sm" w="sm" type="none"/>
+          </a:ln>
+        </p:spPr>
+      </p:pic>
+      <p:sp>
+        <p:nvSpPr>
+          <p:cNvPr id="231" name="Google Shape;231;p14"/>
+          <p:cNvSpPr txBox="1"/>
+          <p:nvPr/>
+        </p:nvSpPr>
+        <p:spPr>
+          <a:xfrm>
+            <a:off x="4459275" y="44875"/>
+            <a:ext cx="4684800" cy="631200"/>
+          </a:xfrm>
+          <a:prstGeom prst="rect">
+            <a:avLst/>
+          </a:prstGeom>
+          <a:noFill/>
+          <a:ln>
+            <a:noFill/>
+          </a:ln>
+        </p:spPr>
+        <p:txBody>
+          <a:bodyPr anchorCtr="0" anchor="t" bIns="91425" lIns="91425" spcFirstLastPara="1" rIns="91425" wrap="square" tIns="91425">
+            <a:spAutoFit/>
+          </a:bodyPr>
+          <a:lstStyle/>
+          <a:p>
             <a:pPr indent="0" lvl="0" marL="0" marR="0" rtl="0" algn="r">
               <a:lnSpc>
                 <a:spcPct val="100000"/>
@@ -15055,12 +15431,12 @@
               <a:buClr>
                 <a:srgbClr val="000000"/>
               </a:buClr>
-              <a:buSzPts val="2300"/>
+              <a:buSzPts val="2900"/>
               <a:buFont typeface="Arial"/>
               <a:buNone/>
             </a:pPr>
             <a:r>
-              <a:rPr b="0" i="0" lang="zh-TW" sz="2300" u="none" cap="none" strike="noStrike">
+              <a:rPr b="0" i="0" lang="zh-TW" sz="2900" u="none" cap="none" strike="noStrike">
                 <a:solidFill>
                   <a:srgbClr val="FF0000"/>
                 </a:solidFill>
@@ -15071,7 +15447,7 @@
               </a:rPr>
               <a:t>windows_setting.bat </a:t>
             </a:r>
-            <a:endParaRPr b="0" i="0" sz="2300" u="none" cap="none" strike="noStrike">
+            <a:endParaRPr b="0" i="0" sz="2900" u="none" cap="none" strike="noStrike">
               <a:solidFill>
                 <a:srgbClr val="FF0000"/>
               </a:solidFill>
@@ -15083,6 +15459,33 @@
           </a:p>
         </p:txBody>
       </p:sp>
+      <p:pic>
+        <p:nvPicPr>
+          <p:cNvPr id="232" name="Google Shape;232;p14"/>
+          <p:cNvPicPr preferRelativeResize="0"/>
+          <p:nvPr/>
+        </p:nvPicPr>
+        <p:blipFill rotWithShape="1">
+          <a:blip r:embed="rId5">
+            <a:alphaModFix/>
+          </a:blip>
+          <a:srcRect b="0" l="1574" r="72059" t="0"/>
+          <a:stretch/>
+        </p:blipFill>
+        <p:spPr>
+          <a:xfrm>
+            <a:off x="878725" y="1090500"/>
+            <a:ext cx="2231975" cy="435500"/>
+          </a:xfrm>
+          <a:prstGeom prst="rect">
+            <a:avLst/>
+          </a:prstGeom>
+          <a:noFill/>
+          <a:ln>
+            <a:noFill/>
+          </a:ln>
+        </p:spPr>
+      </p:pic>
     </p:spTree>
   </p:cSld>
   <p:clrMapOvr>
@@ -15096,7 +15499,7 @@
   <p:cSld>
     <p:spTree>
       <p:nvGrpSpPr>
-        <p:cNvPr id="229" name="Shape 229"/>
+        <p:cNvPr id="236" name="Shape 236"/>
         <p:cNvGrpSpPr/>
         <p:nvPr/>
       </p:nvGrpSpPr>
@@ -15110,7 +15513,7 @@
       </p:grpSpPr>
       <p:sp>
         <p:nvSpPr>
-          <p:cNvPr id="230" name="Google Shape;230;p16"/>
+          <p:cNvPr id="237" name="Google Shape;237;p15"/>
           <p:cNvSpPr txBox="1"/>
           <p:nvPr>
             <p:ph type="title"/>
@@ -15150,7 +15553,7 @@
             </a:pPr>
             <a:r>
               <a:rPr lang="zh-TW"/>
-              <a:t>選擇那個檔案要處理對應的試算表</a:t>
+              <a:t>選擇要處理的檔案</a:t>
             </a:r>
             <a:endParaRPr/>
           </a:p>
@@ -15158,7 +15561,7 @@
       </p:sp>
       <p:sp>
         <p:nvSpPr>
-          <p:cNvPr id="231" name="Google Shape;231;p16"/>
+          <p:cNvPr id="238" name="Google Shape;238;p15"/>
           <p:cNvSpPr txBox="1"/>
           <p:nvPr>
             <p:ph idx="1" type="body"/>
@@ -15166,7 +15569,7 @@
         </p:nvSpPr>
         <p:spPr>
           <a:xfrm>
-            <a:off x="3426525" y="1017725"/>
+            <a:off x="311700" y="1152475"/>
             <a:ext cx="8520600" cy="3416400"/>
           </a:xfrm>
           <a:prstGeom prst="rect">
@@ -15198,7 +15601,7 @@
             </a:pPr>
             <a:r>
               <a:rPr lang="zh-TW"/>
-              <a:t>可以多選</a:t>
+              <a:t>記得要根據「準備的資料」放在相應的位置</a:t>
             </a:r>
             <a:endParaRPr/>
           </a:p>
@@ -15217,7 +15620,8 @@
               <a:buNone/>
             </a:pPr>
             <a:r>
-              <a:t/>
+              <a:rPr lang="zh-TW"/>
+              <a:t>選擇要處理的檔案</a:t>
             </a:r>
             <a:endParaRPr/>
           </a:p>
@@ -15225,7 +15629,7 @@
       </p:sp>
       <p:pic>
         <p:nvPicPr>
-          <p:cNvPr id="232" name="Google Shape;232;p16"/>
+          <p:cNvPr id="239" name="Google Shape;239;p15"/>
           <p:cNvPicPr preferRelativeResize="0"/>
           <p:nvPr/>
         </p:nvPicPr>
@@ -15238,8 +15642,8 @@
         </p:blipFill>
         <p:spPr>
           <a:xfrm>
-            <a:off x="402888" y="1211888"/>
-            <a:ext cx="2790825" cy="3114675"/>
+            <a:off x="365550" y="2269600"/>
+            <a:ext cx="3695700" cy="2076450"/>
           </a:xfrm>
           <a:prstGeom prst="rect">
             <a:avLst/>
@@ -15258,7 +15662,108 @@
       </p:pic>
       <p:sp>
         <p:nvSpPr>
-          <p:cNvPr id="233" name="Google Shape;233;p16"/>
+          <p:cNvPr id="240" name="Google Shape;240;p15"/>
+          <p:cNvSpPr/>
+          <p:nvPr/>
+        </p:nvSpPr>
+        <p:spPr>
+          <a:xfrm>
+            <a:off x="4514675" y="2975675"/>
+            <a:ext cx="556500" cy="466800"/>
+          </a:xfrm>
+          <a:prstGeom prst="rightArrow">
+            <a:avLst>
+              <a:gd fmla="val 50000" name="adj1"/>
+              <a:gd fmla="val 50000" name="adj2"/>
+            </a:avLst>
+          </a:prstGeom>
+          <a:solidFill>
+            <a:schemeClr val="lt2"/>
+          </a:solidFill>
+          <a:ln cap="flat" cmpd="sng" w="9525">
+            <a:solidFill>
+              <a:schemeClr val="dk2"/>
+            </a:solidFill>
+            <a:prstDash val="solid"/>
+            <a:round/>
+            <a:headEnd len="sm" w="sm" type="none"/>
+            <a:tailEnd len="sm" w="sm" type="none"/>
+          </a:ln>
+        </p:spPr>
+        <p:txBody>
+          <a:bodyPr anchorCtr="0" anchor="ctr" bIns="91425" lIns="91425" spcFirstLastPara="1" rIns="91425" wrap="square" tIns="91425">
+            <a:noAutofit/>
+          </a:bodyPr>
+          <a:lstStyle/>
+          <a:p>
+            <a:pPr indent="0" lvl="0" marL="0" marR="0" rtl="0" algn="ctr">
+              <a:lnSpc>
+                <a:spcPct val="100000"/>
+              </a:lnSpc>
+              <a:spcBef>
+                <a:spcPts val="0"/>
+              </a:spcBef>
+              <a:spcAft>
+                <a:spcPts val="0"/>
+              </a:spcAft>
+              <a:buClr>
+                <a:srgbClr val="000000"/>
+              </a:buClr>
+              <a:buSzPts val="1400"/>
+              <a:buFont typeface="Arial"/>
+              <a:buNone/>
+            </a:pPr>
+            <a:r>
+              <a:t/>
+            </a:r>
+            <a:endParaRPr b="0" i="0" sz="1400" u="none" cap="none" strike="noStrike">
+              <a:solidFill>
+                <a:srgbClr val="000000"/>
+              </a:solidFill>
+              <a:latin typeface="Arial"/>
+              <a:ea typeface="Arial"/>
+              <a:cs typeface="Arial"/>
+              <a:sym typeface="Arial"/>
+            </a:endParaRPr>
+          </a:p>
+        </p:txBody>
+      </p:sp>
+      <p:pic>
+        <p:nvPicPr>
+          <p:cNvPr id="241" name="Google Shape;241;p15"/>
+          <p:cNvPicPr preferRelativeResize="0"/>
+          <p:nvPr/>
+        </p:nvPicPr>
+        <p:blipFill rotWithShape="1">
+          <a:blip r:embed="rId4">
+            <a:alphaModFix/>
+          </a:blip>
+          <a:srcRect b="0" l="0" r="50985" t="0"/>
+          <a:stretch/>
+        </p:blipFill>
+        <p:spPr>
+          <a:xfrm>
+            <a:off x="5648350" y="1332025"/>
+            <a:ext cx="2754551" cy="3162300"/>
+          </a:xfrm>
+          <a:prstGeom prst="rect">
+            <a:avLst/>
+          </a:prstGeom>
+          <a:noFill/>
+          <a:ln cap="flat" cmpd="sng" w="9525">
+            <a:solidFill>
+              <a:schemeClr val="dk2"/>
+            </a:solidFill>
+            <a:prstDash val="solid"/>
+            <a:round/>
+            <a:headEnd len="sm" w="sm" type="none"/>
+            <a:tailEnd len="sm" w="sm" type="none"/>
+          </a:ln>
+        </p:spPr>
+      </p:pic>
+      <p:sp>
+        <p:nvSpPr>
+          <p:cNvPr id="242" name="Google Shape;242;p15"/>
           <p:cNvSpPr txBox="1"/>
           <p:nvPr/>
         </p:nvSpPr>
@@ -15322,33 +15827,6 @@
           </a:p>
         </p:txBody>
       </p:sp>
-      <p:pic>
-        <p:nvPicPr>
-          <p:cNvPr id="234" name="Google Shape;234;p16"/>
-          <p:cNvPicPr preferRelativeResize="0"/>
-          <p:nvPr/>
-        </p:nvPicPr>
-        <p:blipFill rotWithShape="1">
-          <a:blip r:embed="rId4">
-            <a:alphaModFix/>
-          </a:blip>
-          <a:srcRect b="0" l="0" r="76091" t="0"/>
-          <a:stretch/>
-        </p:blipFill>
-        <p:spPr>
-          <a:xfrm>
-            <a:off x="3402575" y="3744125"/>
-            <a:ext cx="4337825" cy="647250"/>
-          </a:xfrm>
-          <a:prstGeom prst="rect">
-            <a:avLst/>
-          </a:prstGeom>
-          <a:noFill/>
-          <a:ln>
-            <a:noFill/>
-          </a:ln>
-        </p:spPr>
-      </p:pic>
     </p:spTree>
   </p:cSld>
   <p:clrMapOvr>
@@ -15362,7 +15840,7 @@
   <p:cSld>
     <p:spTree>
       <p:nvGrpSpPr>
-        <p:cNvPr id="238" name="Shape 238"/>
+        <p:cNvPr id="246" name="Shape 246"/>
         <p:cNvGrpSpPr/>
         <p:nvPr/>
       </p:nvGrpSpPr>
@@ -15376,7 +15854,7 @@
       </p:grpSpPr>
       <p:sp>
         <p:nvSpPr>
-          <p:cNvPr id="239" name="Google Shape;239;p17"/>
+          <p:cNvPr id="247" name="Google Shape;247;p16"/>
           <p:cNvSpPr txBox="1"/>
           <p:nvPr>
             <p:ph type="title"/>
@@ -15416,7 +15894,7 @@
             </a:pPr>
             <a:r>
               <a:rPr lang="zh-TW"/>
-              <a:t>選擇欄位</a:t>
+              <a:t>選擇那個檔案要處理對應的試算表</a:t>
             </a:r>
             <a:endParaRPr/>
           </a:p>
@@ -15424,7 +15902,7 @@
       </p:sp>
       <p:sp>
         <p:nvSpPr>
-          <p:cNvPr id="240" name="Google Shape;240;p17"/>
+          <p:cNvPr id="248" name="Google Shape;248;p16"/>
           <p:cNvSpPr txBox="1"/>
           <p:nvPr>
             <p:ph idx="1" type="body"/>
@@ -15432,7 +15910,7 @@
         </p:nvSpPr>
         <p:spPr>
           <a:xfrm>
-            <a:off x="311700" y="1152475"/>
+            <a:off x="3426525" y="1017725"/>
             <a:ext cx="8520600" cy="3416400"/>
           </a:xfrm>
           <a:prstGeom prst="rect">
@@ -15464,12 +15942,12 @@
             </a:pPr>
             <a:r>
               <a:rPr lang="zh-TW"/>
-              <a:t>必填(推薦的主要方法)：</a:t>
+              <a:t>可以多選</a:t>
             </a:r>
             <a:endParaRPr/>
           </a:p>
           <a:p>
-            <a:pPr indent="-342900" lvl="0" marL="457200" rtl="0" algn="l">
+            <a:pPr indent="0" lvl="0" marL="0" rtl="0" algn="l">
               <a:lnSpc>
                 <a:spcPct val="115000"/>
               </a:lnSpc>
@@ -15477,94 +15955,13 @@
                 <a:spcPts val="1200"/>
               </a:spcBef>
               <a:spcAft>
-                <a:spcPts val="0"/>
+                <a:spcPts val="1200"/>
               </a:spcAft>
               <a:buSzPts val="1800"/>
-              <a:buChar char="●"/>
-            </a:pPr>
-            <a:r>
-              <a:rPr lang="zh-TW"/>
-              <a:t>計劃名稱</a:t>
-            </a:r>
-            <a:endParaRPr/>
-          </a:p>
-          <a:p>
-            <a:pPr indent="-342900" lvl="0" marL="457200" rtl="0" algn="l">
-              <a:lnSpc>
-                <a:spcPct val="115000"/>
-              </a:lnSpc>
-              <a:spcBef>
-                <a:spcPts val="0"/>
-              </a:spcBef>
-              <a:spcAft>
-                <a:spcPts val="0"/>
-              </a:spcAft>
-              <a:buSzPts val="1800"/>
-              <a:buChar char="●"/>
-            </a:pPr>
-            <a:r>
-              <a:rPr lang="zh-TW"/>
-              <a:t>中文關鍵字</a:t>
-            </a:r>
-            <a:endParaRPr/>
-          </a:p>
-          <a:p>
-            <a:pPr indent="-342900" lvl="0" marL="457200" rtl="0" algn="l">
-              <a:lnSpc>
-                <a:spcPct val="115000"/>
-              </a:lnSpc>
-              <a:spcBef>
-                <a:spcPts val="0"/>
-              </a:spcBef>
-              <a:spcAft>
-                <a:spcPts val="0"/>
-              </a:spcAft>
-              <a:buSzPts val="1800"/>
-              <a:buChar char="●"/>
-            </a:pPr>
-            <a:r>
-              <a:rPr lang="zh-TW"/>
-              <a:t>計劃摘要</a:t>
-            </a:r>
-            <a:endParaRPr/>
-          </a:p>
-          <a:p>
-            <a:pPr indent="-342900" lvl="0" marL="457200" rtl="0" algn="l">
-              <a:lnSpc>
-                <a:spcPct val="115000"/>
-              </a:lnSpc>
-              <a:spcBef>
-                <a:spcPts val="0"/>
-              </a:spcBef>
-              <a:spcAft>
-                <a:spcPts val="0"/>
-              </a:spcAft>
-              <a:buSzPts val="1800"/>
-              <a:buChar char="●"/>
-            </a:pPr>
-            <a:r>
-              <a:rPr lang="zh-TW"/>
-              <a:t>主持人</a:t>
-            </a:r>
-            <a:endParaRPr/>
-          </a:p>
-          <a:p>
-            <a:pPr indent="-342900" lvl="0" marL="457200" rtl="0" algn="l">
-              <a:lnSpc>
-                <a:spcPct val="115000"/>
-              </a:lnSpc>
-              <a:spcBef>
-                <a:spcPts val="0"/>
-              </a:spcBef>
-              <a:spcAft>
-                <a:spcPts val="0"/>
-              </a:spcAft>
-              <a:buSzPts val="1800"/>
-              <a:buChar char="●"/>
-            </a:pPr>
-            <a:r>
-              <a:rPr lang="zh-TW"/>
-              <a:t>申請機構</a:t>
+              <a:buNone/>
+            </a:pPr>
+            <a:r>
+              <a:t/>
             </a:r>
             <a:endParaRPr/>
           </a:p>
@@ -15572,7 +15969,7 @@
       </p:sp>
       <p:pic>
         <p:nvPicPr>
-          <p:cNvPr id="241" name="Google Shape;241;p17"/>
+          <p:cNvPr id="249" name="Google Shape;249;p16"/>
           <p:cNvPicPr preferRelativeResize="0"/>
           <p:nvPr/>
         </p:nvPicPr>
@@ -15585,8 +15982,8 @@
         </p:blipFill>
         <p:spPr>
           <a:xfrm>
-            <a:off x="2925187" y="44875"/>
-            <a:ext cx="3293625" cy="4971100"/>
+            <a:off x="402888" y="1211888"/>
+            <a:ext cx="2790825" cy="3114675"/>
           </a:xfrm>
           <a:prstGeom prst="rect">
             <a:avLst/>
@@ -15605,7 +16002,7 @@
       </p:pic>
       <p:sp>
         <p:nvSpPr>
-          <p:cNvPr id="242" name="Google Shape;242;p17"/>
+          <p:cNvPr id="250" name="Google Shape;250;p16"/>
           <p:cNvSpPr txBox="1"/>
           <p:nvPr/>
         </p:nvSpPr>
@@ -15669,6 +16066,33 @@
           </a:p>
         </p:txBody>
       </p:sp>
+      <p:pic>
+        <p:nvPicPr>
+          <p:cNvPr id="251" name="Google Shape;251;p16"/>
+          <p:cNvPicPr preferRelativeResize="0"/>
+          <p:nvPr/>
+        </p:nvPicPr>
+        <p:blipFill rotWithShape="1">
+          <a:blip r:embed="rId4">
+            <a:alphaModFix/>
+          </a:blip>
+          <a:srcRect b="0" l="0" r="76091" t="0"/>
+          <a:stretch/>
+        </p:blipFill>
+        <p:spPr>
+          <a:xfrm>
+            <a:off x="3402575" y="3744125"/>
+            <a:ext cx="4337825" cy="647250"/>
+          </a:xfrm>
+          <a:prstGeom prst="rect">
+            <a:avLst/>
+          </a:prstGeom>
+          <a:noFill/>
+          <a:ln>
+            <a:noFill/>
+          </a:ln>
+        </p:spPr>
+      </p:pic>
     </p:spTree>
   </p:cSld>
   <p:clrMapOvr>
@@ -15945,7 +16369,7 @@
   <p:cSld>
     <p:spTree>
       <p:nvGrpSpPr>
-        <p:cNvPr id="246" name="Shape 246"/>
+        <p:cNvPr id="255" name="Shape 255"/>
         <p:cNvGrpSpPr/>
         <p:nvPr/>
       </p:nvGrpSpPr>
@@ -15959,7 +16383,7 @@
       </p:grpSpPr>
       <p:sp>
         <p:nvSpPr>
-          <p:cNvPr id="247" name="Google Shape;247;p18"/>
+          <p:cNvPr id="256" name="Google Shape;256;p17"/>
           <p:cNvSpPr txBox="1"/>
           <p:nvPr>
             <p:ph type="title"/>
@@ -15994,66 +16418,160 @@
               <a:spcAft>
                 <a:spcPts val="0"/>
               </a:spcAft>
-              <a:buSzPct val="172840"/>
+              <a:buSzPct val="111111"/>
               <a:buNone/>
             </a:pPr>
             <a:r>
               <a:rPr lang="zh-TW"/>
-              <a:t>選擇欄位 </a:t>
-            </a:r>
-            <a:r>
-              <a:rPr lang="zh-TW" sz="1800">
-                <a:solidFill>
-                  <a:schemeClr val="dk2"/>
-                </a:solidFill>
-              </a:rPr>
-              <a:t>舉例來說！</a:t>
-            </a:r>
-            <a:endParaRPr sz="1800">
-              <a:solidFill>
-                <a:schemeClr val="dk2"/>
-              </a:solidFill>
-            </a:endParaRPr>
-          </a:p>
+              <a:t>選擇欄位</a:t>
+            </a:r>
+            <a:endParaRPr/>
+          </a:p>
+        </p:txBody>
+      </p:sp>
+      <p:sp>
+        <p:nvSpPr>
+          <p:cNvPr id="257" name="Google Shape;257;p17"/>
+          <p:cNvSpPr txBox="1"/>
+          <p:nvPr>
+            <p:ph idx="1" type="body"/>
+          </p:nvPr>
+        </p:nvSpPr>
+        <p:spPr>
+          <a:xfrm>
+            <a:off x="311700" y="1152475"/>
+            <a:ext cx="8520600" cy="3416400"/>
+          </a:xfrm>
+          <a:prstGeom prst="rect">
+            <a:avLst/>
+          </a:prstGeom>
+          <a:noFill/>
+          <a:ln>
+            <a:noFill/>
+          </a:ln>
+        </p:spPr>
+        <p:txBody>
+          <a:bodyPr anchorCtr="0" anchor="t" bIns="91425" lIns="91425" spcFirstLastPara="1" rIns="91425" wrap="square" tIns="91425">
+            <a:normAutofit/>
+          </a:bodyPr>
+          <a:lstStyle/>
           <a:p>
             <a:pPr indent="0" lvl="0" marL="0" rtl="0" algn="l">
               <a:lnSpc>
-                <a:spcPct val="100000"/>
-              </a:lnSpc>
-              <a:spcBef>
-                <a:spcPts val="0"/>
-              </a:spcBef>
-              <a:spcAft>
-                <a:spcPts val="0"/>
-              </a:spcAft>
-              <a:buClr>
-                <a:schemeClr val="dk1"/>
-              </a:buClr>
-              <a:buSzPct val="39285"/>
-              <a:buFont typeface="Arial"/>
-              <a:buNone/>
-            </a:pPr>
-            <a:r>
-              <a:t/>
+                <a:spcPct val="115000"/>
+              </a:lnSpc>
+              <a:spcBef>
+                <a:spcPts val="0"/>
+              </a:spcBef>
+              <a:spcAft>
+                <a:spcPts val="0"/>
+              </a:spcAft>
+              <a:buSzPts val="1800"/>
+              <a:buNone/>
+            </a:pPr>
+            <a:r>
+              <a:rPr lang="zh-TW"/>
+              <a:t>必填(推薦的主要方法)：</a:t>
             </a:r>
             <a:endParaRPr/>
           </a:p>
           <a:p>
-            <a:pPr indent="0" lvl="0" marL="0" rtl="0" algn="l">
-              <a:lnSpc>
-                <a:spcPct val="100000"/>
-              </a:lnSpc>
-              <a:spcBef>
-                <a:spcPts val="0"/>
-              </a:spcBef>
-              <a:spcAft>
-                <a:spcPts val="0"/>
-              </a:spcAft>
-              <a:buSzPct val="111111"/>
-              <a:buNone/>
-            </a:pPr>
-            <a:r>
-              <a:t/>
+            <a:pPr indent="-342900" lvl="0" marL="457200" rtl="0" algn="l">
+              <a:lnSpc>
+                <a:spcPct val="115000"/>
+              </a:lnSpc>
+              <a:spcBef>
+                <a:spcPts val="1200"/>
+              </a:spcBef>
+              <a:spcAft>
+                <a:spcPts val="0"/>
+              </a:spcAft>
+              <a:buSzPts val="1800"/>
+              <a:buChar char="●"/>
+            </a:pPr>
+            <a:r>
+              <a:rPr lang="zh-TW"/>
+              <a:t>計劃名稱</a:t>
+            </a:r>
+            <a:endParaRPr/>
+          </a:p>
+          <a:p>
+            <a:pPr indent="-342900" lvl="0" marL="457200" rtl="0" algn="l">
+              <a:lnSpc>
+                <a:spcPct val="115000"/>
+              </a:lnSpc>
+              <a:spcBef>
+                <a:spcPts val="0"/>
+              </a:spcBef>
+              <a:spcAft>
+                <a:spcPts val="0"/>
+              </a:spcAft>
+              <a:buSzPts val="1800"/>
+              <a:buChar char="●"/>
+            </a:pPr>
+            <a:r>
+              <a:rPr lang="zh-TW"/>
+              <a:t>中文關鍵字</a:t>
+            </a:r>
+            <a:endParaRPr/>
+          </a:p>
+          <a:p>
+            <a:pPr indent="-342900" lvl="0" marL="457200" rtl="0" algn="l">
+              <a:lnSpc>
+                <a:spcPct val="115000"/>
+              </a:lnSpc>
+              <a:spcBef>
+                <a:spcPts val="0"/>
+              </a:spcBef>
+              <a:spcAft>
+                <a:spcPts val="0"/>
+              </a:spcAft>
+              <a:buSzPts val="1800"/>
+              <a:buChar char="●"/>
+            </a:pPr>
+            <a:r>
+              <a:rPr lang="zh-TW"/>
+              <a:t>計劃摘要</a:t>
+            </a:r>
+            <a:endParaRPr/>
+          </a:p>
+          <a:p>
+            <a:pPr indent="-342900" lvl="0" marL="457200" rtl="0" algn="l">
+              <a:lnSpc>
+                <a:spcPct val="115000"/>
+              </a:lnSpc>
+              <a:spcBef>
+                <a:spcPts val="0"/>
+              </a:spcBef>
+              <a:spcAft>
+                <a:spcPts val="0"/>
+              </a:spcAft>
+              <a:buSzPts val="1800"/>
+              <a:buChar char="●"/>
+            </a:pPr>
+            <a:r>
+              <a:rPr lang="zh-TW"/>
+              <a:t>主持人</a:t>
+            </a:r>
+            <a:endParaRPr/>
+          </a:p>
+          <a:p>
+            <a:pPr indent="-342900" lvl="0" marL="457200" rtl="0" algn="l">
+              <a:lnSpc>
+                <a:spcPct val="115000"/>
+              </a:lnSpc>
+              <a:spcBef>
+                <a:spcPts val="0"/>
+              </a:spcBef>
+              <a:spcAft>
+                <a:spcPts val="0"/>
+              </a:spcAft>
+              <a:buSzPts val="1800"/>
+              <a:buChar char="●"/>
+            </a:pPr>
+            <a:r>
+              <a:rPr lang="zh-TW"/>
+              <a:t>申請機構</a:t>
             </a:r>
             <a:endParaRPr/>
           </a:p>
@@ -16061,7 +16579,7 @@
       </p:sp>
       <p:pic>
         <p:nvPicPr>
-          <p:cNvPr id="248" name="Google Shape;248;p18"/>
+          <p:cNvPr id="258" name="Google Shape;258;p17"/>
           <p:cNvPicPr preferRelativeResize="0"/>
           <p:nvPr/>
         </p:nvPicPr>
@@ -16074,8 +16592,8 @@
         </p:blipFill>
         <p:spPr>
           <a:xfrm>
-            <a:off x="0" y="3106283"/>
-            <a:ext cx="9143999" cy="1274584"/>
+            <a:off x="2925187" y="44875"/>
+            <a:ext cx="3293625" cy="4971100"/>
           </a:xfrm>
           <a:prstGeom prst="rect">
             <a:avLst/>
@@ -16092,42 +16610,16 @@
           </a:ln>
         </p:spPr>
       </p:pic>
-      <p:cxnSp>
-        <p:nvCxnSpPr>
-          <p:cNvPr id="249" name="Google Shape;249;p18"/>
-          <p:cNvCxnSpPr/>
-          <p:nvPr/>
-        </p:nvCxnSpPr>
-        <p:spPr>
-          <a:xfrm>
-            <a:off x="1197225" y="1590875"/>
-            <a:ext cx="0" cy="1458600"/>
-          </a:xfrm>
-          <a:prstGeom prst="straightConnector1">
-            <a:avLst/>
-          </a:prstGeom>
-          <a:noFill/>
-          <a:ln cap="flat" cmpd="sng" w="9525">
-            <a:solidFill>
-              <a:schemeClr val="dk2"/>
-            </a:solidFill>
-            <a:prstDash val="solid"/>
-            <a:round/>
-            <a:headEnd len="sm" w="sm" type="none"/>
-            <a:tailEnd len="med" w="med" type="triangle"/>
-          </a:ln>
-        </p:spPr>
-      </p:cxnSp>
       <p:sp>
         <p:nvSpPr>
-          <p:cNvPr id="250" name="Google Shape;250;p18"/>
+          <p:cNvPr id="259" name="Google Shape;259;p17"/>
           <p:cNvSpPr txBox="1"/>
           <p:nvPr/>
         </p:nvSpPr>
         <p:spPr>
           <a:xfrm>
-            <a:off x="807000" y="1165300"/>
-            <a:ext cx="945900" cy="400200"/>
+            <a:off x="6144000" y="44875"/>
+            <a:ext cx="3000000" cy="538800"/>
           </a:xfrm>
           <a:prstGeom prst="rect">
             <a:avLst/>
@@ -16143,7 +16635,7 @@
           </a:bodyPr>
           <a:lstStyle/>
           <a:p>
-            <a:pPr indent="0" lvl="0" marL="0" marR="0" rtl="0" algn="l">
+            <a:pPr indent="0" lvl="0" marL="0" marR="0" rtl="0" algn="r">
               <a:lnSpc>
                 <a:spcPct val="100000"/>
               </a:lnSpc>
@@ -16156,301 +16648,25 @@
               <a:buClr>
                 <a:srgbClr val="000000"/>
               </a:buClr>
-              <a:buSzPts val="1400"/>
+              <a:buSzPts val="2300"/>
               <a:buFont typeface="Arial"/>
               <a:buNone/>
             </a:pPr>
             <a:r>
-              <a:rPr b="0" i="0" lang="zh-TW" sz="1400" u="none" cap="none" strike="noStrike">
+              <a:rPr b="0" i="0" lang="zh-TW" sz="2300" u="none" cap="none" strike="noStrike">
                 <a:solidFill>
-                  <a:srgbClr val="000000"/>
+                  <a:srgbClr val="FF0000"/>
                 </a:solidFill>
                 <a:latin typeface="Arial"/>
                 <a:ea typeface="Arial"/>
                 <a:cs typeface="Arial"/>
                 <a:sym typeface="Arial"/>
               </a:rPr>
-              <a:t>申請機構</a:t>
-            </a:r>
-            <a:endParaRPr b="0" i="0" sz="1400" u="none" cap="none" strike="noStrike">
+              <a:t>windows_setting.bat </a:t>
+            </a:r>
+            <a:endParaRPr b="0" i="0" sz="2300" u="none" cap="none" strike="noStrike">
               <a:solidFill>
-                <a:srgbClr val="000000"/>
-              </a:solidFill>
-              <a:latin typeface="Arial"/>
-              <a:ea typeface="Arial"/>
-              <a:cs typeface="Arial"/>
-              <a:sym typeface="Arial"/>
-            </a:endParaRPr>
-          </a:p>
-        </p:txBody>
-      </p:sp>
-      <p:cxnSp>
-        <p:nvCxnSpPr>
-          <p:cNvPr id="251" name="Google Shape;251;p18"/>
-          <p:cNvCxnSpPr/>
-          <p:nvPr/>
-        </p:nvCxnSpPr>
-        <p:spPr>
-          <a:xfrm>
-            <a:off x="1587725" y="2340725"/>
-            <a:ext cx="0" cy="708900"/>
-          </a:xfrm>
-          <a:prstGeom prst="straightConnector1">
-            <a:avLst/>
-          </a:prstGeom>
-          <a:noFill/>
-          <a:ln cap="flat" cmpd="sng" w="9525">
-            <a:solidFill>
-              <a:schemeClr val="dk2"/>
-            </a:solidFill>
-            <a:prstDash val="solid"/>
-            <a:round/>
-            <a:headEnd len="sm" w="sm" type="none"/>
-            <a:tailEnd len="med" w="med" type="triangle"/>
-          </a:ln>
-        </p:spPr>
-      </p:cxnSp>
-      <p:sp>
-        <p:nvSpPr>
-          <p:cNvPr id="252" name="Google Shape;252;p18"/>
-          <p:cNvSpPr txBox="1"/>
-          <p:nvPr/>
-        </p:nvSpPr>
-        <p:spPr>
-          <a:xfrm>
-            <a:off x="1327425" y="1888375"/>
-            <a:ext cx="1197300" cy="400200"/>
-          </a:xfrm>
-          <a:prstGeom prst="rect">
-            <a:avLst/>
-          </a:prstGeom>
-          <a:noFill/>
-          <a:ln>
-            <a:noFill/>
-          </a:ln>
-        </p:spPr>
-        <p:txBody>
-          <a:bodyPr anchorCtr="0" anchor="t" bIns="91425" lIns="91425" spcFirstLastPara="1" rIns="91425" wrap="square" tIns="91425">
-            <a:spAutoFit/>
-          </a:bodyPr>
-          <a:lstStyle/>
-          <a:p>
-            <a:pPr indent="0" lvl="0" marL="0" marR="0" rtl="0" algn="l">
-              <a:lnSpc>
-                <a:spcPct val="100000"/>
-              </a:lnSpc>
-              <a:spcBef>
-                <a:spcPts val="0"/>
-              </a:spcBef>
-              <a:spcAft>
-                <a:spcPts val="0"/>
-              </a:spcAft>
-              <a:buClr>
-                <a:srgbClr val="000000"/>
-              </a:buClr>
-              <a:buSzPts val="1400"/>
-              <a:buFont typeface="Arial"/>
-              <a:buNone/>
-            </a:pPr>
-            <a:r>
-              <a:rPr b="0" i="0" lang="zh-TW" sz="1400" u="none" cap="none" strike="noStrike">
-                <a:solidFill>
-                  <a:srgbClr val="000000"/>
-                </a:solidFill>
-                <a:latin typeface="Arial"/>
-                <a:ea typeface="Arial"/>
-                <a:cs typeface="Arial"/>
-                <a:sym typeface="Arial"/>
-              </a:rPr>
-              <a:t>計劃主持人</a:t>
-            </a:r>
-            <a:endParaRPr b="0" i="0" sz="1400" u="none" cap="none" strike="noStrike">
-              <a:solidFill>
-                <a:srgbClr val="000000"/>
-              </a:solidFill>
-              <a:latin typeface="Arial"/>
-              <a:ea typeface="Arial"/>
-              <a:cs typeface="Arial"/>
-              <a:sym typeface="Arial"/>
-            </a:endParaRPr>
-          </a:p>
-        </p:txBody>
-      </p:sp>
-      <p:cxnSp>
-        <p:nvCxnSpPr>
-          <p:cNvPr id="253" name="Google Shape;253;p18"/>
-          <p:cNvCxnSpPr/>
-          <p:nvPr/>
-        </p:nvCxnSpPr>
-        <p:spPr>
-          <a:xfrm>
-            <a:off x="2839550" y="1783400"/>
-            <a:ext cx="0" cy="1289700"/>
-          </a:xfrm>
-          <a:prstGeom prst="straightConnector1">
-            <a:avLst/>
-          </a:prstGeom>
-          <a:noFill/>
-          <a:ln cap="flat" cmpd="sng" w="9525">
-            <a:solidFill>
-              <a:schemeClr val="dk2"/>
-            </a:solidFill>
-            <a:prstDash val="solid"/>
-            <a:round/>
-            <a:headEnd len="sm" w="sm" type="none"/>
-            <a:tailEnd len="med" w="med" type="triangle"/>
-          </a:ln>
-        </p:spPr>
-      </p:cxnSp>
-      <p:sp>
-        <p:nvSpPr>
-          <p:cNvPr id="254" name="Google Shape;254;p18"/>
-          <p:cNvSpPr txBox="1"/>
-          <p:nvPr/>
-        </p:nvSpPr>
-        <p:spPr>
-          <a:xfrm>
-            <a:off x="2524725" y="1350025"/>
-            <a:ext cx="945900" cy="400200"/>
-          </a:xfrm>
-          <a:prstGeom prst="rect">
-            <a:avLst/>
-          </a:prstGeom>
-          <a:noFill/>
-          <a:ln>
-            <a:noFill/>
-          </a:ln>
-        </p:spPr>
-        <p:txBody>
-          <a:bodyPr anchorCtr="0" anchor="t" bIns="91425" lIns="91425" spcFirstLastPara="1" rIns="91425" wrap="square" tIns="91425">
-            <a:spAutoFit/>
-          </a:bodyPr>
-          <a:lstStyle/>
-          <a:p>
-            <a:pPr indent="0" lvl="0" marL="0" marR="0" rtl="0" algn="l">
-              <a:lnSpc>
-                <a:spcPct val="100000"/>
-              </a:lnSpc>
-              <a:spcBef>
-                <a:spcPts val="0"/>
-              </a:spcBef>
-              <a:spcAft>
-                <a:spcPts val="0"/>
-              </a:spcAft>
-              <a:buClr>
-                <a:srgbClr val="000000"/>
-              </a:buClr>
-              <a:buSzPts val="1400"/>
-              <a:buFont typeface="Arial"/>
-              <a:buNone/>
-            </a:pPr>
-            <a:r>
-              <a:rPr b="0" i="0" lang="zh-TW" sz="1400" u="none" cap="none" strike="noStrike">
-                <a:solidFill>
-                  <a:srgbClr val="000000"/>
-                </a:solidFill>
-                <a:latin typeface="Arial"/>
-                <a:ea typeface="Arial"/>
-                <a:cs typeface="Arial"/>
-                <a:sym typeface="Arial"/>
-              </a:rPr>
-              <a:t>計劃名稱</a:t>
-            </a:r>
-            <a:endParaRPr b="0" i="0" sz="1400" u="none" cap="none" strike="noStrike">
-              <a:solidFill>
-                <a:srgbClr val="000000"/>
-              </a:solidFill>
-              <a:latin typeface="Arial"/>
-              <a:ea typeface="Arial"/>
-              <a:cs typeface="Arial"/>
-              <a:sym typeface="Arial"/>
-            </a:endParaRPr>
-          </a:p>
-        </p:txBody>
-      </p:sp>
-      <p:cxnSp>
-        <p:nvCxnSpPr>
-          <p:cNvPr id="255" name="Google Shape;255;p18"/>
-          <p:cNvCxnSpPr/>
-          <p:nvPr/>
-        </p:nvCxnSpPr>
-        <p:spPr>
-          <a:xfrm>
-            <a:off x="3863375" y="2467375"/>
-            <a:ext cx="0" cy="572700"/>
-          </a:xfrm>
-          <a:prstGeom prst="straightConnector1">
-            <a:avLst/>
-          </a:prstGeom>
-          <a:noFill/>
-          <a:ln cap="flat" cmpd="sng" w="9525">
-            <a:solidFill>
-              <a:schemeClr val="dk2"/>
-            </a:solidFill>
-            <a:prstDash val="solid"/>
-            <a:round/>
-            <a:headEnd len="sm" w="sm" type="none"/>
-            <a:tailEnd len="med" w="med" type="triangle"/>
-          </a:ln>
-        </p:spPr>
-      </p:cxnSp>
-      <p:sp>
-        <p:nvSpPr>
-          <p:cNvPr id="256" name="Google Shape;256;p18"/>
-          <p:cNvSpPr txBox="1"/>
-          <p:nvPr/>
-        </p:nvSpPr>
-        <p:spPr>
-          <a:xfrm>
-            <a:off x="3470625" y="2000975"/>
-            <a:ext cx="993000" cy="400200"/>
-          </a:xfrm>
-          <a:prstGeom prst="rect">
-            <a:avLst/>
-          </a:prstGeom>
-          <a:noFill/>
-          <a:ln>
-            <a:noFill/>
-          </a:ln>
-        </p:spPr>
-        <p:txBody>
-          <a:bodyPr anchorCtr="0" anchor="t" bIns="91425" lIns="91425" spcFirstLastPara="1" rIns="91425" wrap="square" tIns="91425">
-            <a:spAutoFit/>
-          </a:bodyPr>
-          <a:lstStyle/>
-          <a:p>
-            <a:pPr indent="0" lvl="0" marL="0" marR="0" rtl="0" algn="l">
-              <a:lnSpc>
-                <a:spcPct val="100000"/>
-              </a:lnSpc>
-              <a:spcBef>
-                <a:spcPts val="0"/>
-              </a:spcBef>
-              <a:spcAft>
-                <a:spcPts val="0"/>
-              </a:spcAft>
-              <a:buClr>
-                <a:srgbClr val="000000"/>
-              </a:buClr>
-              <a:buSzPts val="1400"/>
-              <a:buFont typeface="Arial"/>
-              <a:buNone/>
-            </a:pPr>
-            <a:r>
-              <a:rPr b="0" i="0" lang="zh-TW" sz="1400" u="none" cap="none" strike="noStrike">
-                <a:solidFill>
-                  <a:srgbClr val="000000"/>
-                </a:solidFill>
-                <a:latin typeface="Arial"/>
-                <a:ea typeface="Arial"/>
-                <a:cs typeface="Arial"/>
-                <a:sym typeface="Arial"/>
-              </a:rPr>
-              <a:t>計劃摘要</a:t>
-            </a:r>
-            <a:endParaRPr b="0" i="0" sz="1400" u="none" cap="none" strike="noStrike">
-              <a:solidFill>
-                <a:srgbClr val="000000"/>
+                <a:srgbClr val="FF0000"/>
               </a:solidFill>
               <a:latin typeface="Arial"/>
               <a:ea typeface="Arial"/>
@@ -16473,7 +16689,7 @@
   <p:cSld>
     <p:spTree>
       <p:nvGrpSpPr>
-        <p:cNvPr id="260" name="Shape 260"/>
+        <p:cNvPr id="263" name="Shape 263"/>
         <p:cNvGrpSpPr/>
         <p:nvPr/>
       </p:nvGrpSpPr>
@@ -16487,277 +16703,7 @@
       </p:grpSpPr>
       <p:sp>
         <p:nvSpPr>
-          <p:cNvPr id="261" name="Google Shape;261;p19"/>
-          <p:cNvSpPr txBox="1"/>
-          <p:nvPr>
-            <p:ph idx="1" type="body"/>
-          </p:nvPr>
-        </p:nvSpPr>
-        <p:spPr>
-          <a:xfrm>
-            <a:off x="311700" y="1152475"/>
-            <a:ext cx="8520600" cy="3877200"/>
-          </a:xfrm>
-          <a:prstGeom prst="rect">
-            <a:avLst/>
-          </a:prstGeom>
-          <a:noFill/>
-          <a:ln>
-            <a:noFill/>
-          </a:ln>
-        </p:spPr>
-        <p:txBody>
-          <a:bodyPr anchorCtr="0" anchor="t" bIns="91425" lIns="91425" spcFirstLastPara="1" rIns="91425" wrap="square" tIns="91425">
-            <a:normAutofit fontScale="92500" lnSpcReduction="20000"/>
-          </a:bodyPr>
-          <a:lstStyle/>
-          <a:p>
-            <a:pPr indent="-342900" lvl="0" marL="457200" rtl="0" algn="l">
-              <a:lnSpc>
-                <a:spcPct val="115000"/>
-              </a:lnSpc>
-              <a:spcBef>
-                <a:spcPts val="1000"/>
-              </a:spcBef>
-              <a:spcAft>
-                <a:spcPts val="0"/>
-              </a:spcAft>
-              <a:buSzPct val="108108"/>
-              <a:buChar char="●"/>
-            </a:pPr>
-            <a:r>
-              <a:rPr b="1" lang="zh-TW">
-                <a:solidFill>
-                  <a:srgbClr val="FF0000"/>
-                </a:solidFill>
-              </a:rPr>
-              <a:t>計劃名稱</a:t>
-            </a:r>
-            <a:r>
-              <a:rPr lang="zh-TW"/>
-              <a:t>：要申請計劃名稱的欄位</a:t>
-            </a:r>
-            <a:endParaRPr/>
-          </a:p>
-          <a:p>
-            <a:pPr indent="-342900" lvl="0" marL="457200" rtl="0" algn="l">
-              <a:lnSpc>
-                <a:spcPct val="115000"/>
-              </a:lnSpc>
-              <a:spcBef>
-                <a:spcPts val="1200"/>
-              </a:spcBef>
-              <a:spcAft>
-                <a:spcPts val="0"/>
-              </a:spcAft>
-              <a:buSzPct val="108108"/>
-              <a:buChar char="●"/>
-            </a:pPr>
-            <a:r>
-              <a:rPr b="1" lang="zh-TW">
-                <a:solidFill>
-                  <a:srgbClr val="FF0000"/>
-                </a:solidFill>
-              </a:rPr>
-              <a:t>中文關鍵字</a:t>
-            </a:r>
-            <a:r>
-              <a:rPr lang="zh-TW"/>
-              <a:t>：計劃專業的關鍵字的欄位</a:t>
-            </a:r>
-            <a:endParaRPr/>
-          </a:p>
-          <a:p>
-            <a:pPr indent="-342900" lvl="0" marL="457200" rtl="0" algn="l">
-              <a:lnSpc>
-                <a:spcPct val="115000"/>
-              </a:lnSpc>
-              <a:spcBef>
-                <a:spcPts val="1000"/>
-              </a:spcBef>
-              <a:spcAft>
-                <a:spcPts val="0"/>
-              </a:spcAft>
-              <a:buSzPct val="108108"/>
-              <a:buChar char="●"/>
-            </a:pPr>
-            <a:r>
-              <a:rPr b="1" lang="zh-TW">
-                <a:solidFill>
-                  <a:srgbClr val="FF0000"/>
-                </a:solidFill>
-              </a:rPr>
-              <a:t>計劃摘要</a:t>
-            </a:r>
-            <a:r>
-              <a:rPr b="1" lang="zh-TW"/>
-              <a:t>：</a:t>
-            </a:r>
-            <a:r>
-              <a:rPr lang="zh-TW"/>
-              <a:t>關於計劃的摘要</a:t>
-            </a:r>
-            <a:endParaRPr/>
-          </a:p>
-          <a:p>
-            <a:pPr indent="-342900" lvl="0" marL="457200" rtl="0" algn="l">
-              <a:lnSpc>
-                <a:spcPct val="115000"/>
-              </a:lnSpc>
-              <a:spcBef>
-                <a:spcPts val="1000"/>
-              </a:spcBef>
-              <a:spcAft>
-                <a:spcPts val="0"/>
-              </a:spcAft>
-              <a:buSzPct val="108108"/>
-              <a:buChar char="●"/>
-            </a:pPr>
-            <a:r>
-              <a:rPr b="1" lang="zh-TW">
-                <a:solidFill>
-                  <a:srgbClr val="FF0000"/>
-                </a:solidFill>
-              </a:rPr>
-              <a:t>申請機構</a:t>
-            </a:r>
-            <a:r>
-              <a:rPr lang="zh-TW"/>
-              <a:t>：來自於哪裡申請的學校的欄位</a:t>
-            </a:r>
-            <a:endParaRPr/>
-          </a:p>
-          <a:p>
-            <a:pPr indent="-342900" lvl="0" marL="457200" rtl="0" algn="l">
-              <a:lnSpc>
-                <a:spcPct val="115000"/>
-              </a:lnSpc>
-              <a:spcBef>
-                <a:spcPts val="1000"/>
-              </a:spcBef>
-              <a:spcAft>
-                <a:spcPts val="0"/>
-              </a:spcAft>
-              <a:buSzPct val="108108"/>
-              <a:buChar char="●"/>
-            </a:pPr>
-            <a:r>
-              <a:rPr b="1" lang="zh-TW">
-                <a:solidFill>
-                  <a:srgbClr val="FF0000"/>
-                </a:solidFill>
-              </a:rPr>
-              <a:t>計劃主持人</a:t>
-            </a:r>
-            <a:r>
-              <a:rPr lang="zh-TW"/>
-              <a:t>：申請人名稱的欄位</a:t>
-            </a:r>
-            <a:endParaRPr/>
-          </a:p>
-          <a:p>
-            <a:pPr indent="-342900" lvl="0" marL="457200" rtl="0" algn="l">
-              <a:lnSpc>
-                <a:spcPct val="115000"/>
-              </a:lnSpc>
-              <a:spcBef>
-                <a:spcPts val="1000"/>
-              </a:spcBef>
-              <a:spcAft>
-                <a:spcPts val="0"/>
-              </a:spcAft>
-              <a:buSzPct val="108108"/>
-              <a:buChar char="●"/>
-            </a:pPr>
-            <a:r>
-              <a:rPr b="1" lang="zh-TW"/>
-              <a:t>計畫相關其他欄位 </a:t>
-            </a:r>
-            <a:r>
-              <a:rPr lang="zh-TW"/>
-              <a:t>：不影響結果，</a:t>
-            </a:r>
-            <a:br>
-              <a:rPr lang="zh-TW"/>
-            </a:br>
-            <a:r>
-              <a:rPr lang="zh-TW"/>
-              <a:t>但是可以</a:t>
-            </a:r>
-            <a:r>
-              <a:rPr lang="zh-TW">
-                <a:highlight>
-                  <a:srgbClr val="FFF2CC"/>
-                </a:highlight>
-              </a:rPr>
-              <a:t>附帶在輸出的結果裡面，方便閱讀</a:t>
-            </a:r>
-            <a:endParaRPr>
-              <a:highlight>
-                <a:srgbClr val="FFF2CC"/>
-              </a:highlight>
-            </a:endParaRPr>
-          </a:p>
-          <a:p>
-            <a:pPr indent="-342900" lvl="0" marL="457200" rtl="0" algn="l">
-              <a:lnSpc>
-                <a:spcPct val="115000"/>
-              </a:lnSpc>
-              <a:spcBef>
-                <a:spcPts val="1000"/>
-              </a:spcBef>
-              <a:spcAft>
-                <a:spcPts val="0"/>
-              </a:spcAft>
-              <a:buSzPct val="108108"/>
-              <a:buChar char="●"/>
-            </a:pPr>
-            <a:r>
-              <a:rPr b="1" lang="zh-TW"/>
-              <a:t>共同計劃主持人</a:t>
-            </a:r>
-            <a:r>
-              <a:rPr lang="zh-TW"/>
-              <a:t>：</a:t>
-            </a:r>
-            <a:br>
-              <a:rPr lang="zh-TW"/>
-            </a:br>
-            <a:r>
-              <a:rPr lang="zh-TW"/>
-              <a:t>除了計劃主持人的一同申請的申請人</a:t>
-            </a:r>
-            <a:endParaRPr/>
-          </a:p>
-          <a:p>
-            <a:pPr indent="-342900" lvl="0" marL="457200" rtl="0" algn="l">
-              <a:lnSpc>
-                <a:spcPct val="115000"/>
-              </a:lnSpc>
-              <a:spcBef>
-                <a:spcPts val="1000"/>
-              </a:spcBef>
-              <a:spcAft>
-                <a:spcPts val="1200"/>
-              </a:spcAft>
-              <a:buSzPct val="108108"/>
-              <a:buChar char="●"/>
-            </a:pPr>
-            <a:r>
-              <a:rPr b="1" lang="zh-TW"/>
-              <a:t>共同機構</a:t>
-            </a:r>
-            <a:r>
-              <a:rPr lang="zh-TW"/>
-              <a:t>：除了申請機構一同申請的機構</a:t>
-            </a:r>
-            <a:endParaRPr/>
-          </a:p>
-        </p:txBody>
-      </p:sp>
-      <p:sp>
-        <p:nvSpPr>
-          <p:cNvPr id="262" name="Google Shape;262;p19"/>
+          <p:cNvPr id="264" name="Google Shape;264;p18"/>
           <p:cNvSpPr txBox="1"/>
           <p:nvPr>
             <p:ph type="title"/>
@@ -16792,12 +16738,66 @@
               <a:spcAft>
                 <a:spcPts val="0"/>
               </a:spcAft>
+              <a:buSzPct val="172840"/>
+              <a:buNone/>
+            </a:pPr>
+            <a:r>
+              <a:rPr lang="zh-TW"/>
+              <a:t>選擇欄位 </a:t>
+            </a:r>
+            <a:r>
+              <a:rPr lang="zh-TW" sz="1800">
+                <a:solidFill>
+                  <a:schemeClr val="dk2"/>
+                </a:solidFill>
+              </a:rPr>
+              <a:t>舉例來說！</a:t>
+            </a:r>
+            <a:endParaRPr sz="1800">
+              <a:solidFill>
+                <a:schemeClr val="dk2"/>
+              </a:solidFill>
+            </a:endParaRPr>
+          </a:p>
+          <a:p>
+            <a:pPr indent="0" lvl="0" marL="0" rtl="0" algn="l">
+              <a:lnSpc>
+                <a:spcPct val="100000"/>
+              </a:lnSpc>
+              <a:spcBef>
+                <a:spcPts val="0"/>
+              </a:spcBef>
+              <a:spcAft>
+                <a:spcPts val="0"/>
+              </a:spcAft>
+              <a:buClr>
+                <a:schemeClr val="dk1"/>
+              </a:buClr>
+              <a:buSzPct val="39285"/>
+              <a:buFont typeface="Arial"/>
+              <a:buNone/>
+            </a:pPr>
+            <a:r>
+              <a:t/>
+            </a:r>
+            <a:endParaRPr/>
+          </a:p>
+          <a:p>
+            <a:pPr indent="0" lvl="0" marL="0" rtl="0" algn="l">
+              <a:lnSpc>
+                <a:spcPct val="100000"/>
+              </a:lnSpc>
+              <a:spcBef>
+                <a:spcPts val="0"/>
+              </a:spcBef>
+              <a:spcAft>
+                <a:spcPts val="0"/>
+              </a:spcAft>
               <a:buSzPct val="111111"/>
               <a:buNone/>
             </a:pPr>
             <a:r>
-              <a:rPr lang="zh-TW"/>
-              <a:t>選擇欄位</a:t>
+              <a:t/>
             </a:r>
             <a:endParaRPr/>
           </a:p>
@@ -16805,7 +16805,7 @@
       </p:sp>
       <p:pic>
         <p:nvPicPr>
-          <p:cNvPr id="263" name="Google Shape;263;p19"/>
+          <p:cNvPr id="265" name="Google Shape;265;p18"/>
           <p:cNvPicPr preferRelativeResize="0"/>
           <p:nvPr/>
         </p:nvPicPr>
@@ -16818,8 +16818,8 @@
         </p:blipFill>
         <p:spPr>
           <a:xfrm>
-            <a:off x="5980011" y="445025"/>
-            <a:ext cx="3085840" cy="4657450"/>
+            <a:off x="0" y="3106283"/>
+            <a:ext cx="9143999" cy="1274584"/>
           </a:xfrm>
           <a:prstGeom prst="rect">
             <a:avLst/>
@@ -16836,16 +16836,42 @@
           </a:ln>
         </p:spPr>
       </p:pic>
+      <p:cxnSp>
+        <p:nvCxnSpPr>
+          <p:cNvPr id="266" name="Google Shape;266;p18"/>
+          <p:cNvCxnSpPr/>
+          <p:nvPr/>
+        </p:nvCxnSpPr>
+        <p:spPr>
+          <a:xfrm>
+            <a:off x="1197225" y="1590875"/>
+            <a:ext cx="0" cy="1458600"/>
+          </a:xfrm>
+          <a:prstGeom prst="straightConnector1">
+            <a:avLst/>
+          </a:prstGeom>
+          <a:noFill/>
+          <a:ln cap="flat" cmpd="sng" w="9525">
+            <a:solidFill>
+              <a:schemeClr val="dk2"/>
+            </a:solidFill>
+            <a:prstDash val="solid"/>
+            <a:round/>
+            <a:headEnd len="sm" w="sm" type="none"/>
+            <a:tailEnd len="med" w="med" type="triangle"/>
+          </a:ln>
+        </p:spPr>
+      </p:cxnSp>
       <p:sp>
         <p:nvSpPr>
-          <p:cNvPr id="264" name="Google Shape;264;p19"/>
+          <p:cNvPr id="267" name="Google Shape;267;p18"/>
           <p:cNvSpPr txBox="1"/>
           <p:nvPr/>
         </p:nvSpPr>
         <p:spPr>
           <a:xfrm>
-            <a:off x="6144000" y="44875"/>
-            <a:ext cx="3000000" cy="538800"/>
+            <a:off x="807000" y="1165300"/>
+            <a:ext cx="945900" cy="400200"/>
           </a:xfrm>
           <a:prstGeom prst="rect">
             <a:avLst/>
@@ -16861,7 +16887,7 @@
           </a:bodyPr>
           <a:lstStyle/>
           <a:p>
-            <a:pPr indent="0" lvl="0" marL="0" marR="0" rtl="0" algn="r">
+            <a:pPr indent="0" lvl="0" marL="0" marR="0" rtl="0" algn="l">
               <a:lnSpc>
                 <a:spcPct val="100000"/>
               </a:lnSpc>
@@ -16874,25 +16900,25 @@
               <a:buClr>
                 <a:srgbClr val="000000"/>
               </a:buClr>
-              <a:buSzPts val="2300"/>
+              <a:buSzPts val="1400"/>
               <a:buFont typeface="Arial"/>
               <a:buNone/>
             </a:pPr>
             <a:r>
-              <a:rPr b="0" i="0" lang="zh-TW" sz="2300" u="none" cap="none" strike="noStrike">
+              <a:rPr b="0" i="0" lang="zh-TW" sz="1400" u="none" cap="none" strike="noStrike">
                 <a:solidFill>
-                  <a:srgbClr val="FF0000"/>
+                  <a:srgbClr val="000000"/>
                 </a:solidFill>
                 <a:latin typeface="Arial"/>
                 <a:ea typeface="Arial"/>
                 <a:cs typeface="Arial"/>
                 <a:sym typeface="Arial"/>
               </a:rPr>
-              <a:t>windows_setting.bat </a:t>
-            </a:r>
-            <a:endParaRPr b="0" i="0" sz="2300" u="none" cap="none" strike="noStrike">
+              <a:t>申請機構</a:t>
+            </a:r>
+            <a:endParaRPr b="0" i="0" sz="1400" u="none" cap="none" strike="noStrike">
               <a:solidFill>
-                <a:srgbClr val="FF0000"/>
+                <a:srgbClr val="000000"/>
               </a:solidFill>
               <a:latin typeface="Arial"/>
               <a:ea typeface="Arial"/>
@@ -16902,16 +16928,42 @@
           </a:p>
         </p:txBody>
       </p:sp>
+      <p:cxnSp>
+        <p:nvCxnSpPr>
+          <p:cNvPr id="268" name="Google Shape;268;p18"/>
+          <p:cNvCxnSpPr/>
+          <p:nvPr/>
+        </p:nvCxnSpPr>
+        <p:spPr>
+          <a:xfrm>
+            <a:off x="1587725" y="2340725"/>
+            <a:ext cx="0" cy="708900"/>
+          </a:xfrm>
+          <a:prstGeom prst="straightConnector1">
+            <a:avLst/>
+          </a:prstGeom>
+          <a:noFill/>
+          <a:ln cap="flat" cmpd="sng" w="9525">
+            <a:solidFill>
+              <a:schemeClr val="dk2"/>
+            </a:solidFill>
+            <a:prstDash val="solid"/>
+            <a:round/>
+            <a:headEnd len="sm" w="sm" type="none"/>
+            <a:tailEnd len="med" w="med" type="triangle"/>
+          </a:ln>
+        </p:spPr>
+      </p:cxnSp>
       <p:sp>
         <p:nvSpPr>
-          <p:cNvPr id="265" name="Google Shape;265;p19"/>
+          <p:cNvPr id="269" name="Google Shape;269;p18"/>
           <p:cNvSpPr txBox="1"/>
           <p:nvPr/>
         </p:nvSpPr>
         <p:spPr>
           <a:xfrm>
-            <a:off x="1939500" y="737000"/>
-            <a:ext cx="4297800" cy="461700"/>
+            <a:off x="1327425" y="1888375"/>
+            <a:ext cx="1197300" cy="400200"/>
           </a:xfrm>
           <a:prstGeom prst="rect">
             <a:avLst/>
@@ -16927,27 +16979,227 @@
           </a:bodyPr>
           <a:lstStyle/>
           <a:p>
-            <a:pPr indent="0" lvl="0" marL="0" rtl="0" algn="l">
-              <a:spcBef>
-                <a:spcPts val="0"/>
-              </a:spcBef>
-              <a:spcAft>
-                <a:spcPts val="0"/>
-              </a:spcAft>
-              <a:buNone/>
-            </a:pPr>
-            <a:r>
-              <a:rPr b="1" lang="zh-TW" sz="1800">
+            <a:pPr indent="0" lvl="0" marL="0" marR="0" rtl="0" algn="l">
+              <a:lnSpc>
+                <a:spcPct val="100000"/>
+              </a:lnSpc>
+              <a:spcBef>
+                <a:spcPts val="0"/>
+              </a:spcBef>
+              <a:spcAft>
+                <a:spcPts val="0"/>
+              </a:spcAft>
+              <a:buClr>
+                <a:srgbClr val="000000"/>
+              </a:buClr>
+              <a:buSzPts val="1400"/>
+              <a:buFont typeface="Arial"/>
+              <a:buNone/>
+            </a:pPr>
+            <a:r>
+              <a:rPr b="0" i="0" lang="zh-TW" sz="1400" u="none" cap="none" strike="noStrike">
                 <a:solidFill>
-                  <a:srgbClr val="FF0000"/>
+                  <a:srgbClr val="000000"/>
                 </a:solidFill>
+                <a:latin typeface="Arial"/>
+                <a:ea typeface="Arial"/>
+                <a:cs typeface="Arial"/>
+                <a:sym typeface="Arial"/>
               </a:rPr>
-              <a:t>必要欄位一定要選！！</a:t>
-            </a:r>
-            <a:endParaRPr b="1" sz="1800">
+              <a:t>計劃主持人</a:t>
+            </a:r>
+            <a:endParaRPr b="0" i="0" sz="1400" u="none" cap="none" strike="noStrike">
               <a:solidFill>
-                <a:srgbClr val="FF0000"/>
+                <a:srgbClr val="000000"/>
               </a:solidFill>
+              <a:latin typeface="Arial"/>
+              <a:ea typeface="Arial"/>
+              <a:cs typeface="Arial"/>
+              <a:sym typeface="Arial"/>
+            </a:endParaRPr>
+          </a:p>
+        </p:txBody>
+      </p:sp>
+      <p:cxnSp>
+        <p:nvCxnSpPr>
+          <p:cNvPr id="270" name="Google Shape;270;p18"/>
+          <p:cNvCxnSpPr/>
+          <p:nvPr/>
+        </p:nvCxnSpPr>
+        <p:spPr>
+          <a:xfrm>
+            <a:off x="2839550" y="1783400"/>
+            <a:ext cx="0" cy="1289700"/>
+          </a:xfrm>
+          <a:prstGeom prst="straightConnector1">
+            <a:avLst/>
+          </a:prstGeom>
+          <a:noFill/>
+          <a:ln cap="flat" cmpd="sng" w="9525">
+            <a:solidFill>
+              <a:schemeClr val="dk2"/>
+            </a:solidFill>
+            <a:prstDash val="solid"/>
+            <a:round/>
+            <a:headEnd len="sm" w="sm" type="none"/>
+            <a:tailEnd len="med" w="med" type="triangle"/>
+          </a:ln>
+        </p:spPr>
+      </p:cxnSp>
+      <p:sp>
+        <p:nvSpPr>
+          <p:cNvPr id="271" name="Google Shape;271;p18"/>
+          <p:cNvSpPr txBox="1"/>
+          <p:nvPr/>
+        </p:nvSpPr>
+        <p:spPr>
+          <a:xfrm>
+            <a:off x="2524725" y="1350025"/>
+            <a:ext cx="945900" cy="400200"/>
+          </a:xfrm>
+          <a:prstGeom prst="rect">
+            <a:avLst/>
+          </a:prstGeom>
+          <a:noFill/>
+          <a:ln>
+            <a:noFill/>
+          </a:ln>
+        </p:spPr>
+        <p:txBody>
+          <a:bodyPr anchorCtr="0" anchor="t" bIns="91425" lIns="91425" spcFirstLastPara="1" rIns="91425" wrap="square" tIns="91425">
+            <a:spAutoFit/>
+          </a:bodyPr>
+          <a:lstStyle/>
+          <a:p>
+            <a:pPr indent="0" lvl="0" marL="0" marR="0" rtl="0" algn="l">
+              <a:lnSpc>
+                <a:spcPct val="100000"/>
+              </a:lnSpc>
+              <a:spcBef>
+                <a:spcPts val="0"/>
+              </a:spcBef>
+              <a:spcAft>
+                <a:spcPts val="0"/>
+              </a:spcAft>
+              <a:buClr>
+                <a:srgbClr val="000000"/>
+              </a:buClr>
+              <a:buSzPts val="1400"/>
+              <a:buFont typeface="Arial"/>
+              <a:buNone/>
+            </a:pPr>
+            <a:r>
+              <a:rPr b="0" i="0" lang="zh-TW" sz="1400" u="none" cap="none" strike="noStrike">
+                <a:solidFill>
+                  <a:srgbClr val="000000"/>
+                </a:solidFill>
+                <a:latin typeface="Arial"/>
+                <a:ea typeface="Arial"/>
+                <a:cs typeface="Arial"/>
+                <a:sym typeface="Arial"/>
+              </a:rPr>
+              <a:t>計劃名稱</a:t>
+            </a:r>
+            <a:endParaRPr b="0" i="0" sz="1400" u="none" cap="none" strike="noStrike">
+              <a:solidFill>
+                <a:srgbClr val="000000"/>
+              </a:solidFill>
+              <a:latin typeface="Arial"/>
+              <a:ea typeface="Arial"/>
+              <a:cs typeface="Arial"/>
+              <a:sym typeface="Arial"/>
+            </a:endParaRPr>
+          </a:p>
+        </p:txBody>
+      </p:sp>
+      <p:cxnSp>
+        <p:nvCxnSpPr>
+          <p:cNvPr id="272" name="Google Shape;272;p18"/>
+          <p:cNvCxnSpPr/>
+          <p:nvPr/>
+        </p:nvCxnSpPr>
+        <p:spPr>
+          <a:xfrm>
+            <a:off x="3863375" y="2467375"/>
+            <a:ext cx="0" cy="572700"/>
+          </a:xfrm>
+          <a:prstGeom prst="straightConnector1">
+            <a:avLst/>
+          </a:prstGeom>
+          <a:noFill/>
+          <a:ln cap="flat" cmpd="sng" w="9525">
+            <a:solidFill>
+              <a:schemeClr val="dk2"/>
+            </a:solidFill>
+            <a:prstDash val="solid"/>
+            <a:round/>
+            <a:headEnd len="sm" w="sm" type="none"/>
+            <a:tailEnd len="med" w="med" type="triangle"/>
+          </a:ln>
+        </p:spPr>
+      </p:cxnSp>
+      <p:sp>
+        <p:nvSpPr>
+          <p:cNvPr id="273" name="Google Shape;273;p18"/>
+          <p:cNvSpPr txBox="1"/>
+          <p:nvPr/>
+        </p:nvSpPr>
+        <p:spPr>
+          <a:xfrm>
+            <a:off x="3470625" y="2000975"/>
+            <a:ext cx="993000" cy="400200"/>
+          </a:xfrm>
+          <a:prstGeom prst="rect">
+            <a:avLst/>
+          </a:prstGeom>
+          <a:noFill/>
+          <a:ln>
+            <a:noFill/>
+          </a:ln>
+        </p:spPr>
+        <p:txBody>
+          <a:bodyPr anchorCtr="0" anchor="t" bIns="91425" lIns="91425" spcFirstLastPara="1" rIns="91425" wrap="square" tIns="91425">
+            <a:spAutoFit/>
+          </a:bodyPr>
+          <a:lstStyle/>
+          <a:p>
+            <a:pPr indent="0" lvl="0" marL="0" marR="0" rtl="0" algn="l">
+              <a:lnSpc>
+                <a:spcPct val="100000"/>
+              </a:lnSpc>
+              <a:spcBef>
+                <a:spcPts val="0"/>
+              </a:spcBef>
+              <a:spcAft>
+                <a:spcPts val="0"/>
+              </a:spcAft>
+              <a:buClr>
+                <a:srgbClr val="000000"/>
+              </a:buClr>
+              <a:buSzPts val="1400"/>
+              <a:buFont typeface="Arial"/>
+              <a:buNone/>
+            </a:pPr>
+            <a:r>
+              <a:rPr b="0" i="0" lang="zh-TW" sz="1400" u="none" cap="none" strike="noStrike">
+                <a:solidFill>
+                  <a:srgbClr val="000000"/>
+                </a:solidFill>
+                <a:latin typeface="Arial"/>
+                <a:ea typeface="Arial"/>
+                <a:cs typeface="Arial"/>
+                <a:sym typeface="Arial"/>
+              </a:rPr>
+              <a:t>計劃摘要</a:t>
+            </a:r>
+            <a:endParaRPr b="0" i="0" sz="1400" u="none" cap="none" strike="noStrike">
+              <a:solidFill>
+                <a:srgbClr val="000000"/>
+              </a:solidFill>
+              <a:latin typeface="Arial"/>
+              <a:ea typeface="Arial"/>
+              <a:cs typeface="Arial"/>
+              <a:sym typeface="Arial"/>
             </a:endParaRPr>
           </a:p>
         </p:txBody>
@@ -16965,7 +17217,7 @@
   <p:cSld>
     <p:spTree>
       <p:nvGrpSpPr>
-        <p:cNvPr id="269" name="Shape 269"/>
+        <p:cNvPr id="277" name="Shape 277"/>
         <p:cNvGrpSpPr/>
         <p:nvPr/>
       </p:nvGrpSpPr>
@@ -16979,7 +17231,277 @@
       </p:grpSpPr>
       <p:sp>
         <p:nvSpPr>
-          <p:cNvPr id="270" name="Google Shape;270;p20"/>
+          <p:cNvPr id="278" name="Google Shape;278;p19"/>
+          <p:cNvSpPr txBox="1"/>
+          <p:nvPr>
+            <p:ph idx="1" type="body"/>
+          </p:nvPr>
+        </p:nvSpPr>
+        <p:spPr>
+          <a:xfrm>
+            <a:off x="311700" y="1152475"/>
+            <a:ext cx="8520600" cy="3877200"/>
+          </a:xfrm>
+          <a:prstGeom prst="rect">
+            <a:avLst/>
+          </a:prstGeom>
+          <a:noFill/>
+          <a:ln>
+            <a:noFill/>
+          </a:ln>
+        </p:spPr>
+        <p:txBody>
+          <a:bodyPr anchorCtr="0" anchor="t" bIns="91425" lIns="91425" spcFirstLastPara="1" rIns="91425" wrap="square" tIns="91425">
+            <a:normAutofit fontScale="92500" lnSpcReduction="20000"/>
+          </a:bodyPr>
+          <a:lstStyle/>
+          <a:p>
+            <a:pPr indent="-342900" lvl="0" marL="457200" rtl="0" algn="l">
+              <a:lnSpc>
+                <a:spcPct val="115000"/>
+              </a:lnSpc>
+              <a:spcBef>
+                <a:spcPts val="1000"/>
+              </a:spcBef>
+              <a:spcAft>
+                <a:spcPts val="0"/>
+              </a:spcAft>
+              <a:buSzPct val="108108"/>
+              <a:buChar char="●"/>
+            </a:pPr>
+            <a:r>
+              <a:rPr b="1" lang="zh-TW">
+                <a:solidFill>
+                  <a:srgbClr val="FF0000"/>
+                </a:solidFill>
+              </a:rPr>
+              <a:t>計劃名稱</a:t>
+            </a:r>
+            <a:r>
+              <a:rPr lang="zh-TW"/>
+              <a:t>：要申請計劃名稱的欄位</a:t>
+            </a:r>
+            <a:endParaRPr/>
+          </a:p>
+          <a:p>
+            <a:pPr indent="-342900" lvl="0" marL="457200" rtl="0" algn="l">
+              <a:lnSpc>
+                <a:spcPct val="115000"/>
+              </a:lnSpc>
+              <a:spcBef>
+                <a:spcPts val="1200"/>
+              </a:spcBef>
+              <a:spcAft>
+                <a:spcPts val="0"/>
+              </a:spcAft>
+              <a:buSzPct val="108108"/>
+              <a:buChar char="●"/>
+            </a:pPr>
+            <a:r>
+              <a:rPr b="1" lang="zh-TW">
+                <a:solidFill>
+                  <a:srgbClr val="FF0000"/>
+                </a:solidFill>
+              </a:rPr>
+              <a:t>中文關鍵字</a:t>
+            </a:r>
+            <a:r>
+              <a:rPr lang="zh-TW"/>
+              <a:t>：計劃專業的關鍵字的欄位</a:t>
+            </a:r>
+            <a:endParaRPr/>
+          </a:p>
+          <a:p>
+            <a:pPr indent="-342900" lvl="0" marL="457200" rtl="0" algn="l">
+              <a:lnSpc>
+                <a:spcPct val="115000"/>
+              </a:lnSpc>
+              <a:spcBef>
+                <a:spcPts val="1000"/>
+              </a:spcBef>
+              <a:spcAft>
+                <a:spcPts val="0"/>
+              </a:spcAft>
+              <a:buSzPct val="108108"/>
+              <a:buChar char="●"/>
+            </a:pPr>
+            <a:r>
+              <a:rPr b="1" lang="zh-TW">
+                <a:solidFill>
+                  <a:srgbClr val="FF0000"/>
+                </a:solidFill>
+              </a:rPr>
+              <a:t>計劃摘要</a:t>
+            </a:r>
+            <a:r>
+              <a:rPr b="1" lang="zh-TW"/>
+              <a:t>：</a:t>
+            </a:r>
+            <a:r>
+              <a:rPr lang="zh-TW"/>
+              <a:t>關於計劃的摘要</a:t>
+            </a:r>
+            <a:endParaRPr/>
+          </a:p>
+          <a:p>
+            <a:pPr indent="-342900" lvl="0" marL="457200" rtl="0" algn="l">
+              <a:lnSpc>
+                <a:spcPct val="115000"/>
+              </a:lnSpc>
+              <a:spcBef>
+                <a:spcPts val="1000"/>
+              </a:spcBef>
+              <a:spcAft>
+                <a:spcPts val="0"/>
+              </a:spcAft>
+              <a:buSzPct val="108108"/>
+              <a:buChar char="●"/>
+            </a:pPr>
+            <a:r>
+              <a:rPr b="1" lang="zh-TW">
+                <a:solidFill>
+                  <a:srgbClr val="FF0000"/>
+                </a:solidFill>
+              </a:rPr>
+              <a:t>申請機構</a:t>
+            </a:r>
+            <a:r>
+              <a:rPr lang="zh-TW"/>
+              <a:t>：來自於哪裡申請的學校的欄位</a:t>
+            </a:r>
+            <a:endParaRPr/>
+          </a:p>
+          <a:p>
+            <a:pPr indent="-342900" lvl="0" marL="457200" rtl="0" algn="l">
+              <a:lnSpc>
+                <a:spcPct val="115000"/>
+              </a:lnSpc>
+              <a:spcBef>
+                <a:spcPts val="1000"/>
+              </a:spcBef>
+              <a:spcAft>
+                <a:spcPts val="0"/>
+              </a:spcAft>
+              <a:buSzPct val="108108"/>
+              <a:buChar char="●"/>
+            </a:pPr>
+            <a:r>
+              <a:rPr b="1" lang="zh-TW">
+                <a:solidFill>
+                  <a:srgbClr val="FF0000"/>
+                </a:solidFill>
+              </a:rPr>
+              <a:t>計劃主持人</a:t>
+            </a:r>
+            <a:r>
+              <a:rPr lang="zh-TW"/>
+              <a:t>：申請人名稱的欄位</a:t>
+            </a:r>
+            <a:endParaRPr/>
+          </a:p>
+          <a:p>
+            <a:pPr indent="-342900" lvl="0" marL="457200" rtl="0" algn="l">
+              <a:lnSpc>
+                <a:spcPct val="115000"/>
+              </a:lnSpc>
+              <a:spcBef>
+                <a:spcPts val="1000"/>
+              </a:spcBef>
+              <a:spcAft>
+                <a:spcPts val="0"/>
+              </a:spcAft>
+              <a:buSzPct val="108108"/>
+              <a:buChar char="●"/>
+            </a:pPr>
+            <a:r>
+              <a:rPr b="1" lang="zh-TW"/>
+              <a:t>計畫相關其他欄位 </a:t>
+            </a:r>
+            <a:r>
+              <a:rPr lang="zh-TW"/>
+              <a:t>：不影響結果，</a:t>
+            </a:r>
+            <a:br>
+              <a:rPr lang="zh-TW"/>
+            </a:br>
+            <a:r>
+              <a:rPr lang="zh-TW"/>
+              <a:t>但是可以</a:t>
+            </a:r>
+            <a:r>
+              <a:rPr lang="zh-TW">
+                <a:highlight>
+                  <a:srgbClr val="FFF2CC"/>
+                </a:highlight>
+              </a:rPr>
+              <a:t>附帶在輸出的結果裡面，方便閱讀</a:t>
+            </a:r>
+            <a:endParaRPr>
+              <a:highlight>
+                <a:srgbClr val="FFF2CC"/>
+              </a:highlight>
+            </a:endParaRPr>
+          </a:p>
+          <a:p>
+            <a:pPr indent="-342900" lvl="0" marL="457200" rtl="0" algn="l">
+              <a:lnSpc>
+                <a:spcPct val="115000"/>
+              </a:lnSpc>
+              <a:spcBef>
+                <a:spcPts val="1000"/>
+              </a:spcBef>
+              <a:spcAft>
+                <a:spcPts val="0"/>
+              </a:spcAft>
+              <a:buSzPct val="108108"/>
+              <a:buChar char="●"/>
+            </a:pPr>
+            <a:r>
+              <a:rPr b="1" lang="zh-TW"/>
+              <a:t>共同計劃主持人</a:t>
+            </a:r>
+            <a:r>
+              <a:rPr lang="zh-TW"/>
+              <a:t>：</a:t>
+            </a:r>
+            <a:br>
+              <a:rPr lang="zh-TW"/>
+            </a:br>
+            <a:r>
+              <a:rPr lang="zh-TW"/>
+              <a:t>除了計劃主持人的一同申請的申請人</a:t>
+            </a:r>
+            <a:endParaRPr/>
+          </a:p>
+          <a:p>
+            <a:pPr indent="-342900" lvl="0" marL="457200" rtl="0" algn="l">
+              <a:lnSpc>
+                <a:spcPct val="115000"/>
+              </a:lnSpc>
+              <a:spcBef>
+                <a:spcPts val="1000"/>
+              </a:spcBef>
+              <a:spcAft>
+                <a:spcPts val="1200"/>
+              </a:spcAft>
+              <a:buSzPct val="108108"/>
+              <a:buChar char="●"/>
+            </a:pPr>
+            <a:r>
+              <a:rPr b="1" lang="zh-TW"/>
+              <a:t>共同機構</a:t>
+            </a:r>
+            <a:r>
+              <a:rPr lang="zh-TW"/>
+              <a:t>：除了申請機構一同申請的機構</a:t>
+            </a:r>
+            <a:endParaRPr/>
+          </a:p>
+        </p:txBody>
+      </p:sp>
+      <p:sp>
+        <p:nvSpPr>
+          <p:cNvPr id="279" name="Google Shape;279;p19"/>
           <p:cNvSpPr txBox="1"/>
           <p:nvPr>
             <p:ph type="title"/>
@@ -17019,153 +17541,55 @@
             </a:pPr>
             <a:r>
               <a:rPr lang="zh-TW"/>
-              <a:t>Step 4: 執行檔案，雙擊 windows.bat</a:t>
+              <a:t>選擇欄位</a:t>
             </a:r>
             <a:endParaRPr/>
           </a:p>
         </p:txBody>
       </p:sp>
-      <p:sp>
-        <p:nvSpPr>
-          <p:cNvPr id="271" name="Google Shape;271;p20"/>
-          <p:cNvSpPr txBox="1"/>
-          <p:nvPr>
-            <p:ph idx="1" type="body"/>
-          </p:nvPr>
-        </p:nvSpPr>
-        <p:spPr>
-          <a:xfrm>
-            <a:off x="311700" y="1152475"/>
-            <a:ext cx="8520600" cy="3416400"/>
+      <p:pic>
+        <p:nvPicPr>
+          <p:cNvPr id="280" name="Google Shape;280;p19"/>
+          <p:cNvPicPr preferRelativeResize="0"/>
+          <p:nvPr/>
+        </p:nvPicPr>
+        <p:blipFill rotWithShape="1">
+          <a:blip r:embed="rId3">
+            <a:alphaModFix/>
+          </a:blip>
+          <a:srcRect b="0" l="0" r="0" t="0"/>
+          <a:stretch/>
+        </p:blipFill>
+        <p:spPr>
+          <a:xfrm>
+            <a:off x="5980011" y="445025"/>
+            <a:ext cx="3085840" cy="4657450"/>
           </a:xfrm>
           <a:prstGeom prst="rect">
             <a:avLst/>
           </a:prstGeom>
           <a:noFill/>
-          <a:ln>
-            <a:noFill/>
-          </a:ln>
-        </p:spPr>
-        <p:txBody>
-          <a:bodyPr anchorCtr="0" anchor="t" bIns="91425" lIns="91425" spcFirstLastPara="1" rIns="91425" wrap="square" tIns="91425">
-            <a:normAutofit/>
-          </a:bodyPr>
-          <a:lstStyle/>
-          <a:p>
-            <a:pPr indent="0" lvl="0" marL="0" rtl="0" algn="l">
-              <a:lnSpc>
-                <a:spcPct val="115000"/>
-              </a:lnSpc>
-              <a:spcBef>
-                <a:spcPts val="1000"/>
-              </a:spcBef>
-              <a:spcAft>
-                <a:spcPts val="0"/>
-              </a:spcAft>
-              <a:buSzPts val="1800"/>
-              <a:buNone/>
-            </a:pPr>
-            <a:r>
-              <a:rPr lang="zh-TW"/>
-              <a:t>1. 可能會需要等待一點時間....</a:t>
-            </a:r>
-            <a:endParaRPr/>
-          </a:p>
-          <a:p>
-            <a:pPr indent="0" lvl="0" marL="0" rtl="0" algn="l">
-              <a:lnSpc>
-                <a:spcPct val="115000"/>
-              </a:lnSpc>
-              <a:spcBef>
-                <a:spcPts val="1000"/>
-              </a:spcBef>
-              <a:spcAft>
-                <a:spcPts val="0"/>
-              </a:spcAft>
-              <a:buSzPts val="1800"/>
-              <a:buNone/>
-            </a:pPr>
-            <a:r>
-              <a:rPr lang="zh-TW"/>
-              <a:t>2. 存入資料庫（更新資料庫）：</a:t>
-            </a:r>
-            <a:br>
-              <a:rPr lang="zh-TW"/>
-            </a:br>
-            <a:r>
-              <a:rPr lang="zh-TW"/>
-              <a:t>若已經匯入就不用選擇(預設已經匯入)，並且要確保記憶體空間超過 16GB</a:t>
-            </a:r>
-            <a:endParaRPr/>
-          </a:p>
-          <a:p>
-            <a:pPr indent="0" lvl="0" marL="0" rtl="0" algn="l">
-              <a:lnSpc>
-                <a:spcPct val="115000"/>
-              </a:lnSpc>
-              <a:spcBef>
-                <a:spcPts val="0"/>
-              </a:spcBef>
-              <a:spcAft>
-                <a:spcPts val="0"/>
-              </a:spcAft>
-              <a:buSzPts val="1800"/>
-              <a:buNone/>
-            </a:pPr>
-            <a:r>
-              <a:rPr lang="zh-TW"/>
-              <a:t>如果需要更改需到setting.yaml 修改存</a:t>
-            </a:r>
-            <a:r>
-              <a:rPr lang="zh-TW"/>
-              <a:t>入</a:t>
-            </a:r>
-            <a:r>
-              <a:rPr lang="zh-TW"/>
-              <a:t>資料</a:t>
-            </a:r>
-            <a:endParaRPr/>
-          </a:p>
-          <a:p>
-            <a:pPr indent="0" lvl="0" marL="0" rtl="0" algn="l">
-              <a:lnSpc>
-                <a:spcPct val="115000"/>
-              </a:lnSpc>
-              <a:spcBef>
-                <a:spcPts val="1200"/>
-              </a:spcBef>
-              <a:spcAft>
-                <a:spcPts val="1200"/>
-              </a:spcAft>
-              <a:buSzPts val="1800"/>
-              <a:buNone/>
-            </a:pPr>
-            <a:r>
-              <a:rPr lang="zh-TW">
-                <a:solidFill>
-                  <a:srgbClr val="FF0000"/>
-                </a:solidFill>
-              </a:rPr>
-              <a:t>3. 輸出推薦委員：保證資料都已經匯入就可以輸出檔案</a:t>
-            </a:r>
-            <a:endParaRPr>
-              <a:solidFill>
-                <a:srgbClr val="FF0000"/>
-              </a:solidFill>
-            </a:endParaRPr>
-          </a:p>
-        </p:txBody>
-      </p:sp>
+          <a:ln cap="flat" cmpd="sng" w="9525">
+            <a:solidFill>
+              <a:schemeClr val="dk2"/>
+            </a:solidFill>
+            <a:prstDash val="solid"/>
+            <a:round/>
+            <a:headEnd len="sm" w="sm" type="none"/>
+            <a:tailEnd len="sm" w="sm" type="none"/>
+          </a:ln>
+        </p:spPr>
+      </p:pic>
       <p:sp>
         <p:nvSpPr>
-          <p:cNvPr id="272" name="Google Shape;272;p20"/>
+          <p:cNvPr id="281" name="Google Shape;281;p19"/>
           <p:cNvSpPr txBox="1"/>
           <p:nvPr/>
         </p:nvSpPr>
         <p:spPr>
           <a:xfrm>
             <a:off x="6144000" y="44875"/>
-            <a:ext cx="3000000" cy="738900"/>
+            <a:ext cx="3000000" cy="538800"/>
           </a:xfrm>
           <a:prstGeom prst="rect">
             <a:avLst/>
@@ -17194,12 +17618,12 @@
               <a:buClr>
                 <a:srgbClr val="000000"/>
               </a:buClr>
-              <a:buSzPts val="3600"/>
+              <a:buSzPts val="2300"/>
               <a:buFont typeface="Arial"/>
               <a:buNone/>
             </a:pPr>
             <a:r>
-              <a:rPr b="0" i="0" lang="zh-TW" sz="3600" u="none" cap="none" strike="noStrike">
+              <a:rPr b="0" i="0" lang="zh-TW" sz="2300" u="none" cap="none" strike="noStrike">
                 <a:solidFill>
                   <a:srgbClr val="FF0000"/>
                 </a:solidFill>
@@ -17208,9 +17632,9 @@
                 <a:cs typeface="Arial"/>
                 <a:sym typeface="Arial"/>
               </a:rPr>
-              <a:t>windows.bat </a:t>
-            </a:r>
-            <a:endParaRPr b="0" i="0" sz="3600" u="none" cap="none" strike="noStrike">
+              <a:t>windows_setting.bat </a:t>
+            </a:r>
+            <a:endParaRPr b="0" i="0" sz="2300" u="none" cap="none" strike="noStrike">
               <a:solidFill>
                 <a:srgbClr val="FF0000"/>
               </a:solidFill>
@@ -17222,72 +17646,16 @@
           </a:p>
         </p:txBody>
       </p:sp>
-      <p:pic>
-        <p:nvPicPr>
-          <p:cNvPr id="273" name="Google Shape;273;p20" title="截圖 2026-07-13 13.44.53.png"/>
-          <p:cNvPicPr preferRelativeResize="0"/>
-          <p:nvPr/>
-        </p:nvPicPr>
-        <p:blipFill>
-          <a:blip r:embed="rId3">
-            <a:alphaModFix/>
-          </a:blip>
-          <a:stretch>
-            <a:fillRect/>
-          </a:stretch>
-        </p:blipFill>
-        <p:spPr>
-          <a:xfrm>
-            <a:off x="367097" y="3153575"/>
-            <a:ext cx="2383025" cy="1827000"/>
-          </a:xfrm>
-          <a:prstGeom prst="rect">
-            <a:avLst/>
-          </a:prstGeom>
-          <a:noFill/>
-          <a:ln>
-            <a:noFill/>
-          </a:ln>
-        </p:spPr>
-      </p:pic>
-      <p:pic>
-        <p:nvPicPr>
-          <p:cNvPr id="274" name="Google Shape;274;p20" title="截圖 2026-07-13 13.46.07.png"/>
-          <p:cNvPicPr preferRelativeResize="0"/>
-          <p:nvPr/>
-        </p:nvPicPr>
-        <p:blipFill>
-          <a:blip r:embed="rId4">
-            <a:alphaModFix/>
-          </a:blip>
-          <a:stretch>
-            <a:fillRect/>
-          </a:stretch>
-        </p:blipFill>
-        <p:spPr>
-          <a:xfrm>
-            <a:off x="3082725" y="3153575"/>
-            <a:ext cx="3573255" cy="1827000"/>
-          </a:xfrm>
-          <a:prstGeom prst="rect">
-            <a:avLst/>
-          </a:prstGeom>
-          <a:noFill/>
-          <a:ln>
-            <a:noFill/>
-          </a:ln>
-        </p:spPr>
-      </p:pic>
       <p:sp>
         <p:nvSpPr>
-          <p:cNvPr id="275" name="Google Shape;275;p20"/>
+          <p:cNvPr id="282" name="Google Shape;282;p19"/>
           <p:cNvSpPr txBox="1"/>
           <p:nvPr/>
         </p:nvSpPr>
         <p:spPr>
           <a:xfrm>
-            <a:off x="6423550" y="3941050"/>
-            <a:ext cx="2180100" cy="415500"/>
+            <a:off x="1939500" y="737000"/>
+            <a:ext cx="4297800" cy="461700"/>
           </a:xfrm>
           <a:prstGeom prst="rect">
             <a:avLst/>
@@ -17313,65 +17681,18 @@
               <a:buNone/>
             </a:pPr>
             <a:r>
-              <a:rPr lang="zh-TW" sz="1500">
+              <a:rPr b="1" lang="zh-TW" sz="1800">
                 <a:solidFill>
-                  <a:schemeClr val="dk2"/>
+                  <a:srgbClr val="FF0000"/>
                 </a:solidFill>
               </a:rPr>
-              <a:t>← 會顯示當前執行進度</a:t>
-            </a:r>
-            <a:endParaRPr sz="1500">
+              <a:t>必要欄位一定要選！！</a:t>
+            </a:r>
+            <a:endParaRPr b="1" sz="1800">
               <a:solidFill>
-                <a:schemeClr val="dk2"/>
+                <a:srgbClr val="FF0000"/>
               </a:solidFill>
             </a:endParaRPr>
-          </a:p>
-        </p:txBody>
-      </p:sp>
-      <p:sp>
-        <p:nvSpPr>
-          <p:cNvPr id="276" name="Google Shape;276;p20"/>
-          <p:cNvSpPr/>
-          <p:nvPr/>
-        </p:nvSpPr>
-        <p:spPr>
-          <a:xfrm>
-            <a:off x="3390200" y="3941025"/>
-            <a:ext cx="3087600" cy="738900"/>
-          </a:xfrm>
-          <a:prstGeom prst="rect">
-            <a:avLst/>
-          </a:prstGeom>
-          <a:noFill/>
-          <a:ln cap="flat" cmpd="sng" w="28575">
-            <a:solidFill>
-              <a:schemeClr val="accent4"/>
-            </a:solidFill>
-            <a:prstDash val="solid"/>
-            <a:round/>
-            <a:headEnd len="sm" w="sm" type="none"/>
-            <a:tailEnd len="sm" w="sm" type="none"/>
-          </a:ln>
-        </p:spPr>
-        <p:txBody>
-          <a:bodyPr anchorCtr="0" anchor="ctr" bIns="91425" lIns="91425" spcFirstLastPara="1" rIns="91425" wrap="square" tIns="91425">
-            <a:noAutofit/>
-          </a:bodyPr>
-          <a:lstStyle/>
-          <a:p>
-            <a:pPr indent="0" lvl="0" marL="0" rtl="0" algn="ctr">
-              <a:spcBef>
-                <a:spcPts val="0"/>
-              </a:spcBef>
-              <a:spcAft>
-                <a:spcPts val="0"/>
-              </a:spcAft>
-              <a:buNone/>
-            </a:pPr>
-            <a:r>
-              <a:t/>
-            </a:r>
-            <a:endParaRPr/>
           </a:p>
         </p:txBody>
       </p:sp>
@@ -17388,7 +17709,7 @@
   <p:cSld>
     <p:spTree>
       <p:nvGrpSpPr>
-        <p:cNvPr id="280" name="Shape 280"/>
+        <p:cNvPr id="286" name="Shape 286"/>
         <p:cNvGrpSpPr/>
         <p:nvPr/>
       </p:nvGrpSpPr>
@@ -17402,7 +17723,7 @@
       </p:grpSpPr>
       <p:sp>
         <p:nvSpPr>
-          <p:cNvPr id="281" name="Google Shape;281;p21"/>
+          <p:cNvPr id="287" name="Google Shape;287;p20"/>
           <p:cNvSpPr txBox="1"/>
           <p:nvPr>
             <p:ph type="title"/>
@@ -17442,7 +17763,7 @@
             </a:pPr>
             <a:r>
               <a:rPr lang="zh-TW"/>
-              <a:t>輸出的檔案</a:t>
+              <a:t>Step 4: 執行檔案，雙擊 windows.bat</a:t>
             </a:r>
             <a:endParaRPr/>
           </a:p>
@@ -17450,7 +17771,7 @@
       </p:sp>
       <p:sp>
         <p:nvSpPr>
-          <p:cNvPr id="282" name="Google Shape;282;p21"/>
+          <p:cNvPr id="288" name="Google Shape;288;p20"/>
           <p:cNvSpPr txBox="1"/>
           <p:nvPr>
             <p:ph idx="1" type="body"/>
@@ -17480,7 +17801,7 @@
                 <a:spcPct val="115000"/>
               </a:lnSpc>
               <a:spcBef>
-                <a:spcPts val="0"/>
+                <a:spcPts val="1000"/>
               </a:spcBef>
               <a:spcAft>
                 <a:spcPts val="0"/>
@@ -17490,63 +17811,164 @@
             </a:pPr>
             <a:r>
               <a:rPr lang="zh-TW"/>
-              <a:t>可以主要看 </a:t>
-            </a:r>
+              <a:t>1. 可能會需要等待一點時間....</a:t>
+            </a:r>
+            <a:endParaRPr/>
+          </a:p>
+          <a:p>
+            <a:pPr indent="0" lvl="0" marL="0" rtl="0" algn="l">
+              <a:lnSpc>
+                <a:spcPct val="115000"/>
+              </a:lnSpc>
+              <a:spcBef>
+                <a:spcPts val="1000"/>
+              </a:spcBef>
+              <a:spcAft>
+                <a:spcPts val="0"/>
+              </a:spcAft>
+              <a:buSzPts val="1800"/>
+              <a:buNone/>
+            </a:pPr>
+            <a:r>
+              <a:rPr lang="zh-TW"/>
+              <a:t>2. 存入資料庫（更新資料庫）：</a:t>
+            </a:r>
+            <a:br>
+              <a:rPr lang="zh-TW"/>
+            </a:br>
+            <a:r>
+              <a:rPr lang="zh-TW"/>
+              <a:t>若已經匯入就不用選擇(預設已經匯入)，並且要確保記憶體空間超過 16GB</a:t>
+            </a:r>
+            <a:endParaRPr/>
+          </a:p>
+          <a:p>
+            <a:pPr indent="0" lvl="0" marL="0" rtl="0" algn="l">
+              <a:lnSpc>
+                <a:spcPct val="115000"/>
+              </a:lnSpc>
+              <a:spcBef>
+                <a:spcPts val="0"/>
+              </a:spcBef>
+              <a:spcAft>
+                <a:spcPts val="0"/>
+              </a:spcAft>
+              <a:buSzPts val="1800"/>
+              <a:buNone/>
+            </a:pPr>
+            <a:r>
+              <a:rPr lang="zh-TW"/>
+              <a:t>如果需要更改需到setting.yaml 修改存</a:t>
+            </a:r>
+            <a:r>
+              <a:rPr lang="zh-TW"/>
+              <a:t>入</a:t>
+            </a:r>
+            <a:r>
+              <a:rPr lang="zh-TW"/>
+              <a:t>資料</a:t>
+            </a:r>
+            <a:endParaRPr/>
+          </a:p>
+          <a:p>
+            <a:pPr indent="0" lvl="0" marL="0" rtl="0" algn="l">
+              <a:lnSpc>
+                <a:spcPct val="115000"/>
+              </a:lnSpc>
+              <a:spcBef>
+                <a:spcPts val="1200"/>
+              </a:spcBef>
+              <a:spcAft>
+                <a:spcPts val="1200"/>
+              </a:spcAft>
+              <a:buSzPts val="1800"/>
+              <a:buNone/>
+            </a:pPr>
             <a:r>
               <a:rPr lang="zh-TW">
-                <a:highlight>
-                  <a:srgbClr val="FFF2CC"/>
-                </a:highlight>
+                <a:solidFill>
+                  <a:srgbClr val="FF0000"/>
+                </a:solidFill>
               </a:rPr>
-              <a:t>推薦表統合_VBA</a:t>
+              <a:t>3. 輸出推薦委員：保證資料都已經匯入就可以輸出檔案</a:t>
             </a:r>
             <a:endParaRPr>
-              <a:highlight>
-                <a:srgbClr val="FFF2CC"/>
-              </a:highlight>
+              <a:solidFill>
+                <a:srgbClr val="FF0000"/>
+              </a:solidFill>
             </a:endParaRPr>
           </a:p>
-          <a:p>
-            <a:pPr indent="0" lvl="0" marL="0" rtl="0" algn="l">
-              <a:lnSpc>
-                <a:spcPct val="115000"/>
-              </a:lnSpc>
-              <a:spcBef>
-                <a:spcPts val="1200"/>
-              </a:spcBef>
-              <a:spcAft>
-                <a:spcPts val="1200"/>
-              </a:spcAft>
-              <a:buSzPts val="1800"/>
-              <a:buNone/>
-            </a:pPr>
-            <a:r>
-              <a:rPr lang="zh-TW"/>
-              <a:t>=&gt; ./data/output/{</a:t>
-            </a:r>
-            <a:r>
-              <a:rPr lang="zh-TW"/>
-              <a:t>審查案名稱</a:t>
-            </a:r>
-            <a:r>
-              <a:rPr lang="zh-TW"/>
-              <a:t>}_{</a:t>
-            </a:r>
-            <a:r>
-              <a:rPr lang="zh-TW"/>
-              <a:t>時間</a:t>
-            </a:r>
-            <a:r>
-              <a:rPr lang="zh-TW"/>
-              <a:t>}/...</a:t>
-            </a:r>
-            <a:endParaRPr/>
+        </p:txBody>
+      </p:sp>
+      <p:sp>
+        <p:nvSpPr>
+          <p:cNvPr id="289" name="Google Shape;289;p20"/>
+          <p:cNvSpPr txBox="1"/>
+          <p:nvPr/>
+        </p:nvSpPr>
+        <p:spPr>
+          <a:xfrm>
+            <a:off x="6144000" y="44875"/>
+            <a:ext cx="3000000" cy="738900"/>
+          </a:xfrm>
+          <a:prstGeom prst="rect">
+            <a:avLst/>
+          </a:prstGeom>
+          <a:noFill/>
+          <a:ln>
+            <a:noFill/>
+          </a:ln>
+        </p:spPr>
+        <p:txBody>
+          <a:bodyPr anchorCtr="0" anchor="t" bIns="91425" lIns="91425" spcFirstLastPara="1" rIns="91425" wrap="square" tIns="91425">
+            <a:spAutoFit/>
+          </a:bodyPr>
+          <a:lstStyle/>
+          <a:p>
+            <a:pPr indent="0" lvl="0" marL="0" marR="0" rtl="0" algn="r">
+              <a:lnSpc>
+                <a:spcPct val="100000"/>
+              </a:lnSpc>
+              <a:spcBef>
+                <a:spcPts val="0"/>
+              </a:spcBef>
+              <a:spcAft>
+                <a:spcPts val="0"/>
+              </a:spcAft>
+              <a:buClr>
+                <a:srgbClr val="000000"/>
+              </a:buClr>
+              <a:buSzPts val="3600"/>
+              <a:buFont typeface="Arial"/>
+              <a:buNone/>
+            </a:pPr>
+            <a:r>
+              <a:rPr b="0" i="0" lang="zh-TW" sz="3600" u="none" cap="none" strike="noStrike">
+                <a:solidFill>
+                  <a:srgbClr val="FF0000"/>
+                </a:solidFill>
+                <a:latin typeface="Arial"/>
+                <a:ea typeface="Arial"/>
+                <a:cs typeface="Arial"/>
+                <a:sym typeface="Arial"/>
+              </a:rPr>
+              <a:t>windows.bat </a:t>
+            </a:r>
+            <a:endParaRPr b="0" i="0" sz="3600" u="none" cap="none" strike="noStrike">
+              <a:solidFill>
+                <a:srgbClr val="FF0000"/>
+              </a:solidFill>
+              <a:latin typeface="Arial"/>
+              <a:ea typeface="Arial"/>
+              <a:cs typeface="Arial"/>
+              <a:sym typeface="Arial"/>
+            </a:endParaRPr>
           </a:p>
         </p:txBody>
       </p:sp>
       <p:pic>
         <p:nvPicPr>
-          <p:cNvPr id="283" name="Google Shape;283;p21" title="截圖 2026-07-13 13.58.17.png"/>
+          <p:cNvPr id="290" name="Google Shape;290;p20" title="截圖 2026-07-13 13.44.53.png"/>
           <p:cNvPicPr preferRelativeResize="0"/>
           <p:nvPr/>
         </p:nvPicPr>
@@ -17560,8 +17982,8 @@
         </p:blipFill>
         <p:spPr>
           <a:xfrm>
-            <a:off x="359213" y="2213650"/>
-            <a:ext cx="2067800" cy="2456000"/>
+            <a:off x="367097" y="3153575"/>
+            <a:ext cx="2383025" cy="1827000"/>
           </a:xfrm>
           <a:prstGeom prst="rect">
             <a:avLst/>
@@ -17574,21 +17996,22 @@
       </p:pic>
       <p:pic>
         <p:nvPicPr>
-          <p:cNvPr id="284" name="Google Shape;284;p21" title="截圖 2026-07-13 13.58.52.png"/>
+          <p:cNvPr id="291" name="Google Shape;291;p20" title="截圖 2026-07-13 13.46.07.png"/>
           <p:cNvPicPr preferRelativeResize="0"/>
           <p:nvPr/>
         </p:nvPicPr>
-        <p:blipFill rotWithShape="1">
+        <p:blipFill>
           <a:blip r:embed="rId4">
             <a:alphaModFix/>
           </a:blip>
-          <a:srcRect b="52494" l="0" r="0" t="0"/>
-          <a:stretch/>
+          <a:stretch>
+            <a:fillRect/>
+          </a:stretch>
         </p:blipFill>
         <p:spPr>
           <a:xfrm>
-            <a:off x="2915113" y="2641950"/>
-            <a:ext cx="5869675" cy="1657299"/>
+            <a:off x="3082725" y="3153575"/>
+            <a:ext cx="3573255" cy="1827000"/>
           </a:xfrm>
           <a:prstGeom prst="rect">
             <a:avLst/>
@@ -17599,6 +18022,103 @@
           </a:ln>
         </p:spPr>
       </p:pic>
+      <p:sp>
+        <p:nvSpPr>
+          <p:cNvPr id="292" name="Google Shape;292;p20"/>
+          <p:cNvSpPr txBox="1"/>
+          <p:nvPr/>
+        </p:nvSpPr>
+        <p:spPr>
+          <a:xfrm>
+            <a:off x="6423550" y="3941050"/>
+            <a:ext cx="2180100" cy="415500"/>
+          </a:xfrm>
+          <a:prstGeom prst="rect">
+            <a:avLst/>
+          </a:prstGeom>
+          <a:noFill/>
+          <a:ln>
+            <a:noFill/>
+          </a:ln>
+        </p:spPr>
+        <p:txBody>
+          <a:bodyPr anchorCtr="0" anchor="t" bIns="91425" lIns="91425" spcFirstLastPara="1" rIns="91425" wrap="square" tIns="91425">
+            <a:spAutoFit/>
+          </a:bodyPr>
+          <a:lstStyle/>
+          <a:p>
+            <a:pPr indent="0" lvl="0" marL="0" rtl="0" algn="l">
+              <a:spcBef>
+                <a:spcPts val="0"/>
+              </a:spcBef>
+              <a:spcAft>
+                <a:spcPts val="0"/>
+              </a:spcAft>
+              <a:buNone/>
+            </a:pPr>
+            <a:r>
+              <a:rPr lang="zh-TW" sz="1500">
+                <a:solidFill>
+                  <a:schemeClr val="dk2"/>
+                </a:solidFill>
+              </a:rPr>
+              <a:t>← 會顯示當前執行進度</a:t>
+            </a:r>
+            <a:endParaRPr sz="1500">
+              <a:solidFill>
+                <a:schemeClr val="dk2"/>
+              </a:solidFill>
+            </a:endParaRPr>
+          </a:p>
+        </p:txBody>
+      </p:sp>
+      <p:sp>
+        <p:nvSpPr>
+          <p:cNvPr id="293" name="Google Shape;293;p20"/>
+          <p:cNvSpPr/>
+          <p:nvPr/>
+        </p:nvSpPr>
+        <p:spPr>
+          <a:xfrm>
+            <a:off x="3390200" y="3941025"/>
+            <a:ext cx="3087600" cy="738900"/>
+          </a:xfrm>
+          <a:prstGeom prst="rect">
+            <a:avLst/>
+          </a:prstGeom>
+          <a:noFill/>
+          <a:ln cap="flat" cmpd="sng" w="28575">
+            <a:solidFill>
+              <a:schemeClr val="accent4"/>
+            </a:solidFill>
+            <a:prstDash val="solid"/>
+            <a:round/>
+            <a:headEnd len="sm" w="sm" type="none"/>
+            <a:tailEnd len="sm" w="sm" type="none"/>
+          </a:ln>
+        </p:spPr>
+        <p:txBody>
+          <a:bodyPr anchorCtr="0" anchor="ctr" bIns="91425" lIns="91425" spcFirstLastPara="1" rIns="91425" wrap="square" tIns="91425">
+            <a:noAutofit/>
+          </a:bodyPr>
+          <a:lstStyle/>
+          <a:p>
+            <a:pPr indent="0" lvl="0" marL="0" rtl="0" algn="ctr">
+              <a:spcBef>
+                <a:spcPts val="0"/>
+              </a:spcBef>
+              <a:spcAft>
+                <a:spcPts val="0"/>
+              </a:spcAft>
+              <a:buNone/>
+            </a:pPr>
+            <a:r>
+              <a:t/>
+            </a:r>
+            <a:endParaRPr/>
+          </a:p>
+        </p:txBody>
+      </p:sp>
     </p:spTree>
   </p:cSld>
   <p:clrMapOvr>
@@ -17612,7 +18132,7 @@
   <p:cSld>
     <p:spTree>
       <p:nvGrpSpPr>
-        <p:cNvPr id="288" name="Shape 288"/>
+        <p:cNvPr id="297" name="Shape 297"/>
         <p:cNvGrpSpPr/>
         <p:nvPr/>
       </p:nvGrpSpPr>
@@ -17626,7 +18146,7 @@
       </p:grpSpPr>
       <p:sp>
         <p:nvSpPr>
-          <p:cNvPr id="289" name="Google Shape;289;g3f4f89e88cb_0_8"/>
+          <p:cNvPr id="298" name="Google Shape;298;p21"/>
           <p:cNvSpPr txBox="1"/>
           <p:nvPr>
             <p:ph type="title"/>
@@ -17666,7 +18186,7 @@
             </a:pPr>
             <a:r>
               <a:rPr lang="zh-TW"/>
-              <a:t>過程中可能遇到問題</a:t>
+              <a:t>輸出的檔案</a:t>
             </a:r>
             <a:endParaRPr/>
           </a:p>
@@ -17674,7 +18194,7 @@
       </p:sp>
       <p:sp>
         <p:nvSpPr>
-          <p:cNvPr id="290" name="Google Shape;290;g3f4f89e88cb_0_8"/>
+          <p:cNvPr id="299" name="Google Shape;299;p21"/>
           <p:cNvSpPr txBox="1"/>
           <p:nvPr>
             <p:ph idx="1" type="body"/>
@@ -17699,67 +18219,130 @@
           </a:bodyPr>
           <a:lstStyle/>
           <a:p>
-            <a:pPr indent="-342900" lvl="0" marL="457200" rtl="0" algn="l">
+            <a:pPr indent="0" lvl="0" marL="0" rtl="0" algn="l">
               <a:lnSpc>
                 <a:spcPct val="115000"/>
               </a:lnSpc>
               <a:spcBef>
+                <a:spcPts val="0"/>
+              </a:spcBef>
+              <a:spcAft>
+                <a:spcPts val="0"/>
+              </a:spcAft>
+              <a:buSzPts val="1800"/>
+              <a:buNone/>
+            </a:pPr>
+            <a:r>
+              <a:rPr lang="zh-TW"/>
+              <a:t>可以主要看 </a:t>
+            </a:r>
+            <a:r>
+              <a:rPr lang="zh-TW">
+                <a:highlight>
+                  <a:srgbClr val="FFF2CC"/>
+                </a:highlight>
+              </a:rPr>
+              <a:t>推薦表統合_VBA</a:t>
+            </a:r>
+            <a:endParaRPr>
+              <a:highlight>
+                <a:srgbClr val="FFF2CC"/>
+              </a:highlight>
+            </a:endParaRPr>
+          </a:p>
+          <a:p>
+            <a:pPr indent="0" lvl="0" marL="0" rtl="0" algn="l">
+              <a:lnSpc>
+                <a:spcPct val="115000"/>
+              </a:lnSpc>
+              <a:spcBef>
                 <a:spcPts val="1200"/>
               </a:spcBef>
               <a:spcAft>
-                <a:spcPts val="0"/>
+                <a:spcPts val="1200"/>
               </a:spcAft>
               <a:buSzPts val="1800"/>
-              <a:buAutoNum type="arabicPeriod"/>
+              <a:buNone/>
             </a:pPr>
             <a:r>
               <a:rPr lang="zh-TW"/>
-              <a:t>[Errno 13] Permission denied:.... 代表你可能開著 EXCEL 記得關掉，東西都關掉後重開看看！</a:t>
-            </a:r>
-            <a:endParaRPr/>
-          </a:p>
-          <a:p>
-            <a:pPr indent="-342900" lvl="0" marL="457200" rtl="0" algn="l">
-              <a:lnSpc>
-                <a:spcPct val="115000"/>
-              </a:lnSpc>
-              <a:spcBef>
-                <a:spcPts val="0"/>
-              </a:spcBef>
-              <a:spcAft>
-                <a:spcPts val="0"/>
-              </a:spcAft>
-              <a:buSzPts val="1800"/>
-              <a:buAutoNum type="arabicPeriod"/>
-            </a:pPr>
+              <a:t>=&gt; ./data/output/{</a:t>
+            </a:r>
             <a:r>
               <a:rPr lang="zh-TW"/>
-              <a:t>Ollama 回應超時!： 找RA處理，應該是因為有其他人在使用</a:t>
-            </a:r>
-            <a:endParaRPr/>
-          </a:p>
-          <a:p>
-            <a:pPr indent="-342900" lvl="0" marL="457200" rtl="0" algn="l">
-              <a:lnSpc>
-                <a:spcPct val="115000"/>
-              </a:lnSpc>
-              <a:spcBef>
-                <a:spcPts val="0"/>
-              </a:spcBef>
-              <a:spcAft>
-                <a:spcPts val="0"/>
-              </a:spcAft>
-              <a:buSzPts val="1800"/>
-              <a:buAutoNum type="arabicPeriod"/>
-            </a:pPr>
+              <a:t>審查案名稱</a:t>
+            </a:r>
             <a:r>
               <a:rPr lang="zh-TW"/>
-              <a:t>key not foung: 確認setting.yaml是否有缺漏 可以參考setting_example.yaml</a:t>
+              <a:t>}_{</a:t>
+            </a:r>
+            <a:r>
+              <a:rPr lang="zh-TW"/>
+              <a:t>時間</a:t>
+            </a:r>
+            <a:r>
+              <a:rPr lang="zh-TW"/>
+              <a:t>}/...</a:t>
             </a:r>
             <a:endParaRPr/>
           </a:p>
         </p:txBody>
       </p:sp>
+      <p:pic>
+        <p:nvPicPr>
+          <p:cNvPr id="300" name="Google Shape;300;p21" title="截圖 2026-07-13 13.58.17.png"/>
+          <p:cNvPicPr preferRelativeResize="0"/>
+          <p:nvPr/>
+        </p:nvPicPr>
+        <p:blipFill>
+          <a:blip r:embed="rId3">
+            <a:alphaModFix/>
+          </a:blip>
+          <a:stretch>
+            <a:fillRect/>
+          </a:stretch>
+        </p:blipFill>
+        <p:spPr>
+          <a:xfrm>
+            <a:off x="359213" y="2213650"/>
+            <a:ext cx="2067800" cy="2456000"/>
+          </a:xfrm>
+          <a:prstGeom prst="rect">
+            <a:avLst/>
+          </a:prstGeom>
+          <a:noFill/>
+          <a:ln>
+            <a:noFill/>
+          </a:ln>
+        </p:spPr>
+      </p:pic>
+      <p:pic>
+        <p:nvPicPr>
+          <p:cNvPr id="301" name="Google Shape;301;p21" title="截圖 2026-07-13 13.58.52.png"/>
+          <p:cNvPicPr preferRelativeResize="0"/>
+          <p:nvPr/>
+        </p:nvPicPr>
+        <p:blipFill rotWithShape="1">
+          <a:blip r:embed="rId4">
+            <a:alphaModFix/>
+          </a:blip>
+          <a:srcRect b="52494" l="0" r="0" t="0"/>
+          <a:stretch/>
+        </p:blipFill>
+        <p:spPr>
+          <a:xfrm>
+            <a:off x="2915113" y="2641950"/>
+            <a:ext cx="5869675" cy="1657299"/>
+          </a:xfrm>
+          <a:prstGeom prst="rect">
+            <a:avLst/>
+          </a:prstGeom>
+          <a:noFill/>
+          <a:ln>
+            <a:noFill/>
+          </a:ln>
+        </p:spPr>
+      </p:pic>
     </p:spTree>
   </p:cSld>
   <p:clrMapOvr>
@@ -17773,7 +18356,7 @@
   <p:cSld>
     <p:spTree>
       <p:nvGrpSpPr>
-        <p:cNvPr id="294" name="Shape 294"/>
+        <p:cNvPr id="305" name="Shape 305"/>
         <p:cNvGrpSpPr/>
         <p:nvPr/>
       </p:nvGrpSpPr>
@@ -17787,187 +18370,7 @@
       </p:grpSpPr>
       <p:sp>
         <p:nvSpPr>
-          <p:cNvPr id="295" name="Google Shape;295;g3f4f89e88cb_0_19"/>
-          <p:cNvSpPr txBox="1"/>
-          <p:nvPr>
-            <p:ph type="ctrTitle"/>
-          </p:nvPr>
-        </p:nvSpPr>
-        <p:spPr>
-          <a:xfrm>
-            <a:off x="311708" y="744575"/>
-            <a:ext cx="8520600" cy="2052600"/>
-          </a:xfrm>
-          <a:prstGeom prst="rect">
-            <a:avLst/>
-          </a:prstGeom>
-          <a:noFill/>
-          <a:ln>
-            <a:noFill/>
-          </a:ln>
-        </p:spPr>
-        <p:txBody>
-          <a:bodyPr anchorCtr="0" anchor="b" bIns="91425" lIns="91425" spcFirstLastPara="1" rIns="91425" wrap="square" tIns="91425">
-            <a:normAutofit/>
-          </a:bodyPr>
-          <a:lstStyle/>
-          <a:p>
-            <a:pPr indent="0" lvl="0" marL="0" rtl="0" algn="ctr">
-              <a:lnSpc>
-                <a:spcPct val="100000"/>
-              </a:lnSpc>
-              <a:spcBef>
-                <a:spcPts val="0"/>
-              </a:spcBef>
-              <a:spcAft>
-                <a:spcPts val="0"/>
-              </a:spcAft>
-              <a:buSzPts val="5200"/>
-              <a:buNone/>
-            </a:pPr>
-            <a:r>
-              <a:rPr lang="zh-TW" sz="6500"/>
-              <a:t>更新資料</a:t>
-            </a:r>
-            <a:endParaRPr sz="6500"/>
-          </a:p>
-        </p:txBody>
-      </p:sp>
-      <p:sp>
-        <p:nvSpPr>
-          <p:cNvPr id="296" name="Google Shape;296;g3f4f89e88cb_0_19"/>
-          <p:cNvSpPr txBox="1"/>
-          <p:nvPr/>
-        </p:nvSpPr>
-        <p:spPr>
-          <a:xfrm>
-            <a:off x="0" y="3666000"/>
-            <a:ext cx="5937300" cy="1477500"/>
-          </a:xfrm>
-          <a:prstGeom prst="rect">
-            <a:avLst/>
-          </a:prstGeom>
-          <a:noFill/>
-          <a:ln>
-            <a:noFill/>
-          </a:ln>
-        </p:spPr>
-        <p:txBody>
-          <a:bodyPr anchorCtr="0" anchor="t" bIns="91425" lIns="91425" spcFirstLastPara="1" rIns="91425" wrap="square" tIns="91425">
-            <a:spAutoFit/>
-          </a:bodyPr>
-          <a:lstStyle/>
-          <a:p>
-            <a:pPr indent="0" lvl="0" marL="0" marR="0" rtl="0" algn="l">
-              <a:lnSpc>
-                <a:spcPct val="100000"/>
-              </a:lnSpc>
-              <a:spcBef>
-                <a:spcPts val="0"/>
-              </a:spcBef>
-              <a:spcAft>
-                <a:spcPts val="0"/>
-              </a:spcAft>
-              <a:buNone/>
-            </a:pPr>
-            <a:r>
-              <a:rPr lang="zh-TW" sz="2800">
-                <a:solidFill>
-                  <a:srgbClr val="FF0000"/>
-                </a:solidFill>
-              </a:rPr>
-              <a:t>如果資料庫或是教授資料需要更新</a:t>
-            </a:r>
-            <a:endParaRPr sz="2800">
-              <a:solidFill>
-                <a:srgbClr val="FF0000"/>
-              </a:solidFill>
-            </a:endParaRPr>
-          </a:p>
-          <a:p>
-            <a:pPr indent="0" lvl="0" marL="0" marR="0" rtl="0" algn="l">
-              <a:lnSpc>
-                <a:spcPct val="100000"/>
-              </a:lnSpc>
-              <a:spcBef>
-                <a:spcPts val="0"/>
-              </a:spcBef>
-              <a:spcAft>
-                <a:spcPts val="0"/>
-              </a:spcAft>
-              <a:buNone/>
-            </a:pPr>
-            <a:r>
-              <a:rPr lang="zh-TW" sz="2800">
-                <a:solidFill>
-                  <a:srgbClr val="FF0000"/>
-                </a:solidFill>
-              </a:rPr>
-              <a:t>請使用以下步驟</a:t>
-            </a:r>
-            <a:endParaRPr sz="2800">
-              <a:solidFill>
-                <a:srgbClr val="FF0000"/>
-              </a:solidFill>
-            </a:endParaRPr>
-          </a:p>
-          <a:p>
-            <a:pPr indent="0" lvl="0" marL="0" marR="0" rtl="0" algn="l">
-              <a:lnSpc>
-                <a:spcPct val="100000"/>
-              </a:lnSpc>
-              <a:spcBef>
-                <a:spcPts val="0"/>
-              </a:spcBef>
-              <a:spcAft>
-                <a:spcPts val="0"/>
-              </a:spcAft>
-              <a:buNone/>
-            </a:pPr>
-            <a:r>
-              <a:rPr lang="zh-TW" sz="2800">
-                <a:solidFill>
-                  <a:srgbClr val="FF0000"/>
-                </a:solidFill>
-              </a:rPr>
-              <a:t>建議找學生處理有些許複雜</a:t>
-            </a:r>
-            <a:endParaRPr sz="2800">
-              <a:solidFill>
-                <a:srgbClr val="FF0000"/>
-              </a:solidFill>
-            </a:endParaRPr>
-          </a:p>
-        </p:txBody>
-      </p:sp>
-    </p:spTree>
-  </p:cSld>
-  <p:clrMapOvr>
-    <a:masterClrMapping/>
-  </p:clrMapOvr>
-</p:sld>
-</file>
-
-<file path=ppt/slides/slide26.xml><?xml version="1.0" encoding="utf-8"?>
-<p:sld xmlns:a="http://schemas.openxmlformats.org/drawingml/2006/main" xmlns:r="http://schemas.openxmlformats.org/officeDocument/2006/relationships" xmlns:mc="http://schemas.openxmlformats.org/markup-compatibility/2006" xmlns:mv="urn:schemas-microsoft-com:mac:vml" xmlns:p="http://schemas.openxmlformats.org/presentationml/2006/main" xmlns:c="http://schemas.openxmlformats.org/drawingml/2006/chart" xmlns:dgm="http://schemas.openxmlformats.org/drawingml/2006/diagram" xmlns:o="urn:schemas-microsoft-com:office:office" xmlns:v="urn:schemas-microsoft-com:vml" xmlns:pvml="urn:schemas-microsoft-com:office:powerpoint" xmlns:com="http://schemas.openxmlformats.org/drawingml/2006/compatibility" xmlns:p14="http://schemas.microsoft.com/office/powerpoint/2010/main" xmlns:p15="http://schemas.microsoft.com/office/powerpoint/2012/main" xmlns:ahyp="http://schemas.microsoft.com/office/drawing/2018/hyperlinkcolor">
-  <p:cSld>
-    <p:spTree>
-      <p:nvGrpSpPr>
-        <p:cNvPr id="300" name="Shape 300"/>
-        <p:cNvGrpSpPr/>
-        <p:nvPr/>
-      </p:nvGrpSpPr>
-      <p:grpSpPr>
-        <a:xfrm>
-          <a:off x="0" y="0"/>
-          <a:ext cx="0" cy="0"/>
-          <a:chOff x="0" y="0"/>
-          <a:chExt cx="0" cy="0"/>
-        </a:xfrm>
-      </p:grpSpPr>
-      <p:sp>
-        <p:nvSpPr>
-          <p:cNvPr id="301" name="Google Shape;301;g3f4f89e88cb_0_25"/>
+          <p:cNvPr id="306" name="Google Shape;306;g3f4f89e88cb_0_8"/>
           <p:cNvSpPr txBox="1"/>
           <p:nvPr>
             <p:ph type="title"/>
@@ -18007,7 +18410,7 @@
             </a:pPr>
             <a:r>
               <a:rPr lang="zh-TW"/>
-              <a:t>更新教授資料</a:t>
+              <a:t>過程中可能遇到問題</a:t>
             </a:r>
             <a:endParaRPr/>
           </a:p>
@@ -18015,7 +18418,7 @@
       </p:sp>
       <p:sp>
         <p:nvSpPr>
-          <p:cNvPr id="302" name="Google Shape;302;g3f4f89e88cb_0_25"/>
+          <p:cNvPr id="307" name="Google Shape;307;g3f4f89e88cb_0_8"/>
           <p:cNvSpPr txBox="1"/>
           <p:nvPr>
             <p:ph idx="1" type="body"/>
@@ -18040,281 +18443,117 @@
           </a:bodyPr>
           <a:lstStyle/>
           <a:p>
-            <a:pPr indent="0" lvl="0" marL="0" rtl="0" algn="l">
+            <a:pPr indent="-342900" lvl="0" marL="457200" rtl="0" algn="l">
               <a:lnSpc>
                 <a:spcPct val="115000"/>
               </a:lnSpc>
               <a:spcBef>
-                <a:spcPts val="1000"/>
+                <a:spcPts val="1200"/>
               </a:spcBef>
               <a:spcAft>
                 <a:spcPts val="0"/>
               </a:spcAft>
               <a:buSzPts val="1800"/>
-              <a:buNone/>
+              <a:buAutoNum type="arabicPeriod"/>
             </a:pPr>
             <a:r>
               <a:rPr lang="zh-TW"/>
-              <a:t>1. </a:t>
+              <a:t>install_env.bat </a:t>
             </a:r>
             <a:r>
               <a:rPr lang="zh-TW"/>
-              <a:t>需確認在 data/RDF_database 中有 暫存最新人才資料庫 與 統計清單人才資料_RDF_UNI</a:t>
+              <a:t>若發生錯誤    </a:t>
+            </a:r>
+            <a:r>
+              <a:rPr lang="zh-TW"/>
+              <a:t>→ </a:t>
             </a:r>
             <a:endParaRPr/>
           </a:p>
           <a:p>
-            <a:pPr indent="0" lvl="0" marL="0" rtl="0" algn="l">
+            <a:pPr indent="0" lvl="0" marL="457200" rtl="0" algn="l">
               <a:lnSpc>
                 <a:spcPct val="115000"/>
               </a:lnSpc>
               <a:spcBef>
-                <a:spcPts val="1000"/>
+                <a:spcPts val="1200"/>
+              </a:spcBef>
+              <a:spcAft>
+                <a:spcPts val="0"/>
+              </a:spcAft>
+              <a:buNone/>
+            </a:pPr>
+            <a:r>
+              <a:rPr lang="zh-TW"/>
+              <a:t>請到控控制台 → 地區 → 系統管理 → 變更系統地區設定 → 看有沒有勾選「Beta: 使用 Unicode UTF-8 提供全球語言支援」</a:t>
+            </a:r>
+            <a:endParaRPr/>
+          </a:p>
+          <a:p>
+            <a:pPr indent="-342900" lvl="0" marL="457200" rtl="0" algn="l">
+              <a:lnSpc>
+                <a:spcPct val="115000"/>
+              </a:lnSpc>
+              <a:spcBef>
+                <a:spcPts val="1200"/>
               </a:spcBef>
               <a:spcAft>
                 <a:spcPts val="0"/>
               </a:spcAft>
               <a:buSzPts val="1800"/>
-              <a:buNone/>
-            </a:pPr>
-            <a:r>
-              <a:t/>
+              <a:buAutoNum type="arabicPeriod"/>
+            </a:pPr>
+            <a:r>
+              <a:rPr lang="zh-TW"/>
+              <a:t>[Errno 13] Permission denied:.... 代表你可能開著 EXCEL 記得關掉，東西都關掉後重開看看！</a:t>
             </a:r>
             <a:endParaRPr/>
           </a:p>
           <a:p>
-            <a:pPr indent="0" lvl="0" marL="0" rtl="0" algn="l">
+            <a:pPr indent="-342900" lvl="0" marL="457200" rtl="0" algn="l">
               <a:lnSpc>
                 <a:spcPct val="115000"/>
               </a:lnSpc>
               <a:spcBef>
-                <a:spcPts val="1000"/>
+                <a:spcPts val="0"/>
               </a:spcBef>
               <a:spcAft>
                 <a:spcPts val="0"/>
               </a:spcAft>
               <a:buSzPts val="1800"/>
-              <a:buNone/>
-            </a:pPr>
-            <a:r>
-              <a:t/>
+              <a:buAutoNum type="arabicPeriod"/>
+            </a:pPr>
+            <a:r>
+              <a:rPr lang="zh-TW"/>
+              <a:t>Ollama 回應超時!： 找RA處理，應該是因為有其他人在使用</a:t>
             </a:r>
             <a:endParaRPr/>
           </a:p>
           <a:p>
-            <a:pPr indent="0" lvl="0" marL="0" rtl="0" algn="l">
+            <a:pPr indent="-342900" lvl="0" marL="457200" rtl="0" algn="l">
               <a:lnSpc>
                 <a:spcPct val="115000"/>
               </a:lnSpc>
               <a:spcBef>
-                <a:spcPts val="1000"/>
+                <a:spcPts val="0"/>
               </a:spcBef>
               <a:spcAft>
                 <a:spcPts val="0"/>
               </a:spcAft>
               <a:buSzPts val="1800"/>
-              <a:buNone/>
-            </a:pPr>
-            <a:r>
-              <a:t/>
+              <a:buAutoNum type="arabicPeriod"/>
+            </a:pPr>
+            <a:r>
+              <a:rPr lang="zh-TW"/>
+              <a:t>key not foung: 確認setting.yaml是否有缺漏 可以參考setting_example.yaml</a:t>
             </a:r>
             <a:endParaRPr/>
-          </a:p>
-          <a:p>
-            <a:pPr indent="0" lvl="0" marL="0" rtl="0" algn="l">
-              <a:lnSpc>
-                <a:spcPct val="115000"/>
-              </a:lnSpc>
-              <a:spcBef>
-                <a:spcPts val="0"/>
-              </a:spcBef>
-              <a:spcAft>
-                <a:spcPts val="0"/>
-              </a:spcAft>
-              <a:buSzPts val="1800"/>
-              <a:buNone/>
-            </a:pPr>
-            <a:r>
-              <a:rPr lang="zh-TW"/>
-              <a:t>2. 確認在crawler 有committee_all_education_with_advisor (沒有不影響)</a:t>
-            </a:r>
-            <a:endParaRPr/>
-          </a:p>
-          <a:p>
-            <a:pPr indent="0" lvl="0" marL="0" rtl="0" algn="l">
-              <a:lnSpc>
-                <a:spcPct val="115000"/>
-              </a:lnSpc>
-              <a:spcBef>
-                <a:spcPts val="0"/>
-              </a:spcBef>
-              <a:spcAft>
-                <a:spcPts val="0"/>
-              </a:spcAft>
-              <a:buSzPts val="1800"/>
-              <a:buNone/>
-            </a:pPr>
-            <a:r>
-              <a:rPr lang="zh-TW" sz="1500">
-                <a:highlight>
-                  <a:srgbClr val="FFF2CC"/>
-                </a:highlight>
-              </a:rPr>
-              <a:t>如果有更新需要確認setting.yaml 中</a:t>
-            </a:r>
-            <a:endParaRPr sz="1500">
-              <a:highlight>
-                <a:srgbClr val="FFF2CC"/>
-              </a:highlight>
-            </a:endParaRPr>
-          </a:p>
-          <a:p>
-            <a:pPr indent="0" lvl="0" marL="0" rtl="0" algn="l">
-              <a:lnSpc>
-                <a:spcPct val="115000"/>
-              </a:lnSpc>
-              <a:spcBef>
-                <a:spcPts val="0"/>
-              </a:spcBef>
-              <a:spcAft>
-                <a:spcPts val="0"/>
-              </a:spcAft>
-              <a:buSzPts val="1800"/>
-              <a:buNone/>
-            </a:pPr>
-            <a:r>
-              <a:rPr lang="zh-TW" sz="1500">
-                <a:highlight>
-                  <a:srgbClr val="FFF2CC"/>
-                </a:highlight>
-              </a:rPr>
-              <a:t>crawler中委員指導教授資料</a:t>
-            </a:r>
-            <a:endParaRPr sz="1500">
-              <a:highlight>
-                <a:srgbClr val="FFF2CC"/>
-              </a:highlight>
-            </a:endParaRPr>
-          </a:p>
-          <a:p>
-            <a:pPr indent="0" lvl="0" marL="0" rtl="0" algn="l">
-              <a:lnSpc>
-                <a:spcPct val="115000"/>
-              </a:lnSpc>
-              <a:spcBef>
-                <a:spcPts val="0"/>
-              </a:spcBef>
-              <a:spcAft>
-                <a:spcPts val="0"/>
-              </a:spcAft>
-              <a:buSzPts val="1800"/>
-              <a:buNone/>
-            </a:pPr>
-            <a:r>
-              <a:rPr lang="zh-TW" sz="1500">
-                <a:highlight>
-                  <a:srgbClr val="FFF2CC"/>
-                </a:highlight>
-              </a:rPr>
-              <a:t>是指向最新檔案</a:t>
-            </a:r>
-            <a:endParaRPr sz="1500">
-              <a:highlight>
-                <a:srgbClr val="FFF2CC"/>
-              </a:highlight>
-            </a:endParaRPr>
-          </a:p>
-        </p:txBody>
-      </p:sp>
-      <p:sp>
-        <p:nvSpPr>
-          <p:cNvPr id="303" name="Google Shape;303;g3f4f89e88cb_0_25"/>
-          <p:cNvSpPr txBox="1"/>
-          <p:nvPr/>
-        </p:nvSpPr>
-        <p:spPr>
-          <a:xfrm>
-            <a:off x="5081425" y="44875"/>
-            <a:ext cx="4062600" cy="738900"/>
-          </a:xfrm>
-          <a:prstGeom prst="rect">
-            <a:avLst/>
-          </a:prstGeom>
-          <a:noFill/>
-          <a:ln>
-            <a:noFill/>
-          </a:ln>
-        </p:spPr>
-        <p:txBody>
-          <a:bodyPr anchorCtr="0" anchor="t" bIns="91425" lIns="91425" spcFirstLastPara="1" rIns="91425" wrap="square" tIns="91425">
-            <a:spAutoFit/>
-          </a:bodyPr>
-          <a:lstStyle/>
-          <a:p>
-            <a:pPr indent="0" lvl="0" marL="0" marR="0" rtl="0" algn="r">
-              <a:lnSpc>
-                <a:spcPct val="100000"/>
-              </a:lnSpc>
-              <a:spcBef>
-                <a:spcPts val="0"/>
-              </a:spcBef>
-              <a:spcAft>
-                <a:spcPts val="0"/>
-              </a:spcAft>
-              <a:buClr>
-                <a:srgbClr val="000000"/>
-              </a:buClr>
-              <a:buSzPts val="3600"/>
-              <a:buFont typeface="Arial"/>
-              <a:buNone/>
-            </a:pPr>
-            <a:r>
-              <a:rPr b="0" i="0" lang="zh-TW" sz="3600" u="none" cap="none" strike="noStrike">
-                <a:solidFill>
-                  <a:srgbClr val="FF0000"/>
-                </a:solidFill>
-                <a:latin typeface="Arial"/>
-                <a:ea typeface="Arial"/>
-                <a:cs typeface="Arial"/>
-                <a:sym typeface="Arial"/>
-              </a:rPr>
-              <a:t>windows</a:t>
-            </a:r>
-            <a:r>
-              <a:rPr lang="zh-TW" sz="3600">
-                <a:solidFill>
-                  <a:srgbClr val="FF0000"/>
-                </a:solidFill>
-              </a:rPr>
-              <a:t>_crawl</a:t>
-            </a:r>
-            <a:r>
-              <a:rPr b="0" i="0" lang="zh-TW" sz="3600" u="none" cap="none" strike="noStrike">
-                <a:solidFill>
-                  <a:srgbClr val="FF0000"/>
-                </a:solidFill>
-                <a:latin typeface="Arial"/>
-                <a:ea typeface="Arial"/>
-                <a:cs typeface="Arial"/>
-                <a:sym typeface="Arial"/>
-              </a:rPr>
-              <a:t>.bat </a:t>
-            </a:r>
-            <a:endParaRPr b="0" i="0" sz="3600" u="none" cap="none" strike="noStrike">
-              <a:solidFill>
-                <a:srgbClr val="FF0000"/>
-              </a:solidFill>
-              <a:latin typeface="Arial"/>
-              <a:ea typeface="Arial"/>
-              <a:cs typeface="Arial"/>
-              <a:sym typeface="Arial"/>
-            </a:endParaRPr>
           </a:p>
         </p:txBody>
       </p:sp>
       <p:pic>
         <p:nvPicPr>
-          <p:cNvPr id="304" name="Google Shape;304;g3f4f89e88cb_0_25" title="截圖 2026-07-13 14.01.45.png"/>
+          <p:cNvPr id="308" name="Google Shape;308;g3f4f89e88cb_0_8"/>
           <p:cNvPicPr preferRelativeResize="0"/>
           <p:nvPr/>
         </p:nvPicPr>
@@ -18328,8 +18567,8 @@
         </p:blipFill>
         <p:spPr>
           <a:xfrm>
-            <a:off x="4148125" y="1610825"/>
-            <a:ext cx="4684168" cy="1298475"/>
+            <a:off x="4090263" y="816488"/>
+            <a:ext cx="4581525" cy="733425"/>
           </a:xfrm>
           <a:prstGeom prst="rect">
             <a:avLst/>
@@ -18340,226 +18579,6 @@
           </a:ln>
         </p:spPr>
       </p:pic>
-      <p:sp>
-        <p:nvSpPr>
-          <p:cNvPr id="305" name="Google Shape;305;g3f4f89e88cb_0_25"/>
-          <p:cNvSpPr/>
-          <p:nvPr/>
-        </p:nvSpPr>
-        <p:spPr>
-          <a:xfrm>
-            <a:off x="4189275" y="2249800"/>
-            <a:ext cx="1668000" cy="411300"/>
-          </a:xfrm>
-          <a:prstGeom prst="rect">
-            <a:avLst/>
-          </a:prstGeom>
-          <a:noFill/>
-          <a:ln cap="flat" cmpd="sng" w="28575">
-            <a:solidFill>
-              <a:schemeClr val="accent4"/>
-            </a:solidFill>
-            <a:prstDash val="solid"/>
-            <a:round/>
-            <a:headEnd len="sm" w="sm" type="none"/>
-            <a:tailEnd len="sm" w="sm" type="none"/>
-          </a:ln>
-        </p:spPr>
-        <p:txBody>
-          <a:bodyPr anchorCtr="0" anchor="ctr" bIns="91425" lIns="91425" spcFirstLastPara="1" rIns="91425" wrap="square" tIns="91425">
-            <a:noAutofit/>
-          </a:bodyPr>
-          <a:lstStyle/>
-          <a:p>
-            <a:pPr indent="0" lvl="0" marL="0" rtl="0" algn="ctr">
-              <a:spcBef>
-                <a:spcPts val="0"/>
-              </a:spcBef>
-              <a:spcAft>
-                <a:spcPts val="0"/>
-              </a:spcAft>
-              <a:buNone/>
-            </a:pPr>
-            <a:r>
-              <a:t/>
-            </a:r>
-            <a:endParaRPr/>
-          </a:p>
-        </p:txBody>
-      </p:sp>
-      <p:pic>
-        <p:nvPicPr>
-          <p:cNvPr id="306" name="Google Shape;306;g3f4f89e88cb_0_25" title="截圖 2026-07-13 14.03.12.png"/>
-          <p:cNvPicPr preferRelativeResize="0"/>
-          <p:nvPr/>
-        </p:nvPicPr>
-        <p:blipFill>
-          <a:blip r:embed="rId4">
-            <a:alphaModFix/>
-          </a:blip>
-          <a:stretch>
-            <a:fillRect/>
-          </a:stretch>
-        </p:blipFill>
-        <p:spPr>
-          <a:xfrm>
-            <a:off x="4109125" y="3647602"/>
-            <a:ext cx="4684177" cy="1429278"/>
-          </a:xfrm>
-          <a:prstGeom prst="rect">
-            <a:avLst/>
-          </a:prstGeom>
-          <a:noFill/>
-          <a:ln>
-            <a:noFill/>
-          </a:ln>
-        </p:spPr>
-      </p:pic>
-      <p:sp>
-        <p:nvSpPr>
-          <p:cNvPr id="307" name="Google Shape;307;g3f4f89e88cb_0_25"/>
-          <p:cNvSpPr/>
-          <p:nvPr/>
-        </p:nvSpPr>
-        <p:spPr>
-          <a:xfrm>
-            <a:off x="4163650" y="4569425"/>
-            <a:ext cx="2027100" cy="139500"/>
-          </a:xfrm>
-          <a:prstGeom prst="rect">
-            <a:avLst/>
-          </a:prstGeom>
-          <a:noFill/>
-          <a:ln cap="flat" cmpd="sng" w="28575">
-            <a:solidFill>
-              <a:schemeClr val="accent4"/>
-            </a:solidFill>
-            <a:prstDash val="solid"/>
-            <a:round/>
-            <a:headEnd len="sm" w="sm" type="none"/>
-            <a:tailEnd len="sm" w="sm" type="none"/>
-          </a:ln>
-        </p:spPr>
-        <p:txBody>
-          <a:bodyPr anchorCtr="0" anchor="ctr" bIns="91425" lIns="91425" spcFirstLastPara="1" rIns="91425" wrap="square" tIns="91425">
-            <a:noAutofit/>
-          </a:bodyPr>
-          <a:lstStyle/>
-          <a:p>
-            <a:pPr indent="0" lvl="0" marL="0" rtl="0" algn="ctr">
-              <a:spcBef>
-                <a:spcPts val="0"/>
-              </a:spcBef>
-              <a:spcAft>
-                <a:spcPts val="0"/>
-              </a:spcAft>
-              <a:buNone/>
-            </a:pPr>
-            <a:r>
-              <a:t/>
-            </a:r>
-            <a:endParaRPr/>
-          </a:p>
-        </p:txBody>
-      </p:sp>
-      <p:sp>
-        <p:nvSpPr>
-          <p:cNvPr id="308" name="Google Shape;308;g3f4f89e88cb_0_25"/>
-          <p:cNvSpPr txBox="1"/>
-          <p:nvPr/>
-        </p:nvSpPr>
-        <p:spPr>
-          <a:xfrm>
-            <a:off x="311700" y="2238000"/>
-            <a:ext cx="5213400" cy="877200"/>
-          </a:xfrm>
-          <a:prstGeom prst="rect">
-            <a:avLst/>
-          </a:prstGeom>
-          <a:noFill/>
-          <a:ln>
-            <a:noFill/>
-          </a:ln>
-        </p:spPr>
-        <p:txBody>
-          <a:bodyPr anchorCtr="0" anchor="t" bIns="91425" lIns="91425" spcFirstLastPara="1" rIns="91425" wrap="square" tIns="91425">
-            <a:spAutoFit/>
-          </a:bodyPr>
-          <a:lstStyle/>
-          <a:p>
-            <a:pPr indent="0" lvl="0" marL="0" rtl="0" algn="l">
-              <a:spcBef>
-                <a:spcPts val="0"/>
-              </a:spcBef>
-              <a:spcAft>
-                <a:spcPts val="0"/>
-              </a:spcAft>
-              <a:buNone/>
-            </a:pPr>
-            <a:r>
-              <a:rPr lang="zh-TW" sz="1500">
-                <a:solidFill>
-                  <a:srgbClr val="FF0000"/>
-                </a:solidFill>
-              </a:rPr>
-              <a:t>一定要有</a:t>
-            </a:r>
-            <a:endParaRPr sz="1500">
-              <a:solidFill>
-                <a:srgbClr val="FF0000"/>
-              </a:solidFill>
-            </a:endParaRPr>
-          </a:p>
-          <a:p>
-            <a:pPr indent="0" lvl="0" marL="0" rtl="0" algn="l">
-              <a:spcBef>
-                <a:spcPts val="0"/>
-              </a:spcBef>
-              <a:spcAft>
-                <a:spcPts val="0"/>
-              </a:spcAft>
-              <a:buNone/>
-            </a:pPr>
-            <a:r>
-              <a:rPr lang="zh-TW" sz="1500">
-                <a:solidFill>
-                  <a:srgbClr val="FF0000"/>
-                </a:solidFill>
-              </a:rPr>
-              <a:t>在先前執行推薦時會自動更新</a:t>
-            </a:r>
-            <a:endParaRPr sz="1500">
-              <a:solidFill>
-                <a:srgbClr val="FF0000"/>
-              </a:solidFill>
-            </a:endParaRPr>
-          </a:p>
-          <a:p>
-            <a:pPr indent="0" lvl="0" marL="0" rtl="0" algn="l">
-              <a:spcBef>
-                <a:spcPts val="0"/>
-              </a:spcBef>
-              <a:spcAft>
-                <a:spcPts val="0"/>
-              </a:spcAft>
-              <a:buNone/>
-            </a:pPr>
-            <a:r>
-              <a:rPr lang="zh-TW" sz="1500">
-                <a:solidFill>
-                  <a:srgbClr val="FF0000"/>
-                </a:solidFill>
-              </a:rPr>
-              <a:t>故建議是每年更新一次即可(先前的檔案不要刪掉)</a:t>
-            </a:r>
-            <a:endParaRPr sz="1500">
-              <a:solidFill>
-                <a:srgbClr val="FF0000"/>
-              </a:solidFill>
-            </a:endParaRPr>
-          </a:p>
-        </p:txBody>
-      </p:sp>
     </p:spTree>
   </p:cSld>
   <p:clrMapOvr>
@@ -18568,7 +18587,7 @@
 </p:sld>
 </file>
 
-<file path=ppt/slides/slide27.xml><?xml version="1.0" encoding="utf-8"?>
+<file path=ppt/slides/slide26.xml><?xml version="1.0" encoding="utf-8"?>
 <p:sld xmlns:a="http://schemas.openxmlformats.org/drawingml/2006/main" xmlns:r="http://schemas.openxmlformats.org/officeDocument/2006/relationships" xmlns:mc="http://schemas.openxmlformats.org/markup-compatibility/2006" xmlns:mv="urn:schemas-microsoft-com:mac:vml" xmlns:p="http://schemas.openxmlformats.org/presentationml/2006/main" xmlns:c="http://schemas.openxmlformats.org/drawingml/2006/chart" xmlns:dgm="http://schemas.openxmlformats.org/drawingml/2006/diagram" xmlns:o="urn:schemas-microsoft-com:office:office" xmlns:v="urn:schemas-microsoft-com:vml" xmlns:pvml="urn:schemas-microsoft-com:office:powerpoint" xmlns:com="http://schemas.openxmlformats.org/drawingml/2006/compatibility" xmlns:p14="http://schemas.microsoft.com/office/powerpoint/2010/main" xmlns:p15="http://schemas.microsoft.com/office/powerpoint/2012/main" xmlns:ahyp="http://schemas.microsoft.com/office/drawing/2018/hyperlinkcolor">
   <p:cSld>
     <p:spTree>
@@ -18587,7 +18606,187 @@
       </p:grpSpPr>
       <p:sp>
         <p:nvSpPr>
-          <p:cNvPr id="313" name="Google Shape;313;g3f4f89e88cb_0_46"/>
+          <p:cNvPr id="313" name="Google Shape;313;g3f4f89e88cb_0_19"/>
+          <p:cNvSpPr txBox="1"/>
+          <p:nvPr>
+            <p:ph type="ctrTitle"/>
+          </p:nvPr>
+        </p:nvSpPr>
+        <p:spPr>
+          <a:xfrm>
+            <a:off x="311708" y="744575"/>
+            <a:ext cx="8520600" cy="2052600"/>
+          </a:xfrm>
+          <a:prstGeom prst="rect">
+            <a:avLst/>
+          </a:prstGeom>
+          <a:noFill/>
+          <a:ln>
+            <a:noFill/>
+          </a:ln>
+        </p:spPr>
+        <p:txBody>
+          <a:bodyPr anchorCtr="0" anchor="b" bIns="91425" lIns="91425" spcFirstLastPara="1" rIns="91425" wrap="square" tIns="91425">
+            <a:normAutofit/>
+          </a:bodyPr>
+          <a:lstStyle/>
+          <a:p>
+            <a:pPr indent="0" lvl="0" marL="0" rtl="0" algn="ctr">
+              <a:lnSpc>
+                <a:spcPct val="100000"/>
+              </a:lnSpc>
+              <a:spcBef>
+                <a:spcPts val="0"/>
+              </a:spcBef>
+              <a:spcAft>
+                <a:spcPts val="0"/>
+              </a:spcAft>
+              <a:buSzPts val="5200"/>
+              <a:buNone/>
+            </a:pPr>
+            <a:r>
+              <a:rPr lang="zh-TW" sz="6500"/>
+              <a:t>更新資料</a:t>
+            </a:r>
+            <a:endParaRPr sz="6500"/>
+          </a:p>
+        </p:txBody>
+      </p:sp>
+      <p:sp>
+        <p:nvSpPr>
+          <p:cNvPr id="314" name="Google Shape;314;g3f4f89e88cb_0_19"/>
+          <p:cNvSpPr txBox="1"/>
+          <p:nvPr/>
+        </p:nvSpPr>
+        <p:spPr>
+          <a:xfrm>
+            <a:off x="0" y="3666000"/>
+            <a:ext cx="5937300" cy="1477500"/>
+          </a:xfrm>
+          <a:prstGeom prst="rect">
+            <a:avLst/>
+          </a:prstGeom>
+          <a:noFill/>
+          <a:ln>
+            <a:noFill/>
+          </a:ln>
+        </p:spPr>
+        <p:txBody>
+          <a:bodyPr anchorCtr="0" anchor="t" bIns="91425" lIns="91425" spcFirstLastPara="1" rIns="91425" wrap="square" tIns="91425">
+            <a:spAutoFit/>
+          </a:bodyPr>
+          <a:lstStyle/>
+          <a:p>
+            <a:pPr indent="0" lvl="0" marL="0" marR="0" rtl="0" algn="l">
+              <a:lnSpc>
+                <a:spcPct val="100000"/>
+              </a:lnSpc>
+              <a:spcBef>
+                <a:spcPts val="0"/>
+              </a:spcBef>
+              <a:spcAft>
+                <a:spcPts val="0"/>
+              </a:spcAft>
+              <a:buNone/>
+            </a:pPr>
+            <a:r>
+              <a:rPr lang="zh-TW" sz="2800">
+                <a:solidFill>
+                  <a:srgbClr val="FF0000"/>
+                </a:solidFill>
+              </a:rPr>
+              <a:t>如果資料庫或是教授資料需要更新</a:t>
+            </a:r>
+            <a:endParaRPr sz="2800">
+              <a:solidFill>
+                <a:srgbClr val="FF0000"/>
+              </a:solidFill>
+            </a:endParaRPr>
+          </a:p>
+          <a:p>
+            <a:pPr indent="0" lvl="0" marL="0" marR="0" rtl="0" algn="l">
+              <a:lnSpc>
+                <a:spcPct val="100000"/>
+              </a:lnSpc>
+              <a:spcBef>
+                <a:spcPts val="0"/>
+              </a:spcBef>
+              <a:spcAft>
+                <a:spcPts val="0"/>
+              </a:spcAft>
+              <a:buNone/>
+            </a:pPr>
+            <a:r>
+              <a:rPr lang="zh-TW" sz="2800">
+                <a:solidFill>
+                  <a:srgbClr val="FF0000"/>
+                </a:solidFill>
+              </a:rPr>
+              <a:t>請使用以下步驟</a:t>
+            </a:r>
+            <a:endParaRPr sz="2800">
+              <a:solidFill>
+                <a:srgbClr val="FF0000"/>
+              </a:solidFill>
+            </a:endParaRPr>
+          </a:p>
+          <a:p>
+            <a:pPr indent="0" lvl="0" marL="0" marR="0" rtl="0" algn="l">
+              <a:lnSpc>
+                <a:spcPct val="100000"/>
+              </a:lnSpc>
+              <a:spcBef>
+                <a:spcPts val="0"/>
+              </a:spcBef>
+              <a:spcAft>
+                <a:spcPts val="0"/>
+              </a:spcAft>
+              <a:buNone/>
+            </a:pPr>
+            <a:r>
+              <a:rPr lang="zh-TW" sz="2800">
+                <a:solidFill>
+                  <a:srgbClr val="FF0000"/>
+                </a:solidFill>
+              </a:rPr>
+              <a:t>建議找學生處理有些許複雜</a:t>
+            </a:r>
+            <a:endParaRPr sz="2800">
+              <a:solidFill>
+                <a:srgbClr val="FF0000"/>
+              </a:solidFill>
+            </a:endParaRPr>
+          </a:p>
+        </p:txBody>
+      </p:sp>
+    </p:spTree>
+  </p:cSld>
+  <p:clrMapOvr>
+    <a:masterClrMapping/>
+  </p:clrMapOvr>
+</p:sld>
+</file>
+
+<file path=ppt/slides/slide27.xml><?xml version="1.0" encoding="utf-8"?>
+<p:sld xmlns:a="http://schemas.openxmlformats.org/drawingml/2006/main" xmlns:r="http://schemas.openxmlformats.org/officeDocument/2006/relationships" xmlns:mc="http://schemas.openxmlformats.org/markup-compatibility/2006" xmlns:mv="urn:schemas-microsoft-com:mac:vml" xmlns:p="http://schemas.openxmlformats.org/presentationml/2006/main" xmlns:c="http://schemas.openxmlformats.org/drawingml/2006/chart" xmlns:dgm="http://schemas.openxmlformats.org/drawingml/2006/diagram" xmlns:o="urn:schemas-microsoft-com:office:office" xmlns:v="urn:schemas-microsoft-com:vml" xmlns:pvml="urn:schemas-microsoft-com:office:powerpoint" xmlns:com="http://schemas.openxmlformats.org/drawingml/2006/compatibility" xmlns:p14="http://schemas.microsoft.com/office/powerpoint/2010/main" xmlns:p15="http://schemas.microsoft.com/office/powerpoint/2012/main" xmlns:ahyp="http://schemas.microsoft.com/office/drawing/2018/hyperlinkcolor">
+  <p:cSld>
+    <p:spTree>
+      <p:nvGrpSpPr>
+        <p:cNvPr id="318" name="Shape 318"/>
+        <p:cNvGrpSpPr/>
+        <p:nvPr/>
+      </p:nvGrpSpPr>
+      <p:grpSpPr>
+        <a:xfrm>
+          <a:off x="0" y="0"/>
+          <a:ext cx="0" cy="0"/>
+          <a:chOff x="0" y="0"/>
+          <a:chExt cx="0" cy="0"/>
+        </a:xfrm>
+      </p:grpSpPr>
+      <p:sp>
+        <p:nvSpPr>
+          <p:cNvPr id="319" name="Google Shape;319;g3f4f89e88cb_0_25"/>
           <p:cNvSpPr txBox="1"/>
           <p:nvPr>
             <p:ph type="title"/>
@@ -18633,9 +18832,308 @@
           </a:p>
         </p:txBody>
       </p:sp>
+      <p:sp>
+        <p:nvSpPr>
+          <p:cNvPr id="320" name="Google Shape;320;g3f4f89e88cb_0_25"/>
+          <p:cNvSpPr txBox="1"/>
+          <p:nvPr>
+            <p:ph idx="1" type="body"/>
+          </p:nvPr>
+        </p:nvSpPr>
+        <p:spPr>
+          <a:xfrm>
+            <a:off x="311700" y="1152475"/>
+            <a:ext cx="8520600" cy="3416400"/>
+          </a:xfrm>
+          <a:prstGeom prst="rect">
+            <a:avLst/>
+          </a:prstGeom>
+          <a:noFill/>
+          <a:ln>
+            <a:noFill/>
+          </a:ln>
+        </p:spPr>
+        <p:txBody>
+          <a:bodyPr anchorCtr="0" anchor="t" bIns="91425" lIns="91425" spcFirstLastPara="1" rIns="91425" wrap="square" tIns="91425">
+            <a:normAutofit/>
+          </a:bodyPr>
+          <a:lstStyle/>
+          <a:p>
+            <a:pPr indent="0" lvl="0" marL="0" rtl="0" algn="l">
+              <a:lnSpc>
+                <a:spcPct val="115000"/>
+              </a:lnSpc>
+              <a:spcBef>
+                <a:spcPts val="1000"/>
+              </a:spcBef>
+              <a:spcAft>
+                <a:spcPts val="0"/>
+              </a:spcAft>
+              <a:buSzPts val="1800"/>
+              <a:buNone/>
+            </a:pPr>
+            <a:r>
+              <a:rPr lang="zh-TW"/>
+              <a:t>1. </a:t>
+            </a:r>
+            <a:r>
+              <a:rPr lang="zh-TW"/>
+              <a:t>需確認在 data/RDF_database 中有 暫存最新人才資料庫 與 統計清單人才資料_RDF_UNI</a:t>
+            </a:r>
+            <a:endParaRPr/>
+          </a:p>
+          <a:p>
+            <a:pPr indent="0" lvl="0" marL="0" rtl="0" algn="l">
+              <a:lnSpc>
+                <a:spcPct val="115000"/>
+              </a:lnSpc>
+              <a:spcBef>
+                <a:spcPts val="1000"/>
+              </a:spcBef>
+              <a:spcAft>
+                <a:spcPts val="0"/>
+              </a:spcAft>
+              <a:buSzPts val="1800"/>
+              <a:buNone/>
+            </a:pPr>
+            <a:r>
+              <a:t/>
+            </a:r>
+            <a:endParaRPr/>
+          </a:p>
+          <a:p>
+            <a:pPr indent="0" lvl="0" marL="0" rtl="0" algn="l">
+              <a:lnSpc>
+                <a:spcPct val="115000"/>
+              </a:lnSpc>
+              <a:spcBef>
+                <a:spcPts val="1000"/>
+              </a:spcBef>
+              <a:spcAft>
+                <a:spcPts val="0"/>
+              </a:spcAft>
+              <a:buSzPts val="1800"/>
+              <a:buNone/>
+            </a:pPr>
+            <a:r>
+              <a:t/>
+            </a:r>
+            <a:endParaRPr/>
+          </a:p>
+          <a:p>
+            <a:pPr indent="0" lvl="0" marL="0" rtl="0" algn="l">
+              <a:lnSpc>
+                <a:spcPct val="115000"/>
+              </a:lnSpc>
+              <a:spcBef>
+                <a:spcPts val="1000"/>
+              </a:spcBef>
+              <a:spcAft>
+                <a:spcPts val="0"/>
+              </a:spcAft>
+              <a:buSzPts val="1800"/>
+              <a:buNone/>
+            </a:pPr>
+            <a:r>
+              <a:t/>
+            </a:r>
+            <a:endParaRPr/>
+          </a:p>
+          <a:p>
+            <a:pPr indent="0" lvl="0" marL="0" rtl="0" algn="l">
+              <a:lnSpc>
+                <a:spcPct val="115000"/>
+              </a:lnSpc>
+              <a:spcBef>
+                <a:spcPts val="0"/>
+              </a:spcBef>
+              <a:spcAft>
+                <a:spcPts val="0"/>
+              </a:spcAft>
+              <a:buSzPts val="1800"/>
+              <a:buNone/>
+            </a:pPr>
+            <a:r>
+              <a:rPr lang="zh-TW"/>
+              <a:t>2. 確認在crawler 有committee_all_education_with_advisor (沒有不影響)</a:t>
+            </a:r>
+            <a:endParaRPr/>
+          </a:p>
+          <a:p>
+            <a:pPr indent="0" lvl="0" marL="0" rtl="0" algn="l">
+              <a:lnSpc>
+                <a:spcPct val="115000"/>
+              </a:lnSpc>
+              <a:spcBef>
+                <a:spcPts val="0"/>
+              </a:spcBef>
+              <a:spcAft>
+                <a:spcPts val="0"/>
+              </a:spcAft>
+              <a:buSzPts val="1800"/>
+              <a:buNone/>
+            </a:pPr>
+            <a:r>
+              <a:rPr lang="zh-TW" sz="1500">
+                <a:highlight>
+                  <a:srgbClr val="FFF2CC"/>
+                </a:highlight>
+              </a:rPr>
+              <a:t>如果有更新需要確認setting.yaml 中</a:t>
+            </a:r>
+            <a:endParaRPr sz="1500">
+              <a:highlight>
+                <a:srgbClr val="FFF2CC"/>
+              </a:highlight>
+            </a:endParaRPr>
+          </a:p>
+          <a:p>
+            <a:pPr indent="0" lvl="0" marL="0" rtl="0" algn="l">
+              <a:lnSpc>
+                <a:spcPct val="115000"/>
+              </a:lnSpc>
+              <a:spcBef>
+                <a:spcPts val="0"/>
+              </a:spcBef>
+              <a:spcAft>
+                <a:spcPts val="0"/>
+              </a:spcAft>
+              <a:buSzPts val="1800"/>
+              <a:buNone/>
+            </a:pPr>
+            <a:r>
+              <a:rPr lang="zh-TW" sz="1500">
+                <a:highlight>
+                  <a:srgbClr val="FFF2CC"/>
+                </a:highlight>
+              </a:rPr>
+              <a:t>crawler中委員指導教授資料</a:t>
+            </a:r>
+            <a:endParaRPr sz="1500">
+              <a:highlight>
+                <a:srgbClr val="FFF2CC"/>
+              </a:highlight>
+            </a:endParaRPr>
+          </a:p>
+          <a:p>
+            <a:pPr indent="0" lvl="0" marL="0" rtl="0" algn="l">
+              <a:lnSpc>
+                <a:spcPct val="115000"/>
+              </a:lnSpc>
+              <a:spcBef>
+                <a:spcPts val="0"/>
+              </a:spcBef>
+              <a:spcAft>
+                <a:spcPts val="0"/>
+              </a:spcAft>
+              <a:buSzPts val="1800"/>
+              <a:buNone/>
+            </a:pPr>
+            <a:r>
+              <a:rPr lang="zh-TW" sz="1500">
+                <a:highlight>
+                  <a:srgbClr val="FFF2CC"/>
+                </a:highlight>
+              </a:rPr>
+              <a:t>是指向最新檔案</a:t>
+            </a:r>
+            <a:endParaRPr sz="1500">
+              <a:highlight>
+                <a:srgbClr val="FFF2CC"/>
+              </a:highlight>
+            </a:endParaRPr>
+          </a:p>
+        </p:txBody>
+      </p:sp>
+      <p:sp>
+        <p:nvSpPr>
+          <p:cNvPr id="321" name="Google Shape;321;g3f4f89e88cb_0_25"/>
+          <p:cNvSpPr txBox="1"/>
+          <p:nvPr/>
+        </p:nvSpPr>
+        <p:spPr>
+          <a:xfrm>
+            <a:off x="5081425" y="44875"/>
+            <a:ext cx="4062600" cy="738900"/>
+          </a:xfrm>
+          <a:prstGeom prst="rect">
+            <a:avLst/>
+          </a:prstGeom>
+          <a:noFill/>
+          <a:ln>
+            <a:noFill/>
+          </a:ln>
+        </p:spPr>
+        <p:txBody>
+          <a:bodyPr anchorCtr="0" anchor="t" bIns="91425" lIns="91425" spcFirstLastPara="1" rIns="91425" wrap="square" tIns="91425">
+            <a:spAutoFit/>
+          </a:bodyPr>
+          <a:lstStyle/>
+          <a:p>
+            <a:pPr indent="0" lvl="0" marL="0" marR="0" rtl="0" algn="r">
+              <a:lnSpc>
+                <a:spcPct val="100000"/>
+              </a:lnSpc>
+              <a:spcBef>
+                <a:spcPts val="0"/>
+              </a:spcBef>
+              <a:spcAft>
+                <a:spcPts val="0"/>
+              </a:spcAft>
+              <a:buClr>
+                <a:srgbClr val="000000"/>
+              </a:buClr>
+              <a:buSzPts val="3600"/>
+              <a:buFont typeface="Arial"/>
+              <a:buNone/>
+            </a:pPr>
+            <a:r>
+              <a:rPr b="0" i="0" lang="zh-TW" sz="3600" u="none" cap="none" strike="noStrike">
+                <a:solidFill>
+                  <a:srgbClr val="FF0000"/>
+                </a:solidFill>
+                <a:latin typeface="Arial"/>
+                <a:ea typeface="Arial"/>
+                <a:cs typeface="Arial"/>
+                <a:sym typeface="Arial"/>
+              </a:rPr>
+              <a:t>windows</a:t>
+            </a:r>
+            <a:r>
+              <a:rPr lang="zh-TW" sz="3600">
+                <a:solidFill>
+                  <a:srgbClr val="FF0000"/>
+                </a:solidFill>
+              </a:rPr>
+              <a:t>_crawl</a:t>
+            </a:r>
+            <a:r>
+              <a:rPr b="0" i="0" lang="zh-TW" sz="3600" u="none" cap="none" strike="noStrike">
+                <a:solidFill>
+                  <a:srgbClr val="FF0000"/>
+                </a:solidFill>
+                <a:latin typeface="Arial"/>
+                <a:ea typeface="Arial"/>
+                <a:cs typeface="Arial"/>
+                <a:sym typeface="Arial"/>
+              </a:rPr>
+              <a:t>.bat </a:t>
+            </a:r>
+            <a:endParaRPr b="0" i="0" sz="3600" u="none" cap="none" strike="noStrike">
+              <a:solidFill>
+                <a:srgbClr val="FF0000"/>
+              </a:solidFill>
+              <a:latin typeface="Arial"/>
+              <a:ea typeface="Arial"/>
+              <a:cs typeface="Arial"/>
+              <a:sym typeface="Arial"/>
+            </a:endParaRPr>
+          </a:p>
+        </p:txBody>
+      </p:sp>
       <p:pic>
         <p:nvPicPr>
-          <p:cNvPr id="314" name="Google Shape;314;g3f4f89e88cb_0_46"/>
+          <p:cNvPr id="322" name="Google Shape;322;g3f4f89e88cb_0_25" title="截圖 2026-07-13 14.01.45.png"/>
           <p:cNvPicPr preferRelativeResize="0"/>
           <p:nvPr/>
         </p:nvPicPr>
@@ -18649,8 +19147,8 @@
         </p:blipFill>
         <p:spPr>
           <a:xfrm>
-            <a:off x="311700" y="2842950"/>
-            <a:ext cx="4468501" cy="2260551"/>
+            <a:off x="4148125" y="1610825"/>
+            <a:ext cx="4684168" cy="1298475"/>
           </a:xfrm>
           <a:prstGeom prst="rect">
             <a:avLst/>
@@ -18663,234 +19161,22 @@
       </p:pic>
       <p:sp>
         <p:nvSpPr>
-          <p:cNvPr id="315" name="Google Shape;315;g3f4f89e88cb_0_46"/>
-          <p:cNvSpPr txBox="1"/>
-          <p:nvPr>
-            <p:ph idx="1" type="body"/>
-          </p:nvPr>
+          <p:cNvPr id="323" name="Google Shape;323;g3f4f89e88cb_0_25"/>
+          <p:cNvSpPr/>
+          <p:nvPr/>
         </p:nvSpPr>
         <p:spPr>
           <a:xfrm>
-            <a:off x="311700" y="1152475"/>
-            <a:ext cx="8520600" cy="3416400"/>
+            <a:off x="4189275" y="2249800"/>
+            <a:ext cx="1668000" cy="411300"/>
           </a:xfrm>
           <a:prstGeom prst="rect">
             <a:avLst/>
           </a:prstGeom>
           <a:noFill/>
-          <a:ln>
-            <a:noFill/>
-          </a:ln>
-        </p:spPr>
-        <p:txBody>
-          <a:bodyPr anchorCtr="0" anchor="t" bIns="91425" lIns="91425" spcFirstLastPara="1" rIns="91425" wrap="square" tIns="91425">
-            <a:normAutofit/>
-          </a:bodyPr>
-          <a:lstStyle/>
-          <a:p>
-            <a:pPr indent="0" lvl="0" marL="0" rtl="0" algn="l">
-              <a:lnSpc>
-                <a:spcPct val="115000"/>
-              </a:lnSpc>
-              <a:spcBef>
-                <a:spcPts val="1000"/>
-              </a:spcBef>
-              <a:spcAft>
-                <a:spcPts val="0"/>
-              </a:spcAft>
-              <a:buSzPts val="1800"/>
-              <a:buNone/>
-            </a:pPr>
-            <a:r>
-              <a:rPr lang="zh-TW"/>
-              <a:t>Step1: 於 NSTC（國家科學及技術委員會研究人才查詢）以「教授名稱＋當前任職單位」取得教授畢業院校（註：部分教授未公開，故查不到）</a:t>
-            </a:r>
-            <a:endParaRPr/>
-          </a:p>
-          <a:p>
-            <a:pPr indent="0" lvl="0" marL="0" rtl="0" algn="l">
-              <a:lnSpc>
-                <a:spcPct val="115000"/>
-              </a:lnSpc>
-              <a:spcBef>
-                <a:spcPts val="1000"/>
-              </a:spcBef>
-              <a:spcAft>
-                <a:spcPts val="0"/>
-              </a:spcAft>
-              <a:buSzPts val="1800"/>
-              <a:buNone/>
-            </a:pPr>
-            <a:r>
-              <a:rPr lang="zh-TW"/>
-              <a:t>Step2:  於 NDLTD（碩博士論文加值網）取得教授的指導教授</a:t>
-            </a:r>
-            <a:endParaRPr/>
-          </a:p>
-          <a:p>
-            <a:pPr indent="0" lvl="0" marL="0" rtl="0" algn="l">
-              <a:lnSpc>
-                <a:spcPct val="115000"/>
-              </a:lnSpc>
-              <a:spcBef>
-                <a:spcPts val="1000"/>
-              </a:spcBef>
-              <a:spcAft>
-                <a:spcPts val="0"/>
-              </a:spcAft>
-              <a:buSzPts val="1800"/>
-              <a:buNone/>
-            </a:pPr>
-            <a:r>
-              <a:rPr lang="zh-TW"/>
-              <a:t>過程中因為需要打驗證碼，故需要適時查看 在輸入後按下enter</a:t>
-            </a:r>
-            <a:endParaRPr/>
-          </a:p>
-          <a:p>
-            <a:pPr indent="0" lvl="0" marL="0" rtl="0" algn="l">
-              <a:lnSpc>
-                <a:spcPct val="115000"/>
-              </a:lnSpc>
-              <a:spcBef>
-                <a:spcPts val="1000"/>
-              </a:spcBef>
-              <a:spcAft>
-                <a:spcPts val="0"/>
-              </a:spcAft>
-              <a:buSzPts val="1800"/>
-              <a:buNone/>
-            </a:pPr>
-            <a:r>
-              <a:t/>
-            </a:r>
-            <a:endParaRPr/>
-          </a:p>
-          <a:p>
-            <a:pPr indent="0" lvl="0" marL="0" rtl="0" algn="l">
-              <a:lnSpc>
-                <a:spcPct val="115000"/>
-              </a:lnSpc>
-              <a:spcBef>
-                <a:spcPts val="1000"/>
-              </a:spcBef>
-              <a:spcAft>
-                <a:spcPts val="0"/>
-              </a:spcAft>
-              <a:buSzPts val="1800"/>
-              <a:buNone/>
-            </a:pPr>
-            <a:r>
-              <a:t/>
-            </a:r>
-            <a:endParaRPr/>
-          </a:p>
-        </p:txBody>
-      </p:sp>
-      <p:sp>
-        <p:nvSpPr>
-          <p:cNvPr id="316" name="Google Shape;316;g3f4f89e88cb_0_46"/>
-          <p:cNvSpPr txBox="1"/>
-          <p:nvPr/>
-        </p:nvSpPr>
-        <p:spPr>
-          <a:xfrm>
-            <a:off x="5081425" y="44875"/>
-            <a:ext cx="4062600" cy="738900"/>
-          </a:xfrm>
-          <a:prstGeom prst="rect">
-            <a:avLst/>
-          </a:prstGeom>
-          <a:noFill/>
-          <a:ln>
-            <a:noFill/>
-          </a:ln>
-        </p:spPr>
-        <p:txBody>
-          <a:bodyPr anchorCtr="0" anchor="t" bIns="91425" lIns="91425" spcFirstLastPara="1" rIns="91425" wrap="square" tIns="91425">
-            <a:spAutoFit/>
-          </a:bodyPr>
-          <a:lstStyle/>
-          <a:p>
-            <a:pPr indent="0" lvl="0" marL="0" marR="0" rtl="0" algn="r">
-              <a:lnSpc>
-                <a:spcPct val="100000"/>
-              </a:lnSpc>
-              <a:spcBef>
-                <a:spcPts val="0"/>
-              </a:spcBef>
-              <a:spcAft>
-                <a:spcPts val="0"/>
-              </a:spcAft>
-              <a:buClr>
-                <a:srgbClr val="000000"/>
-              </a:buClr>
-              <a:buSzPts val="3600"/>
-              <a:buFont typeface="Arial"/>
-              <a:buNone/>
-            </a:pPr>
-            <a:r>
-              <a:rPr b="0" i="0" lang="zh-TW" sz="3600" u="none" cap="none" strike="noStrike">
-                <a:solidFill>
-                  <a:srgbClr val="FF0000"/>
-                </a:solidFill>
-                <a:latin typeface="Arial"/>
-                <a:ea typeface="Arial"/>
-                <a:cs typeface="Arial"/>
-                <a:sym typeface="Arial"/>
-              </a:rPr>
-              <a:t>windows</a:t>
-            </a:r>
-            <a:r>
-              <a:rPr lang="zh-TW" sz="3600">
-                <a:solidFill>
-                  <a:srgbClr val="FF0000"/>
-                </a:solidFill>
-              </a:rPr>
-              <a:t>_crawl</a:t>
-            </a:r>
-            <a:r>
-              <a:rPr b="0" i="0" lang="zh-TW" sz="3600" u="none" cap="none" strike="noStrike">
-                <a:solidFill>
-                  <a:srgbClr val="FF0000"/>
-                </a:solidFill>
-                <a:latin typeface="Arial"/>
-                <a:ea typeface="Arial"/>
-                <a:cs typeface="Arial"/>
-                <a:sym typeface="Arial"/>
-              </a:rPr>
-              <a:t>.bat </a:t>
-            </a:r>
-            <a:endParaRPr b="0" i="0" sz="3600" u="none" cap="none" strike="noStrike">
-              <a:solidFill>
-                <a:srgbClr val="FF0000"/>
-              </a:solidFill>
-              <a:latin typeface="Arial"/>
-              <a:ea typeface="Arial"/>
-              <a:cs typeface="Arial"/>
-              <a:sym typeface="Arial"/>
-            </a:endParaRPr>
-          </a:p>
-        </p:txBody>
-      </p:sp>
-      <p:sp>
-        <p:nvSpPr>
-          <p:cNvPr id="317" name="Google Shape;317;g3f4f89e88cb_0_46"/>
-          <p:cNvSpPr/>
-          <p:nvPr/>
-        </p:nvSpPr>
-        <p:spPr>
-          <a:xfrm>
-            <a:off x="311700" y="4057375"/>
-            <a:ext cx="1837200" cy="263700"/>
-          </a:xfrm>
-          <a:prstGeom prst="rect">
-            <a:avLst/>
-          </a:prstGeom>
-          <a:noFill/>
           <a:ln cap="flat" cmpd="sng" w="28575">
             <a:solidFill>
-              <a:schemeClr val="lt1"/>
+              <a:schemeClr val="accent4"/>
             </a:solidFill>
             <a:prstDash val="solid"/>
             <a:round/>
@@ -18922,7 +19208,7 @@
       </p:sp>
       <p:pic>
         <p:nvPicPr>
-          <p:cNvPr id="318" name="Google Shape;318;g3f4f89e88cb_0_46"/>
+          <p:cNvPr id="324" name="Google Shape;324;g3f4f89e88cb_0_25" title="截圖 2026-07-13 14.03.12.png"/>
           <p:cNvPicPr preferRelativeResize="0"/>
           <p:nvPr/>
         </p:nvPicPr>
@@ -18936,8 +19222,8 @@
         </p:blipFill>
         <p:spPr>
           <a:xfrm>
-            <a:off x="5003850" y="3461150"/>
-            <a:ext cx="3952998" cy="1593750"/>
+            <a:off x="4109125" y="3647602"/>
+            <a:ext cx="4684177" cy="1429278"/>
           </a:xfrm>
           <a:prstGeom prst="rect">
             <a:avLst/>
@@ -18950,14 +19236,14 @@
       </p:pic>
       <p:sp>
         <p:nvSpPr>
-          <p:cNvPr id="319" name="Google Shape;319;g3f4f89e88cb_0_46"/>
+          <p:cNvPr id="325" name="Google Shape;325;g3f4f89e88cb_0_25"/>
           <p:cNvSpPr/>
           <p:nvPr/>
         </p:nvSpPr>
         <p:spPr>
           <a:xfrm>
-            <a:off x="5003850" y="3894475"/>
-            <a:ext cx="1668000" cy="504300"/>
+            <a:off x="4163650" y="4569425"/>
+            <a:ext cx="2027100" cy="139500"/>
           </a:xfrm>
           <a:prstGeom prst="rect">
             <a:avLst/>
@@ -18997,14 +19283,14 @@
       </p:sp>
       <p:sp>
         <p:nvSpPr>
-          <p:cNvPr id="320" name="Google Shape;320;g3f4f89e88cb_0_46"/>
+          <p:cNvPr id="326" name="Google Shape;326;g3f4f89e88cb_0_25"/>
           <p:cNvSpPr txBox="1"/>
           <p:nvPr/>
         </p:nvSpPr>
         <p:spPr>
           <a:xfrm>
-            <a:off x="5003850" y="3198275"/>
-            <a:ext cx="4468500" cy="400200"/>
+            <a:off x="311700" y="2238000"/>
+            <a:ext cx="5213400" cy="877200"/>
           </a:xfrm>
           <a:prstGeom prst="rect">
             <a:avLst/>
@@ -19030,79 +19316,65 @@
               <a:buNone/>
             </a:pPr>
             <a:r>
-              <a:rPr lang="zh-TW">
+              <a:rPr lang="zh-TW" sz="1500">
                 <a:solidFill>
-                  <a:schemeClr val="dk2"/>
+                  <a:srgbClr val="FF0000"/>
                 </a:solidFill>
-                <a:highlight>
-                  <a:srgbClr val="FFF2CC"/>
-                </a:highlight>
               </a:rPr>
-              <a:t>輸入後進入碩博士網站載到終端機按下enter</a:t>
-            </a:r>
-            <a:endParaRPr>
+              <a:t>一定要有</a:t>
+            </a:r>
+            <a:endParaRPr sz="1500">
               <a:solidFill>
-                <a:schemeClr val="dk2"/>
+                <a:srgbClr val="FF0000"/>
               </a:solidFill>
-              <a:highlight>
-                <a:srgbClr val="FFF2CC"/>
-              </a:highlight>
             </a:endParaRPr>
           </a:p>
-        </p:txBody>
-      </p:sp>
-      <p:sp>
-        <p:nvSpPr>
-          <p:cNvPr id="321" name="Google Shape;321;g3f4f89e88cb_0_46"/>
-          <p:cNvSpPr txBox="1"/>
-          <p:nvPr/>
-        </p:nvSpPr>
-        <p:spPr>
-          <a:xfrm>
-            <a:off x="5684125" y="687700"/>
-            <a:ext cx="3459900" cy="400200"/>
-          </a:xfrm>
-          <a:prstGeom prst="rect">
-            <a:avLst/>
-          </a:prstGeom>
-          <a:noFill/>
-          <a:ln>
-            <a:noFill/>
-          </a:ln>
-        </p:spPr>
-        <p:txBody>
-          <a:bodyPr anchorCtr="0" anchor="t" bIns="91425" lIns="91425" spcFirstLastPara="1" rIns="91425" wrap="square" tIns="91425">
-            <a:spAutoFit/>
-          </a:bodyPr>
-          <a:lstStyle/>
-          <a:p>
-            <a:pPr indent="0" lvl="0" marL="0" rtl="0" algn="r">
-              <a:spcBef>
-                <a:spcPts val="0"/>
-              </a:spcBef>
-              <a:spcAft>
-                <a:spcPts val="0"/>
-              </a:spcAft>
-              <a:buNone/>
-            </a:pPr>
-            <a:r>
-              <a:rPr b="1" lang="zh-TW">
+          <a:p>
+            <a:pPr indent="0" lvl="0" marL="0" rtl="0" algn="l">
+              <a:spcBef>
+                <a:spcPts val="0"/>
+              </a:spcBef>
+              <a:spcAft>
+                <a:spcPts val="0"/>
+              </a:spcAft>
+              <a:buNone/>
+            </a:pPr>
+            <a:r>
+              <a:rPr lang="zh-TW" sz="1500">
                 <a:solidFill>
-                  <a:schemeClr val="dk2"/>
+                  <a:srgbClr val="FF0000"/>
                 </a:solidFill>
-                <a:highlight>
-                  <a:srgbClr val="F4CCCC"/>
-                </a:highlight>
               </a:rPr>
-              <a:t>爬蟲會執行很久 建議非必要不要更新</a:t>
-            </a:r>
-            <a:endParaRPr b="1">
+              <a:t>在先前執行推薦時會自動更新</a:t>
+            </a:r>
+            <a:endParaRPr sz="1500">
               <a:solidFill>
-                <a:schemeClr val="dk2"/>
+                <a:srgbClr val="FF0000"/>
               </a:solidFill>
-              <a:highlight>
-                <a:srgbClr val="F4CCCC"/>
-              </a:highlight>
+            </a:endParaRPr>
+          </a:p>
+          <a:p>
+            <a:pPr indent="0" lvl="0" marL="0" rtl="0" algn="l">
+              <a:spcBef>
+                <a:spcPts val="0"/>
+              </a:spcBef>
+              <a:spcAft>
+                <a:spcPts val="0"/>
+              </a:spcAft>
+              <a:buNone/>
+            </a:pPr>
+            <a:r>
+              <a:rPr lang="zh-TW" sz="1500">
+                <a:solidFill>
+                  <a:srgbClr val="FF0000"/>
+                </a:solidFill>
+              </a:rPr>
+              <a:t>故建議是每年更新一次即可(先前的檔案不要刪掉)</a:t>
+            </a:r>
+            <a:endParaRPr sz="1500">
+              <a:solidFill>
+                <a:srgbClr val="FF0000"/>
+              </a:solidFill>
             </a:endParaRPr>
           </a:p>
         </p:txBody>
@@ -19120,7 +19392,7 @@
   <p:cSld>
     <p:spTree>
       <p:nvGrpSpPr>
-        <p:cNvPr id="325" name="Shape 325"/>
+        <p:cNvPr id="330" name="Shape 330"/>
         <p:cNvGrpSpPr/>
         <p:nvPr/>
       </p:nvGrpSpPr>
@@ -19134,7 +19406,7 @@
       </p:grpSpPr>
       <p:sp>
         <p:nvSpPr>
-          <p:cNvPr id="326" name="Google Shape;326;g3f4f89e88cb_0_64"/>
+          <p:cNvPr id="331" name="Google Shape;331;g3f4f89e88cb_0_46"/>
           <p:cNvSpPr txBox="1"/>
           <p:nvPr>
             <p:ph type="title"/>
@@ -19174,219 +19446,15 @@
             </a:pPr>
             <a:r>
               <a:rPr lang="zh-TW"/>
-              <a:t>更新</a:t>
-            </a:r>
-            <a:r>
-              <a:rPr lang="zh-TW"/>
-              <a:t>通過資料</a:t>
+              <a:t>更新教授資料</a:t>
             </a:r>
             <a:endParaRPr/>
-          </a:p>
-        </p:txBody>
-      </p:sp>
-      <p:sp>
-        <p:nvSpPr>
-          <p:cNvPr id="327" name="Google Shape;327;g3f4f89e88cb_0_64"/>
-          <p:cNvSpPr txBox="1"/>
-          <p:nvPr>
-            <p:ph idx="1" type="body"/>
-          </p:nvPr>
-        </p:nvSpPr>
-        <p:spPr>
-          <a:xfrm>
-            <a:off x="311700" y="1152475"/>
-            <a:ext cx="8520600" cy="3416400"/>
-          </a:xfrm>
-          <a:prstGeom prst="rect">
-            <a:avLst/>
-          </a:prstGeom>
-          <a:noFill/>
-          <a:ln>
-            <a:noFill/>
-          </a:ln>
-        </p:spPr>
-        <p:txBody>
-          <a:bodyPr anchorCtr="0" anchor="t" bIns="91425" lIns="91425" spcFirstLastPara="1" rIns="91425" wrap="square" tIns="91425">
-            <a:normAutofit/>
-          </a:bodyPr>
-          <a:lstStyle/>
-          <a:p>
-            <a:pPr indent="-342900" lvl="0" marL="457200" rtl="0" algn="l">
-              <a:lnSpc>
-                <a:spcPct val="115000"/>
-              </a:lnSpc>
-              <a:spcBef>
-                <a:spcPts val="1000"/>
-              </a:spcBef>
-              <a:spcAft>
-                <a:spcPts val="0"/>
-              </a:spcAft>
-              <a:buSzPts val="1800"/>
-              <a:buAutoNum type="arabicPeriod"/>
-            </a:pPr>
-            <a:r>
-              <a:rPr lang="zh-TW"/>
-              <a:t>修改 setting.yaml 中資料</a:t>
-            </a:r>
-            <a:endParaRPr/>
-          </a:p>
-          <a:p>
-            <a:pPr indent="-342900" lvl="0" marL="457200" rtl="0" algn="l">
-              <a:lnSpc>
-                <a:spcPct val="115000"/>
-              </a:lnSpc>
-              <a:spcBef>
-                <a:spcPts val="0"/>
-              </a:spcBef>
-              <a:spcAft>
-                <a:spcPts val="0"/>
-              </a:spcAft>
-              <a:buSzPts val="1800"/>
-              <a:buAutoNum type="arabicPeriod"/>
-            </a:pPr>
-            <a:r>
-              <a:rPr lang="zh-TW"/>
-              <a:t>設定好後執行 windowss.bat 按下存入資料庫即可</a:t>
-            </a:r>
-            <a:endParaRPr/>
-          </a:p>
-          <a:p>
-            <a:pPr indent="0" lvl="0" marL="0" rtl="0" algn="l">
-              <a:lnSpc>
-                <a:spcPct val="115000"/>
-              </a:lnSpc>
-              <a:spcBef>
-                <a:spcPts val="1000"/>
-              </a:spcBef>
-              <a:spcAft>
-                <a:spcPts val="0"/>
-              </a:spcAft>
-              <a:buSzPts val="1800"/>
-              <a:buNone/>
-            </a:pPr>
-            <a:r>
-              <a:t/>
-            </a:r>
-            <a:endParaRPr/>
-          </a:p>
-        </p:txBody>
-      </p:sp>
-      <p:sp>
-        <p:nvSpPr>
-          <p:cNvPr id="328" name="Google Shape;328;g3f4f89e88cb_0_64"/>
-          <p:cNvSpPr/>
-          <p:nvPr/>
-        </p:nvSpPr>
-        <p:spPr>
-          <a:xfrm>
-            <a:off x="331875" y="4561650"/>
-            <a:ext cx="3052800" cy="271500"/>
-          </a:xfrm>
-          <a:prstGeom prst="rect">
-            <a:avLst/>
-          </a:prstGeom>
-          <a:noFill/>
-          <a:ln cap="flat" cmpd="sng" w="28575">
-            <a:solidFill>
-              <a:schemeClr val="lt1"/>
-            </a:solidFill>
-            <a:prstDash val="solid"/>
-            <a:round/>
-            <a:headEnd len="sm" w="sm" type="none"/>
-            <a:tailEnd len="sm" w="sm" type="none"/>
-          </a:ln>
-        </p:spPr>
-        <p:txBody>
-          <a:bodyPr anchorCtr="0" anchor="ctr" bIns="91425" lIns="91425" spcFirstLastPara="1" rIns="91425" wrap="square" tIns="91425">
-            <a:noAutofit/>
-          </a:bodyPr>
-          <a:lstStyle/>
-          <a:p>
-            <a:pPr indent="0" lvl="0" marL="0" rtl="0" algn="ctr">
-              <a:spcBef>
-                <a:spcPts val="0"/>
-              </a:spcBef>
-              <a:spcAft>
-                <a:spcPts val="0"/>
-              </a:spcAft>
-              <a:buNone/>
-            </a:pPr>
-            <a:r>
-              <a:t/>
-            </a:r>
-            <a:endParaRPr/>
-          </a:p>
-        </p:txBody>
-      </p:sp>
-      <p:sp>
-        <p:nvSpPr>
-          <p:cNvPr id="329" name="Google Shape;329;g3f4f89e88cb_0_64"/>
-          <p:cNvSpPr txBox="1"/>
-          <p:nvPr/>
-        </p:nvSpPr>
-        <p:spPr>
-          <a:xfrm>
-            <a:off x="6144000" y="44875"/>
-            <a:ext cx="3000000" cy="738900"/>
-          </a:xfrm>
-          <a:prstGeom prst="rect">
-            <a:avLst/>
-          </a:prstGeom>
-          <a:noFill/>
-          <a:ln>
-            <a:noFill/>
-          </a:ln>
-        </p:spPr>
-        <p:txBody>
-          <a:bodyPr anchorCtr="0" anchor="t" bIns="91425" lIns="91425" spcFirstLastPara="1" rIns="91425" wrap="square" tIns="91425">
-            <a:spAutoFit/>
-          </a:bodyPr>
-          <a:lstStyle/>
-          <a:p>
-            <a:pPr indent="0" lvl="0" marL="0" marR="0" rtl="0" algn="r">
-              <a:lnSpc>
-                <a:spcPct val="100000"/>
-              </a:lnSpc>
-              <a:spcBef>
-                <a:spcPts val="0"/>
-              </a:spcBef>
-              <a:spcAft>
-                <a:spcPts val="0"/>
-              </a:spcAft>
-              <a:buClr>
-                <a:srgbClr val="000000"/>
-              </a:buClr>
-              <a:buSzPts val="3600"/>
-              <a:buFont typeface="Arial"/>
-              <a:buNone/>
-            </a:pPr>
-            <a:r>
-              <a:rPr b="0" i="0" lang="zh-TW" sz="3600" u="none" cap="none" strike="noStrike">
-                <a:solidFill>
-                  <a:srgbClr val="FF0000"/>
-                </a:solidFill>
-                <a:latin typeface="Arial"/>
-                <a:ea typeface="Arial"/>
-                <a:cs typeface="Arial"/>
-                <a:sym typeface="Arial"/>
-              </a:rPr>
-              <a:t>windows.bat </a:t>
-            </a:r>
-            <a:endParaRPr b="0" i="0" sz="3600" u="none" cap="none" strike="noStrike">
-              <a:solidFill>
-                <a:srgbClr val="FF0000"/>
-              </a:solidFill>
-              <a:latin typeface="Arial"/>
-              <a:ea typeface="Arial"/>
-              <a:cs typeface="Arial"/>
-              <a:sym typeface="Arial"/>
-            </a:endParaRPr>
           </a:p>
         </p:txBody>
       </p:sp>
       <p:pic>
         <p:nvPicPr>
-          <p:cNvPr id="330" name="Google Shape;330;g3f4f89e88cb_0_64" title="截圖 2026-07-13 15.02.39.png"/>
+          <p:cNvPr id="332" name="Google Shape;332;g3f4f89e88cb_0_46"/>
           <p:cNvPicPr preferRelativeResize="0"/>
           <p:nvPr/>
         </p:nvPicPr>
@@ -19400,8 +19468,8 @@
         </p:blipFill>
         <p:spPr>
           <a:xfrm>
-            <a:off x="331871" y="2655275"/>
-            <a:ext cx="5567875" cy="2419100"/>
+            <a:off x="311700" y="2842950"/>
+            <a:ext cx="4468501" cy="2260551"/>
           </a:xfrm>
           <a:prstGeom prst="rect">
             <a:avLst/>
@@ -19414,14 +19482,226 @@
       </p:pic>
       <p:sp>
         <p:nvSpPr>
-          <p:cNvPr id="331" name="Google Shape;331;g3f4f89e88cb_0_64"/>
+          <p:cNvPr id="333" name="Google Shape;333;g3f4f89e88cb_0_46"/>
+          <p:cNvSpPr txBox="1"/>
+          <p:nvPr>
+            <p:ph idx="1" type="body"/>
+          </p:nvPr>
+        </p:nvSpPr>
+        <p:spPr>
+          <a:xfrm>
+            <a:off x="311700" y="1152475"/>
+            <a:ext cx="8520600" cy="3416400"/>
+          </a:xfrm>
+          <a:prstGeom prst="rect">
+            <a:avLst/>
+          </a:prstGeom>
+          <a:noFill/>
+          <a:ln>
+            <a:noFill/>
+          </a:ln>
+        </p:spPr>
+        <p:txBody>
+          <a:bodyPr anchorCtr="0" anchor="t" bIns="91425" lIns="91425" spcFirstLastPara="1" rIns="91425" wrap="square" tIns="91425">
+            <a:normAutofit/>
+          </a:bodyPr>
+          <a:lstStyle/>
+          <a:p>
+            <a:pPr indent="0" lvl="0" marL="0" rtl="0" algn="l">
+              <a:lnSpc>
+                <a:spcPct val="115000"/>
+              </a:lnSpc>
+              <a:spcBef>
+                <a:spcPts val="1000"/>
+              </a:spcBef>
+              <a:spcAft>
+                <a:spcPts val="0"/>
+              </a:spcAft>
+              <a:buSzPts val="1800"/>
+              <a:buNone/>
+            </a:pPr>
+            <a:r>
+              <a:rPr lang="zh-TW"/>
+              <a:t>Step1: 於 NSTC（國家科學及技術委員會研究人才查詢）以「教授名稱＋當前任職單位」取得教授畢業院校（註：部分教授未公開，故查不到）</a:t>
+            </a:r>
+            <a:endParaRPr/>
+          </a:p>
+          <a:p>
+            <a:pPr indent="0" lvl="0" marL="0" rtl="0" algn="l">
+              <a:lnSpc>
+                <a:spcPct val="115000"/>
+              </a:lnSpc>
+              <a:spcBef>
+                <a:spcPts val="1000"/>
+              </a:spcBef>
+              <a:spcAft>
+                <a:spcPts val="0"/>
+              </a:spcAft>
+              <a:buSzPts val="1800"/>
+              <a:buNone/>
+            </a:pPr>
+            <a:r>
+              <a:rPr lang="zh-TW"/>
+              <a:t>Step2:  於 NDLTD（碩博士論文加值網）取得教授的指導教授</a:t>
+            </a:r>
+            <a:endParaRPr/>
+          </a:p>
+          <a:p>
+            <a:pPr indent="0" lvl="0" marL="0" rtl="0" algn="l">
+              <a:lnSpc>
+                <a:spcPct val="115000"/>
+              </a:lnSpc>
+              <a:spcBef>
+                <a:spcPts val="1000"/>
+              </a:spcBef>
+              <a:spcAft>
+                <a:spcPts val="0"/>
+              </a:spcAft>
+              <a:buSzPts val="1800"/>
+              <a:buNone/>
+            </a:pPr>
+            <a:r>
+              <a:rPr lang="zh-TW"/>
+              <a:t>過程中因為需要打驗證碼，故需要適時查看 在輸入後按下enter</a:t>
+            </a:r>
+            <a:endParaRPr/>
+          </a:p>
+          <a:p>
+            <a:pPr indent="0" lvl="0" marL="0" rtl="0" algn="l">
+              <a:lnSpc>
+                <a:spcPct val="115000"/>
+              </a:lnSpc>
+              <a:spcBef>
+                <a:spcPts val="1000"/>
+              </a:spcBef>
+              <a:spcAft>
+                <a:spcPts val="0"/>
+              </a:spcAft>
+              <a:buSzPts val="1800"/>
+              <a:buNone/>
+            </a:pPr>
+            <a:r>
+              <a:t/>
+            </a:r>
+            <a:endParaRPr/>
+          </a:p>
+          <a:p>
+            <a:pPr indent="0" lvl="0" marL="0" rtl="0" algn="l">
+              <a:lnSpc>
+                <a:spcPct val="115000"/>
+              </a:lnSpc>
+              <a:spcBef>
+                <a:spcPts val="1000"/>
+              </a:spcBef>
+              <a:spcAft>
+                <a:spcPts val="0"/>
+              </a:spcAft>
+              <a:buSzPts val="1800"/>
+              <a:buNone/>
+            </a:pPr>
+            <a:r>
+              <a:t/>
+            </a:r>
+            <a:endParaRPr/>
+          </a:p>
+        </p:txBody>
+      </p:sp>
+      <p:sp>
+        <p:nvSpPr>
+          <p:cNvPr id="334" name="Google Shape;334;g3f4f89e88cb_0_46"/>
+          <p:cNvSpPr txBox="1"/>
+          <p:nvPr/>
+        </p:nvSpPr>
+        <p:spPr>
+          <a:xfrm>
+            <a:off x="5081425" y="44875"/>
+            <a:ext cx="4062600" cy="738900"/>
+          </a:xfrm>
+          <a:prstGeom prst="rect">
+            <a:avLst/>
+          </a:prstGeom>
+          <a:noFill/>
+          <a:ln>
+            <a:noFill/>
+          </a:ln>
+        </p:spPr>
+        <p:txBody>
+          <a:bodyPr anchorCtr="0" anchor="t" bIns="91425" lIns="91425" spcFirstLastPara="1" rIns="91425" wrap="square" tIns="91425">
+            <a:spAutoFit/>
+          </a:bodyPr>
+          <a:lstStyle/>
+          <a:p>
+            <a:pPr indent="0" lvl="0" marL="0" marR="0" rtl="0" algn="r">
+              <a:lnSpc>
+                <a:spcPct val="100000"/>
+              </a:lnSpc>
+              <a:spcBef>
+                <a:spcPts val="0"/>
+              </a:spcBef>
+              <a:spcAft>
+                <a:spcPts val="0"/>
+              </a:spcAft>
+              <a:buClr>
+                <a:srgbClr val="000000"/>
+              </a:buClr>
+              <a:buSzPts val="3600"/>
+              <a:buFont typeface="Arial"/>
+              <a:buNone/>
+            </a:pPr>
+            <a:r>
+              <a:rPr b="0" i="0" lang="zh-TW" sz="3600" u="none" cap="none" strike="noStrike">
+                <a:solidFill>
+                  <a:srgbClr val="FF0000"/>
+                </a:solidFill>
+                <a:latin typeface="Arial"/>
+                <a:ea typeface="Arial"/>
+                <a:cs typeface="Arial"/>
+                <a:sym typeface="Arial"/>
+              </a:rPr>
+              <a:t>windows</a:t>
+            </a:r>
+            <a:r>
+              <a:rPr lang="zh-TW" sz="3600">
+                <a:solidFill>
+                  <a:srgbClr val="FF0000"/>
+                </a:solidFill>
+              </a:rPr>
+              <a:t>_crawl</a:t>
+            </a:r>
+            <a:r>
+              <a:rPr b="0" i="0" lang="zh-TW" sz="3600" u="none" cap="none" strike="noStrike">
+                <a:solidFill>
+                  <a:srgbClr val="FF0000"/>
+                </a:solidFill>
+                <a:latin typeface="Arial"/>
+                <a:ea typeface="Arial"/>
+                <a:cs typeface="Arial"/>
+                <a:sym typeface="Arial"/>
+              </a:rPr>
+              <a:t>.bat </a:t>
+            </a:r>
+            <a:endParaRPr b="0" i="0" sz="3600" u="none" cap="none" strike="noStrike">
+              <a:solidFill>
+                <a:srgbClr val="FF0000"/>
+              </a:solidFill>
+              <a:latin typeface="Arial"/>
+              <a:ea typeface="Arial"/>
+              <a:cs typeface="Arial"/>
+              <a:sym typeface="Arial"/>
+            </a:endParaRPr>
+          </a:p>
+        </p:txBody>
+      </p:sp>
+      <p:sp>
+        <p:nvSpPr>
+          <p:cNvPr id="335" name="Google Shape;335;g3f4f89e88cb_0_46"/>
           <p:cNvSpPr/>
           <p:nvPr/>
         </p:nvSpPr>
         <p:spPr>
           <a:xfrm>
-            <a:off x="515400" y="3409600"/>
-            <a:ext cx="5200800" cy="738900"/>
+            <a:off x="311700" y="4057375"/>
+            <a:ext cx="1837200" cy="263700"/>
           </a:xfrm>
           <a:prstGeom prst="rect">
             <a:avLst/>
@@ -19459,56 +19739,9 @@
           </a:p>
         </p:txBody>
       </p:sp>
-      <p:sp>
-        <p:nvSpPr>
-          <p:cNvPr id="332" name="Google Shape;332;g3f4f89e88cb_0_64"/>
-          <p:cNvSpPr/>
-          <p:nvPr/>
-        </p:nvSpPr>
-        <p:spPr>
-          <a:xfrm>
-            <a:off x="551650" y="4642275"/>
-            <a:ext cx="5200800" cy="339600"/>
-          </a:xfrm>
-          <a:prstGeom prst="rect">
-            <a:avLst/>
-          </a:prstGeom>
-          <a:noFill/>
-          <a:ln cap="flat" cmpd="sng" w="28575">
-            <a:solidFill>
-              <a:schemeClr val="lt1"/>
-            </a:solidFill>
-            <a:prstDash val="solid"/>
-            <a:round/>
-            <a:headEnd len="sm" w="sm" type="none"/>
-            <a:tailEnd len="sm" w="sm" type="none"/>
-          </a:ln>
-        </p:spPr>
-        <p:txBody>
-          <a:bodyPr anchorCtr="0" anchor="ctr" bIns="91425" lIns="91425" spcFirstLastPara="1" rIns="91425" wrap="square" tIns="91425">
-            <a:noAutofit/>
-          </a:bodyPr>
-          <a:lstStyle/>
-          <a:p>
-            <a:pPr indent="0" lvl="0" marL="0" rtl="0" algn="ctr">
-              <a:spcBef>
-                <a:spcPts val="0"/>
-              </a:spcBef>
-              <a:spcAft>
-                <a:spcPts val="0"/>
-              </a:spcAft>
-              <a:buNone/>
-            </a:pPr>
-            <a:r>
-              <a:t/>
-            </a:r>
-            <a:endParaRPr/>
-          </a:p>
-        </p:txBody>
-      </p:sp>
       <p:pic>
         <p:nvPicPr>
-          <p:cNvPr id="333" name="Google Shape;333;g3f4f89e88cb_0_64" title="截圖 2026-07-13 15.07.23.png"/>
+          <p:cNvPr id="336" name="Google Shape;336;g3f4f89e88cb_0_46"/>
           <p:cNvPicPr preferRelativeResize="0"/>
           <p:nvPr/>
         </p:nvPicPr>
@@ -19522,8 +19755,8 @@
         </p:blipFill>
         <p:spPr>
           <a:xfrm>
-            <a:off x="331863" y="1912325"/>
-            <a:ext cx="3228975" cy="742950"/>
+            <a:off x="5003850" y="3461150"/>
+            <a:ext cx="3952998" cy="1593750"/>
           </a:xfrm>
           <a:prstGeom prst="rect">
             <a:avLst/>
@@ -19536,116 +19769,14 @@
       </p:pic>
       <p:sp>
         <p:nvSpPr>
-          <p:cNvPr id="334" name="Google Shape;334;g3f4f89e88cb_0_64"/>
-          <p:cNvSpPr txBox="1"/>
-          <p:nvPr/>
-        </p:nvSpPr>
-        <p:spPr>
-          <a:xfrm>
-            <a:off x="1382275" y="2300225"/>
-            <a:ext cx="2242800" cy="615600"/>
-          </a:xfrm>
-          <a:prstGeom prst="rect">
-            <a:avLst/>
-          </a:prstGeom>
-          <a:noFill/>
-          <a:ln>
-            <a:noFill/>
-          </a:ln>
-        </p:spPr>
-        <p:txBody>
-          <a:bodyPr anchorCtr="0" anchor="t" bIns="91425" lIns="91425" spcFirstLastPara="1" rIns="91425" wrap="square" tIns="91425">
-            <a:spAutoFit/>
-          </a:bodyPr>
-          <a:lstStyle/>
-          <a:p>
-            <a:pPr indent="0" lvl="0" marL="0" rtl="0" algn="l">
-              <a:spcBef>
-                <a:spcPts val="0"/>
-              </a:spcBef>
-              <a:spcAft>
-                <a:spcPts val="0"/>
-              </a:spcAft>
-              <a:buNone/>
-            </a:pPr>
-            <a:r>
-              <a:rPr b="1" lang="zh-TW">
-                <a:solidFill>
-                  <a:schemeClr val="lt1"/>
-                </a:solidFill>
-              </a:rPr>
-              <a:t>修改成要更新的檔案類型</a:t>
-            </a:r>
-            <a:endParaRPr b="1">
-              <a:solidFill>
-                <a:schemeClr val="lt1"/>
-              </a:solidFill>
-            </a:endParaRPr>
-          </a:p>
-          <a:p>
-            <a:pPr indent="0" lvl="0" marL="0" rtl="0" algn="l">
-              <a:spcBef>
-                <a:spcPts val="0"/>
-              </a:spcBef>
-              <a:spcAft>
-                <a:spcPts val="0"/>
-              </a:spcAft>
-              <a:buNone/>
-            </a:pPr>
-            <a:r>
-              <a:rPr b="1" lang="zh-TW">
-                <a:solidFill>
-                  <a:schemeClr val="lt1"/>
-                </a:solidFill>
-              </a:rPr>
-              <a:t>如果都要更新要執行兩次!</a:t>
-            </a:r>
-            <a:endParaRPr b="1">
-              <a:solidFill>
-                <a:schemeClr val="lt1"/>
-              </a:solidFill>
-            </a:endParaRPr>
-          </a:p>
-        </p:txBody>
-      </p:sp>
-      <p:pic>
-        <p:nvPicPr>
-          <p:cNvPr id="335" name="Google Shape;335;g3f4f89e88cb_0_64" title="截圖 2026-07-13 13.44.53.png"/>
-          <p:cNvPicPr preferRelativeResize="0"/>
-          <p:nvPr/>
-        </p:nvPicPr>
-        <p:blipFill>
-          <a:blip r:embed="rId5">
-            <a:alphaModFix/>
-          </a:blip>
-          <a:stretch>
-            <a:fillRect/>
-          </a:stretch>
-        </p:blipFill>
-        <p:spPr>
-          <a:xfrm>
-            <a:off x="6031751" y="1654775"/>
-            <a:ext cx="2918717" cy="2237700"/>
-          </a:xfrm>
-          <a:prstGeom prst="rect">
-            <a:avLst/>
-          </a:prstGeom>
-          <a:noFill/>
-          <a:ln>
-            <a:noFill/>
-          </a:ln>
-        </p:spPr>
-      </p:pic>
-      <p:sp>
-        <p:nvSpPr>
-          <p:cNvPr id="336" name="Google Shape;336;g3f4f89e88cb_0_64"/>
+          <p:cNvPr id="337" name="Google Shape;337;g3f4f89e88cb_0_46"/>
           <p:cNvSpPr/>
           <p:nvPr/>
         </p:nvSpPr>
         <p:spPr>
           <a:xfrm>
-            <a:off x="6276149" y="2571750"/>
-            <a:ext cx="2296500" cy="400200"/>
+            <a:off x="5003850" y="3894475"/>
+            <a:ext cx="1668000" cy="504300"/>
           </a:xfrm>
           <a:prstGeom prst="rect">
             <a:avLst/>
@@ -19680,6 +19811,118 @@
               <a:t/>
             </a:r>
             <a:endParaRPr/>
+          </a:p>
+        </p:txBody>
+      </p:sp>
+      <p:sp>
+        <p:nvSpPr>
+          <p:cNvPr id="338" name="Google Shape;338;g3f4f89e88cb_0_46"/>
+          <p:cNvSpPr txBox="1"/>
+          <p:nvPr/>
+        </p:nvSpPr>
+        <p:spPr>
+          <a:xfrm>
+            <a:off x="5003850" y="3198275"/>
+            <a:ext cx="4468500" cy="400200"/>
+          </a:xfrm>
+          <a:prstGeom prst="rect">
+            <a:avLst/>
+          </a:prstGeom>
+          <a:noFill/>
+          <a:ln>
+            <a:noFill/>
+          </a:ln>
+        </p:spPr>
+        <p:txBody>
+          <a:bodyPr anchorCtr="0" anchor="t" bIns="91425" lIns="91425" spcFirstLastPara="1" rIns="91425" wrap="square" tIns="91425">
+            <a:spAutoFit/>
+          </a:bodyPr>
+          <a:lstStyle/>
+          <a:p>
+            <a:pPr indent="0" lvl="0" marL="0" rtl="0" algn="l">
+              <a:spcBef>
+                <a:spcPts val="0"/>
+              </a:spcBef>
+              <a:spcAft>
+                <a:spcPts val="0"/>
+              </a:spcAft>
+              <a:buNone/>
+            </a:pPr>
+            <a:r>
+              <a:rPr lang="zh-TW">
+                <a:solidFill>
+                  <a:schemeClr val="dk2"/>
+                </a:solidFill>
+                <a:highlight>
+                  <a:srgbClr val="FFF2CC"/>
+                </a:highlight>
+              </a:rPr>
+              <a:t>輸入後進入碩博士網站載到終端機按下enter</a:t>
+            </a:r>
+            <a:endParaRPr>
+              <a:solidFill>
+                <a:schemeClr val="dk2"/>
+              </a:solidFill>
+              <a:highlight>
+                <a:srgbClr val="FFF2CC"/>
+              </a:highlight>
+            </a:endParaRPr>
+          </a:p>
+        </p:txBody>
+      </p:sp>
+      <p:sp>
+        <p:nvSpPr>
+          <p:cNvPr id="339" name="Google Shape;339;g3f4f89e88cb_0_46"/>
+          <p:cNvSpPr txBox="1"/>
+          <p:nvPr/>
+        </p:nvSpPr>
+        <p:spPr>
+          <a:xfrm>
+            <a:off x="5684125" y="687700"/>
+            <a:ext cx="3459900" cy="400200"/>
+          </a:xfrm>
+          <a:prstGeom prst="rect">
+            <a:avLst/>
+          </a:prstGeom>
+          <a:noFill/>
+          <a:ln>
+            <a:noFill/>
+          </a:ln>
+        </p:spPr>
+        <p:txBody>
+          <a:bodyPr anchorCtr="0" anchor="t" bIns="91425" lIns="91425" spcFirstLastPara="1" rIns="91425" wrap="square" tIns="91425">
+            <a:spAutoFit/>
+          </a:bodyPr>
+          <a:lstStyle/>
+          <a:p>
+            <a:pPr indent="0" lvl="0" marL="0" rtl="0" algn="r">
+              <a:spcBef>
+                <a:spcPts val="0"/>
+              </a:spcBef>
+              <a:spcAft>
+                <a:spcPts val="0"/>
+              </a:spcAft>
+              <a:buNone/>
+            </a:pPr>
+            <a:r>
+              <a:rPr b="1" lang="zh-TW">
+                <a:solidFill>
+                  <a:schemeClr val="dk2"/>
+                </a:solidFill>
+                <a:highlight>
+                  <a:srgbClr val="F4CCCC"/>
+                </a:highlight>
+              </a:rPr>
+              <a:t>爬蟲會執行很久 建議非必要不要更新</a:t>
+            </a:r>
+            <a:endParaRPr b="1">
+              <a:solidFill>
+                <a:schemeClr val="dk2"/>
+              </a:solidFill>
+              <a:highlight>
+                <a:srgbClr val="F4CCCC"/>
+              </a:highlight>
+            </a:endParaRPr>
           </a:p>
         </p:txBody>
       </p:sp>
@@ -19696,7 +19939,7 @@
   <p:cSld>
     <p:spTree>
       <p:nvGrpSpPr>
-        <p:cNvPr id="340" name="Shape 340"/>
+        <p:cNvPr id="343" name="Shape 343"/>
         <p:cNvGrpSpPr/>
         <p:nvPr/>
       </p:nvGrpSpPr>
@@ -19710,7 +19953,7 @@
       </p:grpSpPr>
       <p:sp>
         <p:nvSpPr>
-          <p:cNvPr id="341" name="Google Shape;341;g3f4f89e88cb_0_83"/>
+          <p:cNvPr id="344" name="Google Shape;344;g3f4f89e88cb_0_64"/>
           <p:cNvSpPr txBox="1"/>
           <p:nvPr>
             <p:ph type="title"/>
@@ -19750,7 +19993,11 @@
             </a:pPr>
             <a:r>
               <a:rPr lang="zh-TW"/>
-              <a:t>更新通過資料</a:t>
+              <a:t>更新</a:t>
+            </a:r>
+            <a:r>
+              <a:rPr lang="zh-TW"/>
+              <a:t>通過資料</a:t>
             </a:r>
             <a:endParaRPr/>
           </a:p>
@@ -19758,7 +20005,7 @@
       </p:sp>
       <p:sp>
         <p:nvSpPr>
-          <p:cNvPr id="342" name="Google Shape;342;g3f4f89e88cb_0_83"/>
+          <p:cNvPr id="345" name="Google Shape;345;g3f4f89e88cb_0_64"/>
           <p:cNvSpPr txBox="1"/>
           <p:nvPr>
             <p:ph idx="1" type="body"/>
@@ -19779,10 +20026,50 @@
         </p:spPr>
         <p:txBody>
           <a:bodyPr anchorCtr="0" anchor="t" bIns="91425" lIns="91425" spcFirstLastPara="1" rIns="91425" wrap="square" tIns="91425">
-            <a:normAutofit fontScale="25000" lnSpcReduction="20000"/>
+            <a:normAutofit/>
           </a:bodyPr>
           <a:lstStyle/>
           <a:p>
+            <a:pPr indent="-342900" lvl="0" marL="457200" rtl="0" algn="l">
+              <a:lnSpc>
+                <a:spcPct val="115000"/>
+              </a:lnSpc>
+              <a:spcBef>
+                <a:spcPts val="1000"/>
+              </a:spcBef>
+              <a:spcAft>
+                <a:spcPts val="0"/>
+              </a:spcAft>
+              <a:buSzPts val="1800"/>
+              <a:buAutoNum type="arabicPeriod"/>
+            </a:pPr>
+            <a:r>
+              <a:rPr lang="zh-TW"/>
+              <a:t>修改 setting.yaml 中資料</a:t>
+            </a:r>
+            <a:endParaRPr/>
+          </a:p>
+          <a:p>
+            <a:pPr indent="-342900" lvl="0" marL="457200" rtl="0" algn="l">
+              <a:lnSpc>
+                <a:spcPct val="115000"/>
+              </a:lnSpc>
+              <a:spcBef>
+                <a:spcPts val="0"/>
+              </a:spcBef>
+              <a:spcAft>
+                <a:spcPts val="0"/>
+              </a:spcAft>
+              <a:buSzPts val="1800"/>
+              <a:buAutoNum type="arabicPeriod"/>
+            </a:pPr>
+            <a:r>
+              <a:rPr lang="zh-TW"/>
+              <a:t>設定好後執行 windowss.bat 按下存入資料庫即可</a:t>
+            </a:r>
+            <a:endParaRPr/>
+          </a:p>
+          <a:p>
             <a:pPr indent="0" lvl="0" marL="0" rtl="0" algn="l">
               <a:lnSpc>
                 <a:spcPct val="115000"/>
@@ -19793,276 +20080,7 @@
               <a:spcAft>
                 <a:spcPts val="0"/>
               </a:spcAft>
-              <a:buNone/>
-            </a:pPr>
-            <a:r>
-              <a:rPr lang="zh-TW" sz="6458"/>
-              <a:t>確保輸入資料欄位如下(每個分頁欄位名稱要一樣)：</a:t>
-            </a:r>
-            <a:endParaRPr sz="6458"/>
-          </a:p>
-          <a:p>
-            <a:pPr indent="-318416" lvl="0" marL="457200" rtl="0" algn="l">
-              <a:lnSpc>
-                <a:spcPct val="150000"/>
-              </a:lnSpc>
-              <a:spcBef>
-                <a:spcPts val="1000"/>
-              </a:spcBef>
-              <a:spcAft>
-                <a:spcPts val="0"/>
-              </a:spcAft>
-              <a:buSzPct val="100000"/>
-              <a:buChar char="●"/>
-            </a:pPr>
-            <a:r>
-              <a:rPr b="1" lang="zh-TW" sz="5658"/>
-              <a:t>研究計畫</a:t>
-            </a:r>
-            <a:r>
-              <a:rPr lang="zh-TW" sz="5658"/>
-              <a:t>（is_industry=False，來源＝計畫過去申請案件）</a:t>
-            </a:r>
-            <a:endParaRPr sz="5658"/>
-          </a:p>
-          <a:p>
-            <a:pPr indent="-305716" lvl="1" marL="914400" rtl="0" algn="l">
-              <a:lnSpc>
-                <a:spcPct val="150000"/>
-              </a:lnSpc>
-              <a:spcBef>
-                <a:spcPts val="0"/>
-              </a:spcBef>
-              <a:spcAft>
-                <a:spcPts val="0"/>
-              </a:spcAft>
-              <a:buSzPct val="100000"/>
-              <a:buChar char="○"/>
-            </a:pPr>
-            <a:r>
-              <a:rPr lang="zh-TW" sz="4858"/>
-              <a:t>檔案每個年度分頁都要有上面四欄，分頁名要對上 計畫過去申請案件年分範圍(請以年份代表)。</a:t>
-            </a:r>
-            <a:endParaRPr sz="4858"/>
-          </a:p>
-          <a:p>
-            <a:pPr indent="-305716" lvl="1" marL="914400" rtl="0" algn="l">
-              <a:lnSpc>
-                <a:spcPct val="150000"/>
-              </a:lnSpc>
-              <a:spcBef>
-                <a:spcPts val="0"/>
-              </a:spcBef>
-              <a:spcAft>
-                <a:spcPts val="0"/>
-              </a:spcAft>
-              <a:buSzPct val="100000"/>
-              <a:buChar char="○"/>
-            </a:pPr>
-            <a:r>
-              <a:rPr lang="zh-TW" sz="4858"/>
-              <a:t>「</a:t>
-            </a:r>
-            <a:r>
-              <a:rPr lang="zh-TW" sz="4858"/>
-              <a:t>通過」欄不用自己準備——程式會自動補：</a:t>
-            </a:r>
-            <a:endParaRPr sz="4858"/>
-          </a:p>
-          <a:p>
-            <a:pPr indent="-305716" lvl="2" marL="1371600" rtl="0" algn="l">
-              <a:lnSpc>
-                <a:spcPct val="150000"/>
-              </a:lnSpc>
-              <a:spcBef>
-                <a:spcPts val="0"/>
-              </a:spcBef>
-              <a:spcAft>
-                <a:spcPts val="0"/>
-              </a:spcAft>
-              <a:buSzPct val="100000"/>
-              <a:buChar char="■"/>
-            </a:pPr>
-            <a:r>
-              <a:rPr lang="zh-TW" sz="4858"/>
-              <a:t>  有提供 統計清單（{年度}總計畫清單 分頁，需含 計畫中文名稱）→ 用它比對決定 通過 = true/false，只有 true 的才存入。</a:t>
-            </a:r>
-            <a:endParaRPr sz="4858"/>
-          </a:p>
-          <a:p>
-            <a:pPr indent="-305716" lvl="2" marL="1371600" rtl="0" algn="l">
-              <a:lnSpc>
-                <a:spcPct val="150000"/>
-              </a:lnSpc>
-              <a:spcBef>
-                <a:spcPts val="0"/>
-              </a:spcBef>
-              <a:spcAft>
-                <a:spcPts val="0"/>
-              </a:spcAft>
-              <a:buSzPct val="100000"/>
-              <a:buChar char="■"/>
-            </a:pPr>
-            <a:r>
-              <a:rPr lang="zh-TW" sz="4858"/>
-              <a:t>  沒提供統計清單 → 該年度全部視為通過存入。</a:t>
-            </a:r>
-            <a:endParaRPr sz="4858"/>
-          </a:p>
-          <a:p>
-            <a:pPr indent="-318416" lvl="0" marL="457200" rtl="0" algn="l">
-              <a:lnSpc>
-                <a:spcPct val="150000"/>
-              </a:lnSpc>
-              <a:spcBef>
-                <a:spcPts val="0"/>
-              </a:spcBef>
-              <a:spcAft>
-                <a:spcPts val="0"/>
-              </a:spcAft>
-              <a:buSzPct val="100000"/>
-              <a:buChar char="●"/>
-            </a:pPr>
-            <a:r>
-              <a:rPr b="1" lang="zh-TW" sz="5658"/>
-              <a:t>產學合作</a:t>
-            </a:r>
-            <a:r>
-              <a:rPr lang="zh-TW" sz="5658"/>
-              <a:t>（is_industry=True，來源＝產學過去申請名冊）</a:t>
-            </a:r>
-            <a:endParaRPr sz="5658"/>
-          </a:p>
-          <a:p>
-            <a:pPr indent="-305716" lvl="1" marL="914400" rtl="0" algn="l">
-              <a:lnSpc>
-                <a:spcPct val="150000"/>
-              </a:lnSpc>
-              <a:spcBef>
-                <a:spcPts val="0"/>
-              </a:spcBef>
-              <a:spcAft>
-                <a:spcPts val="0"/>
-              </a:spcAft>
-              <a:buSzPct val="100000"/>
-              <a:buChar char="○"/>
-            </a:pPr>
-            <a:r>
-              <a:rPr lang="zh-TW" sz="4858"/>
-              <a:t>分頁名寫死為 專題計畫綜合查詢（get_industry_coop_proj 內），你的檔案必須有這個分頁。</a:t>
-            </a:r>
-            <a:endParaRPr sz="4858"/>
-          </a:p>
-          <a:p>
-            <a:pPr indent="-305716" lvl="1" marL="914400" rtl="0" algn="l">
-              <a:lnSpc>
-                <a:spcPct val="150000"/>
-              </a:lnSpc>
-              <a:spcBef>
-                <a:spcPts val="0"/>
-              </a:spcBef>
-              <a:spcAft>
-                <a:spcPts val="0"/>
-              </a:spcAft>
-              <a:buSzPct val="100000"/>
-              <a:buChar char="○"/>
-            </a:pPr>
-            <a:r>
-              <a:rPr lang="zh-TW" sz="4858"/>
-              <a:t>一樣要有那四個欄位。</a:t>
-            </a:r>
-            <a:endParaRPr sz="4858"/>
-          </a:p>
-          <a:p>
-            <a:pPr indent="-305716" lvl="1" marL="914400" rtl="0" algn="l">
-              <a:lnSpc>
-                <a:spcPct val="150000"/>
-              </a:lnSpc>
-              <a:spcBef>
-                <a:spcPts val="0"/>
-              </a:spcBef>
-              <a:spcAft>
-                <a:spcPts val="0"/>
-              </a:spcAft>
-              <a:buSzPct val="100000"/>
-              <a:buChar char="○"/>
-            </a:pPr>
-            <a:r>
-              <a:rPr lang="zh-TW" sz="4858"/>
-              <a:t>產學不做通過與否的過濾，全部存入。</a:t>
-            </a:r>
-            <a:endParaRPr sz="4858"/>
-          </a:p>
-          <a:p>
-            <a:pPr indent="-305716" lvl="0" marL="457200" rtl="0" algn="l">
-              <a:lnSpc>
-                <a:spcPct val="150000"/>
-              </a:lnSpc>
-              <a:spcBef>
-                <a:spcPts val="0"/>
-              </a:spcBef>
-              <a:spcAft>
-                <a:spcPts val="0"/>
-              </a:spcAft>
-              <a:buSzPct val="100000"/>
-              <a:buChar char="●"/>
-            </a:pPr>
-            <a:r>
-              <a:rPr lang="zh-TW" sz="4858"/>
-              <a:t>必要欄位名稱（確保名稱一致）</a:t>
-            </a:r>
-            <a:endParaRPr sz="4858"/>
-          </a:p>
-          <a:p>
-            <a:pPr indent="-305716" lvl="1" marL="914400" rtl="0" algn="l">
-              <a:lnSpc>
-                <a:spcPct val="150000"/>
-              </a:lnSpc>
-              <a:spcBef>
-                <a:spcPts val="0"/>
-              </a:spcBef>
-              <a:spcAft>
-                <a:spcPts val="0"/>
-              </a:spcAft>
-              <a:buSzPct val="100000"/>
-              <a:buChar char="○"/>
-            </a:pPr>
-            <a:r>
-              <a:rPr lang="zh-TW" sz="4858"/>
-              <a:t>計畫主持人、計畫中文名稱、中文摘要、中文關鍵字</a:t>
-            </a:r>
-            <a:endParaRPr sz="4858"/>
-          </a:p>
-          <a:p>
-            <a:pPr indent="0" lvl="0" marL="0" rtl="0" algn="l">
-              <a:lnSpc>
-                <a:spcPct val="115000"/>
-              </a:lnSpc>
-              <a:spcBef>
-                <a:spcPts val="1000"/>
-              </a:spcBef>
-              <a:spcAft>
-                <a:spcPts val="0"/>
-              </a:spcAft>
-              <a:buNone/>
-            </a:pPr>
-            <a:r>
-              <a:t/>
-            </a:r>
-            <a:endParaRPr/>
-          </a:p>
-          <a:p>
-            <a:pPr indent="0" lvl="0" marL="0" rtl="0" algn="l">
-              <a:lnSpc>
-                <a:spcPct val="115000"/>
-              </a:lnSpc>
-              <a:spcBef>
-                <a:spcPts val="1000"/>
-              </a:spcBef>
-              <a:spcAft>
-                <a:spcPts val="0"/>
-              </a:spcAft>
-              <a:buSzPct val="100000"/>
+              <a:buSzPts val="1800"/>
               <a:buNone/>
             </a:pPr>
             <a:r>
@@ -20074,7 +20092,54 @@
       </p:sp>
       <p:sp>
         <p:nvSpPr>
-          <p:cNvPr id="343" name="Google Shape;343;g3f4f89e88cb_0_83"/>
+          <p:cNvPr id="346" name="Google Shape;346;g3f4f89e88cb_0_64"/>
+          <p:cNvSpPr/>
+          <p:nvPr/>
+        </p:nvSpPr>
+        <p:spPr>
+          <a:xfrm>
+            <a:off x="331875" y="4561650"/>
+            <a:ext cx="3052800" cy="271500"/>
+          </a:xfrm>
+          <a:prstGeom prst="rect">
+            <a:avLst/>
+          </a:prstGeom>
+          <a:noFill/>
+          <a:ln cap="flat" cmpd="sng" w="28575">
+            <a:solidFill>
+              <a:schemeClr val="lt1"/>
+            </a:solidFill>
+            <a:prstDash val="solid"/>
+            <a:round/>
+            <a:headEnd len="sm" w="sm" type="none"/>
+            <a:tailEnd len="sm" w="sm" type="none"/>
+          </a:ln>
+        </p:spPr>
+        <p:txBody>
+          <a:bodyPr anchorCtr="0" anchor="ctr" bIns="91425" lIns="91425" spcFirstLastPara="1" rIns="91425" wrap="square" tIns="91425">
+            <a:noAutofit/>
+          </a:bodyPr>
+          <a:lstStyle/>
+          <a:p>
+            <a:pPr indent="0" lvl="0" marL="0" rtl="0" algn="ctr">
+              <a:spcBef>
+                <a:spcPts val="0"/>
+              </a:spcBef>
+              <a:spcAft>
+                <a:spcPts val="0"/>
+              </a:spcAft>
+              <a:buNone/>
+            </a:pPr>
+            <a:r>
+              <a:t/>
+            </a:r>
+            <a:endParaRPr/>
+          </a:p>
+        </p:txBody>
+      </p:sp>
+      <p:sp>
+        <p:nvSpPr>
+          <p:cNvPr id="347" name="Google Shape;347;g3f4f89e88cb_0_64"/>
           <p:cNvSpPr txBox="1"/>
           <p:nvPr/>
         </p:nvSpPr>
@@ -20135,6 +20200,305 @@
               <a:cs typeface="Arial"/>
               <a:sym typeface="Arial"/>
             </a:endParaRPr>
+          </a:p>
+        </p:txBody>
+      </p:sp>
+      <p:pic>
+        <p:nvPicPr>
+          <p:cNvPr id="348" name="Google Shape;348;g3f4f89e88cb_0_64" title="截圖 2026-07-13 15.02.39.png"/>
+          <p:cNvPicPr preferRelativeResize="0"/>
+          <p:nvPr/>
+        </p:nvPicPr>
+        <p:blipFill>
+          <a:blip r:embed="rId3">
+            <a:alphaModFix/>
+          </a:blip>
+          <a:stretch>
+            <a:fillRect/>
+          </a:stretch>
+        </p:blipFill>
+        <p:spPr>
+          <a:xfrm>
+            <a:off x="331871" y="2655275"/>
+            <a:ext cx="5567875" cy="2419100"/>
+          </a:xfrm>
+          <a:prstGeom prst="rect">
+            <a:avLst/>
+          </a:prstGeom>
+          <a:noFill/>
+          <a:ln>
+            <a:noFill/>
+          </a:ln>
+        </p:spPr>
+      </p:pic>
+      <p:sp>
+        <p:nvSpPr>
+          <p:cNvPr id="349" name="Google Shape;349;g3f4f89e88cb_0_64"/>
+          <p:cNvSpPr/>
+          <p:nvPr/>
+        </p:nvSpPr>
+        <p:spPr>
+          <a:xfrm>
+            <a:off x="515400" y="3409600"/>
+            <a:ext cx="5200800" cy="738900"/>
+          </a:xfrm>
+          <a:prstGeom prst="rect">
+            <a:avLst/>
+          </a:prstGeom>
+          <a:noFill/>
+          <a:ln cap="flat" cmpd="sng" w="28575">
+            <a:solidFill>
+              <a:schemeClr val="lt1"/>
+            </a:solidFill>
+            <a:prstDash val="solid"/>
+            <a:round/>
+            <a:headEnd len="sm" w="sm" type="none"/>
+            <a:tailEnd len="sm" w="sm" type="none"/>
+          </a:ln>
+        </p:spPr>
+        <p:txBody>
+          <a:bodyPr anchorCtr="0" anchor="ctr" bIns="91425" lIns="91425" spcFirstLastPara="1" rIns="91425" wrap="square" tIns="91425">
+            <a:noAutofit/>
+          </a:bodyPr>
+          <a:lstStyle/>
+          <a:p>
+            <a:pPr indent="0" lvl="0" marL="0" rtl="0" algn="ctr">
+              <a:spcBef>
+                <a:spcPts val="0"/>
+              </a:spcBef>
+              <a:spcAft>
+                <a:spcPts val="0"/>
+              </a:spcAft>
+              <a:buNone/>
+            </a:pPr>
+            <a:r>
+              <a:t/>
+            </a:r>
+            <a:endParaRPr/>
+          </a:p>
+        </p:txBody>
+      </p:sp>
+      <p:sp>
+        <p:nvSpPr>
+          <p:cNvPr id="350" name="Google Shape;350;g3f4f89e88cb_0_64"/>
+          <p:cNvSpPr/>
+          <p:nvPr/>
+        </p:nvSpPr>
+        <p:spPr>
+          <a:xfrm>
+            <a:off x="551650" y="4642275"/>
+            <a:ext cx="5200800" cy="339600"/>
+          </a:xfrm>
+          <a:prstGeom prst="rect">
+            <a:avLst/>
+          </a:prstGeom>
+          <a:noFill/>
+          <a:ln cap="flat" cmpd="sng" w="28575">
+            <a:solidFill>
+              <a:schemeClr val="lt1"/>
+            </a:solidFill>
+            <a:prstDash val="solid"/>
+            <a:round/>
+            <a:headEnd len="sm" w="sm" type="none"/>
+            <a:tailEnd len="sm" w="sm" type="none"/>
+          </a:ln>
+        </p:spPr>
+        <p:txBody>
+          <a:bodyPr anchorCtr="0" anchor="ctr" bIns="91425" lIns="91425" spcFirstLastPara="1" rIns="91425" wrap="square" tIns="91425">
+            <a:noAutofit/>
+          </a:bodyPr>
+          <a:lstStyle/>
+          <a:p>
+            <a:pPr indent="0" lvl="0" marL="0" rtl="0" algn="ctr">
+              <a:spcBef>
+                <a:spcPts val="0"/>
+              </a:spcBef>
+              <a:spcAft>
+                <a:spcPts val="0"/>
+              </a:spcAft>
+              <a:buNone/>
+            </a:pPr>
+            <a:r>
+              <a:t/>
+            </a:r>
+            <a:endParaRPr/>
+          </a:p>
+        </p:txBody>
+      </p:sp>
+      <p:pic>
+        <p:nvPicPr>
+          <p:cNvPr id="351" name="Google Shape;351;g3f4f89e88cb_0_64" title="截圖 2026-07-13 15.07.23.png"/>
+          <p:cNvPicPr preferRelativeResize="0"/>
+          <p:nvPr/>
+        </p:nvPicPr>
+        <p:blipFill>
+          <a:blip r:embed="rId4">
+            <a:alphaModFix/>
+          </a:blip>
+          <a:stretch>
+            <a:fillRect/>
+          </a:stretch>
+        </p:blipFill>
+        <p:spPr>
+          <a:xfrm>
+            <a:off x="331863" y="1912325"/>
+            <a:ext cx="3228975" cy="742950"/>
+          </a:xfrm>
+          <a:prstGeom prst="rect">
+            <a:avLst/>
+          </a:prstGeom>
+          <a:noFill/>
+          <a:ln>
+            <a:noFill/>
+          </a:ln>
+        </p:spPr>
+      </p:pic>
+      <p:sp>
+        <p:nvSpPr>
+          <p:cNvPr id="352" name="Google Shape;352;g3f4f89e88cb_0_64"/>
+          <p:cNvSpPr txBox="1"/>
+          <p:nvPr/>
+        </p:nvSpPr>
+        <p:spPr>
+          <a:xfrm>
+            <a:off x="1382275" y="2300225"/>
+            <a:ext cx="2242800" cy="615600"/>
+          </a:xfrm>
+          <a:prstGeom prst="rect">
+            <a:avLst/>
+          </a:prstGeom>
+          <a:noFill/>
+          <a:ln>
+            <a:noFill/>
+          </a:ln>
+        </p:spPr>
+        <p:txBody>
+          <a:bodyPr anchorCtr="0" anchor="t" bIns="91425" lIns="91425" spcFirstLastPara="1" rIns="91425" wrap="square" tIns="91425">
+            <a:spAutoFit/>
+          </a:bodyPr>
+          <a:lstStyle/>
+          <a:p>
+            <a:pPr indent="0" lvl="0" marL="0" rtl="0" algn="l">
+              <a:spcBef>
+                <a:spcPts val="0"/>
+              </a:spcBef>
+              <a:spcAft>
+                <a:spcPts val="0"/>
+              </a:spcAft>
+              <a:buNone/>
+            </a:pPr>
+            <a:r>
+              <a:rPr b="1" lang="zh-TW">
+                <a:solidFill>
+                  <a:schemeClr val="lt1"/>
+                </a:solidFill>
+              </a:rPr>
+              <a:t>修改成要更新的檔案類型</a:t>
+            </a:r>
+            <a:endParaRPr b="1">
+              <a:solidFill>
+                <a:schemeClr val="lt1"/>
+              </a:solidFill>
+            </a:endParaRPr>
+          </a:p>
+          <a:p>
+            <a:pPr indent="0" lvl="0" marL="0" rtl="0" algn="l">
+              <a:spcBef>
+                <a:spcPts val="0"/>
+              </a:spcBef>
+              <a:spcAft>
+                <a:spcPts val="0"/>
+              </a:spcAft>
+              <a:buNone/>
+            </a:pPr>
+            <a:r>
+              <a:rPr b="1" lang="zh-TW">
+                <a:solidFill>
+                  <a:schemeClr val="lt1"/>
+                </a:solidFill>
+              </a:rPr>
+              <a:t>如果都要更新要執行兩次!</a:t>
+            </a:r>
+            <a:endParaRPr b="1">
+              <a:solidFill>
+                <a:schemeClr val="lt1"/>
+              </a:solidFill>
+            </a:endParaRPr>
+          </a:p>
+        </p:txBody>
+      </p:sp>
+      <p:pic>
+        <p:nvPicPr>
+          <p:cNvPr id="353" name="Google Shape;353;g3f4f89e88cb_0_64" title="截圖 2026-07-13 13.44.53.png"/>
+          <p:cNvPicPr preferRelativeResize="0"/>
+          <p:nvPr/>
+        </p:nvPicPr>
+        <p:blipFill>
+          <a:blip r:embed="rId5">
+            <a:alphaModFix/>
+          </a:blip>
+          <a:stretch>
+            <a:fillRect/>
+          </a:stretch>
+        </p:blipFill>
+        <p:spPr>
+          <a:xfrm>
+            <a:off x="6031751" y="1654775"/>
+            <a:ext cx="2918717" cy="2237700"/>
+          </a:xfrm>
+          <a:prstGeom prst="rect">
+            <a:avLst/>
+          </a:prstGeom>
+          <a:noFill/>
+          <a:ln>
+            <a:noFill/>
+          </a:ln>
+        </p:spPr>
+      </p:pic>
+      <p:sp>
+        <p:nvSpPr>
+          <p:cNvPr id="354" name="Google Shape;354;g3f4f89e88cb_0_64"/>
+          <p:cNvSpPr/>
+          <p:nvPr/>
+        </p:nvSpPr>
+        <p:spPr>
+          <a:xfrm>
+            <a:off x="6276149" y="2571750"/>
+            <a:ext cx="2296500" cy="400200"/>
+          </a:xfrm>
+          <a:prstGeom prst="rect">
+            <a:avLst/>
+          </a:prstGeom>
+          <a:noFill/>
+          <a:ln cap="flat" cmpd="sng" w="28575">
+            <a:solidFill>
+              <a:schemeClr val="accent4"/>
+            </a:solidFill>
+            <a:prstDash val="solid"/>
+            <a:round/>
+            <a:headEnd len="sm" w="sm" type="none"/>
+            <a:tailEnd len="sm" w="sm" type="none"/>
+          </a:ln>
+        </p:spPr>
+        <p:txBody>
+          <a:bodyPr anchorCtr="0" anchor="ctr" bIns="91425" lIns="91425" spcFirstLastPara="1" rIns="91425" wrap="square" tIns="91425">
+            <a:noAutofit/>
+          </a:bodyPr>
+          <a:lstStyle/>
+          <a:p>
+            <a:pPr indent="0" lvl="0" marL="0" rtl="0" algn="ctr">
+              <a:spcBef>
+                <a:spcPts val="0"/>
+              </a:spcBef>
+              <a:spcAft>
+                <a:spcPts val="0"/>
+              </a:spcAft>
+              <a:buNone/>
+            </a:pPr>
+            <a:r>
+              <a:t/>
+            </a:r>
+            <a:endParaRPr/>
           </a:p>
         </p:txBody>
       </p:sp>
@@ -20850,7 +21214,7 @@
   <p:cSld>
     <p:spTree>
       <p:nvGrpSpPr>
-        <p:cNvPr id="347" name="Shape 347"/>
+        <p:cNvPr id="358" name="Shape 358"/>
         <p:cNvGrpSpPr/>
         <p:nvPr/>
       </p:nvGrpSpPr>
@@ -20864,16 +21228,16 @@
       </p:grpSpPr>
       <p:sp>
         <p:nvSpPr>
-          <p:cNvPr id="348" name="Google Shape;348;p23"/>
+          <p:cNvPr id="359" name="Google Shape;359;g3f4f89e88cb_0_83"/>
           <p:cNvSpPr txBox="1"/>
           <p:nvPr>
-            <p:ph type="ctrTitle"/>
+            <p:ph type="title"/>
           </p:nvPr>
         </p:nvSpPr>
         <p:spPr>
           <a:xfrm>
-            <a:off x="311708" y="744575"/>
-            <a:ext cx="8520600" cy="2052600"/>
+            <a:off x="311700" y="445025"/>
+            <a:ext cx="8520600" cy="572700"/>
           </a:xfrm>
           <a:prstGeom prst="rect">
             <a:avLst/>
@@ -20884,27 +21248,27 @@
           </a:ln>
         </p:spPr>
         <p:txBody>
-          <a:bodyPr anchorCtr="0" anchor="b" bIns="91425" lIns="91425" spcFirstLastPara="1" rIns="91425" wrap="square" tIns="91425">
-            <a:normAutofit/>
+          <a:bodyPr anchorCtr="0" anchor="t" bIns="91425" lIns="91425" spcFirstLastPara="1" rIns="91425" wrap="square" tIns="91425">
+            <a:normAutofit fontScale="90000"/>
           </a:bodyPr>
           <a:lstStyle/>
           <a:p>
-            <a:pPr indent="0" lvl="0" marL="0" rtl="0" algn="ctr">
-              <a:lnSpc>
-                <a:spcPct val="100000"/>
-              </a:lnSpc>
-              <a:spcBef>
-                <a:spcPts val="0"/>
-              </a:spcBef>
-              <a:spcAft>
-                <a:spcPts val="0"/>
-              </a:spcAft>
-              <a:buSzPts val="5200"/>
+            <a:pPr indent="0" lvl="0" marL="0" rtl="0" algn="l">
+              <a:lnSpc>
+                <a:spcPct val="100000"/>
+              </a:lnSpc>
+              <a:spcBef>
+                <a:spcPts val="0"/>
+              </a:spcBef>
+              <a:spcAft>
+                <a:spcPts val="0"/>
+              </a:spcAft>
+              <a:buSzPct val="111111"/>
               <a:buNone/>
             </a:pPr>
             <a:r>
               <a:rPr lang="zh-TW"/>
-              <a:t>原理</a:t>
+              <a:t>更新通過資料</a:t>
             </a:r>
             <a:endParaRPr/>
           </a:p>
@@ -20912,14 +21276,330 @@
       </p:sp>
       <p:sp>
         <p:nvSpPr>
-          <p:cNvPr id="349" name="Google Shape;349;p23"/>
+          <p:cNvPr id="360" name="Google Shape;360;g3f4f89e88cb_0_83"/>
+          <p:cNvSpPr txBox="1"/>
+          <p:nvPr>
+            <p:ph idx="1" type="body"/>
+          </p:nvPr>
+        </p:nvSpPr>
+        <p:spPr>
+          <a:xfrm>
+            <a:off x="311700" y="1152475"/>
+            <a:ext cx="8520600" cy="3416400"/>
+          </a:xfrm>
+          <a:prstGeom prst="rect">
+            <a:avLst/>
+          </a:prstGeom>
+          <a:noFill/>
+          <a:ln>
+            <a:noFill/>
+          </a:ln>
+        </p:spPr>
+        <p:txBody>
+          <a:bodyPr anchorCtr="0" anchor="t" bIns="91425" lIns="91425" spcFirstLastPara="1" rIns="91425" wrap="square" tIns="91425">
+            <a:normAutofit fontScale="25000" lnSpcReduction="20000"/>
+          </a:bodyPr>
+          <a:lstStyle/>
+          <a:p>
+            <a:pPr indent="0" lvl="0" marL="0" rtl="0" algn="l">
+              <a:lnSpc>
+                <a:spcPct val="115000"/>
+              </a:lnSpc>
+              <a:spcBef>
+                <a:spcPts val="1000"/>
+              </a:spcBef>
+              <a:spcAft>
+                <a:spcPts val="0"/>
+              </a:spcAft>
+              <a:buNone/>
+            </a:pPr>
+            <a:r>
+              <a:rPr lang="zh-TW" sz="6458"/>
+              <a:t>確保輸入資料欄位如下(每個分頁欄位名稱要一樣)：</a:t>
+            </a:r>
+            <a:endParaRPr sz="6458"/>
+          </a:p>
+          <a:p>
+            <a:pPr indent="-318416" lvl="0" marL="457200" rtl="0" algn="l">
+              <a:lnSpc>
+                <a:spcPct val="150000"/>
+              </a:lnSpc>
+              <a:spcBef>
+                <a:spcPts val="1000"/>
+              </a:spcBef>
+              <a:spcAft>
+                <a:spcPts val="0"/>
+              </a:spcAft>
+              <a:buSzPct val="100000"/>
+              <a:buChar char="●"/>
+            </a:pPr>
+            <a:r>
+              <a:rPr b="1" lang="zh-TW" sz="5658"/>
+              <a:t>研究計畫</a:t>
+            </a:r>
+            <a:r>
+              <a:rPr lang="zh-TW" sz="5658"/>
+              <a:t>（is_industry=False，來源＝計畫過去申請案件）</a:t>
+            </a:r>
+            <a:endParaRPr sz="5658"/>
+          </a:p>
+          <a:p>
+            <a:pPr indent="-305716" lvl="1" marL="914400" rtl="0" algn="l">
+              <a:lnSpc>
+                <a:spcPct val="150000"/>
+              </a:lnSpc>
+              <a:spcBef>
+                <a:spcPts val="0"/>
+              </a:spcBef>
+              <a:spcAft>
+                <a:spcPts val="0"/>
+              </a:spcAft>
+              <a:buSzPct val="100000"/>
+              <a:buChar char="○"/>
+            </a:pPr>
+            <a:r>
+              <a:rPr lang="zh-TW" sz="4858"/>
+              <a:t>檔案每個年度分頁都要有上面四欄，分頁名要對上 計畫過去申請案件年分範圍(請以年份代表)。</a:t>
+            </a:r>
+            <a:endParaRPr sz="4858"/>
+          </a:p>
+          <a:p>
+            <a:pPr indent="-305716" lvl="1" marL="914400" rtl="0" algn="l">
+              <a:lnSpc>
+                <a:spcPct val="150000"/>
+              </a:lnSpc>
+              <a:spcBef>
+                <a:spcPts val="0"/>
+              </a:spcBef>
+              <a:spcAft>
+                <a:spcPts val="0"/>
+              </a:spcAft>
+              <a:buSzPct val="100000"/>
+              <a:buChar char="○"/>
+            </a:pPr>
+            <a:r>
+              <a:rPr lang="zh-TW" sz="4858"/>
+              <a:t>「</a:t>
+            </a:r>
+            <a:r>
+              <a:rPr lang="zh-TW" sz="4858"/>
+              <a:t>通過」欄不用自己準備——程式會自動補：</a:t>
+            </a:r>
+            <a:endParaRPr sz="4858"/>
+          </a:p>
+          <a:p>
+            <a:pPr indent="-305716" lvl="2" marL="1371600" rtl="0" algn="l">
+              <a:lnSpc>
+                <a:spcPct val="150000"/>
+              </a:lnSpc>
+              <a:spcBef>
+                <a:spcPts val="0"/>
+              </a:spcBef>
+              <a:spcAft>
+                <a:spcPts val="0"/>
+              </a:spcAft>
+              <a:buSzPct val="100000"/>
+              <a:buChar char="■"/>
+            </a:pPr>
+            <a:r>
+              <a:rPr lang="zh-TW" sz="4858"/>
+              <a:t>  有提供 統計清單（{年度}總計畫清單 分頁，需含 計畫中文名稱）→ 用它比對決定 通過 = true/false，只有 true 的才存入。</a:t>
+            </a:r>
+            <a:endParaRPr sz="4858"/>
+          </a:p>
+          <a:p>
+            <a:pPr indent="-305716" lvl="2" marL="1371600" rtl="0" algn="l">
+              <a:lnSpc>
+                <a:spcPct val="150000"/>
+              </a:lnSpc>
+              <a:spcBef>
+                <a:spcPts val="0"/>
+              </a:spcBef>
+              <a:spcAft>
+                <a:spcPts val="0"/>
+              </a:spcAft>
+              <a:buSzPct val="100000"/>
+              <a:buChar char="■"/>
+            </a:pPr>
+            <a:r>
+              <a:rPr lang="zh-TW" sz="4858"/>
+              <a:t>  沒提供統計清單 → 該年度全部視為通過存入。</a:t>
+            </a:r>
+            <a:endParaRPr sz="4858"/>
+          </a:p>
+          <a:p>
+            <a:pPr indent="-318416" lvl="0" marL="457200" rtl="0" algn="l">
+              <a:lnSpc>
+                <a:spcPct val="150000"/>
+              </a:lnSpc>
+              <a:spcBef>
+                <a:spcPts val="0"/>
+              </a:spcBef>
+              <a:spcAft>
+                <a:spcPts val="0"/>
+              </a:spcAft>
+              <a:buSzPct val="100000"/>
+              <a:buChar char="●"/>
+            </a:pPr>
+            <a:r>
+              <a:rPr b="1" lang="zh-TW" sz="5658"/>
+              <a:t>產學合作</a:t>
+            </a:r>
+            <a:r>
+              <a:rPr lang="zh-TW" sz="5658"/>
+              <a:t>（is_industry=True，來源＝產學過去申請名冊）</a:t>
+            </a:r>
+            <a:endParaRPr sz="5658"/>
+          </a:p>
+          <a:p>
+            <a:pPr indent="-305716" lvl="1" marL="914400" rtl="0" algn="l">
+              <a:lnSpc>
+                <a:spcPct val="150000"/>
+              </a:lnSpc>
+              <a:spcBef>
+                <a:spcPts val="0"/>
+              </a:spcBef>
+              <a:spcAft>
+                <a:spcPts val="0"/>
+              </a:spcAft>
+              <a:buSzPct val="100000"/>
+              <a:buChar char="○"/>
+            </a:pPr>
+            <a:r>
+              <a:rPr lang="zh-TW" sz="4858"/>
+              <a:t>分頁名寫死為 專題計畫綜合查詢（get_industry_coop_proj 內），你的檔案必須有這個分頁。</a:t>
+            </a:r>
+            <a:endParaRPr sz="4858"/>
+          </a:p>
+          <a:p>
+            <a:pPr indent="-305716" lvl="1" marL="914400" rtl="0" algn="l">
+              <a:lnSpc>
+                <a:spcPct val="150000"/>
+              </a:lnSpc>
+              <a:spcBef>
+                <a:spcPts val="0"/>
+              </a:spcBef>
+              <a:spcAft>
+                <a:spcPts val="0"/>
+              </a:spcAft>
+              <a:buSzPct val="100000"/>
+              <a:buChar char="○"/>
+            </a:pPr>
+            <a:r>
+              <a:rPr lang="zh-TW" sz="4858"/>
+              <a:t>一樣要有那四個欄位。</a:t>
+            </a:r>
+            <a:endParaRPr sz="4858"/>
+          </a:p>
+          <a:p>
+            <a:pPr indent="-305716" lvl="1" marL="914400" rtl="0" algn="l">
+              <a:lnSpc>
+                <a:spcPct val="150000"/>
+              </a:lnSpc>
+              <a:spcBef>
+                <a:spcPts val="0"/>
+              </a:spcBef>
+              <a:spcAft>
+                <a:spcPts val="0"/>
+              </a:spcAft>
+              <a:buSzPct val="100000"/>
+              <a:buChar char="○"/>
+            </a:pPr>
+            <a:r>
+              <a:rPr lang="zh-TW" sz="4858"/>
+              <a:t>產學不做通過與否的過濾，全部存入。</a:t>
+            </a:r>
+            <a:endParaRPr sz="4858"/>
+          </a:p>
+          <a:p>
+            <a:pPr indent="-305716" lvl="0" marL="457200" rtl="0" algn="l">
+              <a:lnSpc>
+                <a:spcPct val="150000"/>
+              </a:lnSpc>
+              <a:spcBef>
+                <a:spcPts val="0"/>
+              </a:spcBef>
+              <a:spcAft>
+                <a:spcPts val="0"/>
+              </a:spcAft>
+              <a:buSzPct val="100000"/>
+              <a:buChar char="●"/>
+            </a:pPr>
+            <a:r>
+              <a:rPr lang="zh-TW" sz="4858"/>
+              <a:t>必要欄位名稱（確保名稱一致）</a:t>
+            </a:r>
+            <a:endParaRPr sz="4858"/>
+          </a:p>
+          <a:p>
+            <a:pPr indent="-305716" lvl="1" marL="914400" rtl="0" algn="l">
+              <a:lnSpc>
+                <a:spcPct val="150000"/>
+              </a:lnSpc>
+              <a:spcBef>
+                <a:spcPts val="0"/>
+              </a:spcBef>
+              <a:spcAft>
+                <a:spcPts val="0"/>
+              </a:spcAft>
+              <a:buSzPct val="100000"/>
+              <a:buChar char="○"/>
+            </a:pPr>
+            <a:r>
+              <a:rPr lang="zh-TW" sz="4858"/>
+              <a:t>計畫主持人、計畫中文名稱、中文摘要、中文關鍵字</a:t>
+            </a:r>
+            <a:endParaRPr sz="4858"/>
+          </a:p>
+          <a:p>
+            <a:pPr indent="0" lvl="0" marL="0" rtl="0" algn="l">
+              <a:lnSpc>
+                <a:spcPct val="115000"/>
+              </a:lnSpc>
+              <a:spcBef>
+                <a:spcPts val="1000"/>
+              </a:spcBef>
+              <a:spcAft>
+                <a:spcPts val="0"/>
+              </a:spcAft>
+              <a:buNone/>
+            </a:pPr>
+            <a:r>
+              <a:t/>
+            </a:r>
+            <a:endParaRPr/>
+          </a:p>
+          <a:p>
+            <a:pPr indent="0" lvl="0" marL="0" rtl="0" algn="l">
+              <a:lnSpc>
+                <a:spcPct val="115000"/>
+              </a:lnSpc>
+              <a:spcBef>
+                <a:spcPts val="1000"/>
+              </a:spcBef>
+              <a:spcAft>
+                <a:spcPts val="0"/>
+              </a:spcAft>
+              <a:buSzPct val="100000"/>
+              <a:buNone/>
+            </a:pPr>
+            <a:r>
+              <a:t/>
+            </a:r>
+            <a:endParaRPr/>
+          </a:p>
+        </p:txBody>
+      </p:sp>
+      <p:sp>
+        <p:nvSpPr>
+          <p:cNvPr id="361" name="Google Shape;361;g3f4f89e88cb_0_83"/>
           <p:cNvSpPr txBox="1"/>
           <p:nvPr/>
         </p:nvSpPr>
         <p:spPr>
           <a:xfrm>
-            <a:off x="396875" y="3382175"/>
-            <a:ext cx="8211900" cy="507900"/>
+            <a:off x="6144000" y="44875"/>
+            <a:ext cx="3000000" cy="738900"/>
           </a:xfrm>
           <a:prstGeom prst="rect">
             <a:avLst/>
@@ -20935,7 +21615,7 @@
           </a:bodyPr>
           <a:lstStyle/>
           <a:p>
-            <a:pPr indent="0" lvl="0" marL="0" marR="0" rtl="0" algn="ctr">
+            <a:pPr indent="0" lvl="0" marL="0" marR="0" rtl="0" algn="r">
               <a:lnSpc>
                 <a:spcPct val="100000"/>
               </a:lnSpc>
@@ -20948,16 +21628,25 @@
               <a:buClr>
                 <a:srgbClr val="000000"/>
               </a:buClr>
-              <a:buSzPts val="2100"/>
+              <a:buSzPts val="3600"/>
               <a:buFont typeface="Arial"/>
               <a:buNone/>
             </a:pPr>
             <a:r>
-              <a:t/>
-            </a:r>
-            <a:endParaRPr b="0" i="0" sz="2100" u="none" cap="none" strike="noStrike">
+              <a:rPr b="0" i="0" lang="zh-TW" sz="3600" u="none" cap="none" strike="noStrike">
+                <a:solidFill>
+                  <a:srgbClr val="FF0000"/>
+                </a:solidFill>
+                <a:latin typeface="Arial"/>
+                <a:ea typeface="Arial"/>
+                <a:cs typeface="Arial"/>
+                <a:sym typeface="Arial"/>
+              </a:rPr>
+              <a:t>windows.bat </a:t>
+            </a:r>
+            <a:endParaRPr b="0" i="0" sz="3600" u="none" cap="none" strike="noStrike">
               <a:solidFill>
-                <a:srgbClr val="000000"/>
+                <a:srgbClr val="FF0000"/>
               </a:solidFill>
               <a:latin typeface="Arial"/>
               <a:ea typeface="Arial"/>
@@ -20980,7 +21669,137 @@
   <p:cSld>
     <p:spTree>
       <p:nvGrpSpPr>
-        <p:cNvPr id="353" name="Shape 353"/>
+        <p:cNvPr id="365" name="Shape 365"/>
+        <p:cNvGrpSpPr/>
+        <p:nvPr/>
+      </p:nvGrpSpPr>
+      <p:grpSpPr>
+        <a:xfrm>
+          <a:off x="0" y="0"/>
+          <a:ext cx="0" cy="0"/>
+          <a:chOff x="0" y="0"/>
+          <a:chExt cx="0" cy="0"/>
+        </a:xfrm>
+      </p:grpSpPr>
+      <p:sp>
+        <p:nvSpPr>
+          <p:cNvPr id="366" name="Google Shape;366;p23"/>
+          <p:cNvSpPr txBox="1"/>
+          <p:nvPr>
+            <p:ph type="ctrTitle"/>
+          </p:nvPr>
+        </p:nvSpPr>
+        <p:spPr>
+          <a:xfrm>
+            <a:off x="311708" y="744575"/>
+            <a:ext cx="8520600" cy="2052600"/>
+          </a:xfrm>
+          <a:prstGeom prst="rect">
+            <a:avLst/>
+          </a:prstGeom>
+          <a:noFill/>
+          <a:ln>
+            <a:noFill/>
+          </a:ln>
+        </p:spPr>
+        <p:txBody>
+          <a:bodyPr anchorCtr="0" anchor="b" bIns="91425" lIns="91425" spcFirstLastPara="1" rIns="91425" wrap="square" tIns="91425">
+            <a:normAutofit/>
+          </a:bodyPr>
+          <a:lstStyle/>
+          <a:p>
+            <a:pPr indent="0" lvl="0" marL="0" rtl="0" algn="ctr">
+              <a:lnSpc>
+                <a:spcPct val="100000"/>
+              </a:lnSpc>
+              <a:spcBef>
+                <a:spcPts val="0"/>
+              </a:spcBef>
+              <a:spcAft>
+                <a:spcPts val="0"/>
+              </a:spcAft>
+              <a:buSzPts val="5200"/>
+              <a:buNone/>
+            </a:pPr>
+            <a:r>
+              <a:rPr lang="zh-TW"/>
+              <a:t>原理</a:t>
+            </a:r>
+            <a:endParaRPr/>
+          </a:p>
+        </p:txBody>
+      </p:sp>
+      <p:sp>
+        <p:nvSpPr>
+          <p:cNvPr id="367" name="Google Shape;367;p23"/>
+          <p:cNvSpPr txBox="1"/>
+          <p:nvPr/>
+        </p:nvSpPr>
+        <p:spPr>
+          <a:xfrm>
+            <a:off x="396875" y="3382175"/>
+            <a:ext cx="8211900" cy="507900"/>
+          </a:xfrm>
+          <a:prstGeom prst="rect">
+            <a:avLst/>
+          </a:prstGeom>
+          <a:noFill/>
+          <a:ln>
+            <a:noFill/>
+          </a:ln>
+        </p:spPr>
+        <p:txBody>
+          <a:bodyPr anchorCtr="0" anchor="t" bIns="91425" lIns="91425" spcFirstLastPara="1" rIns="91425" wrap="square" tIns="91425">
+            <a:spAutoFit/>
+          </a:bodyPr>
+          <a:lstStyle/>
+          <a:p>
+            <a:pPr indent="0" lvl="0" marL="0" marR="0" rtl="0" algn="ctr">
+              <a:lnSpc>
+                <a:spcPct val="100000"/>
+              </a:lnSpc>
+              <a:spcBef>
+                <a:spcPts val="0"/>
+              </a:spcBef>
+              <a:spcAft>
+                <a:spcPts val="0"/>
+              </a:spcAft>
+              <a:buClr>
+                <a:srgbClr val="000000"/>
+              </a:buClr>
+              <a:buSzPts val="2100"/>
+              <a:buFont typeface="Arial"/>
+              <a:buNone/>
+            </a:pPr>
+            <a:r>
+              <a:t/>
+            </a:r>
+            <a:endParaRPr b="0" i="0" sz="2100" u="none" cap="none" strike="noStrike">
+              <a:solidFill>
+                <a:srgbClr val="000000"/>
+              </a:solidFill>
+              <a:latin typeface="Arial"/>
+              <a:ea typeface="Arial"/>
+              <a:cs typeface="Arial"/>
+              <a:sym typeface="Arial"/>
+            </a:endParaRPr>
+          </a:p>
+        </p:txBody>
+      </p:sp>
+    </p:spTree>
+  </p:cSld>
+  <p:clrMapOvr>
+    <a:masterClrMapping/>
+  </p:clrMapOvr>
+</p:sld>
+</file>
+
+<file path=ppt/slides/slide32.xml><?xml version="1.0" encoding="utf-8"?>
+<p:sld xmlns:a="http://schemas.openxmlformats.org/drawingml/2006/main" xmlns:r="http://schemas.openxmlformats.org/officeDocument/2006/relationships" xmlns:mc="http://schemas.openxmlformats.org/markup-compatibility/2006" xmlns:mv="urn:schemas-microsoft-com:mac:vml" xmlns:p="http://schemas.openxmlformats.org/presentationml/2006/main" xmlns:c="http://schemas.openxmlformats.org/drawingml/2006/chart" xmlns:dgm="http://schemas.openxmlformats.org/drawingml/2006/diagram" xmlns:o="urn:schemas-microsoft-com:office:office" xmlns:v="urn:schemas-microsoft-com:vml" xmlns:pvml="urn:schemas-microsoft-com:office:powerpoint" xmlns:com="http://schemas.openxmlformats.org/drawingml/2006/compatibility" xmlns:p14="http://schemas.microsoft.com/office/powerpoint/2010/main" xmlns:p15="http://schemas.microsoft.com/office/powerpoint/2012/main" xmlns:ahyp="http://schemas.microsoft.com/office/drawing/2018/hyperlinkcolor">
+  <p:cSld>
+    <p:spTree>
+      <p:nvGrpSpPr>
+        <p:cNvPr id="371" name="Shape 371"/>
         <p:cNvGrpSpPr/>
         <p:nvPr/>
       </p:nvGrpSpPr>
@@ -20994,7 +21813,7 @@
       </p:grpSpPr>
       <p:pic>
         <p:nvPicPr>
-          <p:cNvPr id="354" name="Google Shape;354;p24"/>
+          <p:cNvPr id="372" name="Google Shape;372;p24"/>
           <p:cNvPicPr preferRelativeResize="0"/>
           <p:nvPr/>
         </p:nvPicPr>
@@ -21022,7 +21841,7 @@
       </p:pic>
       <p:sp>
         <p:nvSpPr>
-          <p:cNvPr id="355" name="Google Shape;355;p24"/>
+          <p:cNvPr id="373" name="Google Shape;373;p24"/>
           <p:cNvSpPr txBox="1"/>
           <p:nvPr>
             <p:ph type="title"/>
@@ -21070,7 +21889,7 @@
       </p:sp>
       <p:pic>
         <p:nvPicPr>
-          <p:cNvPr id="356" name="Google Shape;356;p24"/>
+          <p:cNvPr id="374" name="Google Shape;374;p24"/>
           <p:cNvPicPr preferRelativeResize="0"/>
           <p:nvPr/>
         </p:nvPicPr>
@@ -24241,6 +25060,285 @@
 </file>
 
 <file path=ppt/theme/theme1.xml><?xml version="1.0" encoding="utf-8"?>
+<a:theme xmlns:a="http://schemas.openxmlformats.org/drawingml/2006/main" xmlns:r="http://schemas.openxmlformats.org/officeDocument/2006/relationships" name="Simple Light">
+  <a:themeElements>
+    <a:clrScheme name="Simple Light">
+      <a:dk1>
+        <a:srgbClr val="000000"/>
+      </a:dk1>
+      <a:lt1>
+        <a:srgbClr val="FFFFFF"/>
+      </a:lt1>
+      <a:dk2>
+        <a:srgbClr val="595959"/>
+      </a:dk2>
+      <a:lt2>
+        <a:srgbClr val="EEEEEE"/>
+      </a:lt2>
+      <a:accent1>
+        <a:srgbClr val="4285F4"/>
+      </a:accent1>
+      <a:accent2>
+        <a:srgbClr val="212121"/>
+      </a:accent2>
+      <a:accent3>
+        <a:srgbClr val="78909C"/>
+      </a:accent3>
+      <a:accent4>
+        <a:srgbClr val="FFAB40"/>
+      </a:accent4>
+      <a:accent5>
+        <a:srgbClr val="0097A7"/>
+      </a:accent5>
+      <a:accent6>
+        <a:srgbClr val="EEFF41"/>
+      </a:accent6>
+      <a:hlink>
+        <a:srgbClr val="0097A7"/>
+      </a:hlink>
+      <a:folHlink>
+        <a:srgbClr val="0097A7"/>
+      </a:folHlink>
+    </a:clrScheme>
+    <a:fontScheme name="Office">
+      <a:majorFont>
+        <a:latin typeface="Arial"/>
+        <a:ea typeface=""/>
+        <a:cs typeface=""/>
+        <a:font script="Jpan" typeface="ＭＳ Ｐゴシック"/>
+        <a:font script="Hang" typeface="맑은 고딕"/>
+        <a:font script="Hans" typeface="宋体"/>
+        <a:font script="Hant" typeface="新細明體"/>
+        <a:font script="Arab" typeface="Times New Roman"/>
+        <a:font script="Hebr" typeface="Times New Roman"/>
+        <a:font script="Thai" typeface="Angsana New"/>
+        <a:font script="Ethi" typeface="Nyala"/>
+        <a:font script="Beng" typeface="Vrinda"/>
+        <a:font script="Gujr" typeface="Shruti"/>
+        <a:font script="Khmr" typeface="MoolBoran"/>
+        <a:font script="Knda" typeface="Tunga"/>
+        <a:font script="Guru" typeface="Raavi"/>
+        <a:font script="Cans" typeface="Euphemia"/>
+        <a:font script="Cher" typeface="Plantagenet Cherokee"/>
+        <a:font script="Yiii" typeface="Microsoft Yi Baiti"/>
+        <a:font script="Tibt" typeface="Microsoft Himalaya"/>
+        <a:font script="Thaa" typeface="MV Boli"/>
+        <a:font script="Deva" typeface="Mangal"/>
+        <a:font script="Telu" typeface="Gautami"/>
+        <a:font script="Taml" typeface="Latha"/>
+        <a:font script="Syrc" typeface="Estrangelo Edessa"/>
+        <a:font script="Orya" typeface="Kalinga"/>
+        <a:font script="Mlym" typeface="Kartika"/>
+        <a:font script="Laoo" typeface="DokChampa"/>
+        <a:font script="Sinh" typeface="Iskoola Pota"/>
+        <a:font script="Mong" typeface="Mongolian Baiti"/>
+        <a:font script="Viet" typeface="Times New Roman"/>
+        <a:font script="Uigh" typeface="Microsoft Uighur"/>
+        <a:font script="Geor" typeface="Sylfaen"/>
+      </a:majorFont>
+      <a:minorFont>
+        <a:latin typeface="Arial"/>
+        <a:ea typeface=""/>
+        <a:cs typeface=""/>
+        <a:font script="Jpan" typeface="ＭＳ Ｐゴシック"/>
+        <a:font script="Hang" typeface="맑은 고딕"/>
+        <a:font script="Hans" typeface="宋体"/>
+        <a:font script="Hant" typeface="新細明體"/>
+        <a:font script="Arab" typeface="Arial"/>
+        <a:font script="Hebr" typeface="Arial"/>
+        <a:font script="Thai" typeface="Cordia New"/>
+        <a:font script="Ethi" typeface="Nyala"/>
+        <a:font script="Beng" typeface="Vrinda"/>
+        <a:font script="Gujr" typeface="Shruti"/>
+        <a:font script="Khmr" typeface="DaunPenh"/>
+        <a:font script="Knda" typeface="Tunga"/>
+        <a:font script="Guru" typeface="Raavi"/>
+        <a:font script="Cans" typeface="Euphemia"/>
+        <a:font script="Cher" typeface="Plantagenet Cherokee"/>
+        <a:font script="Yiii" typeface="Microsoft Yi Baiti"/>
+        <a:font script="Tibt" typeface="Microsoft Himalaya"/>
+        <a:font script="Thaa" typeface="MV Boli"/>
+        <a:font script="Deva" typeface="Mangal"/>
+        <a:font script="Telu" typeface="Gautami"/>
+        <a:font script="Taml" typeface="Latha"/>
+        <a:font script="Syrc" typeface="Estrangelo Edessa"/>
+        <a:font script="Orya" typeface="Kalinga"/>
+        <a:font script="Mlym" typeface="Kartika"/>
+        <a:font script="Laoo" typeface="DokChampa"/>
+        <a:font script="Sinh" typeface="Iskoola Pota"/>
+        <a:font script="Mong" typeface="Mongolian Baiti"/>
+        <a:font script="Viet" typeface="Arial"/>
+        <a:font script="Uigh" typeface="Microsoft Uighur"/>
+        <a:font script="Geor" typeface="Sylfaen"/>
+      </a:minorFont>
+    </a:fontScheme>
+    <a:fmtScheme name="Office">
+      <a:fillStyleLst>
+        <a:solidFill>
+          <a:schemeClr val="phClr"/>
+        </a:solidFill>
+        <a:gradFill rotWithShape="1">
+          <a:gsLst>
+            <a:gs pos="0">
+              <a:schemeClr val="phClr">
+                <a:tint val="50000"/>
+                <a:satMod val="300000"/>
+              </a:schemeClr>
+            </a:gs>
+            <a:gs pos="35000">
+              <a:schemeClr val="phClr">
+                <a:tint val="37000"/>
+                <a:satMod val="300000"/>
+              </a:schemeClr>
+            </a:gs>
+            <a:gs pos="100000">
+              <a:schemeClr val="phClr">
+                <a:tint val="15000"/>
+                <a:satMod val="350000"/>
+              </a:schemeClr>
+            </a:gs>
+          </a:gsLst>
+          <a:lin ang="16200000" scaled="1"/>
+        </a:gradFill>
+        <a:gradFill rotWithShape="1">
+          <a:gsLst>
+            <a:gs pos="0">
+              <a:schemeClr val="phClr">
+                <a:tint val="100000"/>
+                <a:shade val="100000"/>
+                <a:satMod val="130000"/>
+              </a:schemeClr>
+            </a:gs>
+            <a:gs pos="100000">
+              <a:schemeClr val="phClr">
+                <a:tint val="50000"/>
+                <a:shade val="100000"/>
+                <a:satMod val="350000"/>
+              </a:schemeClr>
+            </a:gs>
+          </a:gsLst>
+          <a:lin ang="16200000" scaled="0"/>
+        </a:gradFill>
+      </a:fillStyleLst>
+      <a:lnStyleLst>
+        <a:ln w="9525" cap="flat" cmpd="sng" algn="ctr">
+          <a:solidFill>
+            <a:schemeClr val="phClr">
+              <a:shade val="95000"/>
+              <a:satMod val="105000"/>
+            </a:schemeClr>
+          </a:solidFill>
+          <a:prstDash val="solid"/>
+        </a:ln>
+        <a:ln w="25400" cap="flat" cmpd="sng" algn="ctr">
+          <a:solidFill>
+            <a:schemeClr val="phClr"/>
+          </a:solidFill>
+          <a:prstDash val="solid"/>
+        </a:ln>
+        <a:ln w="38100" cap="flat" cmpd="sng" algn="ctr">
+          <a:solidFill>
+            <a:schemeClr val="phClr"/>
+          </a:solidFill>
+          <a:prstDash val="solid"/>
+        </a:ln>
+      </a:lnStyleLst>
+      <a:effectStyleLst>
+        <a:effectStyle>
+          <a:effectLst>
+            <a:outerShdw blurRad="40000" dist="20000" dir="5400000" rotWithShape="0">
+              <a:srgbClr val="000000">
+                <a:alpha val="38000"/>
+              </a:srgbClr>
+            </a:outerShdw>
+          </a:effectLst>
+        </a:effectStyle>
+        <a:effectStyle>
+          <a:effectLst>
+            <a:outerShdw blurRad="40000" dist="23000" dir="5400000" rotWithShape="0">
+              <a:srgbClr val="000000">
+                <a:alpha val="35000"/>
+              </a:srgbClr>
+            </a:outerShdw>
+          </a:effectLst>
+        </a:effectStyle>
+        <a:effectStyle>
+          <a:effectLst>
+            <a:outerShdw blurRad="40000" dist="23000" dir="5400000" rotWithShape="0">
+              <a:srgbClr val="000000">
+                <a:alpha val="35000"/>
+              </a:srgbClr>
+            </a:outerShdw>
+          </a:effectLst>
+          <a:scene3d>
+            <a:camera prst="orthographicFront">
+              <a:rot lat="0" lon="0" rev="0"/>
+            </a:camera>
+            <a:lightRig rig="threePt" dir="t">
+              <a:rot lat="0" lon="0" rev="1200000"/>
+            </a:lightRig>
+          </a:scene3d>
+          <a:sp3d>
+            <a:bevelT w="63500" h="25400"/>
+          </a:sp3d>
+        </a:effectStyle>
+      </a:effectStyleLst>
+      <a:bgFillStyleLst>
+        <a:solidFill>
+          <a:schemeClr val="phClr"/>
+        </a:solidFill>
+        <a:gradFill rotWithShape="1">
+          <a:gsLst>
+            <a:gs pos="0">
+              <a:schemeClr val="phClr">
+                <a:tint val="40000"/>
+                <a:satMod val="350000"/>
+              </a:schemeClr>
+            </a:gs>
+            <a:gs pos="40000">
+              <a:schemeClr val="phClr">
+                <a:tint val="45000"/>
+                <a:shade val="99000"/>
+                <a:satMod val="350000"/>
+              </a:schemeClr>
+            </a:gs>
+            <a:gs pos="100000">
+              <a:schemeClr val="phClr">
+                <a:shade val="20000"/>
+                <a:satMod val="255000"/>
+              </a:schemeClr>
+            </a:gs>
+          </a:gsLst>
+          <a:path path="circle">
+            <a:fillToRect l="50000" t="-80000" r="50000" b="180000"/>
+          </a:path>
+        </a:gradFill>
+        <a:gradFill rotWithShape="1">
+          <a:gsLst>
+            <a:gs pos="0">
+              <a:schemeClr val="phClr">
+                <a:tint val="80000"/>
+                <a:satMod val="300000"/>
+              </a:schemeClr>
+            </a:gs>
+            <a:gs pos="100000">
+              <a:schemeClr val="phClr">
+                <a:shade val="30000"/>
+                <a:satMod val="200000"/>
+              </a:schemeClr>
+            </a:gs>
+          </a:gsLst>
+          <a:path path="circle">
+            <a:fillToRect l="50000" t="50000" r="50000" b="50000"/>
+          </a:path>
+        </a:gradFill>
+      </a:bgFillStyleLst>
+    </a:fmtScheme>
+  </a:themeElements>
+</a:theme>
+</file>
+
+<file path=ppt/theme/theme2.xml><?xml version="1.0" encoding="utf-8"?>
 <a:theme xmlns:a="http://schemas.openxmlformats.org/drawingml/2006/main" xmlns:r="http://schemas.openxmlformats.org/officeDocument/2006/relationships">
   <a:themeElements>
     <a:clrScheme name="Default">
@@ -24517,283 +25615,4 @@
     </a:fmtScheme>
   </a:themeElements>
 </a:theme>
-</file>
-
-<file path=ppt/theme/theme2.xml><?xml version="1.0" encoding="utf-8"?>
-<a:theme xmlns:a="http://schemas.openxmlformats.org/drawingml/2006/main" xmlns:r="http://schemas.openxmlformats.org/officeDocument/2006/relationships" name="Simple Light">
-  <a:themeElements>
-    <a:clrScheme name="Simple Light">
-      <a:dk1>
-        <a:srgbClr val="000000"/>
-      </a:dk1>
-      <a:lt1>
-        <a:srgbClr val="FFFFFF"/>
-      </a:lt1>
-      <a:dk2>
-        <a:srgbClr val="595959"/>
-      </a:dk2>
-      <a:lt2>
-        <a:srgbClr val="EEEEEE"/>
-      </a:lt2>
-      <a:accent1>
-        <a:srgbClr val="4285F4"/>
-      </a:accent1>
-      <a:accent2>
-        <a:srgbClr val="212121"/>
-      </a:accent2>
-      <a:accent3>
-        <a:srgbClr val="78909C"/>
-      </a:accent3>
-      <a:accent4>
-        <a:srgbClr val="FFAB40"/>
-      </a:accent4>
-      <a:accent5>
-        <a:srgbClr val="0097A7"/>
-      </a:accent5>
-      <a:accent6>
-        <a:srgbClr val="EEFF41"/>
-      </a:accent6>
-      <a:hlink>
-        <a:srgbClr val="0097A7"/>
-      </a:hlink>
-      <a:folHlink>
-        <a:srgbClr val="0097A7"/>
-      </a:folHlink>
-    </a:clrScheme>
-    <a:fontScheme name="Office">
-      <a:majorFont>
-        <a:latin typeface="Arial"/>
-        <a:ea typeface=""/>
-        <a:cs typeface=""/>
-        <a:font script="Jpan" typeface="ＭＳ Ｐゴシック"/>
-        <a:font script="Hang" typeface="맑은 고딕"/>
-        <a:font script="Hans" typeface="宋体"/>
-        <a:font script="Hant" typeface="新細明體"/>
-        <a:font script="Arab" typeface="Times New Roman"/>
-        <a:font script="Hebr" typeface="Times New Roman"/>
-        <a:font script="Thai" typeface="Angsana New"/>
-        <a:font script="Ethi" typeface="Nyala"/>
-        <a:font script="Beng" typeface="Vrinda"/>
-        <a:font script="Gujr" typeface="Shruti"/>
-        <a:font script="Khmr" typeface="MoolBoran"/>
-        <a:font script="Knda" typeface="Tunga"/>
-        <a:font script="Guru" typeface="Raavi"/>
-        <a:font script="Cans" typeface="Euphemia"/>
-        <a:font script="Cher" typeface="Plantagenet Cherokee"/>
-        <a:font script="Yiii" typeface="Microsoft Yi Baiti"/>
-        <a:font script="Tibt" typeface="Microsoft Himalaya"/>
-        <a:font script="Thaa" typeface="MV Boli"/>
-        <a:font script="Deva" typeface="Mangal"/>
-        <a:font script="Telu" typeface="Gautami"/>
-        <a:font script="Taml" typeface="Latha"/>
-        <a:font script="Syrc" typeface="Estrangelo Edessa"/>
-        <a:font script="Orya" typeface="Kalinga"/>
-        <a:font script="Mlym" typeface="Kartika"/>
-        <a:font script="Laoo" typeface="DokChampa"/>
-        <a:font script="Sinh" typeface="Iskoola Pota"/>
-        <a:font script="Mong" typeface="Mongolian Baiti"/>
-        <a:font script="Viet" typeface="Times New Roman"/>
-        <a:font script="Uigh" typeface="Microsoft Uighur"/>
-        <a:font script="Geor" typeface="Sylfaen"/>
-      </a:majorFont>
-      <a:minorFont>
-        <a:latin typeface="Arial"/>
-        <a:ea typeface=""/>
-        <a:cs typeface=""/>
-        <a:font script="Jpan" typeface="ＭＳ Ｐゴシック"/>
-        <a:font script="Hang" typeface="맑은 고딕"/>
-        <a:font script="Hans" typeface="宋体"/>
-        <a:font script="Hant" typeface="新細明體"/>
-        <a:font script="Arab" typeface="Arial"/>
-        <a:font script="Hebr" typeface="Arial"/>
-        <a:font script="Thai" typeface="Cordia New"/>
-        <a:font script="Ethi" typeface="Nyala"/>
-        <a:font script="Beng" typeface="Vrinda"/>
-        <a:font script="Gujr" typeface="Shruti"/>
-        <a:font script="Khmr" typeface="DaunPenh"/>
-        <a:font script="Knda" typeface="Tunga"/>
-        <a:font script="Guru" typeface="Raavi"/>
-        <a:font script="Cans" typeface="Euphemia"/>
-        <a:font script="Cher" typeface="Plantagenet Cherokee"/>
-        <a:font script="Yiii" typeface="Microsoft Yi Baiti"/>
-        <a:font script="Tibt" typeface="Microsoft Himalaya"/>
-        <a:font script="Thaa" typeface="MV Boli"/>
-        <a:font script="Deva" typeface="Mangal"/>
-        <a:font script="Telu" typeface="Gautami"/>
-        <a:font script="Taml" typeface="Latha"/>
-        <a:font script="Syrc" typeface="Estrangelo Edessa"/>
-        <a:font script="Orya" typeface="Kalinga"/>
-        <a:font script="Mlym" typeface="Kartika"/>
-        <a:font script="Laoo" typeface="DokChampa"/>
-        <a:font script="Sinh" typeface="Iskoola Pota"/>
-        <a:font script="Mong" typeface="Mongolian Baiti"/>
-        <a:font script="Viet" typeface="Arial"/>
-        <a:font script="Uigh" typeface="Microsoft Uighur"/>
-        <a:font script="Geor" typeface="Sylfaen"/>
-      </a:minorFont>
-    </a:fontScheme>
-    <a:fmtScheme name="Office">
-      <a:fillStyleLst>
-        <a:solidFill>
-          <a:schemeClr val="phClr"/>
-        </a:solidFill>
-        <a:gradFill rotWithShape="1">
-          <a:gsLst>
-            <a:gs pos="0">
-              <a:schemeClr val="phClr">
-                <a:tint val="50000"/>
-                <a:satMod val="300000"/>
-              </a:schemeClr>
-            </a:gs>
-            <a:gs pos="35000">
-              <a:schemeClr val="phClr">
-                <a:tint val="37000"/>
-                <a:satMod val="300000"/>
-              </a:schemeClr>
-            </a:gs>
-            <a:gs pos="100000">
-              <a:schemeClr val="phClr">
-                <a:tint val="15000"/>
-                <a:satMod val="350000"/>
-              </a:schemeClr>
-            </a:gs>
-          </a:gsLst>
-          <a:lin ang="16200000" scaled="1"/>
-        </a:gradFill>
-        <a:gradFill rotWithShape="1">
-          <a:gsLst>
-            <a:gs pos="0">
-              <a:schemeClr val="phClr">
-                <a:tint val="100000"/>
-                <a:shade val="100000"/>
-                <a:satMod val="130000"/>
-              </a:schemeClr>
-            </a:gs>
-            <a:gs pos="100000">
-              <a:schemeClr val="phClr">
-                <a:tint val="50000"/>
-                <a:shade val="100000"/>
-                <a:satMod val="350000"/>
-              </a:schemeClr>
-            </a:gs>
-          </a:gsLst>
-          <a:lin ang="16200000" scaled="0"/>
-        </a:gradFill>
-      </a:fillStyleLst>
-      <a:lnStyleLst>
-        <a:ln w="9525" cap="flat" cmpd="sng" algn="ctr">
-          <a:solidFill>
-            <a:schemeClr val="phClr">
-              <a:shade val="95000"/>
-              <a:satMod val="105000"/>
-            </a:schemeClr>
-          </a:solidFill>
-          <a:prstDash val="solid"/>
-        </a:ln>
-        <a:ln w="25400" cap="flat" cmpd="sng" algn="ctr">
-          <a:solidFill>
-            <a:schemeClr val="phClr"/>
-          </a:solidFill>
-          <a:prstDash val="solid"/>
-        </a:ln>
-        <a:ln w="38100" cap="flat" cmpd="sng" algn="ctr">
-          <a:solidFill>
-            <a:schemeClr val="phClr"/>
-          </a:solidFill>
-          <a:prstDash val="solid"/>
-        </a:ln>
-      </a:lnStyleLst>
-      <a:effectStyleLst>
-        <a:effectStyle>
-          <a:effectLst>
-            <a:outerShdw blurRad="40000" dist="20000" dir="5400000" rotWithShape="0">
-              <a:srgbClr val="000000">
-                <a:alpha val="38000"/>
-              </a:srgbClr>
-            </a:outerShdw>
-          </a:effectLst>
-        </a:effectStyle>
-        <a:effectStyle>
-          <a:effectLst>
-            <a:outerShdw blurRad="40000" dist="23000" dir="5400000" rotWithShape="0">
-              <a:srgbClr val="000000">
-                <a:alpha val="35000"/>
-              </a:srgbClr>
-            </a:outerShdw>
-          </a:effectLst>
-        </a:effectStyle>
-        <a:effectStyle>
-          <a:effectLst>
-            <a:outerShdw blurRad="40000" dist="23000" dir="5400000" rotWithShape="0">
-              <a:srgbClr val="000000">
-                <a:alpha val="35000"/>
-              </a:srgbClr>
-            </a:outerShdw>
-          </a:effectLst>
-          <a:scene3d>
-            <a:camera prst="orthographicFront">
-              <a:rot lat="0" lon="0" rev="0"/>
-            </a:camera>
-            <a:lightRig rig="threePt" dir="t">
-              <a:rot lat="0" lon="0" rev="1200000"/>
-            </a:lightRig>
-          </a:scene3d>
-          <a:sp3d>
-            <a:bevelT w="63500" h="25400"/>
-          </a:sp3d>
-        </a:effectStyle>
-      </a:effectStyleLst>
-      <a:bgFillStyleLst>
-        <a:solidFill>
-          <a:schemeClr val="phClr"/>
-        </a:solidFill>
-        <a:gradFill rotWithShape="1">
-          <a:gsLst>
-            <a:gs pos="0">
-              <a:schemeClr val="phClr">
-                <a:tint val="40000"/>
-                <a:satMod val="350000"/>
-              </a:schemeClr>
-            </a:gs>
-            <a:gs pos="40000">
-              <a:schemeClr val="phClr">
-                <a:tint val="45000"/>
-                <a:shade val="99000"/>
-                <a:satMod val="350000"/>
-              </a:schemeClr>
-            </a:gs>
-            <a:gs pos="100000">
-              <a:schemeClr val="phClr">
-                <a:shade val="20000"/>
-                <a:satMod val="255000"/>
-              </a:schemeClr>
-            </a:gs>
-          </a:gsLst>
-          <a:path path="circle">
-            <a:fillToRect l="50000" t="-80000" r="50000" b="180000"/>
-          </a:path>
-        </a:gradFill>
-        <a:gradFill rotWithShape="1">
-          <a:gsLst>
-            <a:gs pos="0">
-              <a:schemeClr val="phClr">
-                <a:tint val="80000"/>
-                <a:satMod val="300000"/>
-              </a:schemeClr>
-            </a:gs>
-            <a:gs pos="100000">
-              <a:schemeClr val="phClr">
-                <a:shade val="30000"/>
-                <a:satMod val="200000"/>
-              </a:schemeClr>
-            </a:gs>
-          </a:gsLst>
-          <a:path path="circle">
-            <a:fillToRect l="50000" t="50000" r="50000" b="50000"/>
-          </a:path>
-        </a:gradFill>
-      </a:bgFillStyleLst>
-    </a:fmtScheme>
-  </a:themeElements>
-</a:theme>
 </file>